--- a/product-presentation/ClassPilot-AI-Product-Introduction.pptx
+++ b/product-presentation/ClassPilot-AI-Product-Introduction.pptx
@@ -2,21 +2,21 @@
 <file path=ppt/presentation.xml><?xml version="1.0" encoding="utf-8"?>
 <p:presentation xmlns:p="http://schemas.openxmlformats.org/presentationml/2006/main">
   <p:sldMasterIdLst>
-    <p:sldMasterId xmlns:r="http://schemas.openxmlformats.org/officeDocument/2006/relationships" id="2147483648" r:id="Rd510cf5092024f4c"/>
+    <p:sldMasterId xmlns:r="http://schemas.openxmlformats.org/officeDocument/2006/relationships" id="2147483648" r:id="R6bba25dc900c48d2"/>
   </p:sldMasterIdLst>
   <p:notesMasterIdLst>
-    <p:notesMasterId xmlns:r="http://schemas.openxmlformats.org/officeDocument/2006/relationships" r:id="Re66a6f773f2342f0"/>
+    <p:notesMasterId xmlns:r="http://schemas.openxmlformats.org/officeDocument/2006/relationships" r:id="Rf5bea1f3331745a1"/>
   </p:notesMasterIdLst>
   <p:sldIdLst>
-    <p:sldId xmlns:r="http://schemas.openxmlformats.org/officeDocument/2006/relationships" id="256" r:id="R8aebde479bf24e41"/>
-    <p:sldId xmlns:r="http://schemas.openxmlformats.org/officeDocument/2006/relationships" id="257" r:id="R8786dae82a8645ac"/>
-    <p:sldId xmlns:r="http://schemas.openxmlformats.org/officeDocument/2006/relationships" id="258" r:id="Rffb6c79023a84b06"/>
-    <p:sldId xmlns:r="http://schemas.openxmlformats.org/officeDocument/2006/relationships" id="259" r:id="Rd9d12c7111b740ce"/>
-    <p:sldId xmlns:r="http://schemas.openxmlformats.org/officeDocument/2006/relationships" id="260" r:id="R568250b4dd3e478e"/>
-    <p:sldId xmlns:r="http://schemas.openxmlformats.org/officeDocument/2006/relationships" id="261" r:id="Rfa53bbff39894ce7"/>
-    <p:sldId xmlns:r="http://schemas.openxmlformats.org/officeDocument/2006/relationships" id="262" r:id="R797860f49cd04dc3"/>
-    <p:sldId xmlns:r="http://schemas.openxmlformats.org/officeDocument/2006/relationships" id="263" r:id="Re7c39b6455ac4212"/>
-    <p:sldId xmlns:r="http://schemas.openxmlformats.org/officeDocument/2006/relationships" id="264" r:id="Ra675704834b04092"/>
+    <p:sldId xmlns:r="http://schemas.openxmlformats.org/officeDocument/2006/relationships" id="256" r:id="Rc0d73fd047734cd6"/>
+    <p:sldId xmlns:r="http://schemas.openxmlformats.org/officeDocument/2006/relationships" id="257" r:id="R0c09c5d59c8c4b6c"/>
+    <p:sldId xmlns:r="http://schemas.openxmlformats.org/officeDocument/2006/relationships" id="258" r:id="R800e55b8bc644bb9"/>
+    <p:sldId xmlns:r="http://schemas.openxmlformats.org/officeDocument/2006/relationships" id="259" r:id="Rd67132c2ebdb4dd4"/>
+    <p:sldId xmlns:r="http://schemas.openxmlformats.org/officeDocument/2006/relationships" id="260" r:id="Rbf7e1ad497fe4ce6"/>
+    <p:sldId xmlns:r="http://schemas.openxmlformats.org/officeDocument/2006/relationships" id="261" r:id="R448f7d096f16475b"/>
+    <p:sldId xmlns:r="http://schemas.openxmlformats.org/officeDocument/2006/relationships" id="262" r:id="R7f3551a379a14393"/>
+    <p:sldId xmlns:r="http://schemas.openxmlformats.org/officeDocument/2006/relationships" id="263" r:id="R535bbd9bfce643c5"/>
+    <p:sldId xmlns:r="http://schemas.openxmlformats.org/officeDocument/2006/relationships" id="264" r:id="Rb415f9de078543ae"/>
   </p:sldIdLst>
   <p:sldSz cx="12192000" cy="6858000"/>
   <p:notesSz cx="6858000" cy="9144000"/>
@@ -450,7 +450,7 @@
           <a:lstStyle xmlns:a="http://schemas.openxmlformats.org/drawingml/2006/main"/>
           <a:p xmlns:a="http://schemas.openxmlformats.org/drawingml/2006/main">
             <a:r>
-              <a:t>Introduce ClassPilot AI as a finished student workspace, then frame the AI Coach as one part of a broader course organization workflow.</a:t>
+              <a:t>Introduce ClassPilot AI as a finished student workspace. The live conversational Coach is one part of a broader loop from course import to final submission check.</a:t>
             </a:r>
           </a:p>
           <a:p xmlns:a="http://schemas.openxmlformats.org/drawingml/2006/main">
@@ -465,7 +465,7 @@
           </a:p>
           <a:p xmlns:a="http://schemas.openxmlformats.org/drawingml/2006/main">
             <a:r>
-              <a:t>- ClassPilot AI local product screenshot, captured July 25, 2026.</a:t>
+              <a:t>- ClassPilot AI live product screenshot, captured July 25, 2026.</a:t>
             </a:r>
           </a:p>
           <a:p xmlns:a="http://schemas.openxmlformats.org/drawingml/2006/main">
@@ -630,7 +630,7 @@
           <a:lstStyle xmlns:a="http://schemas.openxmlformats.org/drawingml/2006/main"/>
           <a:p xmlns:a="http://schemas.openxmlformats.org/drawingml/2006/main">
             <a:r>
-              <a:t>Walk through the four-step loop. Emphasize that uploading within a course removes the need for the student to re-identify the course.</a:t>
+              <a:t>Walk through the course-bound import flow. The selected course is authoritative, while global import remains available when the course is genuinely unknown.</a:t>
             </a:r>
           </a:p>
           <a:p xmlns:a="http://schemas.openxmlformats.org/drawingml/2006/main">
@@ -645,7 +645,7 @@
           </a:p>
           <a:p xmlns:a="http://schemas.openxmlformats.org/drawingml/2006/main">
             <a:r>
-              <a:t>- ClassPilot AI implementation: course-bound import flow and content parser, July 2026.</a:t>
+              <a:t>- ClassPilot AI implementation: course-bound import flow, source evidence catalog, and content parser, July 2026.</a:t>
             </a:r>
           </a:p>
           <a:p xmlns:a="http://schemas.openxmlformats.org/drawingml/2006/main">
@@ -720,7 +720,7 @@
           <a:lstStyle xmlns:a="http://schemas.openxmlformats.org/drawingml/2006/main"/>
           <a:p xmlns:a="http://schemas.openxmlformats.org/drawingml/2006/main">
             <a:r>
-              <a:t>Point out the course and assignment context strip, then show the four quick actions and conversational composer.</a:t>
+              <a:t>Present the product as one connected learning loop rather than a collection of utilities. The same selected course and assignment context flows through every step.</a:t>
             </a:r>
           </a:p>
           <a:p xmlns:a="http://schemas.openxmlformats.org/drawingml/2006/main">
@@ -735,7 +735,7 @@
           </a:p>
           <a:p xmlns:a="http://schemas.openxmlformats.org/drawingml/2006/main">
             <a:r>
-              <a:t>- ClassPilot AI local product screenshot, captured July 25, 2026.</a:t>
+              <a:t>- ClassPilot AI implementation: import, planning, Today focus, submission checker, and Coach modules, July 2026.</a:t>
             </a:r>
           </a:p>
           <a:p xmlns:a="http://schemas.openxmlformats.org/drawingml/2006/main">
@@ -810,7 +810,7 @@
           <a:lstStyle xmlns:a="http://schemas.openxmlformats.org/drawingml/2006/main"/>
           <a:p xmlns:a="http://schemas.openxmlformats.org/drawingml/2006/main">
             <a:r>
-              <a:t>Explain that the assistant has a bounded context object rather than unrestricted access to all student data. The visible evidence rail lets the student verify what the response used.</a:t>
+              <a:t>Show the two-turn live conversation. The Coach first identifies the easiest-to-miss requirement, then converts that advice into a three-day plan with evidence citations and actionable steps.</a:t>
             </a:r>
           </a:p>
           <a:p xmlns:a="http://schemas.openxmlformats.org/drawingml/2006/main">
@@ -825,7 +825,7 @@
           </a:p>
           <a:p xmlns:a="http://schemas.openxmlformats.org/drawingml/2006/main">
             <a:r>
-              <a:t>- ClassPilot AI Coach implementation and local product screenshot, July 25, 2026.</a:t>
+              <a:t>- ClassPilot AI live product screenshot and Workers AI response, captured July 25, 2026.</a:t>
             </a:r>
           </a:p>
           <a:p xmlns:a="http://schemas.openxmlformats.org/drawingml/2006/main">
@@ -900,7 +900,7 @@
           <a:lstStyle xmlns:a="http://schemas.openxmlformats.org/drawingml/2006/main"/>
           <a:p xmlns:a="http://schemas.openxmlformats.org/drawingml/2006/main">
             <a:r>
-              <a:t>Use this slide to explain the security boundary. The browser holds student-facing state; the Worker controls origins, payload size, validation, rate limiting, and the server secret.</a:t>
+              <a:t>Explain how ClassPilot supports execution, not only import. Be transparent that the Canvas OAuth flow is implemented but institutional approval is an external prerequisite.</a:t>
             </a:r>
           </a:p>
           <a:p xmlns:a="http://schemas.openxmlformats.org/drawingml/2006/main">
@@ -915,12 +915,12 @@
           </a:p>
           <a:p xmlns:a="http://schemas.openxmlformats.org/drawingml/2006/main">
             <a:r>
-              <a:t>- ClassPilot AI Worker implementation, July 25, 2026.</a:t>
-            </a:r>
-          </a:p>
-          <a:p xmlns:a="http://schemas.openxmlformats.org/drawingml/2006/main">
-            <a:r>
-              <a:t>- OpenAI Responses API documentation: https://platform.openai.com/docs/api-reference/responses</a:t>
+              <a:t>- ClassPilot AI Today, study scheduler, submission checker, and Canvas connector implementations, July 2026.</a:t>
+            </a:r>
+          </a:p>
+          <a:p xmlns:a="http://schemas.openxmlformats.org/drawingml/2006/main">
+            <a:r>
+              <a:t>- Canvas LMS OAuth2 documentation: https://developerdocs.instructure.com/services/canvas/oauth2</a:t>
             </a:r>
           </a:p>
           <a:p xmlns:a="http://schemas.openxmlformats.org/drawingml/2006/main">
@@ -995,7 +995,7 @@
           <a:lstStyle xmlns:a="http://schemas.openxmlformats.org/drawingml/2006/main"/>
           <a:p xmlns:a="http://schemas.openxmlformats.org/drawingml/2006/main">
             <a:r>
-              <a:t>Position academic integrity as a product feature. The Coach supports interpretation, planning, and checking while leaving judgment and final authorship with the student.</a:t>
+              <a:t>Use this slide to explain the privacy and academic-integrity boundary. Workers AI is the default live provider; an OpenAI server-side provider remains optional without changing the public response contract.</a:t>
             </a:r>
           </a:p>
           <a:p xmlns:a="http://schemas.openxmlformats.org/drawingml/2006/main">
@@ -1010,7 +1010,17 @@
           </a:p>
           <a:p xmlns:a="http://schemas.openxmlformats.org/drawingml/2006/main">
             <a:r>
-              <a:t>- ClassPilot AI Coach system prompt and privacy UI, July 25, 2026.</a:t>
+              <a:t>- ClassPilot AI Worker and Coach system instructions, July 25, 2026.</a:t>
+            </a:r>
+          </a:p>
+          <a:p xmlns:a="http://schemas.openxmlformats.org/drawingml/2006/main">
+            <a:r>
+              <a:t>- Cloudflare Workers AI bindings: https://developers.cloudflare.com/workers-ai/configuration/bindings/</a:t>
+            </a:r>
+          </a:p>
+          <a:p xmlns:a="http://schemas.openxmlformats.org/drawingml/2006/main">
+            <a:r>
+              <a:t>- Cloudflare Workers AI JSON mode: https://developers.cloudflare.com/workers-ai/features/json-mode/</a:t>
             </a:r>
           </a:p>
           <a:p xmlns:a="http://schemas.openxmlformats.org/drawingml/2006/main">
@@ -1085,7 +1095,7 @@
           <a:lstStyle xmlns:a="http://schemas.openxmlformats.org/drawingml/2006/main"/>
           <a:p xmlns:a="http://schemas.openxmlformats.org/drawingml/2006/main">
             <a:r>
-              <a:t>Share the verification evidence: all automated tests passed, the tested browser had no console errors, and both desktop and mobile layouts were inspected.</a:t>
+              <a:t>Share the verification evidence: 326 automated tests passed, the public product had no browser console errors, and the 390-pixel mobile layout had no page or transcript overflow.</a:t>
             </a:r>
           </a:p>
           <a:p xmlns:a="http://schemas.openxmlformats.org/drawingml/2006/main">
@@ -1100,12 +1110,12 @@
           </a:p>
           <a:p xmlns:a="http://schemas.openxmlformats.org/drawingml/2006/main">
             <a:r>
-              <a:t>- ClassPilot AI test suite and local browser QA, July 25, 2026.</a:t>
-            </a:r>
-          </a:p>
-          <a:p xmlns:a="http://schemas.openxmlformats.org/drawingml/2006/main">
-            <a:r>
-              <a:t>- ClassPilot AI mobile product screenshot, captured July 25, 2026.</a:t>
+              <a:t>- ClassPilot AI test suite and public browser QA, July 25, 2026.</a:t>
+            </a:r>
+          </a:p>
+          <a:p xmlns:a="http://schemas.openxmlformats.org/drawingml/2006/main">
+            <a:r>
+              <a:t>- ClassPilot AI live mobile product screenshot, captured July 25, 2026.</a:t>
             </a:r>
           </a:p>
           <a:p xmlns:a="http://schemas.openxmlformats.org/drawingml/2006/main">
@@ -1180,7 +1190,7 @@
           <a:lstStyle xmlns:a="http://schemas.openxmlformats.org/drawingml/2006/main"/>
           <a:p xmlns:a="http://schemas.openxmlformats.org/drawingml/2006/main">
             <a:r>
-              <a:t>Close on the product promise and open the live URL. Be transparent that the real-time model connection is activated through the server secret, while the complete interface and backend are already implemented.</a:t>
+              <a:t>Close on the product promise and open the live URL. The Coach is online through Workers AI; Canvas sync will become active after the school approves a Developer Key.</a:t>
             </a:r>
           </a:p>
           <a:p xmlns:a="http://schemas.openxmlformats.org/drawingml/2006/main">
@@ -1195,7 +1205,12 @@
           </a:p>
           <a:p xmlns:a="http://schemas.openxmlformats.org/drawingml/2006/main">
             <a:r>
-              <a:t>- ClassPilot AI product: https://cngei2.github.io/classpilot-ai-website/</a:t>
+              <a:t>- ClassPilot AI live product: https://cngei2.github.io/classpilot-ai-website/</a:t>
+            </a:r>
+          </a:p>
+          <a:p xmlns:a="http://schemas.openxmlformats.org/drawingml/2006/main">
+            <a:r>
+              <a:t>- ClassPilot AI Worker deployment: https://classpilot-ai-coach.cngei2-classpilot.workers.dev</a:t>
             </a:r>
           </a:p>
           <a:p xmlns:a="http://schemas.openxmlformats.org/drawingml/2006/main">
@@ -1268,7 +1283,7 @@
   </p:cSld>
   <p:clrMap bg1="lt1" tx1="dk1" bg2="lt2" tx2="dk2" accent1="accent1" accent2="accent2" accent3="accent3" accent4="accent4" accent5="accent5" accent6="accent6" hlink="hlink" folHlink="folHlink"/>
   <p:sldLayoutIdLst>
-    <p:sldLayoutId xmlns:r="http://schemas.openxmlformats.org/officeDocument/2006/relationships" id="2147483649" r:id="R9e42b8978b414faa"/>
+    <p:sldLayoutId xmlns:r="http://schemas.openxmlformats.org/officeDocument/2006/relationships" id="2147483649" r:id="R5627ecae792f435f"/>
   </p:sldLayoutIdLst>
   <p:txStyles>
     <p:titleStyle>
@@ -1819,7 +1834,7 @@
           <p:cNvPr id="8" name="cover-accent">
             <a:extLst xmlns:a="http://schemas.openxmlformats.org/drawingml/2006/main">
               <a:ext uri="{FF2B5EF4-FFF2-40B4-BE49-F238E27FC236}">
-                <a16:creationId xmlns:a16="http://schemas.microsoft.com/office/drawing/2014/main" id="{B98E9ADE-7DC6-4F0B-87F6-7C58B8065E4D}"/>
+                <a16:creationId xmlns:a16="http://schemas.microsoft.com/office/drawing/2014/main" id="{DDCC0067-4EED-49E1-B814-F62D9EA49F84}"/>
               </a:ext>
             </a:extLst>
           </p:cNvPr>
@@ -1852,7 +1867,7 @@
           <p:cNvPr id="2" name="cover-kicker">
             <a:extLst xmlns:a="http://schemas.openxmlformats.org/drawingml/2006/main">
               <a:ext uri="{FF2B5EF4-FFF2-40B4-BE49-F238E27FC236}">
-                <a16:creationId xmlns:a16="http://schemas.microsoft.com/office/drawing/2014/main" id="{54239CA0-5A15-4BA5-BE2E-621286624D94}"/>
+                <a16:creationId xmlns:a16="http://schemas.microsoft.com/office/drawing/2014/main" id="{015AE949-3195-4FCD-B75D-43D6EEDE0F6C}"/>
               </a:ext>
             </a:extLst>
           </p:cNvPr>
@@ -1902,7 +1917,7 @@
           <p:cNvPr id="3" name="cover-title">
             <a:extLst xmlns:a="http://schemas.openxmlformats.org/drawingml/2006/main">
               <a:ext uri="{FF2B5EF4-FFF2-40B4-BE49-F238E27FC236}">
-                <a16:creationId xmlns:a16="http://schemas.microsoft.com/office/drawing/2014/main" id="{400D1361-0D8C-4060-9D2D-D73CBD9D72ED}"/>
+                <a16:creationId xmlns:a16="http://schemas.microsoft.com/office/drawing/2014/main" id="{D58A0D3F-5EDE-4086-AC33-0C6A4982D70B}"/>
               </a:ext>
             </a:extLst>
           </p:cNvPr>
@@ -1969,7 +1984,7 @@
           <p:cNvPr id="4" name="cover-body">
             <a:extLst xmlns:a="http://schemas.openxmlformats.org/drawingml/2006/main">
               <a:ext uri="{FF2B5EF4-FFF2-40B4-BE49-F238E27FC236}">
-                <a16:creationId xmlns:a16="http://schemas.microsoft.com/office/drawing/2014/main" id="{07EE67A0-D45F-4B0D-91CA-2FE397C2C0BB}"/>
+                <a16:creationId xmlns:a16="http://schemas.microsoft.com/office/drawing/2014/main" id="{210CA153-8888-415B-95A2-C3DC988FA63E}"/>
               </a:ext>
             </a:extLst>
           </p:cNvPr>
@@ -2009,7 +2024,7 @@
                   <a:srgbClr val="CAD1D4"/>
                 </a:solidFill>
               </a:rPr>
-              <a:t>A private student workspace that reads uploads, organizes coursework, and coaches the student through the work.</a:t>
+              <a:t>A private student workspace that reads course material, builds a plan, checks the final file, and coaches the student in a live conversation.</a:t>
             </a:r>
           </a:p>
         </p:txBody>
@@ -2019,7 +2034,7 @@
           <p:cNvPr id="5" name="label-Product introduction-62">
             <a:extLst xmlns:a="http://schemas.openxmlformats.org/drawingml/2006/main">
               <a:ext uri="{FF2B5EF4-FFF2-40B4-BE49-F238E27FC236}">
-                <a16:creationId xmlns:a16="http://schemas.microsoft.com/office/drawing/2014/main" id="{DDB527BD-4164-442A-AECC-46C1D9355FAA}"/>
+                <a16:creationId xmlns:a16="http://schemas.microsoft.com/office/drawing/2014/main" id="{1229FEA3-7838-4C52-8910-9A820B9C2CBF}"/>
               </a:ext>
             </a:extLst>
           </p:cNvPr>
@@ -2075,7 +2090,7 @@
           <p:cNvPr id="6" name="cover-screen-frame">
             <a:extLst xmlns:a="http://schemas.openxmlformats.org/drawingml/2006/main">
               <a:ext uri="{FF2B5EF4-FFF2-40B4-BE49-F238E27FC236}">
-                <a16:creationId xmlns:a16="http://schemas.microsoft.com/office/drawing/2014/main" id="{88540A10-28E5-45C4-83CA-647C70FFA2DC}"/>
+                <a16:creationId xmlns:a16="http://schemas.microsoft.com/office/drawing/2014/main" id="{3E3B973C-9308-4886-A6BD-349EEA6125FD}"/>
               </a:ext>
             </a:extLst>
           </p:cNvPr>
@@ -2114,8 +2129,8 @@
           <p:nvPr/>
         </p:nvPicPr>
         <p:blipFill>
-          <a:blip xmlns:r="http://schemas.openxmlformats.org/officeDocument/2006/relationships" xmlns:a="http://schemas.openxmlformats.org/drawingml/2006/main" r:embed="Rd0e42696ef204d52"/>
-          <a:srcRect xmlns:a="http://schemas.openxmlformats.org/drawingml/2006/main" l="0" t="3208" r="0" b="3208"/>
+          <a:blip xmlns:r="http://schemas.openxmlformats.org/officeDocument/2006/relationships" xmlns:a="http://schemas.openxmlformats.org/drawingml/2006/main" r:embed="Rf0499b74358b400c"/>
+          <a:srcRect xmlns:a="http://schemas.openxmlformats.org/drawingml/2006/main" l="2017" t="0" r="2017" b="0"/>
           <a:stretch xmlns:a="http://schemas.openxmlformats.org/drawingml/2006/main">
             <a:fillRect l="0" t="0" r="0" b="0"/>
           </a:stretch>
@@ -2135,7 +2150,7 @@
     </p:spTree>
     <p:extLst>
       <p:ext uri="{BB962C8B-B14F-4D97-AF65-F5344CB8AC3E}">
-        <p14:creationId xmlns:p14="http://schemas.microsoft.com/office/powerpoint/2010/main" val="672493113"/>
+        <p14:creationId xmlns:p14="http://schemas.microsoft.com/office/powerpoint/2010/main" val="797015344"/>
       </p:ext>
     </p:extLst>
   </p:cSld>
@@ -2166,7 +2181,7 @@
           <p:cNvPr id="18" name="section-2">
             <a:extLst xmlns:a="http://schemas.openxmlformats.org/drawingml/2006/main">
               <a:ext uri="{FF2B5EF4-FFF2-40B4-BE49-F238E27FC236}">
-                <a16:creationId xmlns:a16="http://schemas.microsoft.com/office/drawing/2014/main" id="{EF9A240E-858F-4133-BD90-C438ACEF3A17}"/>
+                <a16:creationId xmlns:a16="http://schemas.microsoft.com/office/drawing/2014/main" id="{6CC7964F-EF1A-421F-B39E-EA6981A08DD6}"/>
               </a:ext>
             </a:extLst>
           </p:cNvPr>
@@ -2216,7 +2231,7 @@
           <p:cNvPr id="2" name="page-2">
             <a:extLst xmlns:a="http://schemas.openxmlformats.org/drawingml/2006/main">
               <a:ext uri="{FF2B5EF4-FFF2-40B4-BE49-F238E27FC236}">
-                <a16:creationId xmlns:a16="http://schemas.microsoft.com/office/drawing/2014/main" id="{782D9AC1-51D4-455E-9C22-B0CC9B3A01B3}"/>
+                <a16:creationId xmlns:a16="http://schemas.microsoft.com/office/drawing/2014/main" id="{E6E8A8DB-074D-4F4A-9213-5CB1EAC7A660}"/>
               </a:ext>
             </a:extLst>
           </p:cNvPr>
@@ -2266,7 +2281,7 @@
           <p:cNvPr id="3" name="rule-48-66">
             <a:extLst xmlns:a="http://schemas.openxmlformats.org/drawingml/2006/main">
               <a:ext uri="{FF2B5EF4-FFF2-40B4-BE49-F238E27FC236}">
-                <a16:creationId xmlns:a16="http://schemas.microsoft.com/office/drawing/2014/main" id="{A7DD98FC-4DB1-4DFB-8A9E-32EB711A50E4}"/>
+                <a16:creationId xmlns:a16="http://schemas.microsoft.com/office/drawing/2014/main" id="{EBA05033-4F05-43BA-BBAF-73BC5053FEA1}"/>
               </a:ext>
             </a:extLst>
           </p:cNvPr>
@@ -2297,7 +2312,7 @@
           <p:cNvPr id="4" name="title-Students do not need another dashboard.">
             <a:extLst xmlns:a="http://schemas.openxmlformats.org/drawingml/2006/main">
               <a:ext uri="{FF2B5EF4-FFF2-40B4-BE49-F238E27FC236}">
-                <a16:creationId xmlns:a16="http://schemas.microsoft.com/office/drawing/2014/main" id="{050217B6-86D6-41A8-AEA9-59826E3DE8F3}"/>
+                <a16:creationId xmlns:a16="http://schemas.microsoft.com/office/drawing/2014/main" id="{45718F58-F3C7-47BB-A2DA-61AFB4D94128}"/>
               </a:ext>
             </a:extLst>
           </p:cNvPr>
@@ -2347,7 +2362,7 @@
           <p:cNvPr id="5" name="subtitle-Students do not need another dashboard.">
             <a:extLst xmlns:a="http://schemas.openxmlformats.org/drawingml/2006/main">
               <a:ext uri="{FF2B5EF4-FFF2-40B4-BE49-F238E27FC236}">
-                <a16:creationId xmlns:a16="http://schemas.microsoft.com/office/drawing/2014/main" id="{301790BB-0433-439C-B466-71CFC5791263}"/>
+                <a16:creationId xmlns:a16="http://schemas.microsoft.com/office/drawing/2014/main" id="{AAB437CA-9BF1-42A4-88EF-CE7A01BDF9C5}"/>
               </a:ext>
             </a:extLst>
           </p:cNvPr>
@@ -2397,7 +2412,7 @@
           <p:cNvPr id="6" name="problem-card-0">
             <a:extLst xmlns:a="http://schemas.openxmlformats.org/drawingml/2006/main">
               <a:ext uri="{FF2B5EF4-FFF2-40B4-BE49-F238E27FC236}">
-                <a16:creationId xmlns:a16="http://schemas.microsoft.com/office/drawing/2014/main" id="{EE5B6D14-955C-4128-A22B-EF4749BE1E25}"/>
+                <a16:creationId xmlns:a16="http://schemas.microsoft.com/office/drawing/2014/main" id="{1CC18705-A946-49D7-8D56-B0BE6FD0FD6E}"/>
               </a:ext>
             </a:extLst>
           </p:cNvPr>
@@ -2432,7 +2447,7 @@
           <p:cNvPr id="7" name="problem-number-0">
             <a:extLst xmlns:a="http://schemas.openxmlformats.org/drawingml/2006/main">
               <a:ext uri="{FF2B5EF4-FFF2-40B4-BE49-F238E27FC236}">
-                <a16:creationId xmlns:a16="http://schemas.microsoft.com/office/drawing/2014/main" id="{55FC15CB-1FF9-44BB-A74B-B9497C17EF3E}"/>
+                <a16:creationId xmlns:a16="http://schemas.microsoft.com/office/drawing/2014/main" id="{C42C15EC-DD2D-4BAA-9098-856539CF1C1E}"/>
               </a:ext>
             </a:extLst>
           </p:cNvPr>
@@ -2482,7 +2497,7 @@
           <p:cNvPr id="8" name="problem-title-0">
             <a:extLst xmlns:a="http://schemas.openxmlformats.org/drawingml/2006/main">
               <a:ext uri="{FF2B5EF4-FFF2-40B4-BE49-F238E27FC236}">
-                <a16:creationId xmlns:a16="http://schemas.microsoft.com/office/drawing/2014/main" id="{89532B20-A679-41A7-8D04-E53F21E4E14A}"/>
+                <a16:creationId xmlns:a16="http://schemas.microsoft.com/office/drawing/2014/main" id="{A12300B3-41F6-46E6-A8CF-E13BF62DDD38}"/>
               </a:ext>
             </a:extLst>
           </p:cNvPr>
@@ -2532,7 +2547,7 @@
           <p:cNvPr id="9" name="problem-body-0">
             <a:extLst xmlns:a="http://schemas.openxmlformats.org/drawingml/2006/main">
               <a:ext uri="{FF2B5EF4-FFF2-40B4-BE49-F238E27FC236}">
-                <a16:creationId xmlns:a16="http://schemas.microsoft.com/office/drawing/2014/main" id="{DF5B3597-7520-4B9E-9589-4A2DACAF22EB}"/>
+                <a16:creationId xmlns:a16="http://schemas.microsoft.com/office/drawing/2014/main" id="{6F2EC913-EA92-4E7A-B582-7A77AD2AE3EE}"/>
               </a:ext>
             </a:extLst>
           </p:cNvPr>
@@ -2582,7 +2597,7 @@
           <p:cNvPr id="10" name="problem-card-1">
             <a:extLst xmlns:a="http://schemas.openxmlformats.org/drawingml/2006/main">
               <a:ext uri="{FF2B5EF4-FFF2-40B4-BE49-F238E27FC236}">
-                <a16:creationId xmlns:a16="http://schemas.microsoft.com/office/drawing/2014/main" id="{77AE4F16-48D7-4F62-AAE7-9BB284626C00}"/>
+                <a16:creationId xmlns:a16="http://schemas.microsoft.com/office/drawing/2014/main" id="{57B3C753-52B9-40DE-81F6-871748B5AE1C}"/>
               </a:ext>
             </a:extLst>
           </p:cNvPr>
@@ -2617,7 +2632,7 @@
           <p:cNvPr id="11" name="problem-number-1">
             <a:extLst xmlns:a="http://schemas.openxmlformats.org/drawingml/2006/main">
               <a:ext uri="{FF2B5EF4-FFF2-40B4-BE49-F238E27FC236}">
-                <a16:creationId xmlns:a16="http://schemas.microsoft.com/office/drawing/2014/main" id="{69C366F3-2A42-488D-B3DF-8B22A8CB7F9A}"/>
+                <a16:creationId xmlns:a16="http://schemas.microsoft.com/office/drawing/2014/main" id="{75D072BC-6878-43E9-A9EB-5DB960ABBAEE}"/>
               </a:ext>
             </a:extLst>
           </p:cNvPr>
@@ -2667,7 +2682,7 @@
           <p:cNvPr id="12" name="problem-title-1">
             <a:extLst xmlns:a="http://schemas.openxmlformats.org/drawingml/2006/main">
               <a:ext uri="{FF2B5EF4-FFF2-40B4-BE49-F238E27FC236}">
-                <a16:creationId xmlns:a16="http://schemas.microsoft.com/office/drawing/2014/main" id="{D677169F-3687-42AF-B75D-839DD240D12A}"/>
+                <a16:creationId xmlns:a16="http://schemas.microsoft.com/office/drawing/2014/main" id="{0E2AFD70-05A2-48A4-B070-89BBE701B2CE}"/>
               </a:ext>
             </a:extLst>
           </p:cNvPr>
@@ -2717,7 +2732,7 @@
           <p:cNvPr id="13" name="problem-body-1">
             <a:extLst xmlns:a="http://schemas.openxmlformats.org/drawingml/2006/main">
               <a:ext uri="{FF2B5EF4-FFF2-40B4-BE49-F238E27FC236}">
-                <a16:creationId xmlns:a16="http://schemas.microsoft.com/office/drawing/2014/main" id="{DD6021C2-5A02-4F03-A5EC-9E945055AE40}"/>
+                <a16:creationId xmlns:a16="http://schemas.microsoft.com/office/drawing/2014/main" id="{CA2EB6EB-5A9E-4943-91D7-1D9CF7A59C9C}"/>
               </a:ext>
             </a:extLst>
           </p:cNvPr>
@@ -2767,7 +2782,7 @@
           <p:cNvPr id="14" name="problem-card-2">
             <a:extLst xmlns:a="http://schemas.openxmlformats.org/drawingml/2006/main">
               <a:ext uri="{FF2B5EF4-FFF2-40B4-BE49-F238E27FC236}">
-                <a16:creationId xmlns:a16="http://schemas.microsoft.com/office/drawing/2014/main" id="{F88665A5-4B9B-40E6-BAC9-828A035055A5}"/>
+                <a16:creationId xmlns:a16="http://schemas.microsoft.com/office/drawing/2014/main" id="{9C0E33D9-FFEC-41A3-AF4D-C0969D1D2A17}"/>
               </a:ext>
             </a:extLst>
           </p:cNvPr>
@@ -2802,7 +2817,7 @@
           <p:cNvPr id="15" name="problem-number-2">
             <a:extLst xmlns:a="http://schemas.openxmlformats.org/drawingml/2006/main">
               <a:ext uri="{FF2B5EF4-FFF2-40B4-BE49-F238E27FC236}">
-                <a16:creationId xmlns:a16="http://schemas.microsoft.com/office/drawing/2014/main" id="{94C442B2-8CFF-41CF-9B5B-B433ADC95EDE}"/>
+                <a16:creationId xmlns:a16="http://schemas.microsoft.com/office/drawing/2014/main" id="{14A47894-C15F-4598-AFD2-6CF8FF05E4C2}"/>
               </a:ext>
             </a:extLst>
           </p:cNvPr>
@@ -2852,7 +2867,7 @@
           <p:cNvPr id="16" name="problem-title-2">
             <a:extLst xmlns:a="http://schemas.openxmlformats.org/drawingml/2006/main">
               <a:ext uri="{FF2B5EF4-FFF2-40B4-BE49-F238E27FC236}">
-                <a16:creationId xmlns:a16="http://schemas.microsoft.com/office/drawing/2014/main" id="{D49089CC-A7DF-4021-94C5-E163A40B636E}"/>
+                <a16:creationId xmlns:a16="http://schemas.microsoft.com/office/drawing/2014/main" id="{C58EEE39-7F5D-463F-8E49-67DDDA86CA49}"/>
               </a:ext>
             </a:extLst>
           </p:cNvPr>
@@ -2902,7 +2917,7 @@
           <p:cNvPr id="17" name="problem-body-2">
             <a:extLst xmlns:a="http://schemas.openxmlformats.org/drawingml/2006/main">
               <a:ext uri="{FF2B5EF4-FFF2-40B4-BE49-F238E27FC236}">
-                <a16:creationId xmlns:a16="http://schemas.microsoft.com/office/drawing/2014/main" id="{AD36C4CF-3E14-4A47-B4F2-E6DB99BB721C}"/>
+                <a16:creationId xmlns:a16="http://schemas.microsoft.com/office/drawing/2014/main" id="{FED7F536-AB53-47DB-9D5E-850EF63AF4D9}"/>
               </a:ext>
             </a:extLst>
           </p:cNvPr>
@@ -2950,7 +2965,7 @@
     </p:spTree>
     <p:extLst>
       <p:ext uri="{BB962C8B-B14F-4D97-AF65-F5344CB8AC3E}">
-        <p14:creationId xmlns:p14="http://schemas.microsoft.com/office/powerpoint/2010/main" val="1079463778"/>
+        <p14:creationId xmlns:p14="http://schemas.microsoft.com/office/powerpoint/2010/main" val="1617875129"/>
       </p:ext>
     </p:extLst>
   </p:cSld>
@@ -2981,7 +2996,7 @@
           <p:cNvPr id="29" name="section-3">
             <a:extLst xmlns:a="http://schemas.openxmlformats.org/drawingml/2006/main">
               <a:ext uri="{FF2B5EF4-FFF2-40B4-BE49-F238E27FC236}">
-                <a16:creationId xmlns:a16="http://schemas.microsoft.com/office/drawing/2014/main" id="{AE1CC0E4-6A94-4146-B3F3-D3ED6C9BAE31}"/>
+                <a16:creationId xmlns:a16="http://schemas.microsoft.com/office/drawing/2014/main" id="{13EE8F65-9563-4031-A533-13ECF9B7528B}"/>
               </a:ext>
             </a:extLst>
           </p:cNvPr>
@@ -3031,7 +3046,7 @@
           <p:cNvPr id="2" name="page-3">
             <a:extLst xmlns:a="http://schemas.openxmlformats.org/drawingml/2006/main">
               <a:ext uri="{FF2B5EF4-FFF2-40B4-BE49-F238E27FC236}">
-                <a16:creationId xmlns:a16="http://schemas.microsoft.com/office/drawing/2014/main" id="{2DF6F15B-D2CC-4C8F-B05A-41B4F0E1F4F8}"/>
+                <a16:creationId xmlns:a16="http://schemas.microsoft.com/office/drawing/2014/main" id="{FE9655F9-91C3-4416-91DF-265679B4C4A6}"/>
               </a:ext>
             </a:extLst>
           </p:cNvPr>
@@ -3081,7 +3096,7 @@
           <p:cNvPr id="3" name="rule-48-66">
             <a:extLst xmlns:a="http://schemas.openxmlformats.org/drawingml/2006/main">
               <a:ext uri="{FF2B5EF4-FFF2-40B4-BE49-F238E27FC236}">
-                <a16:creationId xmlns:a16="http://schemas.microsoft.com/office/drawing/2014/main" id="{242140C2-FCA5-46F4-AB68-2C04B2D23626}"/>
+                <a16:creationId xmlns:a16="http://schemas.microsoft.com/office/drawing/2014/main" id="{E5D89E68-8452-4B03-899F-35E8FC8E1FDF}"/>
               </a:ext>
             </a:extLst>
           </p:cNvPr>
@@ -3109,10 +3124,10 @@
       </p:sp>
       <p:sp>
         <p:nvSpPr>
-          <p:cNvPr id="4" name="title-One upload becomes an organized course workflow.">
-            <a:extLst xmlns:a="http://schemas.openxmlformats.org/drawingml/2006/main">
-              <a:ext uri="{FF2B5EF4-FFF2-40B4-BE49-F238E27FC236}">
-                <a16:creationId xmlns:a16="http://schemas.microsoft.com/office/drawing/2014/main" id="{07DF20AD-6778-4C71-85C6-18F5E0F5956F}"/>
+          <p:cNvPr id="4" name="title-Upload once. Keep every fact with the right course.">
+            <a:extLst xmlns:a="http://schemas.openxmlformats.org/drawingml/2006/main">
+              <a:ext uri="{FF2B5EF4-FFF2-40B4-BE49-F238E27FC236}">
+                <a16:creationId xmlns:a16="http://schemas.microsoft.com/office/drawing/2014/main" id="{7EF6AE4E-2321-4086-8FD2-BF400696B9E1}"/>
               </a:ext>
             </a:extLst>
           </p:cNvPr>
@@ -3152,17 +3167,17 @@
                   <a:srgbClr val="141C22"/>
                 </a:solidFill>
               </a:rPr>
-              <a:t>One upload becomes an organized course workflow.</a:t>
-            </a:r>
-          </a:p>
-        </p:txBody>
-      </p:sp>
-      <p:sp>
-        <p:nvSpPr>
-          <p:cNvPr id="5" name="subtitle-One upload becomes an organized course workflow.">
-            <a:extLst xmlns:a="http://schemas.openxmlformats.org/drawingml/2006/main">
-              <a:ext uri="{FF2B5EF4-FFF2-40B4-BE49-F238E27FC236}">
-                <a16:creationId xmlns:a16="http://schemas.microsoft.com/office/drawing/2014/main" id="{67A5F65E-3262-4121-A319-DBF2B0F339F1}"/>
+              <a:t>Upload once. Keep every fact with the right course.</a:t>
+            </a:r>
+          </a:p>
+        </p:txBody>
+      </p:sp>
+      <p:sp>
+        <p:nvSpPr>
+          <p:cNvPr id="5" name="subtitle-Upload once. Keep every fact with the right course.">
+            <a:extLst xmlns:a="http://schemas.openxmlformats.org/drawingml/2006/main">
+              <a:ext uri="{FF2B5EF4-FFF2-40B4-BE49-F238E27FC236}">
+                <a16:creationId xmlns:a16="http://schemas.microsoft.com/office/drawing/2014/main" id="{729DAE95-8CAC-4B2F-A78B-58F615115A8B}"/>
               </a:ext>
             </a:extLst>
           </p:cNvPr>
@@ -3202,7 +3217,7 @@
                   <a:srgbClr val="647078"/>
                 </a:solidFill>
               </a:rPr>
-              <a:t>The selected course is the source of truth, so files cannot drift into duplicate course records.</a:t>
+              <a:t>Importing inside a course removes identity guesswork and prevents syllabus and assignment uploads from splitting into duplicates.</a:t>
             </a:r>
           </a:p>
         </p:txBody>
@@ -3212,7 +3227,7 @@
           <p:cNvPr id="6" name="step-number-1">
             <a:extLst xmlns:a="http://schemas.openxmlformats.org/drawingml/2006/main">
               <a:ext uri="{FF2B5EF4-FFF2-40B4-BE49-F238E27FC236}">
-                <a16:creationId xmlns:a16="http://schemas.microsoft.com/office/drawing/2014/main" id="{7A9B5A94-58D3-40BD-BAAD-37808F1840CE}"/>
+                <a16:creationId xmlns:a16="http://schemas.microsoft.com/office/drawing/2014/main" id="{41C2250D-112F-483B-9E00-614A22071B91}"/>
               </a:ext>
             </a:extLst>
           </p:cNvPr>
@@ -3245,7 +3260,7 @@
           <p:cNvPr id="7" name="step-digit-1">
             <a:extLst xmlns:a="http://schemas.openxmlformats.org/drawingml/2006/main">
               <a:ext uri="{FF2B5EF4-FFF2-40B4-BE49-F238E27FC236}">
-                <a16:creationId xmlns:a16="http://schemas.microsoft.com/office/drawing/2014/main" id="{AC476E7F-F0A3-4650-A96A-3482D389AF36}"/>
+                <a16:creationId xmlns:a16="http://schemas.microsoft.com/office/drawing/2014/main" id="{AD3FB824-3B55-4B4F-9E37-C233E7BD5916}"/>
               </a:ext>
             </a:extLst>
           </p:cNvPr>
@@ -3295,7 +3310,7 @@
           <p:cNvPr id="8" name="step-heading-1">
             <a:extLst xmlns:a="http://schemas.openxmlformats.org/drawingml/2006/main">
               <a:ext uri="{FF2B5EF4-FFF2-40B4-BE49-F238E27FC236}">
-                <a16:creationId xmlns:a16="http://schemas.microsoft.com/office/drawing/2014/main" id="{A08CE2DE-CF0A-4F6B-9D97-7EF5FF66D504}"/>
+                <a16:creationId xmlns:a16="http://schemas.microsoft.com/office/drawing/2014/main" id="{184693AB-6EB7-4927-B73D-3E7F20238996}"/>
               </a:ext>
             </a:extLst>
           </p:cNvPr>
@@ -3345,7 +3360,7 @@
           <p:cNvPr id="9" name="step-body-1">
             <a:extLst xmlns:a="http://schemas.openxmlformats.org/drawingml/2006/main">
               <a:ext uri="{FF2B5EF4-FFF2-40B4-BE49-F238E27FC236}">
-                <a16:creationId xmlns:a16="http://schemas.microsoft.com/office/drawing/2014/main" id="{FC7857DF-2D3C-4604-95F8-4D0760DA2A9D}"/>
+                <a16:creationId xmlns:a16="http://schemas.microsoft.com/office/drawing/2014/main" id="{BD878C88-1B33-4C21-830E-F00E00152CF4}"/>
               </a:ext>
             </a:extLst>
           </p:cNvPr>
@@ -3395,7 +3410,7 @@
           <p:cNvPr id="10" name="rule-116-302">
             <a:extLst xmlns:a="http://schemas.openxmlformats.org/drawingml/2006/main">
               <a:ext uri="{FF2B5EF4-FFF2-40B4-BE49-F238E27FC236}">
-                <a16:creationId xmlns:a16="http://schemas.microsoft.com/office/drawing/2014/main" id="{6E177169-045E-454E-AE89-31686EC2D78E}"/>
+                <a16:creationId xmlns:a16="http://schemas.microsoft.com/office/drawing/2014/main" id="{6671CB29-4EB4-4C86-9EFE-D38432A7D55A}"/>
               </a:ext>
             </a:extLst>
           </p:cNvPr>
@@ -3426,7 +3441,7 @@
           <p:cNvPr id="11" name="arrow-0">
             <a:extLst xmlns:a="http://schemas.openxmlformats.org/drawingml/2006/main">
               <a:ext uri="{FF2B5EF4-FFF2-40B4-BE49-F238E27FC236}">
-                <a16:creationId xmlns:a16="http://schemas.microsoft.com/office/drawing/2014/main" id="{3E4BCB26-FF2C-41BA-8743-F0234BA48C3B}"/>
+                <a16:creationId xmlns:a16="http://schemas.microsoft.com/office/drawing/2014/main" id="{D16D6F31-0852-4849-B1A4-091CA66BA395}"/>
               </a:ext>
             </a:extLst>
           </p:cNvPr>
@@ -3459,7 +3474,7 @@
           <p:cNvPr id="12" name="step-number-2">
             <a:extLst xmlns:a="http://schemas.openxmlformats.org/drawingml/2006/main">
               <a:ext uri="{FF2B5EF4-FFF2-40B4-BE49-F238E27FC236}">
-                <a16:creationId xmlns:a16="http://schemas.microsoft.com/office/drawing/2014/main" id="{870CF76B-8D69-4EE5-98C2-4F19ABF82536}"/>
+                <a16:creationId xmlns:a16="http://schemas.microsoft.com/office/drawing/2014/main" id="{C758AC14-4116-4340-876B-CDA33028538A}"/>
               </a:ext>
             </a:extLst>
           </p:cNvPr>
@@ -3492,7 +3507,7 @@
           <p:cNvPr id="13" name="step-digit-2">
             <a:extLst xmlns:a="http://schemas.openxmlformats.org/drawingml/2006/main">
               <a:ext uri="{FF2B5EF4-FFF2-40B4-BE49-F238E27FC236}">
-                <a16:creationId xmlns:a16="http://schemas.microsoft.com/office/drawing/2014/main" id="{E6410D67-D884-41FF-911F-3675DAD98F02}"/>
+                <a16:creationId xmlns:a16="http://schemas.microsoft.com/office/drawing/2014/main" id="{C6AB886F-36BF-4977-B387-E6A87129D2A0}"/>
               </a:ext>
             </a:extLst>
           </p:cNvPr>
@@ -3542,7 +3557,7 @@
           <p:cNvPr id="14" name="step-heading-2">
             <a:extLst xmlns:a="http://schemas.openxmlformats.org/drawingml/2006/main">
               <a:ext uri="{FF2B5EF4-FFF2-40B4-BE49-F238E27FC236}">
-                <a16:creationId xmlns:a16="http://schemas.microsoft.com/office/drawing/2014/main" id="{0BD14744-4BFD-4082-88F0-9946470DC5BF}"/>
+                <a16:creationId xmlns:a16="http://schemas.microsoft.com/office/drawing/2014/main" id="{69A493A6-7E2F-4EDA-B777-9C74D155D7DF}"/>
               </a:ext>
             </a:extLst>
           </p:cNvPr>
@@ -3592,7 +3607,7 @@
           <p:cNvPr id="15" name="step-body-2">
             <a:extLst xmlns:a="http://schemas.openxmlformats.org/drawingml/2006/main">
               <a:ext uri="{FF2B5EF4-FFF2-40B4-BE49-F238E27FC236}">
-                <a16:creationId xmlns:a16="http://schemas.microsoft.com/office/drawing/2014/main" id="{B92F9DEE-D287-403C-931B-27DC803F6B6A}"/>
+                <a16:creationId xmlns:a16="http://schemas.microsoft.com/office/drawing/2014/main" id="{5885FB04-9099-4DC0-BB4B-30043981A17A}"/>
               </a:ext>
             </a:extLst>
           </p:cNvPr>
@@ -3642,7 +3657,7 @@
           <p:cNvPr id="16" name="rule-418-302">
             <a:extLst xmlns:a="http://schemas.openxmlformats.org/drawingml/2006/main">
               <a:ext uri="{FF2B5EF4-FFF2-40B4-BE49-F238E27FC236}">
-                <a16:creationId xmlns:a16="http://schemas.microsoft.com/office/drawing/2014/main" id="{AF6CD846-7CEF-49B6-A9E6-EFFEC68E8309}"/>
+                <a16:creationId xmlns:a16="http://schemas.microsoft.com/office/drawing/2014/main" id="{D23FD719-3D8F-4C56-BCA8-C1C4679A1600}"/>
               </a:ext>
             </a:extLst>
           </p:cNvPr>
@@ -3673,7 +3688,7 @@
           <p:cNvPr id="17" name="arrow-1">
             <a:extLst xmlns:a="http://schemas.openxmlformats.org/drawingml/2006/main">
               <a:ext uri="{FF2B5EF4-FFF2-40B4-BE49-F238E27FC236}">
-                <a16:creationId xmlns:a16="http://schemas.microsoft.com/office/drawing/2014/main" id="{7476F532-2E7B-4541-8472-131FC0524845}"/>
+                <a16:creationId xmlns:a16="http://schemas.microsoft.com/office/drawing/2014/main" id="{3F301BF0-C5EA-49CD-9ADD-B232519FB02E}"/>
               </a:ext>
             </a:extLst>
           </p:cNvPr>
@@ -3706,7 +3721,7 @@
           <p:cNvPr id="18" name="step-number-3">
             <a:extLst xmlns:a="http://schemas.openxmlformats.org/drawingml/2006/main">
               <a:ext uri="{FF2B5EF4-FFF2-40B4-BE49-F238E27FC236}">
-                <a16:creationId xmlns:a16="http://schemas.microsoft.com/office/drawing/2014/main" id="{DAE94662-2899-4CA1-9C97-0DEE04D6691C}"/>
+                <a16:creationId xmlns:a16="http://schemas.microsoft.com/office/drawing/2014/main" id="{DE2621B7-5EC3-43AA-92AC-923DCC4A1DF9}"/>
               </a:ext>
             </a:extLst>
           </p:cNvPr>
@@ -3739,7 +3754,7 @@
           <p:cNvPr id="19" name="step-digit-3">
             <a:extLst xmlns:a="http://schemas.openxmlformats.org/drawingml/2006/main">
               <a:ext uri="{FF2B5EF4-FFF2-40B4-BE49-F238E27FC236}">
-                <a16:creationId xmlns:a16="http://schemas.microsoft.com/office/drawing/2014/main" id="{E929A4B0-4C03-4D9C-B970-BCBBC5A27246}"/>
+                <a16:creationId xmlns:a16="http://schemas.microsoft.com/office/drawing/2014/main" id="{14E73AE7-C4E4-443D-BE2B-B5EA15BEEFE8}"/>
               </a:ext>
             </a:extLst>
           </p:cNvPr>
@@ -3789,7 +3804,7 @@
           <p:cNvPr id="20" name="step-heading-3">
             <a:extLst xmlns:a="http://schemas.openxmlformats.org/drawingml/2006/main">
               <a:ext uri="{FF2B5EF4-FFF2-40B4-BE49-F238E27FC236}">
-                <a16:creationId xmlns:a16="http://schemas.microsoft.com/office/drawing/2014/main" id="{11B1D68E-AF1E-4E1C-BC67-7B33E1822623}"/>
+                <a16:creationId xmlns:a16="http://schemas.microsoft.com/office/drawing/2014/main" id="{DC2AF1D0-0C11-4320-AAE8-889E58E3D4FE}"/>
               </a:ext>
             </a:extLst>
           </p:cNvPr>
@@ -3839,7 +3854,7 @@
           <p:cNvPr id="21" name="step-body-3">
             <a:extLst xmlns:a="http://schemas.openxmlformats.org/drawingml/2006/main">
               <a:ext uri="{FF2B5EF4-FFF2-40B4-BE49-F238E27FC236}">
-                <a16:creationId xmlns:a16="http://schemas.microsoft.com/office/drawing/2014/main" id="{BB5AEA2B-98BF-48B1-A526-8EF7160D1023}"/>
+                <a16:creationId xmlns:a16="http://schemas.microsoft.com/office/drawing/2014/main" id="{DC411792-184D-4589-8ABC-583F6D801620}"/>
               </a:ext>
             </a:extLst>
           </p:cNvPr>
@@ -3889,7 +3904,7 @@
           <p:cNvPr id="22" name="rule-720-302">
             <a:extLst xmlns:a="http://schemas.openxmlformats.org/drawingml/2006/main">
               <a:ext uri="{FF2B5EF4-FFF2-40B4-BE49-F238E27FC236}">
-                <a16:creationId xmlns:a16="http://schemas.microsoft.com/office/drawing/2014/main" id="{A2B62FC3-1306-410A-BDCA-F6DA293E63EA}"/>
+                <a16:creationId xmlns:a16="http://schemas.microsoft.com/office/drawing/2014/main" id="{FAF3D9C3-439A-4917-A50B-28B0043B3CAC}"/>
               </a:ext>
             </a:extLst>
           </p:cNvPr>
@@ -3920,7 +3935,7 @@
           <p:cNvPr id="23" name="arrow-2">
             <a:extLst xmlns:a="http://schemas.openxmlformats.org/drawingml/2006/main">
               <a:ext uri="{FF2B5EF4-FFF2-40B4-BE49-F238E27FC236}">
-                <a16:creationId xmlns:a16="http://schemas.microsoft.com/office/drawing/2014/main" id="{FE4DF61B-9655-4A5F-839E-26DE47BFF396}"/>
+                <a16:creationId xmlns:a16="http://schemas.microsoft.com/office/drawing/2014/main" id="{8B7CFC15-D031-4AFD-A22E-4C65E73C6606}"/>
               </a:ext>
             </a:extLst>
           </p:cNvPr>
@@ -3953,7 +3968,7 @@
           <p:cNvPr id="24" name="step-number-4">
             <a:extLst xmlns:a="http://schemas.openxmlformats.org/drawingml/2006/main">
               <a:ext uri="{FF2B5EF4-FFF2-40B4-BE49-F238E27FC236}">
-                <a16:creationId xmlns:a16="http://schemas.microsoft.com/office/drawing/2014/main" id="{C19D5CB1-0139-4A0D-A63B-35AC393A7715}"/>
+                <a16:creationId xmlns:a16="http://schemas.microsoft.com/office/drawing/2014/main" id="{0519DA33-C9C4-4FC1-85D6-05BA2FD40F66}"/>
               </a:ext>
             </a:extLst>
           </p:cNvPr>
@@ -3986,7 +4001,7 @@
           <p:cNvPr id="25" name="step-digit-4">
             <a:extLst xmlns:a="http://schemas.openxmlformats.org/drawingml/2006/main">
               <a:ext uri="{FF2B5EF4-FFF2-40B4-BE49-F238E27FC236}">
-                <a16:creationId xmlns:a16="http://schemas.microsoft.com/office/drawing/2014/main" id="{9E36FD0C-D5F1-44D1-9E60-9A4829A56F3F}"/>
+                <a16:creationId xmlns:a16="http://schemas.microsoft.com/office/drawing/2014/main" id="{AAEE159C-153A-4CD6-8F86-154E938CB6F6}"/>
               </a:ext>
             </a:extLst>
           </p:cNvPr>
@@ -4036,7 +4051,7 @@
           <p:cNvPr id="26" name="step-heading-4">
             <a:extLst xmlns:a="http://schemas.openxmlformats.org/drawingml/2006/main">
               <a:ext uri="{FF2B5EF4-FFF2-40B4-BE49-F238E27FC236}">
-                <a16:creationId xmlns:a16="http://schemas.microsoft.com/office/drawing/2014/main" id="{ED8E863B-7384-417C-A6F4-B24D5F4264DC}"/>
+                <a16:creationId xmlns:a16="http://schemas.microsoft.com/office/drawing/2014/main" id="{7AE5F467-1041-4647-9DBF-516E92AFD60F}"/>
               </a:ext>
             </a:extLst>
           </p:cNvPr>
@@ -4076,7 +4091,7 @@
                   <a:srgbClr val="141C22"/>
                 </a:solidFill>
               </a:rPr>
-              <a:t>Coach the work</a:t>
+              <a:t>Build the work</a:t>
             </a:r>
           </a:p>
         </p:txBody>
@@ -4086,7 +4101,7 @@
           <p:cNvPr id="27" name="step-body-4">
             <a:extLst xmlns:a="http://schemas.openxmlformats.org/drawingml/2006/main">
               <a:ext uri="{FF2B5EF4-FFF2-40B4-BE49-F238E27FC236}">
-                <a16:creationId xmlns:a16="http://schemas.microsoft.com/office/drawing/2014/main" id="{6114E65C-0E16-4441-9C4B-C31E62EB3088}"/>
+                <a16:creationId xmlns:a16="http://schemas.microsoft.com/office/drawing/2014/main" id="{1D79D506-0EEE-45B5-B881-FB586B056A21}"/>
               </a:ext>
             </a:extLst>
           </p:cNvPr>
@@ -4126,7 +4141,7 @@
                   <a:srgbClr val="647078"/>
                 </a:solidFill>
               </a:rPr>
-              <a:t>Explain the prompt, identify missing requirements, and turn it into the next practical steps.</a:t>
+              <a:t>Create tasks, a study schedule, a next action, and evidence-grounded Coach context.</a:t>
             </a:r>
           </a:p>
         </p:txBody>
@@ -4136,7 +4151,7 @@
           <p:cNvPr id="28" name="workflow-result">
             <a:extLst xmlns:a="http://schemas.openxmlformats.org/drawingml/2006/main">
               <a:ext uri="{FF2B5EF4-FFF2-40B4-BE49-F238E27FC236}">
-                <a16:creationId xmlns:a16="http://schemas.microsoft.com/office/drawing/2014/main" id="{0C6EAA92-5080-49F7-A242-FF027DDE4E38}"/>
+                <a16:creationId xmlns:a16="http://schemas.microsoft.com/office/drawing/2014/main" id="{4E72650F-F30F-40C5-A019-47873A7508A6}"/>
               </a:ext>
             </a:extLst>
           </p:cNvPr>
@@ -4176,7 +4191,7 @@
                   <a:srgbClr val="2F7D74"/>
                 </a:solidFill>
               </a:rPr>
-              <a:t>RESULT  /  Every course becomes a living workspace instead of a folder of disconnected uploads.</a:t>
+              <a:t>RESULT  /  One course workspace holds its assignments, syllabus, schedule, submission checks, and Coach history.</a:t>
             </a:r>
           </a:p>
         </p:txBody>
@@ -4184,7 +4199,7 @@
     </p:spTree>
     <p:extLst>
       <p:ext uri="{BB962C8B-B14F-4D97-AF65-F5344CB8AC3E}">
-        <p14:creationId xmlns:p14="http://schemas.microsoft.com/office/powerpoint/2010/main" val="248712909"/>
+        <p14:creationId xmlns:p14="http://schemas.microsoft.com/office/powerpoint/2010/main" val="1723410769"/>
       </p:ext>
     </p:extLst>
   </p:cSld>
@@ -4212,10 +4227,10 @@
       </p:grpSpPr>
       <p:sp>
         <p:nvSpPr>
-          <p:cNvPr id="10" name="section-4">
-            <a:extLst xmlns:a="http://schemas.openxmlformats.org/drawingml/2006/main">
-              <a:ext uri="{FF2B5EF4-FFF2-40B4-BE49-F238E27FC236}">
-                <a16:creationId xmlns:a16="http://schemas.microsoft.com/office/drawing/2014/main" id="{D255139F-397E-42E7-A082-30F3BA6BD1C8}"/>
+          <p:cNvPr id="42" name="section-4">
+            <a:extLst xmlns:a="http://schemas.openxmlformats.org/drawingml/2006/main">
+              <a:ext uri="{FF2B5EF4-FFF2-40B4-BE49-F238E27FC236}">
+                <a16:creationId xmlns:a16="http://schemas.microsoft.com/office/drawing/2014/main" id="{44B8CE2C-31A5-4773-8981-59ADB80CEEFC}"/>
               </a:ext>
             </a:extLst>
           </p:cNvPr>
@@ -4265,7 +4280,7 @@
           <p:cNvPr id="2" name="page-4">
             <a:extLst xmlns:a="http://schemas.openxmlformats.org/drawingml/2006/main">
               <a:ext uri="{FF2B5EF4-FFF2-40B4-BE49-F238E27FC236}">
-                <a16:creationId xmlns:a16="http://schemas.microsoft.com/office/drawing/2014/main" id="{298B0F37-BA55-4F97-94D0-12D8D0587CDA}"/>
+                <a16:creationId xmlns:a16="http://schemas.microsoft.com/office/drawing/2014/main" id="{92AE81CA-5FB4-4FD6-811C-429E675B9882}"/>
               </a:ext>
             </a:extLst>
           </p:cNvPr>
@@ -4315,7 +4330,7 @@
           <p:cNvPr id="3" name="rule-48-66">
             <a:extLst xmlns:a="http://schemas.openxmlformats.org/drawingml/2006/main">
               <a:ext uri="{FF2B5EF4-FFF2-40B4-BE49-F238E27FC236}">
-                <a16:creationId xmlns:a16="http://schemas.microsoft.com/office/drawing/2014/main" id="{14053E56-0AB3-44E0-BDFC-D9D2065D9838}"/>
+                <a16:creationId xmlns:a16="http://schemas.microsoft.com/office/drawing/2014/main" id="{BC574603-CD4F-4878-9F06-436D548D1526}"/>
               </a:ext>
             </a:extLst>
           </p:cNvPr>
@@ -4343,10 +4358,10 @@
       </p:sp>
       <p:sp>
         <p:nvSpPr>
-          <p:cNvPr id="4" name="title-The Coach works inside the selected assignment.">
-            <a:extLst xmlns:a="http://schemas.openxmlformats.org/drawingml/2006/main">
-              <a:ext uri="{FF2B5EF4-FFF2-40B4-BE49-F238E27FC236}">
-                <a16:creationId xmlns:a16="http://schemas.microsoft.com/office/drawing/2014/main" id="{2DEDBAB4-F95E-4A9B-9EF5-0F934F054360}"/>
+          <p:cNvPr id="4" name="title-ClassPilot closes the loop from prompt to submission.">
+            <a:extLst xmlns:a="http://schemas.openxmlformats.org/drawingml/2006/main">
+              <a:ext uri="{FF2B5EF4-FFF2-40B4-BE49-F238E27FC236}">
+                <a16:creationId xmlns:a16="http://schemas.microsoft.com/office/drawing/2014/main" id="{63DCCB33-9F37-4BDD-92A5-AB6526022D0D}"/>
               </a:ext>
             </a:extLst>
           </p:cNvPr>
@@ -4386,17 +4401,17 @@
                   <a:srgbClr val="141C22"/>
                 </a:solidFill>
               </a:rPr>
-              <a:t>The Coach works inside the selected assignment.</a:t>
-            </a:r>
-          </a:p>
-        </p:txBody>
-      </p:sp>
-      <p:sp>
-        <p:nvSpPr>
-          <p:cNvPr id="5" name="subtitle-The Coach works inside the selected assignment.">
-            <a:extLst xmlns:a="http://schemas.openxmlformats.org/drawingml/2006/main">
-              <a:ext uri="{FF2B5EF4-FFF2-40B4-BE49-F238E27FC236}">
-                <a16:creationId xmlns:a16="http://schemas.microsoft.com/office/drawing/2014/main" id="{E5ED00AD-0D61-430E-922A-716F1091A3DD}"/>
+              <a:t>ClassPilot closes the loop from prompt to submission.</a:t>
+            </a:r>
+          </a:p>
+        </p:txBody>
+      </p:sp>
+      <p:sp>
+        <p:nvSpPr>
+          <p:cNvPr id="5" name="subtitle-ClassPilot closes the loop from prompt to submission.">
+            <a:extLst xmlns:a="http://schemas.openxmlformats.org/drawingml/2006/main">
+              <a:ext uri="{FF2B5EF4-FFF2-40B4-BE49-F238E27FC236}">
+                <a16:creationId xmlns:a16="http://schemas.microsoft.com/office/drawing/2014/main" id="{70166D9B-9AED-49F6-BED2-DCF36EFE96DE}"/>
               </a:ext>
             </a:extLst>
           </p:cNvPr>
@@ -4436,70 +4451,249 @@
                   <a:srgbClr val="647078"/>
                 </a:solidFill>
               </a:rPr>
-              <a:t>It can see the due date, point value, extracted requirements, deliverables, and current work plan.</a:t>
-            </a:r>
-          </a:p>
-        </p:txBody>
-      </p:sp>
-      <p:sp>
-        <p:nvSpPr>
-          <p:cNvPr id="6" name="screen-shadow">
-            <a:extLst xmlns:a="http://schemas.openxmlformats.org/drawingml/2006/main">
-              <a:ext uri="{FF2B5EF4-FFF2-40B4-BE49-F238E27FC236}">
-                <a16:creationId xmlns:a16="http://schemas.microsoft.com/office/drawing/2014/main" id="{E68D78F3-A860-44BC-9A40-2AE8FEF504F3}"/>
-              </a:ext>
-            </a:extLst>
-          </p:cNvPr>
-          <p:cNvSpPr>
-            <a:spLocks xmlns:a="http://schemas.openxmlformats.org/drawingml/2006/main" noGrp="1"/>
-          </p:cNvSpPr>
-          <p:nvPr/>
-        </p:nvSpPr>
-        <p:spPr>
-          <a:xfrm xmlns:a="http://schemas.openxmlformats.org/drawingml/2006/main">
-            <a:off x="438150" y="2152650"/>
-            <a:ext cx="11315700" cy="4171950"/>
-          </a:xfrm>
-          <a:prstGeom xmlns:a="http://schemas.openxmlformats.org/drawingml/2006/main" prst="roundRect">
-            <a:avLst>
-              <a:gd name="adj" fmla="val 1826"/>
-            </a:avLst>
+              <a:t>Each feature uses the same course record, so the student's plan stays connected to the original evidence.</a:t>
+            </a:r>
+          </a:p>
+        </p:txBody>
+      </p:sp>
+      <p:sp>
+        <p:nvSpPr>
+          <p:cNvPr id="6" name="loop-node-0">
+            <a:extLst xmlns:a="http://schemas.openxmlformats.org/drawingml/2006/main">
+              <a:ext uri="{FF2B5EF4-FFF2-40B4-BE49-F238E27FC236}">
+                <a16:creationId xmlns:a16="http://schemas.microsoft.com/office/drawing/2014/main" id="{438807E0-950F-420B-B613-385554BB8A0E}"/>
+              </a:ext>
+            </a:extLst>
+          </p:cNvPr>
+          <p:cNvSpPr>
+            <a:spLocks xmlns:a="http://schemas.openxmlformats.org/drawingml/2006/main" noGrp="1"/>
+          </p:cNvSpPr>
+          <p:nvPr/>
+        </p:nvSpPr>
+        <p:spPr>
+          <a:xfrm xmlns:a="http://schemas.openxmlformats.org/drawingml/2006/main">
+            <a:off x="476250" y="2628900"/>
+            <a:ext cx="438150" cy="438150"/>
+          </a:xfrm>
+          <a:prstGeom xmlns:a="http://schemas.openxmlformats.org/drawingml/2006/main" prst="ellipse">
+            <a:avLst/>
           </a:prstGeom>
           <a:solidFill xmlns:a="http://schemas.openxmlformats.org/drawingml/2006/main">
-            <a:srgbClr val="DDE1DE"/>
+            <a:srgbClr val="2F7D74"/>
           </a:solidFill>
-          <a:ln xmlns:a="http://schemas.openxmlformats.org/drawingml/2006/main" w="0">
-            <a:noFill/>
-            <a:prstDash val="solid"/>
-          </a:ln>
-        </p:spPr>
-      </p:sp>
-      <p:sp>
-        <p:nvSpPr>
-          <p:cNvPr id="7" name="screen-frame">
-            <a:extLst xmlns:a="http://schemas.openxmlformats.org/drawingml/2006/main">
-              <a:ext uri="{FF2B5EF4-FFF2-40B4-BE49-F238E27FC236}">
-                <a16:creationId xmlns:a16="http://schemas.microsoft.com/office/drawing/2014/main" id="{320CF202-C9C9-43F7-BDCB-9B6BB69381F5}"/>
-              </a:ext>
-            </a:extLst>
-          </p:cNvPr>
-          <p:cNvSpPr>
-            <a:spLocks xmlns:a="http://schemas.openxmlformats.org/drawingml/2006/main" noGrp="1"/>
-          </p:cNvSpPr>
-          <p:nvPr/>
-        </p:nvSpPr>
-        <p:spPr>
-          <a:xfrm xmlns:a="http://schemas.openxmlformats.org/drawingml/2006/main">
-            <a:off x="552450" y="2038350"/>
-            <a:ext cx="11087100" cy="4171950"/>
-          </a:xfrm>
-          <a:prstGeom xmlns:a="http://schemas.openxmlformats.org/drawingml/2006/main" prst="roundRect">
-            <a:avLst>
-              <a:gd name="adj" fmla="val 1826"/>
-            </a:avLst>
+          <a:ln xmlns:a="http://schemas.openxmlformats.org/drawingml/2006/main" w="9525">
+            <a:solidFill>
+              <a:srgbClr val="2F7D74"/>
+            </a:solidFill>
+            <a:prstDash val="solid"/>
+          </a:ln>
+        </p:spPr>
+      </p:sp>
+      <p:sp>
+        <p:nvSpPr>
+          <p:cNvPr id="7" name="loop-number-0">
+            <a:extLst xmlns:a="http://schemas.openxmlformats.org/drawingml/2006/main">
+              <a:ext uri="{FF2B5EF4-FFF2-40B4-BE49-F238E27FC236}">
+                <a16:creationId xmlns:a16="http://schemas.microsoft.com/office/drawing/2014/main" id="{E37299C4-FC37-4AD1-AC47-64A6E281D1FD}"/>
+              </a:ext>
+            </a:extLst>
+          </p:cNvPr>
+          <p:cNvSpPr>
+            <a:spLocks xmlns:a="http://schemas.openxmlformats.org/drawingml/2006/main" noGrp="1"/>
+          </p:cNvSpPr>
+          <p:nvPr/>
+        </p:nvSpPr>
+        <p:spPr>
+          <a:xfrm xmlns:a="http://schemas.openxmlformats.org/drawingml/2006/main">
+            <a:off x="476250" y="2686050"/>
+            <a:ext cx="438150" cy="285750"/>
+          </a:xfrm>
+          <a:prstGeom xmlns:a="http://schemas.openxmlformats.org/drawingml/2006/main" prst="rect">
+            <a:avLst/>
+          </a:prstGeom>
+          <a:noFill xmlns:a="http://schemas.openxmlformats.org/drawingml/2006/main"/>
+          <a:ln xmlns:a="http://schemas.openxmlformats.org/drawingml/2006/main" w="0">
+            <a:noFill/>
+            <a:prstDash val="solid"/>
+          </a:ln>
+        </p:spPr>
+        <p:txBody>
+          <a:bodyPr xmlns:a="http://schemas.openxmlformats.org/drawingml/2006/main" anchor="ctr"/>
+          <a:lstStyle xmlns:a="http://schemas.openxmlformats.org/drawingml/2006/main"/>
+          <a:p xmlns:a="http://schemas.openxmlformats.org/drawingml/2006/main">
+            <a:pPr algn="ctr">
+              <a:defRPr sz="1350" b="1">
+                <a:solidFill>
+                  <a:srgbClr val="FFFFFF"/>
+                </a:solidFill>
+              </a:defRPr>
+            </a:pPr>
+            <a:r>
+              <a:rPr sz="1350" b="1">
+                <a:solidFill>
+                  <a:srgbClr val="FFFFFF"/>
+                </a:solidFill>
+              </a:rPr>
+              <a:t>1</a:t>
+            </a:r>
+          </a:p>
+        </p:txBody>
+      </p:sp>
+      <p:sp>
+        <p:nvSpPr>
+          <p:cNvPr id="8" name="loop-title-0">
+            <a:extLst xmlns:a="http://schemas.openxmlformats.org/drawingml/2006/main">
+              <a:ext uri="{FF2B5EF4-FFF2-40B4-BE49-F238E27FC236}">
+                <a16:creationId xmlns:a16="http://schemas.microsoft.com/office/drawing/2014/main" id="{29592C90-1112-4E57-8870-C1B5BA3B3612}"/>
+              </a:ext>
+            </a:extLst>
+          </p:cNvPr>
+          <p:cNvSpPr>
+            <a:spLocks xmlns:a="http://schemas.openxmlformats.org/drawingml/2006/main" noGrp="1"/>
+          </p:cNvSpPr>
+          <p:nvPr/>
+        </p:nvSpPr>
+        <p:spPr>
+          <a:xfrm xmlns:a="http://schemas.openxmlformats.org/drawingml/2006/main">
+            <a:off x="476250" y="3333750"/>
+            <a:ext cx="1581150" cy="342900"/>
+          </a:xfrm>
+          <a:prstGeom xmlns:a="http://schemas.openxmlformats.org/drawingml/2006/main" prst="rect">
+            <a:avLst/>
+          </a:prstGeom>
+          <a:noFill xmlns:a="http://schemas.openxmlformats.org/drawingml/2006/main"/>
+          <a:ln xmlns:a="http://schemas.openxmlformats.org/drawingml/2006/main" w="0">
+            <a:noFill/>
+            <a:prstDash val="solid"/>
+          </a:ln>
+        </p:spPr>
+        <p:txBody>
+          <a:bodyPr xmlns:a="http://schemas.openxmlformats.org/drawingml/2006/main" anchor="t"/>
+          <a:lstStyle xmlns:a="http://schemas.openxmlformats.org/drawingml/2006/main"/>
+          <a:p xmlns:a="http://schemas.openxmlformats.org/drawingml/2006/main">
+            <a:pPr algn="l">
+              <a:defRPr sz="1575" b="1">
+                <a:solidFill>
+                  <a:srgbClr val="141C22"/>
+                </a:solidFill>
+              </a:defRPr>
+            </a:pPr>
+            <a:r>
+              <a:rPr sz="1575" b="1">
+                <a:solidFill>
+                  <a:srgbClr val="141C22"/>
+                </a:solidFill>
+              </a:rPr>
+              <a:t>Import</a:t>
+            </a:r>
+          </a:p>
+        </p:txBody>
+      </p:sp>
+      <p:sp>
+        <p:nvSpPr>
+          <p:cNvPr id="9" name="loop-body-0">
+            <a:extLst xmlns:a="http://schemas.openxmlformats.org/drawingml/2006/main">
+              <a:ext uri="{FF2B5EF4-FFF2-40B4-BE49-F238E27FC236}">
+                <a16:creationId xmlns:a16="http://schemas.microsoft.com/office/drawing/2014/main" id="{9216B843-1EA8-4EEF-B2EE-55A575FC30FC}"/>
+              </a:ext>
+            </a:extLst>
+          </p:cNvPr>
+          <p:cNvSpPr>
+            <a:spLocks xmlns:a="http://schemas.openxmlformats.org/drawingml/2006/main" noGrp="1"/>
+          </p:cNvSpPr>
+          <p:nvPr/>
+        </p:nvSpPr>
+        <p:spPr>
+          <a:xfrm xmlns:a="http://schemas.openxmlformats.org/drawingml/2006/main">
+            <a:off x="476250" y="3810000"/>
+            <a:ext cx="1581150" cy="952500"/>
+          </a:xfrm>
+          <a:prstGeom xmlns:a="http://schemas.openxmlformats.org/drawingml/2006/main" prst="rect">
+            <a:avLst/>
+          </a:prstGeom>
+          <a:noFill xmlns:a="http://schemas.openxmlformats.org/drawingml/2006/main"/>
+          <a:ln xmlns:a="http://schemas.openxmlformats.org/drawingml/2006/main" w="0">
+            <a:noFill/>
+            <a:prstDash val="solid"/>
+          </a:ln>
+        </p:spPr>
+        <p:txBody>
+          <a:bodyPr xmlns:a="http://schemas.openxmlformats.org/drawingml/2006/main" anchor="t"/>
+          <a:lstStyle xmlns:a="http://schemas.openxmlformats.org/drawingml/2006/main"/>
+          <a:p xmlns:a="http://schemas.openxmlformats.org/drawingml/2006/main">
+            <a:pPr algn="l">
+              <a:defRPr sz="1200" b="0">
+                <a:solidFill>
+                  <a:srgbClr val="647078"/>
+                </a:solidFill>
+              </a:defRPr>
+            </a:pPr>
+            <a:r>
+              <a:rPr sz="1200" b="0">
+                <a:solidFill>
+                  <a:srgbClr val="647078"/>
+                </a:solidFill>
+              </a:rPr>
+              <a:t>Screenshot, text, PDF, DOCX, PPTX</a:t>
+            </a:r>
+          </a:p>
+        </p:txBody>
+      </p:sp>
+      <p:sp>
+        <p:nvSpPr>
+          <p:cNvPr id="10" name="rule-102-298">
+            <a:extLst xmlns:a="http://schemas.openxmlformats.org/drawingml/2006/main">
+              <a:ext uri="{FF2B5EF4-FFF2-40B4-BE49-F238E27FC236}">
+                <a16:creationId xmlns:a16="http://schemas.microsoft.com/office/drawing/2014/main" id="{4D054A14-B07B-42EF-9380-9AC64416CFE7}"/>
+              </a:ext>
+            </a:extLst>
+          </p:cNvPr>
+          <p:cNvSpPr>
+            <a:spLocks xmlns:a="http://schemas.openxmlformats.org/drawingml/2006/main" noGrp="1"/>
+          </p:cNvSpPr>
+          <p:nvPr/>
+        </p:nvSpPr>
+        <p:spPr>
+          <a:xfrm xmlns:a="http://schemas.openxmlformats.org/drawingml/2006/main">
+            <a:off x="971550" y="2838450"/>
+            <a:ext cx="1257300" cy="19050"/>
+          </a:xfrm>
+          <a:prstGeom xmlns:a="http://schemas.openxmlformats.org/drawingml/2006/main" prst="rect">
+            <a:avLst/>
           </a:prstGeom>
           <a:solidFill xmlns:a="http://schemas.openxmlformats.org/drawingml/2006/main">
-            <a:srgbClr val="FFFFFF"/>
+            <a:srgbClr val="C8CECA"/>
+          </a:solidFill>
+          <a:ln xmlns:a="http://schemas.openxmlformats.org/drawingml/2006/main" w="0">
+            <a:noFill/>
+            <a:prstDash val="solid"/>
+          </a:ln>
+        </p:spPr>
+      </p:sp>
+      <p:sp>
+        <p:nvSpPr>
+          <p:cNvPr id="11" name="loop-arrow-0">
+            <a:extLst xmlns:a="http://schemas.openxmlformats.org/drawingml/2006/main">
+              <a:ext uri="{FF2B5EF4-FFF2-40B4-BE49-F238E27FC236}">
+                <a16:creationId xmlns:a16="http://schemas.microsoft.com/office/drawing/2014/main" id="{80851DCD-B753-40EA-AD36-B00D74B0D565}"/>
+              </a:ext>
+            </a:extLst>
+          </p:cNvPr>
+          <p:cNvSpPr>
+            <a:spLocks xmlns:a="http://schemas.openxmlformats.org/drawingml/2006/main" noGrp="1"/>
+          </p:cNvSpPr>
+          <p:nvPr/>
+        </p:nvSpPr>
+        <p:spPr>
+          <a:xfrm xmlns:a="http://schemas.openxmlformats.org/drawingml/2006/main">
+            <a:off x="2095500" y="2781300"/>
+            <a:ext cx="133350" cy="133350"/>
+          </a:xfrm>
+          <a:prstGeom xmlns:a="http://schemas.openxmlformats.org/drawingml/2006/main" prst="triangle">
+            <a:avLst/>
+          </a:prstGeom>
+          <a:solidFill xmlns:a="http://schemas.openxmlformats.org/drawingml/2006/main">
+            <a:srgbClr val="C8CECA"/>
           </a:solidFill>
           <a:ln xmlns:a="http://schemas.openxmlformats.org/drawingml/2006/main" w="9525">
             <a:solidFill>
@@ -4509,85 +4703,1258 @@
           </a:ln>
         </p:spPr>
       </p:sp>
-      <p:pic>
-        <p:nvPicPr>
-          <p:cNvPr id="17" name=""/>
-          <p:cNvPicPr>
-            <a:picLocks xmlns:a="http://schemas.openxmlformats.org/drawingml/2006/main" noChangeAspect="1"/>
-          </p:cNvPicPr>
-          <p:nvPr/>
-        </p:nvPicPr>
-        <p:blipFill>
-          <a:blip xmlns:r="http://schemas.openxmlformats.org/officeDocument/2006/relationships" xmlns:a="http://schemas.openxmlformats.org/drawingml/2006/main" r:embed="R7af97d9e081b419c"/>
-          <a:srcRect xmlns:a="http://schemas.openxmlformats.org/drawingml/2006/main" l="0" t="31595" r="0" b="31595"/>
-          <a:stretch xmlns:a="http://schemas.openxmlformats.org/drawingml/2006/main">
-            <a:fillRect l="0" t="0" r="0" b="0"/>
-          </a:stretch>
-        </p:blipFill>
-        <p:spPr>
-          <a:xfrm xmlns:a="http://schemas.openxmlformats.org/drawingml/2006/main">
-            <a:off x="685800" y="2171700"/>
-            <a:ext cx="10820400" cy="3905250"/>
-          </a:xfrm>
-          <a:prstGeom xmlns:a="http://schemas.openxmlformats.org/drawingml/2006/main" prst="roundRect">
-            <a:avLst>
-              <a:gd name="adj" fmla="val 1707"/>
-            </a:avLst>
-          </a:prstGeom>
-        </p:spPr>
-      </p:pic>
-      <p:sp>
-        <p:nvSpPr>
-          <p:cNvPr id="9" name="label-Selected assignment context-830">
-            <a:extLst xmlns:a="http://schemas.openxmlformats.org/drawingml/2006/main">
-              <a:ext uri="{FF2B5EF4-FFF2-40B4-BE49-F238E27FC236}">
-                <a16:creationId xmlns:a16="http://schemas.microsoft.com/office/drawing/2014/main" id="{4669F1B5-3013-4BC5-A5B1-B208C2753EC0}"/>
-              </a:ext>
-            </a:extLst>
-          </p:cNvPr>
-          <p:cNvSpPr>
-            <a:spLocks xmlns:a="http://schemas.openxmlformats.org/drawingml/2006/main" noGrp="1"/>
-          </p:cNvSpPr>
-          <p:nvPr/>
-        </p:nvSpPr>
-        <p:spPr>
-          <a:xfrm xmlns:a="http://schemas.openxmlformats.org/drawingml/2006/main">
-            <a:off x="7905750" y="1695450"/>
-            <a:ext cx="2495550" cy="285750"/>
-          </a:xfrm>
-          <a:prstGeom xmlns:a="http://schemas.openxmlformats.org/drawingml/2006/main" prst="roundRect">
-            <a:avLst>
-              <a:gd name="adj" fmla="val 26667"/>
-            </a:avLst>
+      <p:sp>
+        <p:nvSpPr>
+          <p:cNvPr id="12" name="loop-node-1">
+            <a:extLst xmlns:a="http://schemas.openxmlformats.org/drawingml/2006/main">
+              <a:ext uri="{FF2B5EF4-FFF2-40B4-BE49-F238E27FC236}">
+                <a16:creationId xmlns:a16="http://schemas.microsoft.com/office/drawing/2014/main" id="{870032A0-EBBD-4574-88AA-BEBA55FAC691}"/>
+              </a:ext>
+            </a:extLst>
+          </p:cNvPr>
+          <p:cNvSpPr>
+            <a:spLocks xmlns:a="http://schemas.openxmlformats.org/drawingml/2006/main" noGrp="1"/>
+          </p:cNvSpPr>
+          <p:nvPr/>
+        </p:nvSpPr>
+        <p:spPr>
+          <a:xfrm xmlns:a="http://schemas.openxmlformats.org/drawingml/2006/main">
+            <a:off x="2362200" y="2628900"/>
+            <a:ext cx="438150" cy="438150"/>
+          </a:xfrm>
+          <a:prstGeom xmlns:a="http://schemas.openxmlformats.org/drawingml/2006/main" prst="ellipse">
+            <a:avLst/>
           </a:prstGeom>
           <a:solidFill xmlns:a="http://schemas.openxmlformats.org/drawingml/2006/main">
-            <a:srgbClr val="F2EEDC"/>
+            <a:srgbClr val="2F7D74"/>
           </a:solidFill>
           <a:ln xmlns:a="http://schemas.openxmlformats.org/drawingml/2006/main" w="9525">
             <a:solidFill>
-              <a:srgbClr val="F2EEDC"/>
+              <a:srgbClr val="2F7D74"/>
             </a:solidFill>
             <a:prstDash val="solid"/>
           </a:ln>
         </p:spPr>
+      </p:sp>
+      <p:sp>
+        <p:nvSpPr>
+          <p:cNvPr id="13" name="loop-number-1">
+            <a:extLst xmlns:a="http://schemas.openxmlformats.org/drawingml/2006/main">
+              <a:ext uri="{FF2B5EF4-FFF2-40B4-BE49-F238E27FC236}">
+                <a16:creationId xmlns:a16="http://schemas.microsoft.com/office/drawing/2014/main" id="{230D45B3-0E0E-431B-A2FF-80D0D7A2554A}"/>
+              </a:ext>
+            </a:extLst>
+          </p:cNvPr>
+          <p:cNvSpPr>
+            <a:spLocks xmlns:a="http://schemas.openxmlformats.org/drawingml/2006/main" noGrp="1"/>
+          </p:cNvSpPr>
+          <p:nvPr/>
+        </p:nvSpPr>
+        <p:spPr>
+          <a:xfrm xmlns:a="http://schemas.openxmlformats.org/drawingml/2006/main">
+            <a:off x="2362200" y="2686050"/>
+            <a:ext cx="438150" cy="285750"/>
+          </a:xfrm>
+          <a:prstGeom xmlns:a="http://schemas.openxmlformats.org/drawingml/2006/main" prst="rect">
+            <a:avLst/>
+          </a:prstGeom>
+          <a:noFill xmlns:a="http://schemas.openxmlformats.org/drawingml/2006/main"/>
+          <a:ln xmlns:a="http://schemas.openxmlformats.org/drawingml/2006/main" w="0">
+            <a:noFill/>
+            <a:prstDash val="solid"/>
+          </a:ln>
+        </p:spPr>
         <p:txBody>
           <a:bodyPr xmlns:a="http://schemas.openxmlformats.org/drawingml/2006/main" anchor="ctr"/>
           <a:lstStyle xmlns:a="http://schemas.openxmlformats.org/drawingml/2006/main"/>
           <a:p xmlns:a="http://schemas.openxmlformats.org/drawingml/2006/main">
             <a:pPr algn="ctr">
-              <a:defRPr sz="900" b="1">
-                <a:solidFill>
-                  <a:srgbClr val="725E16"/>
-                </a:solidFill>
-              </a:defRPr>
-            </a:pPr>
-            <a:r>
-              <a:rPr sz="900" b="1">
-                <a:solidFill>
-                  <a:srgbClr val="725E16"/>
-                </a:solidFill>
-              </a:rPr>
-              <a:t>SELECTED ASSIGNMENT CONTEXT</a:t>
+              <a:defRPr sz="1350" b="1">
+                <a:solidFill>
+                  <a:srgbClr val="FFFFFF"/>
+                </a:solidFill>
+              </a:defRPr>
+            </a:pPr>
+            <a:r>
+              <a:rPr sz="1350" b="1">
+                <a:solidFill>
+                  <a:srgbClr val="FFFFFF"/>
+                </a:solidFill>
+              </a:rPr>
+              <a:t>2</a:t>
+            </a:r>
+          </a:p>
+        </p:txBody>
+      </p:sp>
+      <p:sp>
+        <p:nvSpPr>
+          <p:cNvPr id="14" name="loop-title-1">
+            <a:extLst xmlns:a="http://schemas.openxmlformats.org/drawingml/2006/main">
+              <a:ext uri="{FF2B5EF4-FFF2-40B4-BE49-F238E27FC236}">
+                <a16:creationId xmlns:a16="http://schemas.microsoft.com/office/drawing/2014/main" id="{944A51C6-1FAE-473B-BB1C-1230B7693DE0}"/>
+              </a:ext>
+            </a:extLst>
+          </p:cNvPr>
+          <p:cNvSpPr>
+            <a:spLocks xmlns:a="http://schemas.openxmlformats.org/drawingml/2006/main" noGrp="1"/>
+          </p:cNvSpPr>
+          <p:nvPr/>
+        </p:nvSpPr>
+        <p:spPr>
+          <a:xfrm xmlns:a="http://schemas.openxmlformats.org/drawingml/2006/main">
+            <a:off x="2362200" y="3333750"/>
+            <a:ext cx="1581150" cy="342900"/>
+          </a:xfrm>
+          <a:prstGeom xmlns:a="http://schemas.openxmlformats.org/drawingml/2006/main" prst="rect">
+            <a:avLst/>
+          </a:prstGeom>
+          <a:noFill xmlns:a="http://schemas.openxmlformats.org/drawingml/2006/main"/>
+          <a:ln xmlns:a="http://schemas.openxmlformats.org/drawingml/2006/main" w="0">
+            <a:noFill/>
+            <a:prstDash val="solid"/>
+          </a:ln>
+        </p:spPr>
+        <p:txBody>
+          <a:bodyPr xmlns:a="http://schemas.openxmlformats.org/drawingml/2006/main" anchor="t"/>
+          <a:lstStyle xmlns:a="http://schemas.openxmlformats.org/drawingml/2006/main"/>
+          <a:p xmlns:a="http://schemas.openxmlformats.org/drawingml/2006/main">
+            <a:pPr algn="l">
+              <a:defRPr sz="1575" b="1">
+                <a:solidFill>
+                  <a:srgbClr val="141C22"/>
+                </a:solidFill>
+              </a:defRPr>
+            </a:pPr>
+            <a:r>
+              <a:rPr sz="1575" b="1">
+                <a:solidFill>
+                  <a:srgbClr val="141C22"/>
+                </a:solidFill>
+              </a:rPr>
+              <a:t>Understand</a:t>
+            </a:r>
+          </a:p>
+        </p:txBody>
+      </p:sp>
+      <p:sp>
+        <p:nvSpPr>
+          <p:cNvPr id="15" name="loop-body-1">
+            <a:extLst xmlns:a="http://schemas.openxmlformats.org/drawingml/2006/main">
+              <a:ext uri="{FF2B5EF4-FFF2-40B4-BE49-F238E27FC236}">
+                <a16:creationId xmlns:a16="http://schemas.microsoft.com/office/drawing/2014/main" id="{75D3B1F8-AE77-4CA2-ABAA-8BAD8482A474}"/>
+              </a:ext>
+            </a:extLst>
+          </p:cNvPr>
+          <p:cNvSpPr>
+            <a:spLocks xmlns:a="http://schemas.openxmlformats.org/drawingml/2006/main" noGrp="1"/>
+          </p:cNvSpPr>
+          <p:nvPr/>
+        </p:nvSpPr>
+        <p:spPr>
+          <a:xfrm xmlns:a="http://schemas.openxmlformats.org/drawingml/2006/main">
+            <a:off x="2362200" y="3810000"/>
+            <a:ext cx="1581150" cy="952500"/>
+          </a:xfrm>
+          <a:prstGeom xmlns:a="http://schemas.openxmlformats.org/drawingml/2006/main" prst="rect">
+            <a:avLst/>
+          </a:prstGeom>
+          <a:noFill xmlns:a="http://schemas.openxmlformats.org/drawingml/2006/main"/>
+          <a:ln xmlns:a="http://schemas.openxmlformats.org/drawingml/2006/main" w="0">
+            <a:noFill/>
+            <a:prstDash val="solid"/>
+          </a:ln>
+        </p:spPr>
+        <p:txBody>
+          <a:bodyPr xmlns:a="http://schemas.openxmlformats.org/drawingml/2006/main" anchor="t"/>
+          <a:lstStyle xmlns:a="http://schemas.openxmlformats.org/drawingml/2006/main"/>
+          <a:p xmlns:a="http://schemas.openxmlformats.org/drawingml/2006/main">
+            <a:pPr algn="l">
+              <a:defRPr sz="1200" b="0">
+                <a:solidFill>
+                  <a:srgbClr val="647078"/>
+                </a:solidFill>
+              </a:defRPr>
+            </a:pPr>
+            <a:r>
+              <a:rPr sz="1200" b="0">
+                <a:solidFill>
+                  <a:srgbClr val="647078"/>
+                </a:solidFill>
+              </a:rPr>
+              <a:t>Facts, requirements, rubric, dates</a:t>
+            </a:r>
+          </a:p>
+        </p:txBody>
+      </p:sp>
+      <p:sp>
+        <p:nvSpPr>
+          <p:cNvPr id="16" name="rule-300-298">
+            <a:extLst xmlns:a="http://schemas.openxmlformats.org/drawingml/2006/main">
+              <a:ext uri="{FF2B5EF4-FFF2-40B4-BE49-F238E27FC236}">
+                <a16:creationId xmlns:a16="http://schemas.microsoft.com/office/drawing/2014/main" id="{F00F7828-EBC2-443D-85BF-F85F4FFEA11B}"/>
+              </a:ext>
+            </a:extLst>
+          </p:cNvPr>
+          <p:cNvSpPr>
+            <a:spLocks xmlns:a="http://schemas.openxmlformats.org/drawingml/2006/main" noGrp="1"/>
+          </p:cNvSpPr>
+          <p:nvPr/>
+        </p:nvSpPr>
+        <p:spPr>
+          <a:xfrm xmlns:a="http://schemas.openxmlformats.org/drawingml/2006/main">
+            <a:off x="2857500" y="2838450"/>
+            <a:ext cx="1257300" cy="19050"/>
+          </a:xfrm>
+          <a:prstGeom xmlns:a="http://schemas.openxmlformats.org/drawingml/2006/main" prst="rect">
+            <a:avLst/>
+          </a:prstGeom>
+          <a:solidFill xmlns:a="http://schemas.openxmlformats.org/drawingml/2006/main">
+            <a:srgbClr val="C8CECA"/>
+          </a:solidFill>
+          <a:ln xmlns:a="http://schemas.openxmlformats.org/drawingml/2006/main" w="0">
+            <a:noFill/>
+            <a:prstDash val="solid"/>
+          </a:ln>
+        </p:spPr>
+      </p:sp>
+      <p:sp>
+        <p:nvSpPr>
+          <p:cNvPr id="17" name="loop-arrow-1">
+            <a:extLst xmlns:a="http://schemas.openxmlformats.org/drawingml/2006/main">
+              <a:ext uri="{FF2B5EF4-FFF2-40B4-BE49-F238E27FC236}">
+                <a16:creationId xmlns:a16="http://schemas.microsoft.com/office/drawing/2014/main" id="{E79B337C-F218-4791-8532-677C5856D689}"/>
+              </a:ext>
+            </a:extLst>
+          </p:cNvPr>
+          <p:cNvSpPr>
+            <a:spLocks xmlns:a="http://schemas.openxmlformats.org/drawingml/2006/main" noGrp="1"/>
+          </p:cNvSpPr>
+          <p:nvPr/>
+        </p:nvSpPr>
+        <p:spPr>
+          <a:xfrm xmlns:a="http://schemas.openxmlformats.org/drawingml/2006/main">
+            <a:off x="3981450" y="2781300"/>
+            <a:ext cx="133350" cy="133350"/>
+          </a:xfrm>
+          <a:prstGeom xmlns:a="http://schemas.openxmlformats.org/drawingml/2006/main" prst="triangle">
+            <a:avLst/>
+          </a:prstGeom>
+          <a:solidFill xmlns:a="http://schemas.openxmlformats.org/drawingml/2006/main">
+            <a:srgbClr val="C8CECA"/>
+          </a:solidFill>
+          <a:ln xmlns:a="http://schemas.openxmlformats.org/drawingml/2006/main" w="9525">
+            <a:solidFill>
+              <a:srgbClr val="C8CECA"/>
+            </a:solidFill>
+            <a:prstDash val="solid"/>
+          </a:ln>
+        </p:spPr>
+      </p:sp>
+      <p:sp>
+        <p:nvSpPr>
+          <p:cNvPr id="18" name="loop-node-2">
+            <a:extLst xmlns:a="http://schemas.openxmlformats.org/drawingml/2006/main">
+              <a:ext uri="{FF2B5EF4-FFF2-40B4-BE49-F238E27FC236}">
+                <a16:creationId xmlns:a16="http://schemas.microsoft.com/office/drawing/2014/main" id="{1BF53103-1534-46BE-96B6-326756C2B604}"/>
+              </a:ext>
+            </a:extLst>
+          </p:cNvPr>
+          <p:cNvSpPr>
+            <a:spLocks xmlns:a="http://schemas.openxmlformats.org/drawingml/2006/main" noGrp="1"/>
+          </p:cNvSpPr>
+          <p:nvPr/>
+        </p:nvSpPr>
+        <p:spPr>
+          <a:xfrm xmlns:a="http://schemas.openxmlformats.org/drawingml/2006/main">
+            <a:off x="4248150" y="2628900"/>
+            <a:ext cx="438150" cy="438150"/>
+          </a:xfrm>
+          <a:prstGeom xmlns:a="http://schemas.openxmlformats.org/drawingml/2006/main" prst="ellipse">
+            <a:avLst/>
+          </a:prstGeom>
+          <a:solidFill xmlns:a="http://schemas.openxmlformats.org/drawingml/2006/main">
+            <a:srgbClr val="2F7D74"/>
+          </a:solidFill>
+          <a:ln xmlns:a="http://schemas.openxmlformats.org/drawingml/2006/main" w="9525">
+            <a:solidFill>
+              <a:srgbClr val="2F7D74"/>
+            </a:solidFill>
+            <a:prstDash val="solid"/>
+          </a:ln>
+        </p:spPr>
+      </p:sp>
+      <p:sp>
+        <p:nvSpPr>
+          <p:cNvPr id="19" name="loop-number-2">
+            <a:extLst xmlns:a="http://schemas.openxmlformats.org/drawingml/2006/main">
+              <a:ext uri="{FF2B5EF4-FFF2-40B4-BE49-F238E27FC236}">
+                <a16:creationId xmlns:a16="http://schemas.microsoft.com/office/drawing/2014/main" id="{297A2C56-C6A8-4653-B9DB-972AF8CA928E}"/>
+              </a:ext>
+            </a:extLst>
+          </p:cNvPr>
+          <p:cNvSpPr>
+            <a:spLocks xmlns:a="http://schemas.openxmlformats.org/drawingml/2006/main" noGrp="1"/>
+          </p:cNvSpPr>
+          <p:nvPr/>
+        </p:nvSpPr>
+        <p:spPr>
+          <a:xfrm xmlns:a="http://schemas.openxmlformats.org/drawingml/2006/main">
+            <a:off x="4248150" y="2686050"/>
+            <a:ext cx="438150" cy="285750"/>
+          </a:xfrm>
+          <a:prstGeom xmlns:a="http://schemas.openxmlformats.org/drawingml/2006/main" prst="rect">
+            <a:avLst/>
+          </a:prstGeom>
+          <a:noFill xmlns:a="http://schemas.openxmlformats.org/drawingml/2006/main"/>
+          <a:ln xmlns:a="http://schemas.openxmlformats.org/drawingml/2006/main" w="0">
+            <a:noFill/>
+            <a:prstDash val="solid"/>
+          </a:ln>
+        </p:spPr>
+        <p:txBody>
+          <a:bodyPr xmlns:a="http://schemas.openxmlformats.org/drawingml/2006/main" anchor="ctr"/>
+          <a:lstStyle xmlns:a="http://schemas.openxmlformats.org/drawingml/2006/main"/>
+          <a:p xmlns:a="http://schemas.openxmlformats.org/drawingml/2006/main">
+            <a:pPr algn="ctr">
+              <a:defRPr sz="1350" b="1">
+                <a:solidFill>
+                  <a:srgbClr val="FFFFFF"/>
+                </a:solidFill>
+              </a:defRPr>
+            </a:pPr>
+            <a:r>
+              <a:rPr sz="1350" b="1">
+                <a:solidFill>
+                  <a:srgbClr val="FFFFFF"/>
+                </a:solidFill>
+              </a:rPr>
+              <a:t>3</a:t>
+            </a:r>
+          </a:p>
+        </p:txBody>
+      </p:sp>
+      <p:sp>
+        <p:nvSpPr>
+          <p:cNvPr id="20" name="loop-title-2">
+            <a:extLst xmlns:a="http://schemas.openxmlformats.org/drawingml/2006/main">
+              <a:ext uri="{FF2B5EF4-FFF2-40B4-BE49-F238E27FC236}">
+                <a16:creationId xmlns:a16="http://schemas.microsoft.com/office/drawing/2014/main" id="{54F26BED-6368-4A91-96C8-9746F3C6EE59}"/>
+              </a:ext>
+            </a:extLst>
+          </p:cNvPr>
+          <p:cNvSpPr>
+            <a:spLocks xmlns:a="http://schemas.openxmlformats.org/drawingml/2006/main" noGrp="1"/>
+          </p:cNvSpPr>
+          <p:nvPr/>
+        </p:nvSpPr>
+        <p:spPr>
+          <a:xfrm xmlns:a="http://schemas.openxmlformats.org/drawingml/2006/main">
+            <a:off x="4248150" y="3333750"/>
+            <a:ext cx="1581150" cy="342900"/>
+          </a:xfrm>
+          <a:prstGeom xmlns:a="http://schemas.openxmlformats.org/drawingml/2006/main" prst="rect">
+            <a:avLst/>
+          </a:prstGeom>
+          <a:noFill xmlns:a="http://schemas.openxmlformats.org/drawingml/2006/main"/>
+          <a:ln xmlns:a="http://schemas.openxmlformats.org/drawingml/2006/main" w="0">
+            <a:noFill/>
+            <a:prstDash val="solid"/>
+          </a:ln>
+        </p:spPr>
+        <p:txBody>
+          <a:bodyPr xmlns:a="http://schemas.openxmlformats.org/drawingml/2006/main" anchor="t"/>
+          <a:lstStyle xmlns:a="http://schemas.openxmlformats.org/drawingml/2006/main"/>
+          <a:p xmlns:a="http://schemas.openxmlformats.org/drawingml/2006/main">
+            <a:pPr algn="l">
+              <a:defRPr sz="1575" b="1">
+                <a:solidFill>
+                  <a:srgbClr val="141C22"/>
+                </a:solidFill>
+              </a:defRPr>
+            </a:pPr>
+            <a:r>
+              <a:rPr sz="1575" b="1">
+                <a:solidFill>
+                  <a:srgbClr val="141C22"/>
+                </a:solidFill>
+              </a:rPr>
+              <a:t>Plan</a:t>
+            </a:r>
+          </a:p>
+        </p:txBody>
+      </p:sp>
+      <p:sp>
+        <p:nvSpPr>
+          <p:cNvPr id="21" name="loop-body-2">
+            <a:extLst xmlns:a="http://schemas.openxmlformats.org/drawingml/2006/main">
+              <a:ext uri="{FF2B5EF4-FFF2-40B4-BE49-F238E27FC236}">
+                <a16:creationId xmlns:a16="http://schemas.microsoft.com/office/drawing/2014/main" id="{057D5EA6-10C5-49BF-B2E7-D98C27020C3C}"/>
+              </a:ext>
+            </a:extLst>
+          </p:cNvPr>
+          <p:cNvSpPr>
+            <a:spLocks xmlns:a="http://schemas.openxmlformats.org/drawingml/2006/main" noGrp="1"/>
+          </p:cNvSpPr>
+          <p:nvPr/>
+        </p:nvSpPr>
+        <p:spPr>
+          <a:xfrm xmlns:a="http://schemas.openxmlformats.org/drawingml/2006/main">
+            <a:off x="4248150" y="3810000"/>
+            <a:ext cx="1581150" cy="952500"/>
+          </a:xfrm>
+          <a:prstGeom xmlns:a="http://schemas.openxmlformats.org/drawingml/2006/main" prst="rect">
+            <a:avLst/>
+          </a:prstGeom>
+          <a:noFill xmlns:a="http://schemas.openxmlformats.org/drawingml/2006/main"/>
+          <a:ln xmlns:a="http://schemas.openxmlformats.org/drawingml/2006/main" w="0">
+            <a:noFill/>
+            <a:prstDash val="solid"/>
+          </a:ln>
+        </p:spPr>
+        <p:txBody>
+          <a:bodyPr xmlns:a="http://schemas.openxmlformats.org/drawingml/2006/main" anchor="t"/>
+          <a:lstStyle xmlns:a="http://schemas.openxmlformats.org/drawingml/2006/main"/>
+          <a:p xmlns:a="http://schemas.openxmlformats.org/drawingml/2006/main">
+            <a:pPr algn="l">
+              <a:defRPr sz="1200" b="0">
+                <a:solidFill>
+                  <a:srgbClr val="647078"/>
+                </a:solidFill>
+              </a:defRPr>
+            </a:pPr>
+            <a:r>
+              <a:rPr sz="1200" b="0">
+                <a:solidFill>
+                  <a:srgbClr val="647078"/>
+                </a:solidFill>
+              </a:rPr>
+              <a:t>Tasks and adaptive study sessions</a:t>
+            </a:r>
+          </a:p>
+        </p:txBody>
+      </p:sp>
+      <p:sp>
+        <p:nvSpPr>
+          <p:cNvPr id="22" name="rule-498-298">
+            <a:extLst xmlns:a="http://schemas.openxmlformats.org/drawingml/2006/main">
+              <a:ext uri="{FF2B5EF4-FFF2-40B4-BE49-F238E27FC236}">
+                <a16:creationId xmlns:a16="http://schemas.microsoft.com/office/drawing/2014/main" id="{A5AAE025-A7E7-40E7-BE3C-C874CA8635F3}"/>
+              </a:ext>
+            </a:extLst>
+          </p:cNvPr>
+          <p:cNvSpPr>
+            <a:spLocks xmlns:a="http://schemas.openxmlformats.org/drawingml/2006/main" noGrp="1"/>
+          </p:cNvSpPr>
+          <p:nvPr/>
+        </p:nvSpPr>
+        <p:spPr>
+          <a:xfrm xmlns:a="http://schemas.openxmlformats.org/drawingml/2006/main">
+            <a:off x="4743450" y="2838450"/>
+            <a:ext cx="1257300" cy="19050"/>
+          </a:xfrm>
+          <a:prstGeom xmlns:a="http://schemas.openxmlformats.org/drawingml/2006/main" prst="rect">
+            <a:avLst/>
+          </a:prstGeom>
+          <a:solidFill xmlns:a="http://schemas.openxmlformats.org/drawingml/2006/main">
+            <a:srgbClr val="C8CECA"/>
+          </a:solidFill>
+          <a:ln xmlns:a="http://schemas.openxmlformats.org/drawingml/2006/main" w="0">
+            <a:noFill/>
+            <a:prstDash val="solid"/>
+          </a:ln>
+        </p:spPr>
+      </p:sp>
+      <p:sp>
+        <p:nvSpPr>
+          <p:cNvPr id="23" name="loop-arrow-2">
+            <a:extLst xmlns:a="http://schemas.openxmlformats.org/drawingml/2006/main">
+              <a:ext uri="{FF2B5EF4-FFF2-40B4-BE49-F238E27FC236}">
+                <a16:creationId xmlns:a16="http://schemas.microsoft.com/office/drawing/2014/main" id="{0CE733CC-5F27-4463-97AC-FBAFD0042D04}"/>
+              </a:ext>
+            </a:extLst>
+          </p:cNvPr>
+          <p:cNvSpPr>
+            <a:spLocks xmlns:a="http://schemas.openxmlformats.org/drawingml/2006/main" noGrp="1"/>
+          </p:cNvSpPr>
+          <p:nvPr/>
+        </p:nvSpPr>
+        <p:spPr>
+          <a:xfrm xmlns:a="http://schemas.openxmlformats.org/drawingml/2006/main">
+            <a:off x="5867400" y="2781300"/>
+            <a:ext cx="133350" cy="133350"/>
+          </a:xfrm>
+          <a:prstGeom xmlns:a="http://schemas.openxmlformats.org/drawingml/2006/main" prst="triangle">
+            <a:avLst/>
+          </a:prstGeom>
+          <a:solidFill xmlns:a="http://schemas.openxmlformats.org/drawingml/2006/main">
+            <a:srgbClr val="C8CECA"/>
+          </a:solidFill>
+          <a:ln xmlns:a="http://schemas.openxmlformats.org/drawingml/2006/main" w="9525">
+            <a:solidFill>
+              <a:srgbClr val="C8CECA"/>
+            </a:solidFill>
+            <a:prstDash val="solid"/>
+          </a:ln>
+        </p:spPr>
+      </p:sp>
+      <p:sp>
+        <p:nvSpPr>
+          <p:cNvPr id="24" name="loop-node-3">
+            <a:extLst xmlns:a="http://schemas.openxmlformats.org/drawingml/2006/main">
+              <a:ext uri="{FF2B5EF4-FFF2-40B4-BE49-F238E27FC236}">
+                <a16:creationId xmlns:a16="http://schemas.microsoft.com/office/drawing/2014/main" id="{2D0C4F7F-0DC3-42DD-A785-3C750CF0D418}"/>
+              </a:ext>
+            </a:extLst>
+          </p:cNvPr>
+          <p:cNvSpPr>
+            <a:spLocks xmlns:a="http://schemas.openxmlformats.org/drawingml/2006/main" noGrp="1"/>
+          </p:cNvSpPr>
+          <p:nvPr/>
+        </p:nvSpPr>
+        <p:spPr>
+          <a:xfrm xmlns:a="http://schemas.openxmlformats.org/drawingml/2006/main">
+            <a:off x="6134100" y="2628900"/>
+            <a:ext cx="438150" cy="438150"/>
+          </a:xfrm>
+          <a:prstGeom xmlns:a="http://schemas.openxmlformats.org/drawingml/2006/main" prst="ellipse">
+            <a:avLst/>
+          </a:prstGeom>
+          <a:solidFill xmlns:a="http://schemas.openxmlformats.org/drawingml/2006/main">
+            <a:srgbClr val="2F7D74"/>
+          </a:solidFill>
+          <a:ln xmlns:a="http://schemas.openxmlformats.org/drawingml/2006/main" w="9525">
+            <a:solidFill>
+              <a:srgbClr val="2F7D74"/>
+            </a:solidFill>
+            <a:prstDash val="solid"/>
+          </a:ln>
+        </p:spPr>
+      </p:sp>
+      <p:sp>
+        <p:nvSpPr>
+          <p:cNvPr id="25" name="loop-number-3">
+            <a:extLst xmlns:a="http://schemas.openxmlformats.org/drawingml/2006/main">
+              <a:ext uri="{FF2B5EF4-FFF2-40B4-BE49-F238E27FC236}">
+                <a16:creationId xmlns:a16="http://schemas.microsoft.com/office/drawing/2014/main" id="{3404F5B8-7F0F-480D-82E0-B9B8277ACBCC}"/>
+              </a:ext>
+            </a:extLst>
+          </p:cNvPr>
+          <p:cNvSpPr>
+            <a:spLocks xmlns:a="http://schemas.openxmlformats.org/drawingml/2006/main" noGrp="1"/>
+          </p:cNvSpPr>
+          <p:nvPr/>
+        </p:nvSpPr>
+        <p:spPr>
+          <a:xfrm xmlns:a="http://schemas.openxmlformats.org/drawingml/2006/main">
+            <a:off x="6134100" y="2686050"/>
+            <a:ext cx="438150" cy="285750"/>
+          </a:xfrm>
+          <a:prstGeom xmlns:a="http://schemas.openxmlformats.org/drawingml/2006/main" prst="rect">
+            <a:avLst/>
+          </a:prstGeom>
+          <a:noFill xmlns:a="http://schemas.openxmlformats.org/drawingml/2006/main"/>
+          <a:ln xmlns:a="http://schemas.openxmlformats.org/drawingml/2006/main" w="0">
+            <a:noFill/>
+            <a:prstDash val="solid"/>
+          </a:ln>
+        </p:spPr>
+        <p:txBody>
+          <a:bodyPr xmlns:a="http://schemas.openxmlformats.org/drawingml/2006/main" anchor="ctr"/>
+          <a:lstStyle xmlns:a="http://schemas.openxmlformats.org/drawingml/2006/main"/>
+          <a:p xmlns:a="http://schemas.openxmlformats.org/drawingml/2006/main">
+            <a:pPr algn="ctr">
+              <a:defRPr sz="1350" b="1">
+                <a:solidFill>
+                  <a:srgbClr val="FFFFFF"/>
+                </a:solidFill>
+              </a:defRPr>
+            </a:pPr>
+            <a:r>
+              <a:rPr sz="1350" b="1">
+                <a:solidFill>
+                  <a:srgbClr val="FFFFFF"/>
+                </a:solidFill>
+              </a:rPr>
+              <a:t>4</a:t>
+            </a:r>
+          </a:p>
+        </p:txBody>
+      </p:sp>
+      <p:sp>
+        <p:nvSpPr>
+          <p:cNvPr id="26" name="loop-title-3">
+            <a:extLst xmlns:a="http://schemas.openxmlformats.org/drawingml/2006/main">
+              <a:ext uri="{FF2B5EF4-FFF2-40B4-BE49-F238E27FC236}">
+                <a16:creationId xmlns:a16="http://schemas.microsoft.com/office/drawing/2014/main" id="{DA9BD617-B6ED-49F9-B38B-FA4830826730}"/>
+              </a:ext>
+            </a:extLst>
+          </p:cNvPr>
+          <p:cNvSpPr>
+            <a:spLocks xmlns:a="http://schemas.openxmlformats.org/drawingml/2006/main" noGrp="1"/>
+          </p:cNvSpPr>
+          <p:nvPr/>
+        </p:nvSpPr>
+        <p:spPr>
+          <a:xfrm xmlns:a="http://schemas.openxmlformats.org/drawingml/2006/main">
+            <a:off x="6134100" y="3333750"/>
+            <a:ext cx="1581150" cy="342900"/>
+          </a:xfrm>
+          <a:prstGeom xmlns:a="http://schemas.openxmlformats.org/drawingml/2006/main" prst="rect">
+            <a:avLst/>
+          </a:prstGeom>
+          <a:noFill xmlns:a="http://schemas.openxmlformats.org/drawingml/2006/main"/>
+          <a:ln xmlns:a="http://schemas.openxmlformats.org/drawingml/2006/main" w="0">
+            <a:noFill/>
+            <a:prstDash val="solid"/>
+          </a:ln>
+        </p:spPr>
+        <p:txBody>
+          <a:bodyPr xmlns:a="http://schemas.openxmlformats.org/drawingml/2006/main" anchor="t"/>
+          <a:lstStyle xmlns:a="http://schemas.openxmlformats.org/drawingml/2006/main"/>
+          <a:p xmlns:a="http://schemas.openxmlformats.org/drawingml/2006/main">
+            <a:pPr algn="l">
+              <a:defRPr sz="1575" b="1">
+                <a:solidFill>
+                  <a:srgbClr val="141C22"/>
+                </a:solidFill>
+              </a:defRPr>
+            </a:pPr>
+            <a:r>
+              <a:rPr sz="1575" b="1">
+                <a:solidFill>
+                  <a:srgbClr val="141C22"/>
+                </a:solidFill>
+              </a:rPr>
+              <a:t>Focus</a:t>
+            </a:r>
+          </a:p>
+        </p:txBody>
+      </p:sp>
+      <p:sp>
+        <p:nvSpPr>
+          <p:cNvPr id="27" name="loop-body-3">
+            <a:extLst xmlns:a="http://schemas.openxmlformats.org/drawingml/2006/main">
+              <a:ext uri="{FF2B5EF4-FFF2-40B4-BE49-F238E27FC236}">
+                <a16:creationId xmlns:a16="http://schemas.microsoft.com/office/drawing/2014/main" id="{9595BCEA-C917-4935-BB19-2D63BA837EF7}"/>
+              </a:ext>
+            </a:extLst>
+          </p:cNvPr>
+          <p:cNvSpPr>
+            <a:spLocks xmlns:a="http://schemas.openxmlformats.org/drawingml/2006/main" noGrp="1"/>
+          </p:cNvSpPr>
+          <p:nvPr/>
+        </p:nvSpPr>
+        <p:spPr>
+          <a:xfrm xmlns:a="http://schemas.openxmlformats.org/drawingml/2006/main">
+            <a:off x="6134100" y="3810000"/>
+            <a:ext cx="1581150" cy="952500"/>
+          </a:xfrm>
+          <a:prstGeom xmlns:a="http://schemas.openxmlformats.org/drawingml/2006/main" prst="rect">
+            <a:avLst/>
+          </a:prstGeom>
+          <a:noFill xmlns:a="http://schemas.openxmlformats.org/drawingml/2006/main"/>
+          <a:ln xmlns:a="http://schemas.openxmlformats.org/drawingml/2006/main" w="0">
+            <a:noFill/>
+            <a:prstDash val="solid"/>
+          </a:ln>
+        </p:spPr>
+        <p:txBody>
+          <a:bodyPr xmlns:a="http://schemas.openxmlformats.org/drawingml/2006/main" anchor="t"/>
+          <a:lstStyle xmlns:a="http://schemas.openxmlformats.org/drawingml/2006/main"/>
+          <a:p xmlns:a="http://schemas.openxmlformats.org/drawingml/2006/main">
+            <a:pPr algn="l">
+              <a:defRPr sz="1200" b="0">
+                <a:solidFill>
+                  <a:srgbClr val="647078"/>
+                </a:solidFill>
+              </a:defRPr>
+            </a:pPr>
+            <a:r>
+              <a:rPr sz="1200" b="0">
+                <a:solidFill>
+                  <a:srgbClr val="647078"/>
+                </a:solidFill>
+              </a:rPr>
+              <a:t>One next action on Today</a:t>
+            </a:r>
+          </a:p>
+        </p:txBody>
+      </p:sp>
+      <p:sp>
+        <p:nvSpPr>
+          <p:cNvPr id="28" name="rule-696-298">
+            <a:extLst xmlns:a="http://schemas.openxmlformats.org/drawingml/2006/main">
+              <a:ext uri="{FF2B5EF4-FFF2-40B4-BE49-F238E27FC236}">
+                <a16:creationId xmlns:a16="http://schemas.microsoft.com/office/drawing/2014/main" id="{9868B865-36F1-4228-AC66-9F3DCCC5DAED}"/>
+              </a:ext>
+            </a:extLst>
+          </p:cNvPr>
+          <p:cNvSpPr>
+            <a:spLocks xmlns:a="http://schemas.openxmlformats.org/drawingml/2006/main" noGrp="1"/>
+          </p:cNvSpPr>
+          <p:nvPr/>
+        </p:nvSpPr>
+        <p:spPr>
+          <a:xfrm xmlns:a="http://schemas.openxmlformats.org/drawingml/2006/main">
+            <a:off x="6629400" y="2838450"/>
+            <a:ext cx="1257300" cy="19050"/>
+          </a:xfrm>
+          <a:prstGeom xmlns:a="http://schemas.openxmlformats.org/drawingml/2006/main" prst="rect">
+            <a:avLst/>
+          </a:prstGeom>
+          <a:solidFill xmlns:a="http://schemas.openxmlformats.org/drawingml/2006/main">
+            <a:srgbClr val="C8CECA"/>
+          </a:solidFill>
+          <a:ln xmlns:a="http://schemas.openxmlformats.org/drawingml/2006/main" w="0">
+            <a:noFill/>
+            <a:prstDash val="solid"/>
+          </a:ln>
+        </p:spPr>
+      </p:sp>
+      <p:sp>
+        <p:nvSpPr>
+          <p:cNvPr id="29" name="loop-arrow-3">
+            <a:extLst xmlns:a="http://schemas.openxmlformats.org/drawingml/2006/main">
+              <a:ext uri="{FF2B5EF4-FFF2-40B4-BE49-F238E27FC236}">
+                <a16:creationId xmlns:a16="http://schemas.microsoft.com/office/drawing/2014/main" id="{2DC85590-43F2-4A8D-8F08-7ABB59150CD7}"/>
+              </a:ext>
+            </a:extLst>
+          </p:cNvPr>
+          <p:cNvSpPr>
+            <a:spLocks xmlns:a="http://schemas.openxmlformats.org/drawingml/2006/main" noGrp="1"/>
+          </p:cNvSpPr>
+          <p:nvPr/>
+        </p:nvSpPr>
+        <p:spPr>
+          <a:xfrm xmlns:a="http://schemas.openxmlformats.org/drawingml/2006/main">
+            <a:off x="7753350" y="2781300"/>
+            <a:ext cx="133350" cy="133350"/>
+          </a:xfrm>
+          <a:prstGeom xmlns:a="http://schemas.openxmlformats.org/drawingml/2006/main" prst="triangle">
+            <a:avLst/>
+          </a:prstGeom>
+          <a:solidFill xmlns:a="http://schemas.openxmlformats.org/drawingml/2006/main">
+            <a:srgbClr val="C8CECA"/>
+          </a:solidFill>
+          <a:ln xmlns:a="http://schemas.openxmlformats.org/drawingml/2006/main" w="9525">
+            <a:solidFill>
+              <a:srgbClr val="C8CECA"/>
+            </a:solidFill>
+            <a:prstDash val="solid"/>
+          </a:ln>
+        </p:spPr>
+      </p:sp>
+      <p:sp>
+        <p:nvSpPr>
+          <p:cNvPr id="30" name="loop-node-4">
+            <a:extLst xmlns:a="http://schemas.openxmlformats.org/drawingml/2006/main">
+              <a:ext uri="{FF2B5EF4-FFF2-40B4-BE49-F238E27FC236}">
+                <a16:creationId xmlns:a16="http://schemas.microsoft.com/office/drawing/2014/main" id="{92B9E6EC-6654-420A-8245-F706AF743333}"/>
+              </a:ext>
+            </a:extLst>
+          </p:cNvPr>
+          <p:cNvSpPr>
+            <a:spLocks xmlns:a="http://schemas.openxmlformats.org/drawingml/2006/main" noGrp="1"/>
+          </p:cNvSpPr>
+          <p:nvPr/>
+        </p:nvSpPr>
+        <p:spPr>
+          <a:xfrm xmlns:a="http://schemas.openxmlformats.org/drawingml/2006/main">
+            <a:off x="8020050" y="2628900"/>
+            <a:ext cx="438150" cy="438150"/>
+          </a:xfrm>
+          <a:prstGeom xmlns:a="http://schemas.openxmlformats.org/drawingml/2006/main" prst="ellipse">
+            <a:avLst/>
+          </a:prstGeom>
+          <a:solidFill xmlns:a="http://schemas.openxmlformats.org/drawingml/2006/main">
+            <a:srgbClr val="2F7D74"/>
+          </a:solidFill>
+          <a:ln xmlns:a="http://schemas.openxmlformats.org/drawingml/2006/main" w="9525">
+            <a:solidFill>
+              <a:srgbClr val="2F7D74"/>
+            </a:solidFill>
+            <a:prstDash val="solid"/>
+          </a:ln>
+        </p:spPr>
+      </p:sp>
+      <p:sp>
+        <p:nvSpPr>
+          <p:cNvPr id="31" name="loop-number-4">
+            <a:extLst xmlns:a="http://schemas.openxmlformats.org/drawingml/2006/main">
+              <a:ext uri="{FF2B5EF4-FFF2-40B4-BE49-F238E27FC236}">
+                <a16:creationId xmlns:a16="http://schemas.microsoft.com/office/drawing/2014/main" id="{CA87C956-9EE0-4FD0-940A-E1FA0C9048EE}"/>
+              </a:ext>
+            </a:extLst>
+          </p:cNvPr>
+          <p:cNvSpPr>
+            <a:spLocks xmlns:a="http://schemas.openxmlformats.org/drawingml/2006/main" noGrp="1"/>
+          </p:cNvSpPr>
+          <p:nvPr/>
+        </p:nvSpPr>
+        <p:spPr>
+          <a:xfrm xmlns:a="http://schemas.openxmlformats.org/drawingml/2006/main">
+            <a:off x="8020050" y="2686050"/>
+            <a:ext cx="438150" cy="285750"/>
+          </a:xfrm>
+          <a:prstGeom xmlns:a="http://schemas.openxmlformats.org/drawingml/2006/main" prst="rect">
+            <a:avLst/>
+          </a:prstGeom>
+          <a:noFill xmlns:a="http://schemas.openxmlformats.org/drawingml/2006/main"/>
+          <a:ln xmlns:a="http://schemas.openxmlformats.org/drawingml/2006/main" w="0">
+            <a:noFill/>
+            <a:prstDash val="solid"/>
+          </a:ln>
+        </p:spPr>
+        <p:txBody>
+          <a:bodyPr xmlns:a="http://schemas.openxmlformats.org/drawingml/2006/main" anchor="ctr"/>
+          <a:lstStyle xmlns:a="http://schemas.openxmlformats.org/drawingml/2006/main"/>
+          <a:p xmlns:a="http://schemas.openxmlformats.org/drawingml/2006/main">
+            <a:pPr algn="ctr">
+              <a:defRPr sz="1350" b="1">
+                <a:solidFill>
+                  <a:srgbClr val="FFFFFF"/>
+                </a:solidFill>
+              </a:defRPr>
+            </a:pPr>
+            <a:r>
+              <a:rPr sz="1350" b="1">
+                <a:solidFill>
+                  <a:srgbClr val="FFFFFF"/>
+                </a:solidFill>
+              </a:rPr>
+              <a:t>5</a:t>
+            </a:r>
+          </a:p>
+        </p:txBody>
+      </p:sp>
+      <p:sp>
+        <p:nvSpPr>
+          <p:cNvPr id="32" name="loop-title-4">
+            <a:extLst xmlns:a="http://schemas.openxmlformats.org/drawingml/2006/main">
+              <a:ext uri="{FF2B5EF4-FFF2-40B4-BE49-F238E27FC236}">
+                <a16:creationId xmlns:a16="http://schemas.microsoft.com/office/drawing/2014/main" id="{CF7005D1-7A3B-47D5-8622-BD335C33A90F}"/>
+              </a:ext>
+            </a:extLst>
+          </p:cNvPr>
+          <p:cNvSpPr>
+            <a:spLocks xmlns:a="http://schemas.openxmlformats.org/drawingml/2006/main" noGrp="1"/>
+          </p:cNvSpPr>
+          <p:nvPr/>
+        </p:nvSpPr>
+        <p:spPr>
+          <a:xfrm xmlns:a="http://schemas.openxmlformats.org/drawingml/2006/main">
+            <a:off x="8020050" y="3333750"/>
+            <a:ext cx="1581150" cy="342900"/>
+          </a:xfrm>
+          <a:prstGeom xmlns:a="http://schemas.openxmlformats.org/drawingml/2006/main" prst="rect">
+            <a:avLst/>
+          </a:prstGeom>
+          <a:noFill xmlns:a="http://schemas.openxmlformats.org/drawingml/2006/main"/>
+          <a:ln xmlns:a="http://schemas.openxmlformats.org/drawingml/2006/main" w="0">
+            <a:noFill/>
+            <a:prstDash val="solid"/>
+          </a:ln>
+        </p:spPr>
+        <p:txBody>
+          <a:bodyPr xmlns:a="http://schemas.openxmlformats.org/drawingml/2006/main" anchor="t"/>
+          <a:lstStyle xmlns:a="http://schemas.openxmlformats.org/drawingml/2006/main"/>
+          <a:p xmlns:a="http://schemas.openxmlformats.org/drawingml/2006/main">
+            <a:pPr algn="l">
+              <a:defRPr sz="1575" b="1">
+                <a:solidFill>
+                  <a:srgbClr val="141C22"/>
+                </a:solidFill>
+              </a:defRPr>
+            </a:pPr>
+            <a:r>
+              <a:rPr sz="1575" b="1">
+                <a:solidFill>
+                  <a:srgbClr val="141C22"/>
+                </a:solidFill>
+              </a:rPr>
+              <a:t>Check</a:t>
+            </a:r>
+          </a:p>
+        </p:txBody>
+      </p:sp>
+      <p:sp>
+        <p:nvSpPr>
+          <p:cNvPr id="33" name="loop-body-4">
+            <a:extLst xmlns:a="http://schemas.openxmlformats.org/drawingml/2006/main">
+              <a:ext uri="{FF2B5EF4-FFF2-40B4-BE49-F238E27FC236}">
+                <a16:creationId xmlns:a16="http://schemas.microsoft.com/office/drawing/2014/main" id="{34EA7839-A276-42E3-B208-6711543A6BF5}"/>
+              </a:ext>
+            </a:extLst>
+          </p:cNvPr>
+          <p:cNvSpPr>
+            <a:spLocks xmlns:a="http://schemas.openxmlformats.org/drawingml/2006/main" noGrp="1"/>
+          </p:cNvSpPr>
+          <p:nvPr/>
+        </p:nvSpPr>
+        <p:spPr>
+          <a:xfrm xmlns:a="http://schemas.openxmlformats.org/drawingml/2006/main">
+            <a:off x="8020050" y="3810000"/>
+            <a:ext cx="1581150" cy="952500"/>
+          </a:xfrm>
+          <a:prstGeom xmlns:a="http://schemas.openxmlformats.org/drawingml/2006/main" prst="rect">
+            <a:avLst/>
+          </a:prstGeom>
+          <a:noFill xmlns:a="http://schemas.openxmlformats.org/drawingml/2006/main"/>
+          <a:ln xmlns:a="http://schemas.openxmlformats.org/drawingml/2006/main" w="0">
+            <a:noFill/>
+            <a:prstDash val="solid"/>
+          </a:ln>
+        </p:spPr>
+        <p:txBody>
+          <a:bodyPr xmlns:a="http://schemas.openxmlformats.org/drawingml/2006/main" anchor="t"/>
+          <a:lstStyle xmlns:a="http://schemas.openxmlformats.org/drawingml/2006/main"/>
+          <a:p xmlns:a="http://schemas.openxmlformats.org/drawingml/2006/main">
+            <a:pPr algn="l">
+              <a:defRPr sz="1200" b="0">
+                <a:solidFill>
+                  <a:srgbClr val="647078"/>
+                </a:solidFill>
+              </a:defRPr>
+            </a:pPr>
+            <a:r>
+              <a:rPr sz="1200" b="0">
+                <a:solidFill>
+                  <a:srgbClr val="647078"/>
+                </a:solidFill>
+              </a:rPr>
+              <a:t>Rubric fit, file quality, AI-writing reminder</a:t>
+            </a:r>
+          </a:p>
+        </p:txBody>
+      </p:sp>
+      <p:sp>
+        <p:nvSpPr>
+          <p:cNvPr id="34" name="rule-894-298">
+            <a:extLst xmlns:a="http://schemas.openxmlformats.org/drawingml/2006/main">
+              <a:ext uri="{FF2B5EF4-FFF2-40B4-BE49-F238E27FC236}">
+                <a16:creationId xmlns:a16="http://schemas.microsoft.com/office/drawing/2014/main" id="{EA4BB8B1-0A58-4140-B61D-6C2F002C2DB5}"/>
+              </a:ext>
+            </a:extLst>
+          </p:cNvPr>
+          <p:cNvSpPr>
+            <a:spLocks xmlns:a="http://schemas.openxmlformats.org/drawingml/2006/main" noGrp="1"/>
+          </p:cNvSpPr>
+          <p:nvPr/>
+        </p:nvSpPr>
+        <p:spPr>
+          <a:xfrm xmlns:a="http://schemas.openxmlformats.org/drawingml/2006/main">
+            <a:off x="8515350" y="2838450"/>
+            <a:ext cx="1257300" cy="19050"/>
+          </a:xfrm>
+          <a:prstGeom xmlns:a="http://schemas.openxmlformats.org/drawingml/2006/main" prst="rect">
+            <a:avLst/>
+          </a:prstGeom>
+          <a:solidFill xmlns:a="http://schemas.openxmlformats.org/drawingml/2006/main">
+            <a:srgbClr val="C8CECA"/>
+          </a:solidFill>
+          <a:ln xmlns:a="http://schemas.openxmlformats.org/drawingml/2006/main" w="0">
+            <a:noFill/>
+            <a:prstDash val="solid"/>
+          </a:ln>
+        </p:spPr>
+      </p:sp>
+      <p:sp>
+        <p:nvSpPr>
+          <p:cNvPr id="35" name="loop-arrow-4">
+            <a:extLst xmlns:a="http://schemas.openxmlformats.org/drawingml/2006/main">
+              <a:ext uri="{FF2B5EF4-FFF2-40B4-BE49-F238E27FC236}">
+                <a16:creationId xmlns:a16="http://schemas.microsoft.com/office/drawing/2014/main" id="{E814C3FC-1F20-457E-89D6-29C9379A6264}"/>
+              </a:ext>
+            </a:extLst>
+          </p:cNvPr>
+          <p:cNvSpPr>
+            <a:spLocks xmlns:a="http://schemas.openxmlformats.org/drawingml/2006/main" noGrp="1"/>
+          </p:cNvSpPr>
+          <p:nvPr/>
+        </p:nvSpPr>
+        <p:spPr>
+          <a:xfrm xmlns:a="http://schemas.openxmlformats.org/drawingml/2006/main">
+            <a:off x="9639300" y="2781300"/>
+            <a:ext cx="133350" cy="133350"/>
+          </a:xfrm>
+          <a:prstGeom xmlns:a="http://schemas.openxmlformats.org/drawingml/2006/main" prst="triangle">
+            <a:avLst/>
+          </a:prstGeom>
+          <a:solidFill xmlns:a="http://schemas.openxmlformats.org/drawingml/2006/main">
+            <a:srgbClr val="C8CECA"/>
+          </a:solidFill>
+          <a:ln xmlns:a="http://schemas.openxmlformats.org/drawingml/2006/main" w="9525">
+            <a:solidFill>
+              <a:srgbClr val="C8CECA"/>
+            </a:solidFill>
+            <a:prstDash val="solid"/>
+          </a:ln>
+        </p:spPr>
+      </p:sp>
+      <p:sp>
+        <p:nvSpPr>
+          <p:cNvPr id="36" name="loop-node-5">
+            <a:extLst xmlns:a="http://schemas.openxmlformats.org/drawingml/2006/main">
+              <a:ext uri="{FF2B5EF4-FFF2-40B4-BE49-F238E27FC236}">
+                <a16:creationId xmlns:a16="http://schemas.microsoft.com/office/drawing/2014/main" id="{4473E7D6-EA70-4AB8-8E76-088709FFDC0D}"/>
+              </a:ext>
+            </a:extLst>
+          </p:cNvPr>
+          <p:cNvSpPr>
+            <a:spLocks xmlns:a="http://schemas.openxmlformats.org/drawingml/2006/main" noGrp="1"/>
+          </p:cNvSpPr>
+          <p:nvPr/>
+        </p:nvSpPr>
+        <p:spPr>
+          <a:xfrm xmlns:a="http://schemas.openxmlformats.org/drawingml/2006/main">
+            <a:off x="9906000" y="2628900"/>
+            <a:ext cx="438150" cy="438150"/>
+          </a:xfrm>
+          <a:prstGeom xmlns:a="http://schemas.openxmlformats.org/drawingml/2006/main" prst="ellipse">
+            <a:avLst/>
+          </a:prstGeom>
+          <a:solidFill xmlns:a="http://schemas.openxmlformats.org/drawingml/2006/main">
+            <a:srgbClr val="C9A63F"/>
+          </a:solidFill>
+          <a:ln xmlns:a="http://schemas.openxmlformats.org/drawingml/2006/main" w="9525">
+            <a:solidFill>
+              <a:srgbClr val="C9A63F"/>
+            </a:solidFill>
+            <a:prstDash val="solid"/>
+          </a:ln>
+        </p:spPr>
+      </p:sp>
+      <p:sp>
+        <p:nvSpPr>
+          <p:cNvPr id="37" name="loop-number-5">
+            <a:extLst xmlns:a="http://schemas.openxmlformats.org/drawingml/2006/main">
+              <a:ext uri="{FF2B5EF4-FFF2-40B4-BE49-F238E27FC236}">
+                <a16:creationId xmlns:a16="http://schemas.microsoft.com/office/drawing/2014/main" id="{D4B470F4-E577-4EE5-B12A-13D91FF2F5C2}"/>
+              </a:ext>
+            </a:extLst>
+          </p:cNvPr>
+          <p:cNvSpPr>
+            <a:spLocks xmlns:a="http://schemas.openxmlformats.org/drawingml/2006/main" noGrp="1"/>
+          </p:cNvSpPr>
+          <p:nvPr/>
+        </p:nvSpPr>
+        <p:spPr>
+          <a:xfrm xmlns:a="http://schemas.openxmlformats.org/drawingml/2006/main">
+            <a:off x="9906000" y="2686050"/>
+            <a:ext cx="438150" cy="285750"/>
+          </a:xfrm>
+          <a:prstGeom xmlns:a="http://schemas.openxmlformats.org/drawingml/2006/main" prst="rect">
+            <a:avLst/>
+          </a:prstGeom>
+          <a:noFill xmlns:a="http://schemas.openxmlformats.org/drawingml/2006/main"/>
+          <a:ln xmlns:a="http://schemas.openxmlformats.org/drawingml/2006/main" w="0">
+            <a:noFill/>
+            <a:prstDash val="solid"/>
+          </a:ln>
+        </p:spPr>
+        <p:txBody>
+          <a:bodyPr xmlns:a="http://schemas.openxmlformats.org/drawingml/2006/main" anchor="ctr"/>
+          <a:lstStyle xmlns:a="http://schemas.openxmlformats.org/drawingml/2006/main"/>
+          <a:p xmlns:a="http://schemas.openxmlformats.org/drawingml/2006/main">
+            <a:pPr algn="ctr">
+              <a:defRPr sz="1350" b="1">
+                <a:solidFill>
+                  <a:srgbClr val="FFFFFF"/>
+                </a:solidFill>
+              </a:defRPr>
+            </a:pPr>
+            <a:r>
+              <a:rPr sz="1350" b="1">
+                <a:solidFill>
+                  <a:srgbClr val="FFFFFF"/>
+                </a:solidFill>
+              </a:rPr>
+              <a:t>6</a:t>
+            </a:r>
+          </a:p>
+        </p:txBody>
+      </p:sp>
+      <p:sp>
+        <p:nvSpPr>
+          <p:cNvPr id="38" name="loop-title-5">
+            <a:extLst xmlns:a="http://schemas.openxmlformats.org/drawingml/2006/main">
+              <a:ext uri="{FF2B5EF4-FFF2-40B4-BE49-F238E27FC236}">
+                <a16:creationId xmlns:a16="http://schemas.microsoft.com/office/drawing/2014/main" id="{B96D63F0-D949-41C3-B6E4-D010B425FA60}"/>
+              </a:ext>
+            </a:extLst>
+          </p:cNvPr>
+          <p:cNvSpPr>
+            <a:spLocks xmlns:a="http://schemas.openxmlformats.org/drawingml/2006/main" noGrp="1"/>
+          </p:cNvSpPr>
+          <p:nvPr/>
+        </p:nvSpPr>
+        <p:spPr>
+          <a:xfrm xmlns:a="http://schemas.openxmlformats.org/drawingml/2006/main">
+            <a:off x="9906000" y="3333750"/>
+            <a:ext cx="1581150" cy="342900"/>
+          </a:xfrm>
+          <a:prstGeom xmlns:a="http://schemas.openxmlformats.org/drawingml/2006/main" prst="rect">
+            <a:avLst/>
+          </a:prstGeom>
+          <a:noFill xmlns:a="http://schemas.openxmlformats.org/drawingml/2006/main"/>
+          <a:ln xmlns:a="http://schemas.openxmlformats.org/drawingml/2006/main" w="0">
+            <a:noFill/>
+            <a:prstDash val="solid"/>
+          </a:ln>
+        </p:spPr>
+        <p:txBody>
+          <a:bodyPr xmlns:a="http://schemas.openxmlformats.org/drawingml/2006/main" anchor="t"/>
+          <a:lstStyle xmlns:a="http://schemas.openxmlformats.org/drawingml/2006/main"/>
+          <a:p xmlns:a="http://schemas.openxmlformats.org/drawingml/2006/main">
+            <a:pPr algn="l">
+              <a:defRPr sz="1575" b="1">
+                <a:solidFill>
+                  <a:srgbClr val="141C22"/>
+                </a:solidFill>
+              </a:defRPr>
+            </a:pPr>
+            <a:r>
+              <a:rPr sz="1575" b="1">
+                <a:solidFill>
+                  <a:srgbClr val="141C22"/>
+                </a:solidFill>
+              </a:rPr>
+              <a:t>Coach</a:t>
+            </a:r>
+          </a:p>
+        </p:txBody>
+      </p:sp>
+      <p:sp>
+        <p:nvSpPr>
+          <p:cNvPr id="39" name="loop-body-5">
+            <a:extLst xmlns:a="http://schemas.openxmlformats.org/drawingml/2006/main">
+              <a:ext uri="{FF2B5EF4-FFF2-40B4-BE49-F238E27FC236}">
+                <a16:creationId xmlns:a16="http://schemas.microsoft.com/office/drawing/2014/main" id="{1718CBF2-3B5C-46A9-B0C7-8663C7032158}"/>
+              </a:ext>
+            </a:extLst>
+          </p:cNvPr>
+          <p:cNvSpPr>
+            <a:spLocks xmlns:a="http://schemas.openxmlformats.org/drawingml/2006/main" noGrp="1"/>
+          </p:cNvSpPr>
+          <p:nvPr/>
+        </p:nvSpPr>
+        <p:spPr>
+          <a:xfrm xmlns:a="http://schemas.openxmlformats.org/drawingml/2006/main">
+            <a:off x="9906000" y="3810000"/>
+            <a:ext cx="1581150" cy="952500"/>
+          </a:xfrm>
+          <a:prstGeom xmlns:a="http://schemas.openxmlformats.org/drawingml/2006/main" prst="rect">
+            <a:avLst/>
+          </a:prstGeom>
+          <a:noFill xmlns:a="http://schemas.openxmlformats.org/drawingml/2006/main"/>
+          <a:ln xmlns:a="http://schemas.openxmlformats.org/drawingml/2006/main" w="0">
+            <a:noFill/>
+            <a:prstDash val="solid"/>
+          </a:ln>
+        </p:spPr>
+        <p:txBody>
+          <a:bodyPr xmlns:a="http://schemas.openxmlformats.org/drawingml/2006/main" anchor="t"/>
+          <a:lstStyle xmlns:a="http://schemas.openxmlformats.org/drawingml/2006/main"/>
+          <a:p xmlns:a="http://schemas.openxmlformats.org/drawingml/2006/main">
+            <a:pPr algn="l">
+              <a:defRPr sz="1200" b="0">
+                <a:solidFill>
+                  <a:srgbClr val="647078"/>
+                </a:solidFill>
+              </a:defRPr>
+            </a:pPr>
+            <a:r>
+              <a:rPr sz="1200" b="0">
+                <a:solidFill>
+                  <a:srgbClr val="647078"/>
+                </a:solidFill>
+              </a:rPr>
+              <a:t>Live follow-up conversation with citations</a:t>
+            </a:r>
+          </a:p>
+        </p:txBody>
+      </p:sp>
+      <p:sp>
+        <p:nvSpPr>
+          <p:cNvPr id="40" name="loop-result-band">
+            <a:extLst xmlns:a="http://schemas.openxmlformats.org/drawingml/2006/main">
+              <a:ext uri="{FF2B5EF4-FFF2-40B4-BE49-F238E27FC236}">
+                <a16:creationId xmlns:a16="http://schemas.microsoft.com/office/drawing/2014/main" id="{106E4FDB-5A46-4F48-8C8F-887A99668FBB}"/>
+              </a:ext>
+            </a:extLst>
+          </p:cNvPr>
+          <p:cNvSpPr>
+            <a:spLocks xmlns:a="http://schemas.openxmlformats.org/drawingml/2006/main" noGrp="1"/>
+          </p:cNvSpPr>
+          <p:nvPr/>
+        </p:nvSpPr>
+        <p:spPr>
+          <a:xfrm xmlns:a="http://schemas.openxmlformats.org/drawingml/2006/main">
+            <a:off x="476250" y="5467350"/>
+            <a:ext cx="11239500" cy="590550"/>
+          </a:xfrm>
+          <a:prstGeom xmlns:a="http://schemas.openxmlformats.org/drawingml/2006/main" prst="roundRect">
+            <a:avLst>
+              <a:gd name="adj" fmla="val 12903"/>
+            </a:avLst>
+          </a:prstGeom>
+          <a:solidFill xmlns:a="http://schemas.openxmlformats.org/drawingml/2006/main">
+            <a:srgbClr val="141C22"/>
+          </a:solidFill>
+          <a:ln xmlns:a="http://schemas.openxmlformats.org/drawingml/2006/main" w="9525">
+            <a:solidFill>
+              <a:srgbClr val="141C22"/>
+            </a:solidFill>
+            <a:prstDash val="solid"/>
+          </a:ln>
+        </p:spPr>
+      </p:sp>
+      <p:sp>
+        <p:nvSpPr>
+          <p:cNvPr id="41" name="loop-result">
+            <a:extLst xmlns:a="http://schemas.openxmlformats.org/drawingml/2006/main">
+              <a:ext uri="{FF2B5EF4-FFF2-40B4-BE49-F238E27FC236}">
+                <a16:creationId xmlns:a16="http://schemas.microsoft.com/office/drawing/2014/main" id="{4199F23C-3BBE-40CB-B8AB-9FDEC043E258}"/>
+              </a:ext>
+            </a:extLst>
+          </p:cNvPr>
+          <p:cNvSpPr>
+            <a:spLocks xmlns:a="http://schemas.openxmlformats.org/drawingml/2006/main" noGrp="1"/>
+          </p:cNvSpPr>
+          <p:nvPr/>
+        </p:nvSpPr>
+        <p:spPr>
+          <a:xfrm xmlns:a="http://schemas.openxmlformats.org/drawingml/2006/main">
+            <a:off x="704850" y="5610225"/>
+            <a:ext cx="10782300" cy="323850"/>
+          </a:xfrm>
+          <a:prstGeom xmlns:a="http://schemas.openxmlformats.org/drawingml/2006/main" prst="rect">
+            <a:avLst/>
+          </a:prstGeom>
+          <a:noFill xmlns:a="http://schemas.openxmlformats.org/drawingml/2006/main"/>
+          <a:ln xmlns:a="http://schemas.openxmlformats.org/drawingml/2006/main" w="0">
+            <a:noFill/>
+            <a:prstDash val="solid"/>
+          </a:ln>
+        </p:spPr>
+        <p:txBody>
+          <a:bodyPr xmlns:a="http://schemas.openxmlformats.org/drawingml/2006/main" anchor="t"/>
+          <a:lstStyle xmlns:a="http://schemas.openxmlformats.org/drawingml/2006/main"/>
+          <a:p xmlns:a="http://schemas.openxmlformats.org/drawingml/2006/main">
+            <a:pPr algn="ctr">
+              <a:defRPr sz="1500" b="1">
+                <a:solidFill>
+                  <a:srgbClr val="FFFFFF"/>
+                </a:solidFill>
+              </a:defRPr>
+            </a:pPr>
+            <a:r>
+              <a:rPr sz="1500" b="1">
+                <a:solidFill>
+                  <a:srgbClr val="FFFFFF"/>
+                </a:solidFill>
+              </a:rPr>
+              <a:t>The student always knows what the source said, what remains, and what to do next.</a:t>
             </a:r>
           </a:p>
         </p:txBody>
@@ -4595,7 +5962,7 @@
     </p:spTree>
     <p:extLst>
       <p:ext uri="{BB962C8B-B14F-4D97-AF65-F5344CB8AC3E}">
-        <p14:creationId xmlns:p14="http://schemas.microsoft.com/office/powerpoint/2010/main" val="2091193443"/>
+        <p14:creationId xmlns:p14="http://schemas.microsoft.com/office/powerpoint/2010/main" val="1008414837"/>
       </p:ext>
     </p:extLst>
   </p:cSld>
@@ -4626,7 +5993,7 @@
           <p:cNvPr id="16" name="section-5">
             <a:extLst xmlns:a="http://schemas.openxmlformats.org/drawingml/2006/main">
               <a:ext uri="{FF2B5EF4-FFF2-40B4-BE49-F238E27FC236}">
-                <a16:creationId xmlns:a16="http://schemas.microsoft.com/office/drawing/2014/main" id="{8AEE38C8-3B16-4A3B-A124-D5C9A6E34B4B}"/>
+                <a16:creationId xmlns:a16="http://schemas.microsoft.com/office/drawing/2014/main" id="{D6A7C937-E0AE-4E24-8BF6-E3F2EFB3F36B}"/>
               </a:ext>
             </a:extLst>
           </p:cNvPr>
@@ -4666,7 +6033,7 @@
                   <a:srgbClr val="2F7D74"/>
                 </a:solidFill>
               </a:rPr>
-              <a:t>AI COACH</a:t>
+              <a:t>LIVE AI COACH</a:t>
             </a:r>
           </a:p>
         </p:txBody>
@@ -4676,7 +6043,7 @@
           <p:cNvPr id="2" name="page-5">
             <a:extLst xmlns:a="http://schemas.openxmlformats.org/drawingml/2006/main">
               <a:ext uri="{FF2B5EF4-FFF2-40B4-BE49-F238E27FC236}">
-                <a16:creationId xmlns:a16="http://schemas.microsoft.com/office/drawing/2014/main" id="{01E07254-CE11-4AF4-8F65-922A2FC0D16E}"/>
+                <a16:creationId xmlns:a16="http://schemas.microsoft.com/office/drawing/2014/main" id="{73BCE469-9293-49F9-B901-3C30E7C14026}"/>
               </a:ext>
             </a:extLst>
           </p:cNvPr>
@@ -4726,7 +6093,7 @@
           <p:cNvPr id="3" name="rule-48-66">
             <a:extLst xmlns:a="http://schemas.openxmlformats.org/drawingml/2006/main">
               <a:ext uri="{FF2B5EF4-FFF2-40B4-BE49-F238E27FC236}">
-                <a16:creationId xmlns:a16="http://schemas.microsoft.com/office/drawing/2014/main" id="{AC249A6E-37B4-495C-9E07-F0A9B2F74AAE}"/>
+                <a16:creationId xmlns:a16="http://schemas.microsoft.com/office/drawing/2014/main" id="{34E6F6F9-A353-4465-B15D-F7CAB53ED3A5}"/>
               </a:ext>
             </a:extLst>
           </p:cNvPr>
@@ -4754,10 +6121,10 @@
       </p:sp>
       <p:sp>
         <p:nvSpPr>
-          <p:cNvPr id="4" name="title-Grounded help, not generic chat.">
-            <a:extLst xmlns:a="http://schemas.openxmlformats.org/drawingml/2006/main">
-              <a:ext uri="{FF2B5EF4-FFF2-40B4-BE49-F238E27FC236}">
-                <a16:creationId xmlns:a16="http://schemas.microsoft.com/office/drawing/2014/main" id="{F49F3618-F48E-4C27-B982-E1440890C8F5}"/>
+          <p:cNvPr id="4" name="title-The Coach is a real multi-turn conversation.">
+            <a:extLst xmlns:a="http://schemas.openxmlformats.org/drawingml/2006/main">
+              <a:ext uri="{FF2B5EF4-FFF2-40B4-BE49-F238E27FC236}">
+                <a16:creationId xmlns:a16="http://schemas.microsoft.com/office/drawing/2014/main" id="{58C42D70-B350-4AB5-B4E3-9CDBD7AD5E34}"/>
               </a:ext>
             </a:extLst>
           </p:cNvPr>
@@ -4797,17 +6164,17 @@
                   <a:srgbClr val="141C22"/>
                 </a:solidFill>
               </a:rPr>
-              <a:t>Grounded help, not generic chat.</a:t>
-            </a:r>
-          </a:p>
-        </p:txBody>
-      </p:sp>
-      <p:sp>
-        <p:nvSpPr>
-          <p:cNvPr id="5" name="subtitle-Grounded help, not generic chat.">
-            <a:extLst xmlns:a="http://schemas.openxmlformats.org/drawingml/2006/main">
-              <a:ext uri="{FF2B5EF4-FFF2-40B4-BE49-F238E27FC236}">
-                <a16:creationId xmlns:a16="http://schemas.microsoft.com/office/drawing/2014/main" id="{43D016A7-7831-4F49-BF74-A3CD994145E9}"/>
+              <a:t>The Coach is a real multi-turn conversation.</a:t>
+            </a:r>
+          </a:p>
+        </p:txBody>
+      </p:sp>
+      <p:sp>
+        <p:nvSpPr>
+          <p:cNvPr id="5" name="subtitle-The Coach is a real multi-turn conversation.">
+            <a:extLst xmlns:a="http://schemas.openxmlformats.org/drawingml/2006/main">
+              <a:ext uri="{FF2B5EF4-FFF2-40B4-BE49-F238E27FC236}">
+                <a16:creationId xmlns:a16="http://schemas.microsoft.com/office/drawing/2014/main" id="{8BD3A010-2F8A-4C3C-9815-5DB4EA1C3A42}"/>
               </a:ext>
             </a:extLst>
           </p:cNvPr>
@@ -4847,33 +6214,33 @@
                   <a:srgbClr val="647078"/>
                 </a:solidFill>
               </a:rPr>
-              <a:t>Every response is structured around evidence from the selected course and a short list of next steps.</a:t>
-            </a:r>
-          </a:p>
-        </p:txBody>
-      </p:sp>
-      <p:sp>
-        <p:nvSpPr>
-          <p:cNvPr id="6" name="coach-evidence-frame">
-            <a:extLst xmlns:a="http://schemas.openxmlformats.org/drawingml/2006/main">
-              <a:ext uri="{FF2B5EF4-FFF2-40B4-BE49-F238E27FC236}">
-                <a16:creationId xmlns:a16="http://schemas.microsoft.com/office/drawing/2014/main" id="{93B3AC41-2977-43A0-BB86-EB58CF6DC215}"/>
-              </a:ext>
-            </a:extLst>
-          </p:cNvPr>
-          <p:cNvSpPr>
-            <a:spLocks xmlns:a="http://schemas.openxmlformats.org/drawingml/2006/main" noGrp="1"/>
-          </p:cNvSpPr>
-          <p:nvPr/>
-        </p:nvSpPr>
-        <p:spPr>
-          <a:xfrm xmlns:a="http://schemas.openxmlformats.org/drawingml/2006/main">
-            <a:off x="457200" y="2247900"/>
-            <a:ext cx="6724650" cy="3886200"/>
+              <a:t>Students can ask a question, challenge the answer, request a plan, and act on the next steps without leaving the assignment.</a:t>
+            </a:r>
+          </a:p>
+        </p:txBody>
+      </p:sp>
+      <p:sp>
+        <p:nvSpPr>
+          <p:cNvPr id="6" name="coach-screen-frame">
+            <a:extLst xmlns:a="http://schemas.openxmlformats.org/drawingml/2006/main">
+              <a:ext uri="{FF2B5EF4-FFF2-40B4-BE49-F238E27FC236}">
+                <a16:creationId xmlns:a16="http://schemas.microsoft.com/office/drawing/2014/main" id="{A799AC5B-9B38-44A8-B2C8-FDCF013F893B}"/>
+              </a:ext>
+            </a:extLst>
+          </p:cNvPr>
+          <p:cNvSpPr>
+            <a:spLocks xmlns:a="http://schemas.openxmlformats.org/drawingml/2006/main" noGrp="1"/>
+          </p:cNvSpPr>
+          <p:nvPr/>
+        </p:nvSpPr>
+        <p:spPr>
+          <a:xfrm xmlns:a="http://schemas.openxmlformats.org/drawingml/2006/main">
+            <a:off x="457200" y="2209800"/>
+            <a:ext cx="7067550" cy="3962400"/>
           </a:xfrm>
           <a:prstGeom xmlns:a="http://schemas.openxmlformats.org/drawingml/2006/main" prst="roundRect">
             <a:avLst>
-              <a:gd name="adj" fmla="val 1961"/>
+              <a:gd name="adj" fmla="val 1923"/>
             </a:avLst>
           </a:prstGeom>
           <a:solidFill xmlns:a="http://schemas.openxmlformats.org/drawingml/2006/main">
@@ -4896,98 +6263,92 @@
           <p:nvPr/>
         </p:nvPicPr>
         <p:blipFill>
-          <a:blip xmlns:r="http://schemas.openxmlformats.org/officeDocument/2006/relationships" xmlns:a="http://schemas.openxmlformats.org/drawingml/2006/main" r:embed="Rbda14dd8dfda4bb6"/>
-          <a:srcRect xmlns:a="http://schemas.openxmlformats.org/drawingml/2006/main" l="0" t="21418" r="0" b="21418"/>
+          <a:blip xmlns:r="http://schemas.openxmlformats.org/officeDocument/2006/relationships" xmlns:a="http://schemas.openxmlformats.org/drawingml/2006/main" r:embed="R130e1cb852ff49fe"/>
+          <a:srcRect xmlns:a="http://schemas.openxmlformats.org/drawingml/2006/main" l="0" t="10874" r="0" b="10874"/>
           <a:stretch xmlns:a="http://schemas.openxmlformats.org/drawingml/2006/main">
             <a:fillRect l="0" t="0" r="0" b="0"/>
           </a:stretch>
         </p:blipFill>
         <p:spPr>
           <a:xfrm xmlns:a="http://schemas.openxmlformats.org/drawingml/2006/main">
-            <a:off x="590550" y="2381250"/>
-            <a:ext cx="6457950" cy="3619500"/>
+            <a:off x="590550" y="2343150"/>
+            <a:ext cx="6800850" cy="3695700"/>
           </a:xfrm>
           <a:prstGeom xmlns:a="http://schemas.openxmlformats.org/drawingml/2006/main" prst="roundRect">
             <a:avLst>
-              <a:gd name="adj" fmla="val 1842"/>
+              <a:gd name="adj" fmla="val 1804"/>
             </a:avLst>
           </a:prstGeom>
         </p:spPr>
       </p:pic>
       <p:sp>
         <p:nvSpPr>
-          <p:cNvPr id="8" name="label-Explain-790">
-            <a:extLst xmlns:a="http://schemas.openxmlformats.org/drawingml/2006/main">
-              <a:ext uri="{FF2B5EF4-FFF2-40B4-BE49-F238E27FC236}">
-                <a16:creationId xmlns:a16="http://schemas.microsoft.com/office/drawing/2014/main" id="{6F30A356-D038-4924-B94B-C524203AC80B}"/>
-              </a:ext>
-            </a:extLst>
-          </p:cNvPr>
-          <p:cNvSpPr>
-            <a:spLocks xmlns:a="http://schemas.openxmlformats.org/drawingml/2006/main" noGrp="1"/>
-          </p:cNvSpPr>
-          <p:nvPr/>
-        </p:nvSpPr>
-        <p:spPr>
-          <a:xfrm xmlns:a="http://schemas.openxmlformats.org/drawingml/2006/main">
-            <a:off x="7524750" y="2362200"/>
-            <a:ext cx="1066800" cy="285750"/>
-          </a:xfrm>
-          <a:prstGeom xmlns:a="http://schemas.openxmlformats.org/drawingml/2006/main" prst="roundRect">
-            <a:avLst>
-              <a:gd name="adj" fmla="val 26667"/>
-            </a:avLst>
-          </a:prstGeom>
-          <a:solidFill xmlns:a="http://schemas.openxmlformats.org/drawingml/2006/main">
-            <a:srgbClr val="DCECE8"/>
-          </a:solidFill>
-          <a:ln xmlns:a="http://schemas.openxmlformats.org/drawingml/2006/main" w="9525">
-            <a:solidFill>
-              <a:srgbClr val="DCECE8"/>
-            </a:solidFill>
-            <a:prstDash val="solid"/>
-          </a:ln>
-        </p:spPr>
-        <p:txBody>
-          <a:bodyPr xmlns:a="http://schemas.openxmlformats.org/drawingml/2006/main" anchor="ctr"/>
-          <a:lstStyle xmlns:a="http://schemas.openxmlformats.org/drawingml/2006/main"/>
-          <a:p xmlns:a="http://schemas.openxmlformats.org/drawingml/2006/main">
-            <a:pPr algn="ctr">
-              <a:defRPr sz="900" b="1">
+          <p:cNvPr id="8" name="coach-label-0">
+            <a:extLst xmlns:a="http://schemas.openxmlformats.org/drawingml/2006/main">
+              <a:ext uri="{FF2B5EF4-FFF2-40B4-BE49-F238E27FC236}">
+                <a16:creationId xmlns:a16="http://schemas.microsoft.com/office/drawing/2014/main" id="{C3A4ACB2-2B8D-4B45-9780-691F2C568C46}"/>
+              </a:ext>
+            </a:extLst>
+          </p:cNvPr>
+          <p:cNvSpPr>
+            <a:spLocks xmlns:a="http://schemas.openxmlformats.org/drawingml/2006/main" noGrp="1"/>
+          </p:cNvSpPr>
+          <p:nvPr/>
+        </p:nvSpPr>
+        <p:spPr>
+          <a:xfrm xmlns:a="http://schemas.openxmlformats.org/drawingml/2006/main">
+            <a:off x="7905750" y="2400300"/>
+            <a:ext cx="1047750" cy="266700"/>
+          </a:xfrm>
+          <a:prstGeom xmlns:a="http://schemas.openxmlformats.org/drawingml/2006/main" prst="rect">
+            <a:avLst/>
+          </a:prstGeom>
+          <a:noFill xmlns:a="http://schemas.openxmlformats.org/drawingml/2006/main"/>
+          <a:ln xmlns:a="http://schemas.openxmlformats.org/drawingml/2006/main" w="0">
+            <a:noFill/>
+            <a:prstDash val="solid"/>
+          </a:ln>
+        </p:spPr>
+        <p:txBody>
+          <a:bodyPr xmlns:a="http://schemas.openxmlformats.org/drawingml/2006/main" anchor="t"/>
+          <a:lstStyle xmlns:a="http://schemas.openxmlformats.org/drawingml/2006/main"/>
+          <a:p xmlns:a="http://schemas.openxmlformats.org/drawingml/2006/main">
+            <a:pPr algn="l">
+              <a:defRPr sz="975" b="1">
                 <a:solidFill>
                   <a:srgbClr val="2F7D74"/>
                 </a:solidFill>
               </a:defRPr>
             </a:pPr>
             <a:r>
-              <a:rPr sz="900" b="1">
+              <a:rPr sz="975" b="1">
                 <a:solidFill>
                   <a:srgbClr val="2F7D74"/>
                 </a:solidFill>
               </a:rPr>
-              <a:t>EXPLAIN</a:t>
-            </a:r>
-          </a:p>
-        </p:txBody>
-      </p:sp>
-      <p:sp>
-        <p:nvSpPr>
-          <p:cNvPr id="9" name="coach-item-0">
-            <a:extLst xmlns:a="http://schemas.openxmlformats.org/drawingml/2006/main">
-              <a:ext uri="{FF2B5EF4-FFF2-40B4-BE49-F238E27FC236}">
-                <a16:creationId xmlns:a16="http://schemas.microsoft.com/office/drawing/2014/main" id="{2B885FD4-60D1-409E-A76C-7BE4FF61D3BA}"/>
-              </a:ext>
-            </a:extLst>
-          </p:cNvPr>
-          <p:cNvSpPr>
-            <a:spLocks xmlns:a="http://schemas.openxmlformats.org/drawingml/2006/main" noGrp="1"/>
-          </p:cNvSpPr>
-          <p:nvPr/>
-        </p:nvSpPr>
-        <p:spPr>
-          <a:xfrm xmlns:a="http://schemas.openxmlformats.org/drawingml/2006/main">
-            <a:off x="8839200" y="2343150"/>
-            <a:ext cx="2762250" cy="895350"/>
+              <a:t>FOLLOW UP</a:t>
+            </a:r>
+          </a:p>
+        </p:txBody>
+      </p:sp>
+      <p:sp>
+        <p:nvSpPr>
+          <p:cNvPr id="9" name="coach-copy-0">
+            <a:extLst xmlns:a="http://schemas.openxmlformats.org/drawingml/2006/main">
+              <a:ext uri="{FF2B5EF4-FFF2-40B4-BE49-F238E27FC236}">
+                <a16:creationId xmlns:a16="http://schemas.microsoft.com/office/drawing/2014/main" id="{4B027DEB-DA4A-4829-AEDB-50C568344DC6}"/>
+              </a:ext>
+            </a:extLst>
+          </p:cNvPr>
+          <p:cNvSpPr>
+            <a:spLocks xmlns:a="http://schemas.openxmlformats.org/drawingml/2006/main" noGrp="1"/>
+          </p:cNvSpPr>
+          <p:nvPr/>
+        </p:nvSpPr>
+        <p:spPr>
+          <a:xfrm xmlns:a="http://schemas.openxmlformats.org/drawingml/2006/main">
+            <a:off x="7905750" y="2743200"/>
+            <a:ext cx="3619500" cy="666750"/>
           </a:xfrm>
           <a:prstGeom xmlns:a="http://schemas.openxmlformats.org/drawingml/2006/main" prst="rect">
             <a:avLst/>
@@ -5003,41 +6364,41 @@
           <a:lstStyle xmlns:a="http://schemas.openxmlformats.org/drawingml/2006/main"/>
           <a:p xmlns:a="http://schemas.openxmlformats.org/drawingml/2006/main">
             <a:pPr algn="l">
-              <a:defRPr sz="1350" b="0">
+              <a:defRPr sz="1425" b="0">
                 <a:solidFill>
                   <a:srgbClr val="647078"/>
                 </a:solidFill>
               </a:defRPr>
             </a:pPr>
             <a:r>
-              <a:rPr sz="1350" b="0">
+              <a:rPr sz="1425" b="0">
                 <a:solidFill>
                   <a:srgbClr val="647078"/>
                 </a:solidFill>
               </a:rPr>
-              <a:t>Rewrites dense assignment language into a clear interpretation without inventing facts.</a:t>
-            </a:r>
-          </a:p>
-        </p:txBody>
-      </p:sp>
-      <p:sp>
-        <p:nvSpPr>
-          <p:cNvPr id="10" name="rule-790-354">
-            <a:extLst xmlns:a="http://schemas.openxmlformats.org/drawingml/2006/main">
-              <a:ext uri="{FF2B5EF4-FFF2-40B4-BE49-F238E27FC236}">
-                <a16:creationId xmlns:a16="http://schemas.microsoft.com/office/drawing/2014/main" id="{85C0D9A8-0AAA-4AC3-8B05-CE1C8A753AD4}"/>
-              </a:ext>
-            </a:extLst>
-          </p:cNvPr>
-          <p:cNvSpPr>
-            <a:spLocks xmlns:a="http://schemas.openxmlformats.org/drawingml/2006/main" noGrp="1"/>
-          </p:cNvSpPr>
-          <p:nvPr/>
-        </p:nvSpPr>
-        <p:spPr>
-          <a:xfrm xmlns:a="http://schemas.openxmlformats.org/drawingml/2006/main">
-            <a:off x="7524750" y="3371850"/>
-            <a:ext cx="4076700" cy="9525"/>
+              <a:t>Conversation history stays scoped to the selected course and assignment.</a:t>
+            </a:r>
+          </a:p>
+        </p:txBody>
+      </p:sp>
+      <p:sp>
+        <p:nvSpPr>
+          <p:cNvPr id="10" name="rule-830-362">
+            <a:extLst xmlns:a="http://schemas.openxmlformats.org/drawingml/2006/main">
+              <a:ext uri="{FF2B5EF4-FFF2-40B4-BE49-F238E27FC236}">
+                <a16:creationId xmlns:a16="http://schemas.microsoft.com/office/drawing/2014/main" id="{B7D045E8-20F3-440F-AC9F-2494F1A9D7E4}"/>
+              </a:ext>
+            </a:extLst>
+          </p:cNvPr>
+          <p:cNvSpPr>
+            <a:spLocks xmlns:a="http://schemas.openxmlformats.org/drawingml/2006/main" noGrp="1"/>
+          </p:cNvSpPr>
+          <p:nvPr/>
+        </p:nvSpPr>
+        <p:spPr>
+          <a:xfrm xmlns:a="http://schemas.openxmlformats.org/drawingml/2006/main">
+            <a:off x="7905750" y="3448050"/>
+            <a:ext cx="3619500" cy="9525"/>
           </a:xfrm>
           <a:prstGeom xmlns:a="http://schemas.openxmlformats.org/drawingml/2006/main" prst="rect">
             <a:avLst/>
@@ -5053,78 +6414,72 @@
       </p:sp>
       <p:sp>
         <p:nvSpPr>
-          <p:cNvPr id="11" name="label-Check-790">
-            <a:extLst xmlns:a="http://schemas.openxmlformats.org/drawingml/2006/main">
-              <a:ext uri="{FF2B5EF4-FFF2-40B4-BE49-F238E27FC236}">
-                <a16:creationId xmlns:a16="http://schemas.microsoft.com/office/drawing/2014/main" id="{32D31FA3-CA71-49EE-ACAC-A5B5B979C304}"/>
-              </a:ext>
-            </a:extLst>
-          </p:cNvPr>
-          <p:cNvSpPr>
-            <a:spLocks xmlns:a="http://schemas.openxmlformats.org/drawingml/2006/main" noGrp="1"/>
-          </p:cNvSpPr>
-          <p:nvPr/>
-        </p:nvSpPr>
-        <p:spPr>
-          <a:xfrm xmlns:a="http://schemas.openxmlformats.org/drawingml/2006/main">
-            <a:off x="7524750" y="3562350"/>
-            <a:ext cx="1066800" cy="285750"/>
-          </a:xfrm>
-          <a:prstGeom xmlns:a="http://schemas.openxmlformats.org/drawingml/2006/main" prst="roundRect">
-            <a:avLst>
-              <a:gd name="adj" fmla="val 26667"/>
-            </a:avLst>
-          </a:prstGeom>
-          <a:solidFill xmlns:a="http://schemas.openxmlformats.org/drawingml/2006/main">
-            <a:srgbClr val="F2EEDC"/>
-          </a:solidFill>
-          <a:ln xmlns:a="http://schemas.openxmlformats.org/drawingml/2006/main" w="9525">
-            <a:solidFill>
-              <a:srgbClr val="F2EEDC"/>
-            </a:solidFill>
-            <a:prstDash val="solid"/>
-          </a:ln>
-        </p:spPr>
-        <p:txBody>
-          <a:bodyPr xmlns:a="http://schemas.openxmlformats.org/drawingml/2006/main" anchor="ctr"/>
-          <a:lstStyle xmlns:a="http://schemas.openxmlformats.org/drawingml/2006/main"/>
-          <a:p xmlns:a="http://schemas.openxmlformats.org/drawingml/2006/main">
-            <a:pPr algn="ctr">
-              <a:defRPr sz="900" b="1">
+          <p:cNvPr id="11" name="coach-label-1">
+            <a:extLst xmlns:a="http://schemas.openxmlformats.org/drawingml/2006/main">
+              <a:ext uri="{FF2B5EF4-FFF2-40B4-BE49-F238E27FC236}">
+                <a16:creationId xmlns:a16="http://schemas.microsoft.com/office/drawing/2014/main" id="{CBA2F5A4-0E3F-4B42-9AEB-58DC73FABCF9}"/>
+              </a:ext>
+            </a:extLst>
+          </p:cNvPr>
+          <p:cNvSpPr>
+            <a:spLocks xmlns:a="http://schemas.openxmlformats.org/drawingml/2006/main" noGrp="1"/>
+          </p:cNvSpPr>
+          <p:nvPr/>
+        </p:nvSpPr>
+        <p:spPr>
+          <a:xfrm xmlns:a="http://schemas.openxmlformats.org/drawingml/2006/main">
+            <a:off x="7905750" y="3581400"/>
+            <a:ext cx="1047750" cy="266700"/>
+          </a:xfrm>
+          <a:prstGeom xmlns:a="http://schemas.openxmlformats.org/drawingml/2006/main" prst="rect">
+            <a:avLst/>
+          </a:prstGeom>
+          <a:noFill xmlns:a="http://schemas.openxmlformats.org/drawingml/2006/main"/>
+          <a:ln xmlns:a="http://schemas.openxmlformats.org/drawingml/2006/main" w="0">
+            <a:noFill/>
+            <a:prstDash val="solid"/>
+          </a:ln>
+        </p:spPr>
+        <p:txBody>
+          <a:bodyPr xmlns:a="http://schemas.openxmlformats.org/drawingml/2006/main" anchor="t"/>
+          <a:lstStyle xmlns:a="http://schemas.openxmlformats.org/drawingml/2006/main"/>
+          <a:p xmlns:a="http://schemas.openxmlformats.org/drawingml/2006/main">
+            <a:pPr algn="l">
+              <a:defRPr sz="975" b="1">
                 <a:solidFill>
                   <a:srgbClr val="725E16"/>
                 </a:solidFill>
               </a:defRPr>
             </a:pPr>
             <a:r>
-              <a:rPr sz="900" b="1">
+              <a:rPr sz="975" b="1">
                 <a:solidFill>
                   <a:srgbClr val="725E16"/>
                 </a:solidFill>
               </a:rPr>
-              <a:t>CHECK</a:t>
-            </a:r>
-          </a:p>
-        </p:txBody>
-      </p:sp>
-      <p:sp>
-        <p:nvSpPr>
-          <p:cNvPr id="12" name="coach-item-1">
-            <a:extLst xmlns:a="http://schemas.openxmlformats.org/drawingml/2006/main">
-              <a:ext uri="{FF2B5EF4-FFF2-40B4-BE49-F238E27FC236}">
-                <a16:creationId xmlns:a16="http://schemas.microsoft.com/office/drawing/2014/main" id="{39014D98-7A4C-4E7B-B237-5D689D8432FD}"/>
-              </a:ext>
-            </a:extLst>
-          </p:cNvPr>
-          <p:cNvSpPr>
-            <a:spLocks xmlns:a="http://schemas.openxmlformats.org/drawingml/2006/main" noGrp="1"/>
-          </p:cNvSpPr>
-          <p:nvPr/>
-        </p:nvSpPr>
-        <p:spPr>
-          <a:xfrm xmlns:a="http://schemas.openxmlformats.org/drawingml/2006/main">
-            <a:off x="8839200" y="3543300"/>
-            <a:ext cx="2762250" cy="895350"/>
+              <a:t>VERIFY</a:t>
+            </a:r>
+          </a:p>
+        </p:txBody>
+      </p:sp>
+      <p:sp>
+        <p:nvSpPr>
+          <p:cNvPr id="12" name="coach-copy-1">
+            <a:extLst xmlns:a="http://schemas.openxmlformats.org/drawingml/2006/main">
+              <a:ext uri="{FF2B5EF4-FFF2-40B4-BE49-F238E27FC236}">
+                <a16:creationId xmlns:a16="http://schemas.microsoft.com/office/drawing/2014/main" id="{00A1B16B-E3FC-4CB9-A36C-3D83321EA2EF}"/>
+              </a:ext>
+            </a:extLst>
+          </p:cNvPr>
+          <p:cNvSpPr>
+            <a:spLocks xmlns:a="http://schemas.openxmlformats.org/drawingml/2006/main" noGrp="1"/>
+          </p:cNvSpPr>
+          <p:nvPr/>
+        </p:nvSpPr>
+        <p:spPr>
+          <a:xfrm xmlns:a="http://schemas.openxmlformats.org/drawingml/2006/main">
+            <a:off x="7905750" y="3924300"/>
+            <a:ext cx="3619500" cy="666750"/>
           </a:xfrm>
           <a:prstGeom xmlns:a="http://schemas.openxmlformats.org/drawingml/2006/main" prst="rect">
             <a:avLst/>
@@ -5140,41 +6495,41 @@
           <a:lstStyle xmlns:a="http://schemas.openxmlformats.org/drawingml/2006/main"/>
           <a:p xmlns:a="http://schemas.openxmlformats.org/drawingml/2006/main">
             <a:pPr algn="l">
-              <a:defRPr sz="1350" b="0">
+              <a:defRPr sz="1425" b="0">
                 <a:solidFill>
                   <a:srgbClr val="647078"/>
                 </a:solidFill>
               </a:defRPr>
             </a:pPr>
             <a:r>
-              <a:rPr sz="1350" b="0">
+              <a:rPr sz="1425" b="0">
                 <a:solidFill>
                   <a:srgbClr val="647078"/>
                 </a:solidFill>
               </a:rPr>
-              <a:t>Compares the student's plan against extracted requirements, points, dates, and deliverables.</a:t>
-            </a:r>
-          </a:p>
-        </p:txBody>
-      </p:sp>
-      <p:sp>
-        <p:nvSpPr>
-          <p:cNvPr id="13" name="rule-790-480">
-            <a:extLst xmlns:a="http://schemas.openxmlformats.org/drawingml/2006/main">
-              <a:ext uri="{FF2B5EF4-FFF2-40B4-BE49-F238E27FC236}">
-                <a16:creationId xmlns:a16="http://schemas.microsoft.com/office/drawing/2014/main" id="{3BE68D3E-748A-48EA-8DA7-5EFB1246AD55}"/>
-              </a:ext>
-            </a:extLst>
-          </p:cNvPr>
-          <p:cNvSpPr>
-            <a:spLocks xmlns:a="http://schemas.openxmlformats.org/drawingml/2006/main" noGrp="1"/>
-          </p:cNvSpPr>
-          <p:nvPr/>
-        </p:nvSpPr>
-        <p:spPr>
-          <a:xfrm xmlns:a="http://schemas.openxmlformats.org/drawingml/2006/main">
-            <a:off x="7524750" y="4572000"/>
-            <a:ext cx="4076700" cy="9525"/>
+              <a:t>Evidence chips point back to exact due dates, requirements, and rubric text.</a:t>
+            </a:r>
+          </a:p>
+        </p:txBody>
+      </p:sp>
+      <p:sp>
+        <p:nvSpPr>
+          <p:cNvPr id="13" name="rule-830-486">
+            <a:extLst xmlns:a="http://schemas.openxmlformats.org/drawingml/2006/main">
+              <a:ext uri="{FF2B5EF4-FFF2-40B4-BE49-F238E27FC236}">
+                <a16:creationId xmlns:a16="http://schemas.microsoft.com/office/drawing/2014/main" id="{83B0F387-77A3-46B5-9EA7-C9B5E0163009}"/>
+              </a:ext>
+            </a:extLst>
+          </p:cNvPr>
+          <p:cNvSpPr>
+            <a:spLocks xmlns:a="http://schemas.openxmlformats.org/drawingml/2006/main" noGrp="1"/>
+          </p:cNvSpPr>
+          <p:nvPr/>
+        </p:nvSpPr>
+        <p:spPr>
+          <a:xfrm xmlns:a="http://schemas.openxmlformats.org/drawingml/2006/main">
+            <a:off x="7905750" y="4629150"/>
+            <a:ext cx="3619500" cy="9525"/>
           </a:xfrm>
           <a:prstGeom xmlns:a="http://schemas.openxmlformats.org/drawingml/2006/main" prst="rect">
             <a:avLst/>
@@ -5190,78 +6545,72 @@
       </p:sp>
       <p:sp>
         <p:nvSpPr>
-          <p:cNvPr id="14" name="label-Plan-790">
-            <a:extLst xmlns:a="http://schemas.openxmlformats.org/drawingml/2006/main">
-              <a:ext uri="{FF2B5EF4-FFF2-40B4-BE49-F238E27FC236}">
-                <a16:creationId xmlns:a16="http://schemas.microsoft.com/office/drawing/2014/main" id="{89E9D6C1-30CD-4288-883F-755A71566565}"/>
-              </a:ext>
-            </a:extLst>
-          </p:cNvPr>
-          <p:cNvSpPr>
-            <a:spLocks xmlns:a="http://schemas.openxmlformats.org/drawingml/2006/main" noGrp="1"/>
-          </p:cNvSpPr>
-          <p:nvPr/>
-        </p:nvSpPr>
-        <p:spPr>
-          <a:xfrm xmlns:a="http://schemas.openxmlformats.org/drawingml/2006/main">
-            <a:off x="7524750" y="4762500"/>
-            <a:ext cx="1066800" cy="285750"/>
-          </a:xfrm>
-          <a:prstGeom xmlns:a="http://schemas.openxmlformats.org/drawingml/2006/main" prst="roundRect">
-            <a:avLst>
-              <a:gd name="adj" fmla="val 26667"/>
-            </a:avLst>
-          </a:prstGeom>
-          <a:solidFill xmlns:a="http://schemas.openxmlformats.org/drawingml/2006/main">
-            <a:srgbClr val="DCECE8"/>
-          </a:solidFill>
-          <a:ln xmlns:a="http://schemas.openxmlformats.org/drawingml/2006/main" w="9525">
-            <a:solidFill>
-              <a:srgbClr val="DCECE8"/>
-            </a:solidFill>
-            <a:prstDash val="solid"/>
-          </a:ln>
-        </p:spPr>
-        <p:txBody>
-          <a:bodyPr xmlns:a="http://schemas.openxmlformats.org/drawingml/2006/main" anchor="ctr"/>
-          <a:lstStyle xmlns:a="http://schemas.openxmlformats.org/drawingml/2006/main"/>
-          <a:p xmlns:a="http://schemas.openxmlformats.org/drawingml/2006/main">
-            <a:pPr algn="ctr">
-              <a:defRPr sz="900" b="1">
+          <p:cNvPr id="14" name="coach-label-2">
+            <a:extLst xmlns:a="http://schemas.openxmlformats.org/drawingml/2006/main">
+              <a:ext uri="{FF2B5EF4-FFF2-40B4-BE49-F238E27FC236}">
+                <a16:creationId xmlns:a16="http://schemas.microsoft.com/office/drawing/2014/main" id="{993E66AE-10AA-4265-B8AB-AE761AF0CC42}"/>
+              </a:ext>
+            </a:extLst>
+          </p:cNvPr>
+          <p:cNvSpPr>
+            <a:spLocks xmlns:a="http://schemas.openxmlformats.org/drawingml/2006/main" noGrp="1"/>
+          </p:cNvSpPr>
+          <p:nvPr/>
+        </p:nvSpPr>
+        <p:spPr>
+          <a:xfrm xmlns:a="http://schemas.openxmlformats.org/drawingml/2006/main">
+            <a:off x="7905750" y="4762500"/>
+            <a:ext cx="1047750" cy="266700"/>
+          </a:xfrm>
+          <a:prstGeom xmlns:a="http://schemas.openxmlformats.org/drawingml/2006/main" prst="rect">
+            <a:avLst/>
+          </a:prstGeom>
+          <a:noFill xmlns:a="http://schemas.openxmlformats.org/drawingml/2006/main"/>
+          <a:ln xmlns:a="http://schemas.openxmlformats.org/drawingml/2006/main" w="0">
+            <a:noFill/>
+            <a:prstDash val="solid"/>
+          </a:ln>
+        </p:spPr>
+        <p:txBody>
+          <a:bodyPr xmlns:a="http://schemas.openxmlformats.org/drawingml/2006/main" anchor="t"/>
+          <a:lstStyle xmlns:a="http://schemas.openxmlformats.org/drawingml/2006/main"/>
+          <a:p xmlns:a="http://schemas.openxmlformats.org/drawingml/2006/main">
+            <a:pPr algn="l">
+              <a:defRPr sz="975" b="1">
                 <a:solidFill>
                   <a:srgbClr val="2F7D74"/>
                 </a:solidFill>
               </a:defRPr>
             </a:pPr>
             <a:r>
-              <a:rPr sz="900" b="1">
+              <a:rPr sz="975" b="1">
                 <a:solidFill>
                   <a:srgbClr val="2F7D74"/>
                 </a:solidFill>
               </a:rPr>
-              <a:t>PLAN</a:t>
-            </a:r>
-          </a:p>
-        </p:txBody>
-      </p:sp>
-      <p:sp>
-        <p:nvSpPr>
-          <p:cNvPr id="15" name="coach-item-2">
-            <a:extLst xmlns:a="http://schemas.openxmlformats.org/drawingml/2006/main">
-              <a:ext uri="{FF2B5EF4-FFF2-40B4-BE49-F238E27FC236}">
-                <a16:creationId xmlns:a16="http://schemas.microsoft.com/office/drawing/2014/main" id="{0AB40736-A9F2-4347-A28D-681EE7361A49}"/>
-              </a:ext>
-            </a:extLst>
-          </p:cNvPr>
-          <p:cNvSpPr>
-            <a:spLocks xmlns:a="http://schemas.openxmlformats.org/drawingml/2006/main" noGrp="1"/>
-          </p:cNvSpPr>
-          <p:nvPr/>
-        </p:nvSpPr>
-        <p:spPr>
-          <a:xfrm xmlns:a="http://schemas.openxmlformats.org/drawingml/2006/main">
-            <a:off x="8839200" y="4743450"/>
-            <a:ext cx="2762250" cy="895350"/>
+              <a:t>ACT</a:t>
+            </a:r>
+          </a:p>
+        </p:txBody>
+      </p:sp>
+      <p:sp>
+        <p:nvSpPr>
+          <p:cNvPr id="15" name="coach-copy-2">
+            <a:extLst xmlns:a="http://schemas.openxmlformats.org/drawingml/2006/main">
+              <a:ext uri="{FF2B5EF4-FFF2-40B4-BE49-F238E27FC236}">
+                <a16:creationId xmlns:a16="http://schemas.microsoft.com/office/drawing/2014/main" id="{FBF6161E-81B5-4FFD-BDF2-89AA11C7DCE7}"/>
+              </a:ext>
+            </a:extLst>
+          </p:cNvPr>
+          <p:cNvSpPr>
+            <a:spLocks xmlns:a="http://schemas.openxmlformats.org/drawingml/2006/main" noGrp="1"/>
+          </p:cNvSpPr>
+          <p:nvPr/>
+        </p:nvSpPr>
+        <p:spPr>
+          <a:xfrm xmlns:a="http://schemas.openxmlformats.org/drawingml/2006/main">
+            <a:off x="7905750" y="5105400"/>
+            <a:ext cx="3619500" cy="666750"/>
           </a:xfrm>
           <a:prstGeom xmlns:a="http://schemas.openxmlformats.org/drawingml/2006/main" prst="rect">
             <a:avLst/>
@@ -5277,19 +6626,19 @@
           <a:lstStyle xmlns:a="http://schemas.openxmlformats.org/drawingml/2006/main"/>
           <a:p xmlns:a="http://schemas.openxmlformats.org/drawingml/2006/main">
             <a:pPr algn="l">
-              <a:defRPr sz="1350" b="0">
+              <a:defRPr sz="1425" b="0">
                 <a:solidFill>
                   <a:srgbClr val="647078"/>
                 </a:solidFill>
               </a:defRPr>
             </a:pPr>
             <a:r>
-              <a:rPr sz="1350" b="0">
+              <a:rPr sz="1425" b="0">
                 <a:solidFill>
                   <a:srgbClr val="647078"/>
                 </a:solidFill>
               </a:rPr>
-              <a:t>Recommends the next small actions and keeps the student responsible for the final assessed work.</a:t>
+              <a:t>Any suggested next step can be added directly to the assignment checklist.</a:t>
             </a:r>
           </a:p>
         </p:txBody>
@@ -5297,7 +6646,7 @@
     </p:spTree>
     <p:extLst>
       <p:ext uri="{BB962C8B-B14F-4D97-AF65-F5344CB8AC3E}">
-        <p14:creationId xmlns:p14="http://schemas.microsoft.com/office/powerpoint/2010/main" val="1329392505"/>
+        <p14:creationId xmlns:p14="http://schemas.microsoft.com/office/powerpoint/2010/main" val="671696357"/>
       </p:ext>
     </p:extLst>
   </p:cSld>
@@ -5325,10 +6674,10 @@
       </p:grpSpPr>
       <p:sp>
         <p:nvSpPr>
-          <p:cNvPr id="29" name="section-6">
-            <a:extLst xmlns:a="http://schemas.openxmlformats.org/drawingml/2006/main">
-              <a:ext uri="{FF2B5EF4-FFF2-40B4-BE49-F238E27FC236}">
-                <a16:creationId xmlns:a16="http://schemas.microsoft.com/office/drawing/2014/main" id="{1387D24D-8B74-4A49-80F4-75F49B490E37}"/>
+          <p:cNvPr id="24" name="section-6">
+            <a:extLst xmlns:a="http://schemas.openxmlformats.org/drawingml/2006/main">
+              <a:ext uri="{FF2B5EF4-FFF2-40B4-BE49-F238E27FC236}">
+                <a16:creationId xmlns:a16="http://schemas.microsoft.com/office/drawing/2014/main" id="{8CB14444-5BF1-458E-B6CA-D714B48815F4}"/>
               </a:ext>
             </a:extLst>
           </p:cNvPr>
@@ -5368,7 +6717,7 @@
                   <a:srgbClr val="2F7D74"/>
                 </a:solidFill>
               </a:rPr>
-              <a:t>SECURE ARCHITECTURE</a:t>
+              <a:t>DAILY WORKFLOW</a:t>
             </a:r>
           </a:p>
         </p:txBody>
@@ -5378,7 +6727,7 @@
           <p:cNvPr id="2" name="page-6">
             <a:extLst xmlns:a="http://schemas.openxmlformats.org/drawingml/2006/main">
               <a:ext uri="{FF2B5EF4-FFF2-40B4-BE49-F238E27FC236}">
-                <a16:creationId xmlns:a16="http://schemas.microsoft.com/office/drawing/2014/main" id="{D70170EB-332C-46D7-A8CB-BECDCF3F7B87}"/>
+                <a16:creationId xmlns:a16="http://schemas.microsoft.com/office/drawing/2014/main" id="{B2FD077E-3200-4466-8D6E-C362B7AA7890}"/>
               </a:ext>
             </a:extLst>
           </p:cNvPr>
@@ -5428,7 +6777,7 @@
           <p:cNvPr id="3" name="rule-48-66">
             <a:extLst xmlns:a="http://schemas.openxmlformats.org/drawingml/2006/main">
               <a:ext uri="{FF2B5EF4-FFF2-40B4-BE49-F238E27FC236}">
-                <a16:creationId xmlns:a16="http://schemas.microsoft.com/office/drawing/2014/main" id="{CB7D1C9B-98C2-40C9-B2C2-F13867E13F62}"/>
+                <a16:creationId xmlns:a16="http://schemas.microsoft.com/office/drawing/2014/main" id="{85D89935-F0FE-4CE4-81D2-26CA31D1C6A9}"/>
               </a:ext>
             </a:extLst>
           </p:cNvPr>
@@ -5456,10 +6805,10 @@
       </p:sp>
       <p:sp>
         <p:nvSpPr>
-          <p:cNvPr id="4" name="title-The API key never enters the browser.">
-            <a:extLst xmlns:a="http://schemas.openxmlformats.org/drawingml/2006/main">
-              <a:ext uri="{FF2B5EF4-FFF2-40B4-BE49-F238E27FC236}">
-                <a16:creationId xmlns:a16="http://schemas.microsoft.com/office/drawing/2014/main" id="{6CB4BEA3-37A1-48EE-BAC2-243417E5A73A}"/>
+          <p:cNvPr id="4" name="title-Planning and final checks stay connected.">
+            <a:extLst xmlns:a="http://schemas.openxmlformats.org/drawingml/2006/main">
+              <a:ext uri="{FF2B5EF4-FFF2-40B4-BE49-F238E27FC236}">
+                <a16:creationId xmlns:a16="http://schemas.microsoft.com/office/drawing/2014/main" id="{BA1F6E61-854E-4D9F-8DF0-A550F6C97912}"/>
               </a:ext>
             </a:extLst>
           </p:cNvPr>
@@ -5499,17 +6848,17 @@
                   <a:srgbClr val="141C22"/>
                 </a:solidFill>
               </a:rPr>
-              <a:t>The API key never enters the browser.</a:t>
-            </a:r>
-          </a:p>
-        </p:txBody>
-      </p:sp>
-      <p:sp>
-        <p:nvSpPr>
-          <p:cNvPr id="5" name="subtitle-The API key never enters the browser.">
-            <a:extLst xmlns:a="http://schemas.openxmlformats.org/drawingml/2006/main">
-              <a:ext uri="{FF2B5EF4-FFF2-40B4-BE49-F238E27FC236}">
-                <a16:creationId xmlns:a16="http://schemas.microsoft.com/office/drawing/2014/main" id="{6ECB1E01-100D-4876-9F9F-C3BF20E40037}"/>
+              <a:t>Planning and final checks stay connected.</a:t>
+            </a:r>
+          </a:p>
+        </p:txBody>
+      </p:sp>
+      <p:sp>
+        <p:nvSpPr>
+          <p:cNvPr id="5" name="subtitle-Planning and final checks stay connected.">
+            <a:extLst xmlns:a="http://schemas.openxmlformats.org/drawingml/2006/main">
+              <a:ext uri="{FF2B5EF4-FFF2-40B4-BE49-F238E27FC236}">
+                <a16:creationId xmlns:a16="http://schemas.microsoft.com/office/drawing/2014/main" id="{46DC5EAE-2D0B-4AE2-856D-CD2D96C26E59}"/>
               </a:ext>
             </a:extLst>
           </p:cNvPr>
@@ -5549,41 +6898,765 @@
                   <a:srgbClr val="647078"/>
                 </a:solidFill>
               </a:rPr>
-              <a:t>ClassPilot sends only bounded course context through a same-origin-aware server proxy.</a:t>
-            </a:r>
-          </a:p>
-        </p:txBody>
-      </p:sp>
-      <p:sp>
-        <p:nvSpPr>
-          <p:cNvPr id="6" name="architecture-node-0">
-            <a:extLst xmlns:a="http://schemas.openxmlformats.org/drawingml/2006/main">
-              <a:ext uri="{FF2B5EF4-FFF2-40B4-BE49-F238E27FC236}">
-                <a16:creationId xmlns:a16="http://schemas.microsoft.com/office/drawing/2014/main" id="{1AF8DCEE-A280-4952-B776-AD635192AF72}"/>
-              </a:ext>
-            </a:extLst>
-          </p:cNvPr>
-          <p:cNvSpPr>
-            <a:spLocks xmlns:a="http://schemas.openxmlformats.org/drawingml/2006/main" noGrp="1"/>
-          </p:cNvSpPr>
-          <p:nvPr/>
-        </p:nvSpPr>
-        <p:spPr>
-          <a:xfrm xmlns:a="http://schemas.openxmlformats.org/drawingml/2006/main">
-            <a:off x="514350" y="2571750"/>
-            <a:ext cx="2324100" cy="2095500"/>
+              <a:t>ClassPilot supports the quiet work between importing an assignment and actually submitting it.</a:t>
+            </a:r>
+          </a:p>
+        </p:txBody>
+      </p:sp>
+      <p:sp>
+        <p:nvSpPr>
+          <p:cNvPr id="6" name="daily-tag-0">
+            <a:extLst xmlns:a="http://schemas.openxmlformats.org/drawingml/2006/main">
+              <a:ext uri="{FF2B5EF4-FFF2-40B4-BE49-F238E27FC236}">
+                <a16:creationId xmlns:a16="http://schemas.microsoft.com/office/drawing/2014/main" id="{37611E16-AEB6-4943-A058-FA00F8A21D83}"/>
+              </a:ext>
+            </a:extLst>
+          </p:cNvPr>
+          <p:cNvSpPr>
+            <a:spLocks xmlns:a="http://schemas.openxmlformats.org/drawingml/2006/main" noGrp="1"/>
+          </p:cNvSpPr>
+          <p:nvPr/>
+        </p:nvSpPr>
+        <p:spPr>
+          <a:xfrm xmlns:a="http://schemas.openxmlformats.org/drawingml/2006/main">
+            <a:off x="552450" y="2333625"/>
+            <a:ext cx="1257300" cy="247650"/>
+          </a:xfrm>
+          <a:prstGeom xmlns:a="http://schemas.openxmlformats.org/drawingml/2006/main" prst="rect">
+            <a:avLst/>
+          </a:prstGeom>
+          <a:noFill xmlns:a="http://schemas.openxmlformats.org/drawingml/2006/main"/>
+          <a:ln xmlns:a="http://schemas.openxmlformats.org/drawingml/2006/main" w="0">
+            <a:noFill/>
+            <a:prstDash val="solid"/>
+          </a:ln>
+        </p:spPr>
+        <p:txBody>
+          <a:bodyPr xmlns:a="http://schemas.openxmlformats.org/drawingml/2006/main" anchor="t"/>
+          <a:lstStyle xmlns:a="http://schemas.openxmlformats.org/drawingml/2006/main"/>
+          <a:p xmlns:a="http://schemas.openxmlformats.org/drawingml/2006/main">
+            <a:pPr algn="l">
+              <a:defRPr sz="900" b="1">
+                <a:solidFill>
+                  <a:srgbClr val="2F7D74"/>
+                </a:solidFill>
+              </a:defRPr>
+            </a:pPr>
+            <a:r>
+              <a:rPr sz="900" b="1">
+                <a:solidFill>
+                  <a:srgbClr val="2F7D74"/>
+                </a:solidFill>
+              </a:rPr>
+              <a:t>TODAY</a:t>
+            </a:r>
+          </a:p>
+        </p:txBody>
+      </p:sp>
+      <p:sp>
+        <p:nvSpPr>
+          <p:cNvPr id="7" name="daily-title-0">
+            <a:extLst xmlns:a="http://schemas.openxmlformats.org/drawingml/2006/main">
+              <a:ext uri="{FF2B5EF4-FFF2-40B4-BE49-F238E27FC236}">
+                <a16:creationId xmlns:a16="http://schemas.microsoft.com/office/drawing/2014/main" id="{7EE8623E-F6BC-475E-960D-94A471563D7E}"/>
+              </a:ext>
+            </a:extLst>
+          </p:cNvPr>
+          <p:cNvSpPr>
+            <a:spLocks xmlns:a="http://schemas.openxmlformats.org/drawingml/2006/main" noGrp="1"/>
+          </p:cNvSpPr>
+          <p:nvPr/>
+        </p:nvSpPr>
+        <p:spPr>
+          <a:xfrm xmlns:a="http://schemas.openxmlformats.org/drawingml/2006/main">
+            <a:off x="2076450" y="2266950"/>
+            <a:ext cx="2476500" cy="361950"/>
+          </a:xfrm>
+          <a:prstGeom xmlns:a="http://schemas.openxmlformats.org/drawingml/2006/main" prst="rect">
+            <a:avLst/>
+          </a:prstGeom>
+          <a:noFill xmlns:a="http://schemas.openxmlformats.org/drawingml/2006/main"/>
+          <a:ln xmlns:a="http://schemas.openxmlformats.org/drawingml/2006/main" w="0">
+            <a:noFill/>
+            <a:prstDash val="solid"/>
+          </a:ln>
+        </p:spPr>
+        <p:txBody>
+          <a:bodyPr xmlns:a="http://schemas.openxmlformats.org/drawingml/2006/main" anchor="t"/>
+          <a:lstStyle xmlns:a="http://schemas.openxmlformats.org/drawingml/2006/main"/>
+          <a:p xmlns:a="http://schemas.openxmlformats.org/drawingml/2006/main">
+            <a:pPr algn="l">
+              <a:defRPr sz="1725" b="1">
+                <a:solidFill>
+                  <a:srgbClr val="141C22"/>
+                </a:solidFill>
+              </a:defRPr>
+            </a:pPr>
+            <a:r>
+              <a:rPr sz="1725" b="1">
+                <a:solidFill>
+                  <a:srgbClr val="141C22"/>
+                </a:solidFill>
+              </a:rPr>
+              <a:t>One-click focus</a:t>
+            </a:r>
+          </a:p>
+        </p:txBody>
+      </p:sp>
+      <p:sp>
+        <p:nvSpPr>
+          <p:cNvPr id="8" name="daily-copy-0">
+            <a:extLst xmlns:a="http://schemas.openxmlformats.org/drawingml/2006/main">
+              <a:ext uri="{FF2B5EF4-FFF2-40B4-BE49-F238E27FC236}">
+                <a16:creationId xmlns:a16="http://schemas.microsoft.com/office/drawing/2014/main" id="{DBBC28C7-FC68-4F58-A9AA-853A95AFFCE4}"/>
+              </a:ext>
+            </a:extLst>
+          </p:cNvPr>
+          <p:cNvSpPr>
+            <a:spLocks xmlns:a="http://schemas.openxmlformats.org/drawingml/2006/main" noGrp="1"/>
+          </p:cNvSpPr>
+          <p:nvPr/>
+        </p:nvSpPr>
+        <p:spPr>
+          <a:xfrm xmlns:a="http://schemas.openxmlformats.org/drawingml/2006/main">
+            <a:off x="4781550" y="2266950"/>
+            <a:ext cx="6705600" cy="552450"/>
+          </a:xfrm>
+          <a:prstGeom xmlns:a="http://schemas.openxmlformats.org/drawingml/2006/main" prst="rect">
+            <a:avLst/>
+          </a:prstGeom>
+          <a:noFill xmlns:a="http://schemas.openxmlformats.org/drawingml/2006/main"/>
+          <a:ln xmlns:a="http://schemas.openxmlformats.org/drawingml/2006/main" w="0">
+            <a:noFill/>
+            <a:prstDash val="solid"/>
+          </a:ln>
+        </p:spPr>
+        <p:txBody>
+          <a:bodyPr xmlns:a="http://schemas.openxmlformats.org/drawingml/2006/main" anchor="t"/>
+          <a:lstStyle xmlns:a="http://schemas.openxmlformats.org/drawingml/2006/main"/>
+          <a:p xmlns:a="http://schemas.openxmlformats.org/drawingml/2006/main">
+            <a:pPr algn="l">
+              <a:defRPr sz="1275" b="0">
+                <a:solidFill>
+                  <a:srgbClr val="647078"/>
+                </a:solidFill>
+              </a:defRPr>
+            </a:pPr>
+            <a:r>
+              <a:rPr sz="1275" b="0">
+                <a:solidFill>
+                  <a:srgbClr val="647078"/>
+                </a:solidFill>
+              </a:rPr>
+              <a:t>Shows one next action, starts a focus session, and advances when a checklist item is completed.</a:t>
+            </a:r>
+          </a:p>
+        </p:txBody>
+      </p:sp>
+      <p:sp>
+        <p:nvSpPr>
+          <p:cNvPr id="9" name="rule-58-310">
+            <a:extLst xmlns:a="http://schemas.openxmlformats.org/drawingml/2006/main">
+              <a:ext uri="{FF2B5EF4-FFF2-40B4-BE49-F238E27FC236}">
+                <a16:creationId xmlns:a16="http://schemas.microsoft.com/office/drawing/2014/main" id="{C85943EB-66D2-4B7E-A49A-DC499099AB5D}"/>
+              </a:ext>
+            </a:extLst>
+          </p:cNvPr>
+          <p:cNvSpPr>
+            <a:spLocks xmlns:a="http://schemas.openxmlformats.org/drawingml/2006/main" noGrp="1"/>
+          </p:cNvSpPr>
+          <p:nvPr/>
+        </p:nvSpPr>
+        <p:spPr>
+          <a:xfrm xmlns:a="http://schemas.openxmlformats.org/drawingml/2006/main">
+            <a:off x="552450" y="2952750"/>
+            <a:ext cx="10934700" cy="9525"/>
+          </a:xfrm>
+          <a:prstGeom xmlns:a="http://schemas.openxmlformats.org/drawingml/2006/main" prst="rect">
+            <a:avLst/>
+          </a:prstGeom>
+          <a:solidFill xmlns:a="http://schemas.openxmlformats.org/drawingml/2006/main">
+            <a:srgbClr val="C8CECA"/>
+          </a:solidFill>
+          <a:ln xmlns:a="http://schemas.openxmlformats.org/drawingml/2006/main" w="0">
+            <a:noFill/>
+            <a:prstDash val="solid"/>
+          </a:ln>
+        </p:spPr>
+      </p:sp>
+      <p:sp>
+        <p:nvSpPr>
+          <p:cNvPr id="10" name="daily-tag-1">
+            <a:extLst xmlns:a="http://schemas.openxmlformats.org/drawingml/2006/main">
+              <a:ext uri="{FF2B5EF4-FFF2-40B4-BE49-F238E27FC236}">
+                <a16:creationId xmlns:a16="http://schemas.microsoft.com/office/drawing/2014/main" id="{CE66F96E-AE5B-4C51-9D48-57AA6AA7759F}"/>
+              </a:ext>
+            </a:extLst>
+          </p:cNvPr>
+          <p:cNvSpPr>
+            <a:spLocks xmlns:a="http://schemas.openxmlformats.org/drawingml/2006/main" noGrp="1"/>
+          </p:cNvSpPr>
+          <p:nvPr/>
+        </p:nvSpPr>
+        <p:spPr>
+          <a:xfrm xmlns:a="http://schemas.openxmlformats.org/drawingml/2006/main">
+            <a:off x="552450" y="3209925"/>
+            <a:ext cx="1257300" cy="247650"/>
+          </a:xfrm>
+          <a:prstGeom xmlns:a="http://schemas.openxmlformats.org/drawingml/2006/main" prst="rect">
+            <a:avLst/>
+          </a:prstGeom>
+          <a:noFill xmlns:a="http://schemas.openxmlformats.org/drawingml/2006/main"/>
+          <a:ln xmlns:a="http://schemas.openxmlformats.org/drawingml/2006/main" w="0">
+            <a:noFill/>
+            <a:prstDash val="solid"/>
+          </a:ln>
+        </p:spPr>
+        <p:txBody>
+          <a:bodyPr xmlns:a="http://schemas.openxmlformats.org/drawingml/2006/main" anchor="t"/>
+          <a:lstStyle xmlns:a="http://schemas.openxmlformats.org/drawingml/2006/main"/>
+          <a:p xmlns:a="http://schemas.openxmlformats.org/drawingml/2006/main">
+            <a:pPr algn="l">
+              <a:defRPr sz="900" b="1">
+                <a:solidFill>
+                  <a:srgbClr val="2F7D74"/>
+                </a:solidFill>
+              </a:defRPr>
+            </a:pPr>
+            <a:r>
+              <a:rPr sz="900" b="1">
+                <a:solidFill>
+                  <a:srgbClr val="2F7D74"/>
+                </a:solidFill>
+              </a:rPr>
+              <a:t>SCHEDULE</a:t>
+            </a:r>
+          </a:p>
+        </p:txBody>
+      </p:sp>
+      <p:sp>
+        <p:nvSpPr>
+          <p:cNvPr id="11" name="daily-title-1">
+            <a:extLst xmlns:a="http://schemas.openxmlformats.org/drawingml/2006/main">
+              <a:ext uri="{FF2B5EF4-FFF2-40B4-BE49-F238E27FC236}">
+                <a16:creationId xmlns:a16="http://schemas.microsoft.com/office/drawing/2014/main" id="{C45B8E18-85A2-43A0-8DC4-45E8EF0AB5D8}"/>
+              </a:ext>
+            </a:extLst>
+          </p:cNvPr>
+          <p:cNvSpPr>
+            <a:spLocks xmlns:a="http://schemas.openxmlformats.org/drawingml/2006/main" noGrp="1"/>
+          </p:cNvSpPr>
+          <p:nvPr/>
+        </p:nvSpPr>
+        <p:spPr>
+          <a:xfrm xmlns:a="http://schemas.openxmlformats.org/drawingml/2006/main">
+            <a:off x="2076450" y="3143250"/>
+            <a:ext cx="2476500" cy="361950"/>
+          </a:xfrm>
+          <a:prstGeom xmlns:a="http://schemas.openxmlformats.org/drawingml/2006/main" prst="rect">
+            <a:avLst/>
+          </a:prstGeom>
+          <a:noFill xmlns:a="http://schemas.openxmlformats.org/drawingml/2006/main"/>
+          <a:ln xmlns:a="http://schemas.openxmlformats.org/drawingml/2006/main" w="0">
+            <a:noFill/>
+            <a:prstDash val="solid"/>
+          </a:ln>
+        </p:spPr>
+        <p:txBody>
+          <a:bodyPr xmlns:a="http://schemas.openxmlformats.org/drawingml/2006/main" anchor="t"/>
+          <a:lstStyle xmlns:a="http://schemas.openxmlformats.org/drawingml/2006/main"/>
+          <a:p xmlns:a="http://schemas.openxmlformats.org/drawingml/2006/main">
+            <a:pPr algn="l">
+              <a:defRPr sz="1725" b="1">
+                <a:solidFill>
+                  <a:srgbClr val="141C22"/>
+                </a:solidFill>
+              </a:defRPr>
+            </a:pPr>
+            <a:r>
+              <a:rPr sz="1725" b="1">
+                <a:solidFill>
+                  <a:srgbClr val="141C22"/>
+                </a:solidFill>
+              </a:rPr>
+              <a:t>Adaptive study plan</a:t>
+            </a:r>
+          </a:p>
+        </p:txBody>
+      </p:sp>
+      <p:sp>
+        <p:nvSpPr>
+          <p:cNvPr id="12" name="daily-copy-1">
+            <a:extLst xmlns:a="http://schemas.openxmlformats.org/drawingml/2006/main">
+              <a:ext uri="{FF2B5EF4-FFF2-40B4-BE49-F238E27FC236}">
+                <a16:creationId xmlns:a16="http://schemas.microsoft.com/office/drawing/2014/main" id="{2FD19688-DE13-48C8-903A-30F6C96F9082}"/>
+              </a:ext>
+            </a:extLst>
+          </p:cNvPr>
+          <p:cNvSpPr>
+            <a:spLocks xmlns:a="http://schemas.openxmlformats.org/drawingml/2006/main" noGrp="1"/>
+          </p:cNvSpPr>
+          <p:nvPr/>
+        </p:nvSpPr>
+        <p:spPr>
+          <a:xfrm xmlns:a="http://schemas.openxmlformats.org/drawingml/2006/main">
+            <a:off x="4781550" y="3143250"/>
+            <a:ext cx="6705600" cy="552450"/>
+          </a:xfrm>
+          <a:prstGeom xmlns:a="http://schemas.openxmlformats.org/drawingml/2006/main" prst="rect">
+            <a:avLst/>
+          </a:prstGeom>
+          <a:noFill xmlns:a="http://schemas.openxmlformats.org/drawingml/2006/main"/>
+          <a:ln xmlns:a="http://schemas.openxmlformats.org/drawingml/2006/main" w="0">
+            <a:noFill/>
+            <a:prstDash val="solid"/>
+          </a:ln>
+        </p:spPr>
+        <p:txBody>
+          <a:bodyPr xmlns:a="http://schemas.openxmlformats.org/drawingml/2006/main" anchor="t"/>
+          <a:lstStyle xmlns:a="http://schemas.openxmlformats.org/drawingml/2006/main"/>
+          <a:p xmlns:a="http://schemas.openxmlformats.org/drawingml/2006/main">
+            <a:pPr algn="l">
+              <a:defRPr sz="1275" b="0">
+                <a:solidFill>
+                  <a:srgbClr val="647078"/>
+                </a:solidFill>
+              </a:defRPr>
+            </a:pPr>
+            <a:r>
+              <a:rPr sz="1275" b="0">
+                <a:solidFill>
+                  <a:srgbClr val="647078"/>
+                </a:solidFill>
+              </a:rPr>
+              <a:t>Creates calendar sessions from due dates and unfinished work, then replans after progress changes.</a:t>
+            </a:r>
+          </a:p>
+        </p:txBody>
+      </p:sp>
+      <p:sp>
+        <p:nvSpPr>
+          <p:cNvPr id="13" name="rule-58-402">
+            <a:extLst xmlns:a="http://schemas.openxmlformats.org/drawingml/2006/main">
+              <a:ext uri="{FF2B5EF4-FFF2-40B4-BE49-F238E27FC236}">
+                <a16:creationId xmlns:a16="http://schemas.microsoft.com/office/drawing/2014/main" id="{F01DEEDF-28C9-4A54-96D5-BB504025E232}"/>
+              </a:ext>
+            </a:extLst>
+          </p:cNvPr>
+          <p:cNvSpPr>
+            <a:spLocks xmlns:a="http://schemas.openxmlformats.org/drawingml/2006/main" noGrp="1"/>
+          </p:cNvSpPr>
+          <p:nvPr/>
+        </p:nvSpPr>
+        <p:spPr>
+          <a:xfrm xmlns:a="http://schemas.openxmlformats.org/drawingml/2006/main">
+            <a:off x="552450" y="3829050"/>
+            <a:ext cx="10934700" cy="9525"/>
+          </a:xfrm>
+          <a:prstGeom xmlns:a="http://schemas.openxmlformats.org/drawingml/2006/main" prst="rect">
+            <a:avLst/>
+          </a:prstGeom>
+          <a:solidFill xmlns:a="http://schemas.openxmlformats.org/drawingml/2006/main">
+            <a:srgbClr val="C8CECA"/>
+          </a:solidFill>
+          <a:ln xmlns:a="http://schemas.openxmlformats.org/drawingml/2006/main" w="0">
+            <a:noFill/>
+            <a:prstDash val="solid"/>
+          </a:ln>
+        </p:spPr>
+      </p:sp>
+      <p:sp>
+        <p:nvSpPr>
+          <p:cNvPr id="14" name="daily-tag-2">
+            <a:extLst xmlns:a="http://schemas.openxmlformats.org/drawingml/2006/main">
+              <a:ext uri="{FF2B5EF4-FFF2-40B4-BE49-F238E27FC236}">
+                <a16:creationId xmlns:a16="http://schemas.microsoft.com/office/drawing/2014/main" id="{77A2A086-1FB7-449C-872C-ADE12A9916BD}"/>
+              </a:ext>
+            </a:extLst>
+          </p:cNvPr>
+          <p:cNvSpPr>
+            <a:spLocks xmlns:a="http://schemas.openxmlformats.org/drawingml/2006/main" noGrp="1"/>
+          </p:cNvSpPr>
+          <p:nvPr/>
+        </p:nvSpPr>
+        <p:spPr>
+          <a:xfrm xmlns:a="http://schemas.openxmlformats.org/drawingml/2006/main">
+            <a:off x="552450" y="4086225"/>
+            <a:ext cx="1257300" cy="247650"/>
+          </a:xfrm>
+          <a:prstGeom xmlns:a="http://schemas.openxmlformats.org/drawingml/2006/main" prst="rect">
+            <a:avLst/>
+          </a:prstGeom>
+          <a:noFill xmlns:a="http://schemas.openxmlformats.org/drawingml/2006/main"/>
+          <a:ln xmlns:a="http://schemas.openxmlformats.org/drawingml/2006/main" w="0">
+            <a:noFill/>
+            <a:prstDash val="solid"/>
+          </a:ln>
+        </p:spPr>
+        <p:txBody>
+          <a:bodyPr xmlns:a="http://schemas.openxmlformats.org/drawingml/2006/main" anchor="t"/>
+          <a:lstStyle xmlns:a="http://schemas.openxmlformats.org/drawingml/2006/main"/>
+          <a:p xmlns:a="http://schemas.openxmlformats.org/drawingml/2006/main">
+            <a:pPr algn="l">
+              <a:defRPr sz="900" b="1">
+                <a:solidFill>
+                  <a:srgbClr val="725E16"/>
+                </a:solidFill>
+              </a:defRPr>
+            </a:pPr>
+            <a:r>
+              <a:rPr sz="900" b="1">
+                <a:solidFill>
+                  <a:srgbClr val="725E16"/>
+                </a:solidFill>
+              </a:rPr>
+              <a:t>FINAL CHECK</a:t>
+            </a:r>
+          </a:p>
+        </p:txBody>
+      </p:sp>
+      <p:sp>
+        <p:nvSpPr>
+          <p:cNvPr id="15" name="daily-title-2">
+            <a:extLst xmlns:a="http://schemas.openxmlformats.org/drawingml/2006/main">
+              <a:ext uri="{FF2B5EF4-FFF2-40B4-BE49-F238E27FC236}">
+                <a16:creationId xmlns:a16="http://schemas.microsoft.com/office/drawing/2014/main" id="{14575ABB-FEFD-4078-8917-C04E5FCF514B}"/>
+              </a:ext>
+            </a:extLst>
+          </p:cNvPr>
+          <p:cNvSpPr>
+            <a:spLocks xmlns:a="http://schemas.openxmlformats.org/drawingml/2006/main" noGrp="1"/>
+          </p:cNvSpPr>
+          <p:nvPr/>
+        </p:nvSpPr>
+        <p:spPr>
+          <a:xfrm xmlns:a="http://schemas.openxmlformats.org/drawingml/2006/main">
+            <a:off x="2076450" y="4019550"/>
+            <a:ext cx="2476500" cy="361950"/>
+          </a:xfrm>
+          <a:prstGeom xmlns:a="http://schemas.openxmlformats.org/drawingml/2006/main" prst="rect">
+            <a:avLst/>
+          </a:prstGeom>
+          <a:noFill xmlns:a="http://schemas.openxmlformats.org/drawingml/2006/main"/>
+          <a:ln xmlns:a="http://schemas.openxmlformats.org/drawingml/2006/main" w="0">
+            <a:noFill/>
+            <a:prstDash val="solid"/>
+          </a:ln>
+        </p:spPr>
+        <p:txBody>
+          <a:bodyPr xmlns:a="http://schemas.openxmlformats.org/drawingml/2006/main" anchor="t"/>
+          <a:lstStyle xmlns:a="http://schemas.openxmlformats.org/drawingml/2006/main"/>
+          <a:p xmlns:a="http://schemas.openxmlformats.org/drawingml/2006/main">
+            <a:pPr algn="l">
+              <a:defRPr sz="1725" b="1">
+                <a:solidFill>
+                  <a:srgbClr val="141C22"/>
+                </a:solidFill>
+              </a:defRPr>
+            </a:pPr>
+            <a:r>
+              <a:rPr sz="1725" b="1">
+                <a:solidFill>
+                  <a:srgbClr val="141C22"/>
+                </a:solidFill>
+              </a:rPr>
+              <a:t>Submission readiness</a:t>
+            </a:r>
+          </a:p>
+        </p:txBody>
+      </p:sp>
+      <p:sp>
+        <p:nvSpPr>
+          <p:cNvPr id="16" name="daily-copy-2">
+            <a:extLst xmlns:a="http://schemas.openxmlformats.org/drawingml/2006/main">
+              <a:ext uri="{FF2B5EF4-FFF2-40B4-BE49-F238E27FC236}">
+                <a16:creationId xmlns:a16="http://schemas.microsoft.com/office/drawing/2014/main" id="{1F2A2494-FCF3-45B1-8746-38D06E30EA9C}"/>
+              </a:ext>
+            </a:extLst>
+          </p:cNvPr>
+          <p:cNvSpPr>
+            <a:spLocks xmlns:a="http://schemas.openxmlformats.org/drawingml/2006/main" noGrp="1"/>
+          </p:cNvSpPr>
+          <p:nvPr/>
+        </p:nvSpPr>
+        <p:spPr>
+          <a:xfrm xmlns:a="http://schemas.openxmlformats.org/drawingml/2006/main">
+            <a:off x="4781550" y="4019550"/>
+            <a:ext cx="6705600" cy="552450"/>
+          </a:xfrm>
+          <a:prstGeom xmlns:a="http://schemas.openxmlformats.org/drawingml/2006/main" prst="rect">
+            <a:avLst/>
+          </a:prstGeom>
+          <a:noFill xmlns:a="http://schemas.openxmlformats.org/drawingml/2006/main"/>
+          <a:ln xmlns:a="http://schemas.openxmlformats.org/drawingml/2006/main" w="0">
+            <a:noFill/>
+            <a:prstDash val="solid"/>
+          </a:ln>
+        </p:spPr>
+        <p:txBody>
+          <a:bodyPr xmlns:a="http://schemas.openxmlformats.org/drawingml/2006/main" anchor="t"/>
+          <a:lstStyle xmlns:a="http://schemas.openxmlformats.org/drawingml/2006/main"/>
+          <a:p xmlns:a="http://schemas.openxmlformats.org/drawingml/2006/main">
+            <a:pPr algn="l">
+              <a:defRPr sz="1275" b="0">
+                <a:solidFill>
+                  <a:srgbClr val="647078"/>
+                </a:solidFill>
+              </a:defRPr>
+            </a:pPr>
+            <a:r>
+              <a:rPr sz="1275" b="0">
+                <a:solidFill>
+                  <a:srgbClr val="647078"/>
+                </a:solidFill>
+              </a:rPr>
+              <a:t>Reads the uploaded file once, checks rubric coverage and deliverables, estimates a score range, and warns when AI-writing signals exceed 20%.</a:t>
+            </a:r>
+          </a:p>
+        </p:txBody>
+      </p:sp>
+      <p:sp>
+        <p:nvSpPr>
+          <p:cNvPr id="17" name="rule-58-494">
+            <a:extLst xmlns:a="http://schemas.openxmlformats.org/drawingml/2006/main">
+              <a:ext uri="{FF2B5EF4-FFF2-40B4-BE49-F238E27FC236}">
+                <a16:creationId xmlns:a16="http://schemas.microsoft.com/office/drawing/2014/main" id="{10EF45ED-858B-4012-AFFC-80F3E6513432}"/>
+              </a:ext>
+            </a:extLst>
+          </p:cNvPr>
+          <p:cNvSpPr>
+            <a:spLocks xmlns:a="http://schemas.openxmlformats.org/drawingml/2006/main" noGrp="1"/>
+          </p:cNvSpPr>
+          <p:nvPr/>
+        </p:nvSpPr>
+        <p:spPr>
+          <a:xfrm xmlns:a="http://schemas.openxmlformats.org/drawingml/2006/main">
+            <a:off x="552450" y="4705350"/>
+            <a:ext cx="10934700" cy="9525"/>
+          </a:xfrm>
+          <a:prstGeom xmlns:a="http://schemas.openxmlformats.org/drawingml/2006/main" prst="rect">
+            <a:avLst/>
+          </a:prstGeom>
+          <a:solidFill xmlns:a="http://schemas.openxmlformats.org/drawingml/2006/main">
+            <a:srgbClr val="C8CECA"/>
+          </a:solidFill>
+          <a:ln xmlns:a="http://schemas.openxmlformats.org/drawingml/2006/main" w="0">
+            <a:noFill/>
+            <a:prstDash val="solid"/>
+          </a:ln>
+        </p:spPr>
+      </p:sp>
+      <p:sp>
+        <p:nvSpPr>
+          <p:cNvPr id="18" name="daily-tag-3">
+            <a:extLst xmlns:a="http://schemas.openxmlformats.org/drawingml/2006/main">
+              <a:ext uri="{FF2B5EF4-FFF2-40B4-BE49-F238E27FC236}">
+                <a16:creationId xmlns:a16="http://schemas.microsoft.com/office/drawing/2014/main" id="{69EB1374-7B73-4A50-8901-085E51C968B3}"/>
+              </a:ext>
+            </a:extLst>
+          </p:cNvPr>
+          <p:cNvSpPr>
+            <a:spLocks xmlns:a="http://schemas.openxmlformats.org/drawingml/2006/main" noGrp="1"/>
+          </p:cNvSpPr>
+          <p:nvPr/>
+        </p:nvSpPr>
+        <p:spPr>
+          <a:xfrm xmlns:a="http://schemas.openxmlformats.org/drawingml/2006/main">
+            <a:off x="552450" y="4962525"/>
+            <a:ext cx="1257300" cy="247650"/>
+          </a:xfrm>
+          <a:prstGeom xmlns:a="http://schemas.openxmlformats.org/drawingml/2006/main" prst="rect">
+            <a:avLst/>
+          </a:prstGeom>
+          <a:noFill xmlns:a="http://schemas.openxmlformats.org/drawingml/2006/main"/>
+          <a:ln xmlns:a="http://schemas.openxmlformats.org/drawingml/2006/main" w="0">
+            <a:noFill/>
+            <a:prstDash val="solid"/>
+          </a:ln>
+        </p:spPr>
+        <p:txBody>
+          <a:bodyPr xmlns:a="http://schemas.openxmlformats.org/drawingml/2006/main" anchor="t"/>
+          <a:lstStyle xmlns:a="http://schemas.openxmlformats.org/drawingml/2006/main"/>
+          <a:p xmlns:a="http://schemas.openxmlformats.org/drawingml/2006/main">
+            <a:pPr algn="l">
+              <a:defRPr sz="900" b="1">
+                <a:solidFill>
+                  <a:srgbClr val="2F7D74"/>
+                </a:solidFill>
+              </a:defRPr>
+            </a:pPr>
+            <a:r>
+              <a:rPr sz="900" b="1">
+                <a:solidFill>
+                  <a:srgbClr val="2F7D74"/>
+                </a:solidFill>
+              </a:rPr>
+              <a:t>CANVAS</a:t>
+            </a:r>
+          </a:p>
+        </p:txBody>
+      </p:sp>
+      <p:sp>
+        <p:nvSpPr>
+          <p:cNvPr id="19" name="daily-title-3">
+            <a:extLst xmlns:a="http://schemas.openxmlformats.org/drawingml/2006/main">
+              <a:ext uri="{FF2B5EF4-FFF2-40B4-BE49-F238E27FC236}">
+                <a16:creationId xmlns:a16="http://schemas.microsoft.com/office/drawing/2014/main" id="{8F8A82F8-C305-41AD-BDC1-040DA59AEC54}"/>
+              </a:ext>
+            </a:extLst>
+          </p:cNvPr>
+          <p:cNvSpPr>
+            <a:spLocks xmlns:a="http://schemas.openxmlformats.org/drawingml/2006/main" noGrp="1"/>
+          </p:cNvSpPr>
+          <p:nvPr/>
+        </p:nvSpPr>
+        <p:spPr>
+          <a:xfrm xmlns:a="http://schemas.openxmlformats.org/drawingml/2006/main">
+            <a:off x="2076450" y="4895850"/>
+            <a:ext cx="2476500" cy="361950"/>
+          </a:xfrm>
+          <a:prstGeom xmlns:a="http://schemas.openxmlformats.org/drawingml/2006/main" prst="rect">
+            <a:avLst/>
+          </a:prstGeom>
+          <a:noFill xmlns:a="http://schemas.openxmlformats.org/drawingml/2006/main"/>
+          <a:ln xmlns:a="http://schemas.openxmlformats.org/drawingml/2006/main" w="0">
+            <a:noFill/>
+            <a:prstDash val="solid"/>
+          </a:ln>
+        </p:spPr>
+        <p:txBody>
+          <a:bodyPr xmlns:a="http://schemas.openxmlformats.org/drawingml/2006/main" anchor="t"/>
+          <a:lstStyle xmlns:a="http://schemas.openxmlformats.org/drawingml/2006/main"/>
+          <a:p xmlns:a="http://schemas.openxmlformats.org/drawingml/2006/main">
+            <a:pPr algn="l">
+              <a:defRPr sz="1725" b="1">
+                <a:solidFill>
+                  <a:srgbClr val="141C22"/>
+                </a:solidFill>
+              </a:defRPr>
+            </a:pPr>
+            <a:r>
+              <a:rPr sz="1725" b="1">
+                <a:solidFill>
+                  <a:srgbClr val="141C22"/>
+                </a:solidFill>
+              </a:rPr>
+              <a:t>Read-only sync</a:t>
+            </a:r>
+          </a:p>
+        </p:txBody>
+      </p:sp>
+      <p:sp>
+        <p:nvSpPr>
+          <p:cNvPr id="20" name="daily-copy-3">
+            <a:extLst xmlns:a="http://schemas.openxmlformats.org/drawingml/2006/main">
+              <a:ext uri="{FF2B5EF4-FFF2-40B4-BE49-F238E27FC236}">
+                <a16:creationId xmlns:a16="http://schemas.microsoft.com/office/drawing/2014/main" id="{729FC4B9-3FED-41EB-A1A5-6ADCBFD787F9}"/>
+              </a:ext>
+            </a:extLst>
+          </p:cNvPr>
+          <p:cNvSpPr>
+            <a:spLocks xmlns:a="http://schemas.openxmlformats.org/drawingml/2006/main" noGrp="1"/>
+          </p:cNvSpPr>
+          <p:nvPr/>
+        </p:nvSpPr>
+        <p:spPr>
+          <a:xfrm xmlns:a="http://schemas.openxmlformats.org/drawingml/2006/main">
+            <a:off x="4781550" y="4895850"/>
+            <a:ext cx="6705600" cy="552450"/>
+          </a:xfrm>
+          <a:prstGeom xmlns:a="http://schemas.openxmlformats.org/drawingml/2006/main" prst="rect">
+            <a:avLst/>
+          </a:prstGeom>
+          <a:noFill xmlns:a="http://schemas.openxmlformats.org/drawingml/2006/main"/>
+          <a:ln xmlns:a="http://schemas.openxmlformats.org/drawingml/2006/main" w="0">
+            <a:noFill/>
+            <a:prstDash val="solid"/>
+          </a:ln>
+        </p:spPr>
+        <p:txBody>
+          <a:bodyPr xmlns:a="http://schemas.openxmlformats.org/drawingml/2006/main" anchor="t"/>
+          <a:lstStyle xmlns:a="http://schemas.openxmlformats.org/drawingml/2006/main"/>
+          <a:p xmlns:a="http://schemas.openxmlformats.org/drawingml/2006/main">
+            <a:pPr algn="l">
+              <a:defRPr sz="1275" b="0">
+                <a:solidFill>
+                  <a:srgbClr val="647078"/>
+                </a:solidFill>
+              </a:defRPr>
+            </a:pPr>
+            <a:r>
+              <a:rPr sz="1275" b="0">
+                <a:solidFill>
+                  <a:srgbClr val="647078"/>
+                </a:solidFill>
+              </a:rPr>
+              <a:t>Imports active courses, syllabus content, assignments, dates, points, and submission state through scoped OAuth.</a:t>
+            </a:r>
+          </a:p>
+        </p:txBody>
+      </p:sp>
+      <p:sp>
+        <p:nvSpPr>
+          <p:cNvPr id="21" name="rule-58-586">
+            <a:extLst xmlns:a="http://schemas.openxmlformats.org/drawingml/2006/main">
+              <a:ext uri="{FF2B5EF4-FFF2-40B4-BE49-F238E27FC236}">
+                <a16:creationId xmlns:a16="http://schemas.microsoft.com/office/drawing/2014/main" id="{0FAE2545-B6C2-4DDE-8987-F0A982183738}"/>
+              </a:ext>
+            </a:extLst>
+          </p:cNvPr>
+          <p:cNvSpPr>
+            <a:spLocks xmlns:a="http://schemas.openxmlformats.org/drawingml/2006/main" noGrp="1"/>
+          </p:cNvSpPr>
+          <p:nvPr/>
+        </p:nvSpPr>
+        <p:spPr>
+          <a:xfrm xmlns:a="http://schemas.openxmlformats.org/drawingml/2006/main">
+            <a:off x="552450" y="5581650"/>
+            <a:ext cx="10934700" cy="9525"/>
+          </a:xfrm>
+          <a:prstGeom xmlns:a="http://schemas.openxmlformats.org/drawingml/2006/main" prst="rect">
+            <a:avLst/>
+          </a:prstGeom>
+          <a:solidFill xmlns:a="http://schemas.openxmlformats.org/drawingml/2006/main">
+            <a:srgbClr val="C8CECA"/>
+          </a:solidFill>
+          <a:ln xmlns:a="http://schemas.openxmlformats.org/drawingml/2006/main" w="0">
+            <a:noFill/>
+            <a:prstDash val="solid"/>
+          </a:ln>
+        </p:spPr>
+      </p:sp>
+      <p:sp>
+        <p:nvSpPr>
+          <p:cNvPr id="22" name="canvas-boundary">
+            <a:extLst xmlns:a="http://schemas.openxmlformats.org/drawingml/2006/main">
+              <a:ext uri="{FF2B5EF4-FFF2-40B4-BE49-F238E27FC236}">
+                <a16:creationId xmlns:a16="http://schemas.microsoft.com/office/drawing/2014/main" id="{5CF05043-3533-4735-855D-17077080F380}"/>
+              </a:ext>
+            </a:extLst>
+          </p:cNvPr>
+          <p:cNvSpPr>
+            <a:spLocks xmlns:a="http://schemas.openxmlformats.org/drawingml/2006/main" noGrp="1"/>
+          </p:cNvSpPr>
+          <p:nvPr/>
+        </p:nvSpPr>
+        <p:spPr>
+          <a:xfrm xmlns:a="http://schemas.openxmlformats.org/drawingml/2006/main">
+            <a:off x="552450" y="5905500"/>
+            <a:ext cx="10934700" cy="361950"/>
           </a:xfrm>
           <a:prstGeom xmlns:a="http://schemas.openxmlformats.org/drawingml/2006/main" prst="roundRect">
             <a:avLst>
-              <a:gd name="adj" fmla="val 3636"/>
+              <a:gd name="adj" fmla="val 21053"/>
             </a:avLst>
           </a:prstGeom>
           <a:solidFill xmlns:a="http://schemas.openxmlformats.org/drawingml/2006/main">
-            <a:srgbClr val="FFFFFF"/>
+            <a:srgbClr val="F2EEDC"/>
           </a:solidFill>
           <a:ln xmlns:a="http://schemas.openxmlformats.org/drawingml/2006/main" w="9525">
             <a:solidFill>
-              <a:srgbClr val="C8CECA"/>
+              <a:srgbClr val="F2EEDC"/>
             </a:solidFill>
             <a:prstDash val="solid"/>
           </a:ln>
@@ -5591,1015 +7664,50 @@
       </p:sp>
       <p:sp>
         <p:nvSpPr>
-          <p:cNvPr id="7" name="architecture-index-0">
-            <a:extLst xmlns:a="http://schemas.openxmlformats.org/drawingml/2006/main">
-              <a:ext uri="{FF2B5EF4-FFF2-40B4-BE49-F238E27FC236}">
-                <a16:creationId xmlns:a16="http://schemas.microsoft.com/office/drawing/2014/main" id="{7F4F4508-83A4-4776-878F-9B2FF9A0680A}"/>
-              </a:ext>
-            </a:extLst>
-          </p:cNvPr>
-          <p:cNvSpPr>
-            <a:spLocks xmlns:a="http://schemas.openxmlformats.org/drawingml/2006/main" noGrp="1"/>
-          </p:cNvSpPr>
-          <p:nvPr/>
-        </p:nvSpPr>
-        <p:spPr>
-          <a:xfrm xmlns:a="http://schemas.openxmlformats.org/drawingml/2006/main">
-            <a:off x="723900" y="2781300"/>
-            <a:ext cx="457200" cy="266700"/>
-          </a:xfrm>
-          <a:prstGeom xmlns:a="http://schemas.openxmlformats.org/drawingml/2006/main" prst="rect">
-            <a:avLst/>
-          </a:prstGeom>
-          <a:noFill xmlns:a="http://schemas.openxmlformats.org/drawingml/2006/main"/>
-          <a:ln xmlns:a="http://schemas.openxmlformats.org/drawingml/2006/main" w="0">
-            <a:noFill/>
-            <a:prstDash val="solid"/>
-          </a:ln>
-        </p:spPr>
-        <p:txBody>
-          <a:bodyPr xmlns:a="http://schemas.openxmlformats.org/drawingml/2006/main" anchor="t"/>
-          <a:lstStyle xmlns:a="http://schemas.openxmlformats.org/drawingml/2006/main"/>
-          <a:p xmlns:a="http://schemas.openxmlformats.org/drawingml/2006/main">
-            <a:pPr algn="l">
-              <a:defRPr sz="975" b="1">
-                <a:solidFill>
-                  <a:srgbClr val="2F7D74"/>
-                </a:solidFill>
-              </a:defRPr>
-            </a:pPr>
-            <a:r>
-              <a:rPr sz="975" b="1">
-                <a:solidFill>
-                  <a:srgbClr val="2F7D74"/>
-                </a:solidFill>
-              </a:rPr>
-              <a:t>01</a:t>
-            </a:r>
-          </a:p>
-        </p:txBody>
-      </p:sp>
-      <p:sp>
-        <p:nvSpPr>
-          <p:cNvPr id="8" name="architecture-title-0">
-            <a:extLst xmlns:a="http://schemas.openxmlformats.org/drawingml/2006/main">
-              <a:ext uri="{FF2B5EF4-FFF2-40B4-BE49-F238E27FC236}">
-                <a16:creationId xmlns:a16="http://schemas.microsoft.com/office/drawing/2014/main" id="{8B1E5A1A-8376-4114-853F-25948AF23DEB}"/>
-              </a:ext>
-            </a:extLst>
-          </p:cNvPr>
-          <p:cNvSpPr>
-            <a:spLocks xmlns:a="http://schemas.openxmlformats.org/drawingml/2006/main" noGrp="1"/>
-          </p:cNvSpPr>
-          <p:nvPr/>
-        </p:nvSpPr>
-        <p:spPr>
-          <a:xfrm xmlns:a="http://schemas.openxmlformats.org/drawingml/2006/main">
-            <a:off x="723900" y="3238500"/>
-            <a:ext cx="1905000" cy="400050"/>
-          </a:xfrm>
-          <a:prstGeom xmlns:a="http://schemas.openxmlformats.org/drawingml/2006/main" prst="rect">
-            <a:avLst/>
-          </a:prstGeom>
-          <a:noFill xmlns:a="http://schemas.openxmlformats.org/drawingml/2006/main"/>
-          <a:ln xmlns:a="http://schemas.openxmlformats.org/drawingml/2006/main" w="0">
-            <a:noFill/>
-            <a:prstDash val="solid"/>
-          </a:ln>
-        </p:spPr>
-        <p:txBody>
-          <a:bodyPr xmlns:a="http://schemas.openxmlformats.org/drawingml/2006/main" anchor="t"/>
-          <a:lstStyle xmlns:a="http://schemas.openxmlformats.org/drawingml/2006/main"/>
-          <a:p xmlns:a="http://schemas.openxmlformats.org/drawingml/2006/main">
-            <a:pPr algn="l">
-              <a:defRPr sz="1725" b="1">
-                <a:solidFill>
-                  <a:srgbClr val="141C22"/>
-                </a:solidFill>
-              </a:defRPr>
-            </a:pPr>
-            <a:r>
-              <a:rPr sz="1725" b="1">
-                <a:solidFill>
-                  <a:srgbClr val="141C22"/>
-                </a:solidFill>
-              </a:rPr>
-              <a:t>Browser</a:t>
-            </a:r>
-          </a:p>
-        </p:txBody>
-      </p:sp>
-      <p:sp>
-        <p:nvSpPr>
-          <p:cNvPr id="9" name="architecture-body-0">
-            <a:extLst xmlns:a="http://schemas.openxmlformats.org/drawingml/2006/main">
-              <a:ext uri="{FF2B5EF4-FFF2-40B4-BE49-F238E27FC236}">
-                <a16:creationId xmlns:a16="http://schemas.microsoft.com/office/drawing/2014/main" id="{FD7D3DAE-B14F-440F-98FE-4B599F24D1BA}"/>
-              </a:ext>
-            </a:extLst>
-          </p:cNvPr>
-          <p:cNvSpPr>
-            <a:spLocks xmlns:a="http://schemas.openxmlformats.org/drawingml/2006/main" noGrp="1"/>
-          </p:cNvSpPr>
-          <p:nvPr/>
-        </p:nvSpPr>
-        <p:spPr>
-          <a:xfrm xmlns:a="http://schemas.openxmlformats.org/drawingml/2006/main">
-            <a:off x="723900" y="3829050"/>
-            <a:ext cx="1905000" cy="590550"/>
-          </a:xfrm>
-          <a:prstGeom xmlns:a="http://schemas.openxmlformats.org/drawingml/2006/main" prst="rect">
-            <a:avLst/>
-          </a:prstGeom>
-          <a:noFill xmlns:a="http://schemas.openxmlformats.org/drawingml/2006/main"/>
-          <a:ln xmlns:a="http://schemas.openxmlformats.org/drawingml/2006/main" w="0">
-            <a:noFill/>
-            <a:prstDash val="solid"/>
-          </a:ln>
-        </p:spPr>
-        <p:txBody>
-          <a:bodyPr xmlns:a="http://schemas.openxmlformats.org/drawingml/2006/main" anchor="t"/>
-          <a:lstStyle xmlns:a="http://schemas.openxmlformats.org/drawingml/2006/main"/>
-          <a:p xmlns:a="http://schemas.openxmlformats.org/drawingml/2006/main">
-            <a:pPr algn="l">
-              <a:defRPr sz="1275" b="0">
-                <a:solidFill>
-                  <a:srgbClr val="647078"/>
-                </a:solidFill>
-              </a:defRPr>
-            </a:pPr>
-            <a:r>
-              <a:rPr sz="1275" b="0">
-                <a:solidFill>
-                  <a:srgbClr val="647078"/>
-                </a:solidFill>
-              </a:rPr>
-              <a:t>Local course data</a:t>
-            </a:r>
-          </a:p>
-          <a:p xmlns:a="http://schemas.openxmlformats.org/drawingml/2006/main">
-            <a:pPr algn="l">
-              <a:defRPr sz="1275" b="0">
-                <a:solidFill>
-                  <a:srgbClr val="647078"/>
-                </a:solidFill>
-              </a:defRPr>
-            </a:pPr>
-            <a:r>
-              <a:rPr sz="1275" b="0">
-                <a:solidFill>
-                  <a:srgbClr val="647078"/>
-                </a:solidFill>
-              </a:rPr>
-              <a:t>and conversations</a:t>
-            </a:r>
-          </a:p>
-        </p:txBody>
-      </p:sp>
-      <p:sp>
-        <p:nvSpPr>
-          <p:cNvPr id="10" name="rule-298-378">
-            <a:extLst xmlns:a="http://schemas.openxmlformats.org/drawingml/2006/main">
-              <a:ext uri="{FF2B5EF4-FFF2-40B4-BE49-F238E27FC236}">
-                <a16:creationId xmlns:a16="http://schemas.microsoft.com/office/drawing/2014/main" id="{5E040FC9-584A-40B6-AAF4-16F7864549E1}"/>
-              </a:ext>
-            </a:extLst>
-          </p:cNvPr>
-          <p:cNvSpPr>
-            <a:spLocks xmlns:a="http://schemas.openxmlformats.org/drawingml/2006/main" noGrp="1"/>
-          </p:cNvSpPr>
-          <p:nvPr/>
-        </p:nvSpPr>
-        <p:spPr>
-          <a:xfrm xmlns:a="http://schemas.openxmlformats.org/drawingml/2006/main">
-            <a:off x="2838450" y="3600450"/>
-            <a:ext cx="552450" cy="28575"/>
-          </a:xfrm>
-          <a:prstGeom xmlns:a="http://schemas.openxmlformats.org/drawingml/2006/main" prst="rect">
-            <a:avLst/>
-          </a:prstGeom>
-          <a:solidFill xmlns:a="http://schemas.openxmlformats.org/drawingml/2006/main">
-            <a:srgbClr val="C9A63F"/>
-          </a:solidFill>
-          <a:ln xmlns:a="http://schemas.openxmlformats.org/drawingml/2006/main" w="0">
-            <a:noFill/>
-            <a:prstDash val="solid"/>
-          </a:ln>
-        </p:spPr>
-      </p:sp>
-      <p:sp>
-        <p:nvSpPr>
-          <p:cNvPr id="11" name="architecture-arrow-0">
-            <a:extLst xmlns:a="http://schemas.openxmlformats.org/drawingml/2006/main">
-              <a:ext uri="{FF2B5EF4-FFF2-40B4-BE49-F238E27FC236}">
-                <a16:creationId xmlns:a16="http://schemas.microsoft.com/office/drawing/2014/main" id="{CD9454BE-5A50-4217-9392-726495971A11}"/>
-              </a:ext>
-            </a:extLst>
-          </p:cNvPr>
-          <p:cNvSpPr>
-            <a:spLocks xmlns:a="http://schemas.openxmlformats.org/drawingml/2006/main" noGrp="1"/>
-          </p:cNvSpPr>
-          <p:nvPr/>
-        </p:nvSpPr>
-        <p:spPr>
-          <a:xfrm xmlns:a="http://schemas.openxmlformats.org/drawingml/2006/main">
-            <a:off x="3219450" y="3524250"/>
-            <a:ext cx="171450" cy="171450"/>
-          </a:xfrm>
-          <a:prstGeom xmlns:a="http://schemas.openxmlformats.org/drawingml/2006/main" prst="triangle">
-            <a:avLst/>
-          </a:prstGeom>
-          <a:solidFill xmlns:a="http://schemas.openxmlformats.org/drawingml/2006/main">
-            <a:srgbClr val="C9A63F"/>
-          </a:solidFill>
-          <a:ln xmlns:a="http://schemas.openxmlformats.org/drawingml/2006/main" w="9525">
-            <a:solidFill>
-              <a:srgbClr val="C9A63F"/>
-            </a:solidFill>
-            <a:prstDash val="solid"/>
-          </a:ln>
-        </p:spPr>
-      </p:sp>
-      <p:sp>
-        <p:nvSpPr>
-          <p:cNvPr id="12" name="architecture-node-1">
-            <a:extLst xmlns:a="http://schemas.openxmlformats.org/drawingml/2006/main">
-              <a:ext uri="{FF2B5EF4-FFF2-40B4-BE49-F238E27FC236}">
-                <a16:creationId xmlns:a16="http://schemas.microsoft.com/office/drawing/2014/main" id="{C1E78952-52CF-4398-8522-78CC32F13C8B}"/>
-              </a:ext>
-            </a:extLst>
-          </p:cNvPr>
-          <p:cNvSpPr>
-            <a:spLocks xmlns:a="http://schemas.openxmlformats.org/drawingml/2006/main" noGrp="1"/>
-          </p:cNvSpPr>
-          <p:nvPr/>
-        </p:nvSpPr>
-        <p:spPr>
-          <a:xfrm xmlns:a="http://schemas.openxmlformats.org/drawingml/2006/main">
-            <a:off x="3390900" y="2571750"/>
-            <a:ext cx="2324100" cy="2095500"/>
-          </a:xfrm>
-          <a:prstGeom xmlns:a="http://schemas.openxmlformats.org/drawingml/2006/main" prst="roundRect">
-            <a:avLst>
-              <a:gd name="adj" fmla="val 3636"/>
-            </a:avLst>
-          </a:prstGeom>
-          <a:solidFill xmlns:a="http://schemas.openxmlformats.org/drawingml/2006/main">
-            <a:srgbClr val="FFFFFF"/>
-          </a:solidFill>
-          <a:ln xmlns:a="http://schemas.openxmlformats.org/drawingml/2006/main" w="9525">
-            <a:solidFill>
-              <a:srgbClr val="C8CECA"/>
-            </a:solidFill>
-            <a:prstDash val="solid"/>
-          </a:ln>
-        </p:spPr>
-      </p:sp>
-      <p:sp>
-        <p:nvSpPr>
-          <p:cNvPr id="13" name="architecture-index-1">
-            <a:extLst xmlns:a="http://schemas.openxmlformats.org/drawingml/2006/main">
-              <a:ext uri="{FF2B5EF4-FFF2-40B4-BE49-F238E27FC236}">
-                <a16:creationId xmlns:a16="http://schemas.microsoft.com/office/drawing/2014/main" id="{DF782656-C1B4-4C27-8405-8CB944D613C8}"/>
-              </a:ext>
-            </a:extLst>
-          </p:cNvPr>
-          <p:cNvSpPr>
-            <a:spLocks xmlns:a="http://schemas.openxmlformats.org/drawingml/2006/main" noGrp="1"/>
-          </p:cNvSpPr>
-          <p:nvPr/>
-        </p:nvSpPr>
-        <p:spPr>
-          <a:xfrm xmlns:a="http://schemas.openxmlformats.org/drawingml/2006/main">
-            <a:off x="3600450" y="2781300"/>
-            <a:ext cx="457200" cy="266700"/>
-          </a:xfrm>
-          <a:prstGeom xmlns:a="http://schemas.openxmlformats.org/drawingml/2006/main" prst="rect">
-            <a:avLst/>
-          </a:prstGeom>
-          <a:noFill xmlns:a="http://schemas.openxmlformats.org/drawingml/2006/main"/>
-          <a:ln xmlns:a="http://schemas.openxmlformats.org/drawingml/2006/main" w="0">
-            <a:noFill/>
-            <a:prstDash val="solid"/>
-          </a:ln>
-        </p:spPr>
-        <p:txBody>
-          <a:bodyPr xmlns:a="http://schemas.openxmlformats.org/drawingml/2006/main" anchor="t"/>
-          <a:lstStyle xmlns:a="http://schemas.openxmlformats.org/drawingml/2006/main"/>
-          <a:p xmlns:a="http://schemas.openxmlformats.org/drawingml/2006/main">
-            <a:pPr algn="l">
-              <a:defRPr sz="975" b="1">
-                <a:solidFill>
-                  <a:srgbClr val="2F7D74"/>
-                </a:solidFill>
-              </a:defRPr>
-            </a:pPr>
-            <a:r>
-              <a:rPr sz="975" b="1">
-                <a:solidFill>
-                  <a:srgbClr val="2F7D74"/>
-                </a:solidFill>
-              </a:rPr>
-              <a:t>02</a:t>
-            </a:r>
-          </a:p>
-        </p:txBody>
-      </p:sp>
-      <p:sp>
-        <p:nvSpPr>
-          <p:cNvPr id="14" name="architecture-title-1">
-            <a:extLst xmlns:a="http://schemas.openxmlformats.org/drawingml/2006/main">
-              <a:ext uri="{FF2B5EF4-FFF2-40B4-BE49-F238E27FC236}">
-                <a16:creationId xmlns:a16="http://schemas.microsoft.com/office/drawing/2014/main" id="{E9A16CCE-7B0C-4B7E-AB85-6F55C73BBC01}"/>
-              </a:ext>
-            </a:extLst>
-          </p:cNvPr>
-          <p:cNvSpPr>
-            <a:spLocks xmlns:a="http://schemas.openxmlformats.org/drawingml/2006/main" noGrp="1"/>
-          </p:cNvSpPr>
-          <p:nvPr/>
-        </p:nvSpPr>
-        <p:spPr>
-          <a:xfrm xmlns:a="http://schemas.openxmlformats.org/drawingml/2006/main">
-            <a:off x="3600450" y="3238500"/>
-            <a:ext cx="1905000" cy="400050"/>
-          </a:xfrm>
-          <a:prstGeom xmlns:a="http://schemas.openxmlformats.org/drawingml/2006/main" prst="rect">
-            <a:avLst/>
-          </a:prstGeom>
-          <a:noFill xmlns:a="http://schemas.openxmlformats.org/drawingml/2006/main"/>
-          <a:ln xmlns:a="http://schemas.openxmlformats.org/drawingml/2006/main" w="0">
-            <a:noFill/>
-            <a:prstDash val="solid"/>
-          </a:ln>
-        </p:spPr>
-        <p:txBody>
-          <a:bodyPr xmlns:a="http://schemas.openxmlformats.org/drawingml/2006/main" anchor="t"/>
-          <a:lstStyle xmlns:a="http://schemas.openxmlformats.org/drawingml/2006/main"/>
-          <a:p xmlns:a="http://schemas.openxmlformats.org/drawingml/2006/main">
-            <a:pPr algn="l">
-              <a:defRPr sz="1725" b="1">
-                <a:solidFill>
-                  <a:srgbClr val="141C22"/>
-                </a:solidFill>
-              </a:defRPr>
-            </a:pPr>
-            <a:r>
-              <a:rPr sz="1725" b="1">
-                <a:solidFill>
-                  <a:srgbClr val="141C22"/>
-                </a:solidFill>
-              </a:rPr>
-              <a:t>Context builder</a:t>
-            </a:r>
-          </a:p>
-        </p:txBody>
-      </p:sp>
-      <p:sp>
-        <p:nvSpPr>
-          <p:cNvPr id="15" name="architecture-body-1">
-            <a:extLst xmlns:a="http://schemas.openxmlformats.org/drawingml/2006/main">
-              <a:ext uri="{FF2B5EF4-FFF2-40B4-BE49-F238E27FC236}">
-                <a16:creationId xmlns:a16="http://schemas.microsoft.com/office/drawing/2014/main" id="{A00F7F67-7652-400B-A2EE-924B0C2C99BF}"/>
-              </a:ext>
-            </a:extLst>
-          </p:cNvPr>
-          <p:cNvSpPr>
-            <a:spLocks xmlns:a="http://schemas.openxmlformats.org/drawingml/2006/main" noGrp="1"/>
-          </p:cNvSpPr>
-          <p:nvPr/>
-        </p:nvSpPr>
-        <p:spPr>
-          <a:xfrm xmlns:a="http://schemas.openxmlformats.org/drawingml/2006/main">
-            <a:off x="3600450" y="3829050"/>
-            <a:ext cx="1905000" cy="590550"/>
-          </a:xfrm>
-          <a:prstGeom xmlns:a="http://schemas.openxmlformats.org/drawingml/2006/main" prst="rect">
-            <a:avLst/>
-          </a:prstGeom>
-          <a:noFill xmlns:a="http://schemas.openxmlformats.org/drawingml/2006/main"/>
-          <a:ln xmlns:a="http://schemas.openxmlformats.org/drawingml/2006/main" w="0">
-            <a:noFill/>
-            <a:prstDash val="solid"/>
-          </a:ln>
-        </p:spPr>
-        <p:txBody>
-          <a:bodyPr xmlns:a="http://schemas.openxmlformats.org/drawingml/2006/main" anchor="t"/>
-          <a:lstStyle xmlns:a="http://schemas.openxmlformats.org/drawingml/2006/main"/>
-          <a:p xmlns:a="http://schemas.openxmlformats.org/drawingml/2006/main">
-            <a:pPr algn="l">
-              <a:defRPr sz="1275" b="0">
-                <a:solidFill>
-                  <a:srgbClr val="647078"/>
-                </a:solidFill>
-              </a:defRPr>
-            </a:pPr>
-            <a:r>
-              <a:rPr sz="1275" b="0">
-                <a:solidFill>
-                  <a:srgbClr val="647078"/>
-                </a:solidFill>
-              </a:rPr>
-              <a:t>Selected course +</a:t>
-            </a:r>
-          </a:p>
-          <a:p xmlns:a="http://schemas.openxmlformats.org/drawingml/2006/main">
-            <a:pPr algn="l">
-              <a:defRPr sz="1275" b="0">
-                <a:solidFill>
-                  <a:srgbClr val="647078"/>
-                </a:solidFill>
-              </a:defRPr>
-            </a:pPr>
-            <a:r>
-              <a:rPr sz="1275" b="0">
-                <a:solidFill>
-                  <a:srgbClr val="647078"/>
-                </a:solidFill>
-              </a:rPr>
-              <a:t>selected assignment</a:t>
-            </a:r>
-          </a:p>
-        </p:txBody>
-      </p:sp>
-      <p:sp>
-        <p:nvSpPr>
-          <p:cNvPr id="16" name="rule-600-378">
-            <a:extLst xmlns:a="http://schemas.openxmlformats.org/drawingml/2006/main">
-              <a:ext uri="{FF2B5EF4-FFF2-40B4-BE49-F238E27FC236}">
-                <a16:creationId xmlns:a16="http://schemas.microsoft.com/office/drawing/2014/main" id="{1366AB38-EDB1-4CC9-A503-108B25768E82}"/>
-              </a:ext>
-            </a:extLst>
-          </p:cNvPr>
-          <p:cNvSpPr>
-            <a:spLocks xmlns:a="http://schemas.openxmlformats.org/drawingml/2006/main" noGrp="1"/>
-          </p:cNvSpPr>
-          <p:nvPr/>
-        </p:nvSpPr>
-        <p:spPr>
-          <a:xfrm xmlns:a="http://schemas.openxmlformats.org/drawingml/2006/main">
-            <a:off x="5715000" y="3600450"/>
-            <a:ext cx="552450" cy="28575"/>
-          </a:xfrm>
-          <a:prstGeom xmlns:a="http://schemas.openxmlformats.org/drawingml/2006/main" prst="rect">
-            <a:avLst/>
-          </a:prstGeom>
-          <a:solidFill xmlns:a="http://schemas.openxmlformats.org/drawingml/2006/main">
-            <a:srgbClr val="C9A63F"/>
-          </a:solidFill>
-          <a:ln xmlns:a="http://schemas.openxmlformats.org/drawingml/2006/main" w="0">
-            <a:noFill/>
-            <a:prstDash val="solid"/>
-          </a:ln>
-        </p:spPr>
-      </p:sp>
-      <p:sp>
-        <p:nvSpPr>
-          <p:cNvPr id="17" name="architecture-arrow-1">
-            <a:extLst xmlns:a="http://schemas.openxmlformats.org/drawingml/2006/main">
-              <a:ext uri="{FF2B5EF4-FFF2-40B4-BE49-F238E27FC236}">
-                <a16:creationId xmlns:a16="http://schemas.microsoft.com/office/drawing/2014/main" id="{F9E35220-7839-440A-8179-7C5C13587498}"/>
-              </a:ext>
-            </a:extLst>
-          </p:cNvPr>
-          <p:cNvSpPr>
-            <a:spLocks xmlns:a="http://schemas.openxmlformats.org/drawingml/2006/main" noGrp="1"/>
-          </p:cNvSpPr>
-          <p:nvPr/>
-        </p:nvSpPr>
-        <p:spPr>
-          <a:xfrm xmlns:a="http://schemas.openxmlformats.org/drawingml/2006/main">
-            <a:off x="6096000" y="3524250"/>
-            <a:ext cx="171450" cy="171450"/>
-          </a:xfrm>
-          <a:prstGeom xmlns:a="http://schemas.openxmlformats.org/drawingml/2006/main" prst="triangle">
-            <a:avLst/>
-          </a:prstGeom>
-          <a:solidFill xmlns:a="http://schemas.openxmlformats.org/drawingml/2006/main">
-            <a:srgbClr val="C9A63F"/>
-          </a:solidFill>
-          <a:ln xmlns:a="http://schemas.openxmlformats.org/drawingml/2006/main" w="9525">
-            <a:solidFill>
-              <a:srgbClr val="C9A63F"/>
-            </a:solidFill>
-            <a:prstDash val="solid"/>
-          </a:ln>
-        </p:spPr>
-      </p:sp>
-      <p:sp>
-        <p:nvSpPr>
-          <p:cNvPr id="18" name="architecture-node-2">
-            <a:extLst xmlns:a="http://schemas.openxmlformats.org/drawingml/2006/main">
-              <a:ext uri="{FF2B5EF4-FFF2-40B4-BE49-F238E27FC236}">
-                <a16:creationId xmlns:a16="http://schemas.microsoft.com/office/drawing/2014/main" id="{C6C6035D-A055-451C-889A-9B6780299FA0}"/>
-              </a:ext>
-            </a:extLst>
-          </p:cNvPr>
-          <p:cNvSpPr>
-            <a:spLocks xmlns:a="http://schemas.openxmlformats.org/drawingml/2006/main" noGrp="1"/>
-          </p:cNvSpPr>
-          <p:nvPr/>
-        </p:nvSpPr>
-        <p:spPr>
-          <a:xfrm xmlns:a="http://schemas.openxmlformats.org/drawingml/2006/main">
-            <a:off x="6267450" y="2571750"/>
-            <a:ext cx="2324100" cy="2095500"/>
-          </a:xfrm>
-          <a:prstGeom xmlns:a="http://schemas.openxmlformats.org/drawingml/2006/main" prst="roundRect">
-            <a:avLst>
-              <a:gd name="adj" fmla="val 3636"/>
-            </a:avLst>
-          </a:prstGeom>
-          <a:solidFill xmlns:a="http://schemas.openxmlformats.org/drawingml/2006/main">
-            <a:srgbClr val="141C22"/>
-          </a:solidFill>
-          <a:ln xmlns:a="http://schemas.openxmlformats.org/drawingml/2006/main" w="9525">
-            <a:solidFill>
-              <a:srgbClr val="141C22"/>
-            </a:solidFill>
-            <a:prstDash val="solid"/>
-          </a:ln>
-        </p:spPr>
-      </p:sp>
-      <p:sp>
-        <p:nvSpPr>
-          <p:cNvPr id="19" name="architecture-index-2">
-            <a:extLst xmlns:a="http://schemas.openxmlformats.org/drawingml/2006/main">
-              <a:ext uri="{FF2B5EF4-FFF2-40B4-BE49-F238E27FC236}">
-                <a16:creationId xmlns:a16="http://schemas.microsoft.com/office/drawing/2014/main" id="{CF7CA7E7-8A1A-421C-BE23-52437E2A5C6C}"/>
-              </a:ext>
-            </a:extLst>
-          </p:cNvPr>
-          <p:cNvSpPr>
-            <a:spLocks xmlns:a="http://schemas.openxmlformats.org/drawingml/2006/main" noGrp="1"/>
-          </p:cNvSpPr>
-          <p:nvPr/>
-        </p:nvSpPr>
-        <p:spPr>
-          <a:xfrm xmlns:a="http://schemas.openxmlformats.org/drawingml/2006/main">
-            <a:off x="6477000" y="2781300"/>
-            <a:ext cx="457200" cy="266700"/>
-          </a:xfrm>
-          <a:prstGeom xmlns:a="http://schemas.openxmlformats.org/drawingml/2006/main" prst="rect">
-            <a:avLst/>
-          </a:prstGeom>
-          <a:noFill xmlns:a="http://schemas.openxmlformats.org/drawingml/2006/main"/>
-          <a:ln xmlns:a="http://schemas.openxmlformats.org/drawingml/2006/main" w="0">
-            <a:noFill/>
-            <a:prstDash val="solid"/>
-          </a:ln>
-        </p:spPr>
-        <p:txBody>
-          <a:bodyPr xmlns:a="http://schemas.openxmlformats.org/drawingml/2006/main" anchor="t"/>
-          <a:lstStyle xmlns:a="http://schemas.openxmlformats.org/drawingml/2006/main"/>
-          <a:p xmlns:a="http://schemas.openxmlformats.org/drawingml/2006/main">
-            <a:pPr algn="l">
-              <a:defRPr sz="975" b="1">
-                <a:solidFill>
-                  <a:srgbClr val="C9A63F"/>
-                </a:solidFill>
-              </a:defRPr>
-            </a:pPr>
-            <a:r>
-              <a:rPr sz="975" b="1">
-                <a:solidFill>
-                  <a:srgbClr val="C9A63F"/>
-                </a:solidFill>
-              </a:rPr>
-              <a:t>03</a:t>
-            </a:r>
-          </a:p>
-        </p:txBody>
-      </p:sp>
-      <p:sp>
-        <p:nvSpPr>
-          <p:cNvPr id="20" name="architecture-title-2">
-            <a:extLst xmlns:a="http://schemas.openxmlformats.org/drawingml/2006/main">
-              <a:ext uri="{FF2B5EF4-FFF2-40B4-BE49-F238E27FC236}">
-                <a16:creationId xmlns:a16="http://schemas.microsoft.com/office/drawing/2014/main" id="{44856E4A-E705-45C7-A970-D385680D6B14}"/>
-              </a:ext>
-            </a:extLst>
-          </p:cNvPr>
-          <p:cNvSpPr>
-            <a:spLocks xmlns:a="http://schemas.openxmlformats.org/drawingml/2006/main" noGrp="1"/>
-          </p:cNvSpPr>
-          <p:nvPr/>
-        </p:nvSpPr>
-        <p:spPr>
-          <a:xfrm xmlns:a="http://schemas.openxmlformats.org/drawingml/2006/main">
-            <a:off x="6477000" y="3238500"/>
-            <a:ext cx="1905000" cy="400050"/>
-          </a:xfrm>
-          <a:prstGeom xmlns:a="http://schemas.openxmlformats.org/drawingml/2006/main" prst="rect">
-            <a:avLst/>
-          </a:prstGeom>
-          <a:noFill xmlns:a="http://schemas.openxmlformats.org/drawingml/2006/main"/>
-          <a:ln xmlns:a="http://schemas.openxmlformats.org/drawingml/2006/main" w="0">
-            <a:noFill/>
-            <a:prstDash val="solid"/>
-          </a:ln>
-        </p:spPr>
-        <p:txBody>
-          <a:bodyPr xmlns:a="http://schemas.openxmlformats.org/drawingml/2006/main" anchor="t"/>
-          <a:lstStyle xmlns:a="http://schemas.openxmlformats.org/drawingml/2006/main"/>
-          <a:p xmlns:a="http://schemas.openxmlformats.org/drawingml/2006/main">
-            <a:pPr algn="l">
-              <a:defRPr sz="1725" b="1">
-                <a:solidFill>
-                  <a:srgbClr val="FFFFFF"/>
-                </a:solidFill>
-              </a:defRPr>
-            </a:pPr>
-            <a:r>
-              <a:rPr sz="1725" b="1">
-                <a:solidFill>
-                  <a:srgbClr val="FFFFFF"/>
-                </a:solidFill>
-              </a:rPr>
-              <a:t>Secure Worker</a:t>
-            </a:r>
-          </a:p>
-        </p:txBody>
-      </p:sp>
-      <p:sp>
-        <p:nvSpPr>
-          <p:cNvPr id="21" name="architecture-body-2">
-            <a:extLst xmlns:a="http://schemas.openxmlformats.org/drawingml/2006/main">
-              <a:ext uri="{FF2B5EF4-FFF2-40B4-BE49-F238E27FC236}">
-                <a16:creationId xmlns:a16="http://schemas.microsoft.com/office/drawing/2014/main" id="{E0B94866-A7D9-41C2-B14F-7B0E942467FF}"/>
-              </a:ext>
-            </a:extLst>
-          </p:cNvPr>
-          <p:cNvSpPr>
-            <a:spLocks xmlns:a="http://schemas.openxmlformats.org/drawingml/2006/main" noGrp="1"/>
-          </p:cNvSpPr>
-          <p:nvPr/>
-        </p:nvSpPr>
-        <p:spPr>
-          <a:xfrm xmlns:a="http://schemas.openxmlformats.org/drawingml/2006/main">
-            <a:off x="6477000" y="3829050"/>
-            <a:ext cx="1905000" cy="590550"/>
-          </a:xfrm>
-          <a:prstGeom xmlns:a="http://schemas.openxmlformats.org/drawingml/2006/main" prst="rect">
-            <a:avLst/>
-          </a:prstGeom>
-          <a:noFill xmlns:a="http://schemas.openxmlformats.org/drawingml/2006/main"/>
-          <a:ln xmlns:a="http://schemas.openxmlformats.org/drawingml/2006/main" w="0">
-            <a:noFill/>
-            <a:prstDash val="solid"/>
-          </a:ln>
-        </p:spPr>
-        <p:txBody>
-          <a:bodyPr xmlns:a="http://schemas.openxmlformats.org/drawingml/2006/main" anchor="t"/>
-          <a:lstStyle xmlns:a="http://schemas.openxmlformats.org/drawingml/2006/main"/>
-          <a:p xmlns:a="http://schemas.openxmlformats.org/drawingml/2006/main">
-            <a:pPr algn="l">
-              <a:defRPr sz="1275" b="0">
-                <a:solidFill>
-                  <a:srgbClr val="CBD2D5"/>
-                </a:solidFill>
-              </a:defRPr>
-            </a:pPr>
-            <a:r>
-              <a:rPr sz="1275" b="0">
-                <a:solidFill>
-                  <a:srgbClr val="CBD2D5"/>
-                </a:solidFill>
-              </a:rPr>
-              <a:t>CORS, validation,</a:t>
-            </a:r>
-          </a:p>
-          <a:p xmlns:a="http://schemas.openxmlformats.org/drawingml/2006/main">
-            <a:pPr algn="l">
-              <a:defRPr sz="1275" b="0">
-                <a:solidFill>
-                  <a:srgbClr val="CBD2D5"/>
-                </a:solidFill>
-              </a:defRPr>
-            </a:pPr>
-            <a:r>
-              <a:rPr sz="1275" b="0">
-                <a:solidFill>
-                  <a:srgbClr val="CBD2D5"/>
-                </a:solidFill>
-              </a:rPr>
-              <a:t>rate limiting</a:t>
-            </a:r>
-          </a:p>
-        </p:txBody>
-      </p:sp>
-      <p:sp>
-        <p:nvSpPr>
-          <p:cNvPr id="22" name="rule-902-378">
-            <a:extLst xmlns:a="http://schemas.openxmlformats.org/drawingml/2006/main">
-              <a:ext uri="{FF2B5EF4-FFF2-40B4-BE49-F238E27FC236}">
-                <a16:creationId xmlns:a16="http://schemas.microsoft.com/office/drawing/2014/main" id="{E6E1C651-806E-4A3C-A604-70C96B602919}"/>
-              </a:ext>
-            </a:extLst>
-          </p:cNvPr>
-          <p:cNvSpPr>
-            <a:spLocks xmlns:a="http://schemas.openxmlformats.org/drawingml/2006/main" noGrp="1"/>
-          </p:cNvSpPr>
-          <p:nvPr/>
-        </p:nvSpPr>
-        <p:spPr>
-          <a:xfrm xmlns:a="http://schemas.openxmlformats.org/drawingml/2006/main">
-            <a:off x="8591550" y="3600450"/>
-            <a:ext cx="552450" cy="28575"/>
-          </a:xfrm>
-          <a:prstGeom xmlns:a="http://schemas.openxmlformats.org/drawingml/2006/main" prst="rect">
-            <a:avLst/>
-          </a:prstGeom>
-          <a:solidFill xmlns:a="http://schemas.openxmlformats.org/drawingml/2006/main">
-            <a:srgbClr val="C9A63F"/>
-          </a:solidFill>
-          <a:ln xmlns:a="http://schemas.openxmlformats.org/drawingml/2006/main" w="0">
-            <a:noFill/>
-            <a:prstDash val="solid"/>
-          </a:ln>
-        </p:spPr>
-      </p:sp>
-      <p:sp>
-        <p:nvSpPr>
-          <p:cNvPr id="23" name="architecture-arrow-2">
-            <a:extLst xmlns:a="http://schemas.openxmlformats.org/drawingml/2006/main">
-              <a:ext uri="{FF2B5EF4-FFF2-40B4-BE49-F238E27FC236}">
-                <a16:creationId xmlns:a16="http://schemas.microsoft.com/office/drawing/2014/main" id="{9FA000B4-2982-4160-97A8-5F8B5065ADD4}"/>
-              </a:ext>
-            </a:extLst>
-          </p:cNvPr>
-          <p:cNvSpPr>
-            <a:spLocks xmlns:a="http://schemas.openxmlformats.org/drawingml/2006/main" noGrp="1"/>
-          </p:cNvSpPr>
-          <p:nvPr/>
-        </p:nvSpPr>
-        <p:spPr>
-          <a:xfrm xmlns:a="http://schemas.openxmlformats.org/drawingml/2006/main">
-            <a:off x="8972550" y="3524250"/>
-            <a:ext cx="171450" cy="171450"/>
-          </a:xfrm>
-          <a:prstGeom xmlns:a="http://schemas.openxmlformats.org/drawingml/2006/main" prst="triangle">
-            <a:avLst/>
-          </a:prstGeom>
-          <a:solidFill xmlns:a="http://schemas.openxmlformats.org/drawingml/2006/main">
-            <a:srgbClr val="C9A63F"/>
-          </a:solidFill>
-          <a:ln xmlns:a="http://schemas.openxmlformats.org/drawingml/2006/main" w="9525">
-            <a:solidFill>
-              <a:srgbClr val="C9A63F"/>
-            </a:solidFill>
-            <a:prstDash val="solid"/>
-          </a:ln>
-        </p:spPr>
-      </p:sp>
-      <p:sp>
-        <p:nvSpPr>
-          <p:cNvPr id="24" name="architecture-node-3">
-            <a:extLst xmlns:a="http://schemas.openxmlformats.org/drawingml/2006/main">
-              <a:ext uri="{FF2B5EF4-FFF2-40B4-BE49-F238E27FC236}">
-                <a16:creationId xmlns:a16="http://schemas.microsoft.com/office/drawing/2014/main" id="{68856248-6A19-4569-B99A-532919937618}"/>
-              </a:ext>
-            </a:extLst>
-          </p:cNvPr>
-          <p:cNvSpPr>
-            <a:spLocks xmlns:a="http://schemas.openxmlformats.org/drawingml/2006/main" noGrp="1"/>
-          </p:cNvSpPr>
-          <p:nvPr/>
-        </p:nvSpPr>
-        <p:spPr>
-          <a:xfrm xmlns:a="http://schemas.openxmlformats.org/drawingml/2006/main">
-            <a:off x="9144000" y="2571750"/>
-            <a:ext cx="2324100" cy="2095500"/>
-          </a:xfrm>
-          <a:prstGeom xmlns:a="http://schemas.openxmlformats.org/drawingml/2006/main" prst="roundRect">
-            <a:avLst>
-              <a:gd name="adj" fmla="val 3636"/>
-            </a:avLst>
-          </a:prstGeom>
-          <a:solidFill xmlns:a="http://schemas.openxmlformats.org/drawingml/2006/main">
-            <a:srgbClr val="FFFFFF"/>
-          </a:solidFill>
-          <a:ln xmlns:a="http://schemas.openxmlformats.org/drawingml/2006/main" w="9525">
-            <a:solidFill>
-              <a:srgbClr val="C8CECA"/>
-            </a:solidFill>
-            <a:prstDash val="solid"/>
-          </a:ln>
-        </p:spPr>
-      </p:sp>
-      <p:sp>
-        <p:nvSpPr>
-          <p:cNvPr id="25" name="architecture-index-3">
-            <a:extLst xmlns:a="http://schemas.openxmlformats.org/drawingml/2006/main">
-              <a:ext uri="{FF2B5EF4-FFF2-40B4-BE49-F238E27FC236}">
-                <a16:creationId xmlns:a16="http://schemas.microsoft.com/office/drawing/2014/main" id="{E356C3F5-B69A-490F-BF1D-78CFFA15B79D}"/>
-              </a:ext>
-            </a:extLst>
-          </p:cNvPr>
-          <p:cNvSpPr>
-            <a:spLocks xmlns:a="http://schemas.openxmlformats.org/drawingml/2006/main" noGrp="1"/>
-          </p:cNvSpPr>
-          <p:nvPr/>
-        </p:nvSpPr>
-        <p:spPr>
-          <a:xfrm xmlns:a="http://schemas.openxmlformats.org/drawingml/2006/main">
-            <a:off x="9353550" y="2781300"/>
-            <a:ext cx="457200" cy="266700"/>
-          </a:xfrm>
-          <a:prstGeom xmlns:a="http://schemas.openxmlformats.org/drawingml/2006/main" prst="rect">
-            <a:avLst/>
-          </a:prstGeom>
-          <a:noFill xmlns:a="http://schemas.openxmlformats.org/drawingml/2006/main"/>
-          <a:ln xmlns:a="http://schemas.openxmlformats.org/drawingml/2006/main" w="0">
-            <a:noFill/>
-            <a:prstDash val="solid"/>
-          </a:ln>
-        </p:spPr>
-        <p:txBody>
-          <a:bodyPr xmlns:a="http://schemas.openxmlformats.org/drawingml/2006/main" anchor="t"/>
-          <a:lstStyle xmlns:a="http://schemas.openxmlformats.org/drawingml/2006/main"/>
-          <a:p xmlns:a="http://schemas.openxmlformats.org/drawingml/2006/main">
-            <a:pPr algn="l">
-              <a:defRPr sz="975" b="1">
-                <a:solidFill>
-                  <a:srgbClr val="2F7D74"/>
-                </a:solidFill>
-              </a:defRPr>
-            </a:pPr>
-            <a:r>
-              <a:rPr sz="975" b="1">
-                <a:solidFill>
-                  <a:srgbClr val="2F7D74"/>
-                </a:solidFill>
-              </a:rPr>
-              <a:t>04</a:t>
-            </a:r>
-          </a:p>
-        </p:txBody>
-      </p:sp>
-      <p:sp>
-        <p:nvSpPr>
-          <p:cNvPr id="26" name="architecture-title-3">
-            <a:extLst xmlns:a="http://schemas.openxmlformats.org/drawingml/2006/main">
-              <a:ext uri="{FF2B5EF4-FFF2-40B4-BE49-F238E27FC236}">
-                <a16:creationId xmlns:a16="http://schemas.microsoft.com/office/drawing/2014/main" id="{94CB77D7-610E-43D0-9498-960FCDE0E179}"/>
-              </a:ext>
-            </a:extLst>
-          </p:cNvPr>
-          <p:cNvSpPr>
-            <a:spLocks xmlns:a="http://schemas.openxmlformats.org/drawingml/2006/main" noGrp="1"/>
-          </p:cNvSpPr>
-          <p:nvPr/>
-        </p:nvSpPr>
-        <p:spPr>
-          <a:xfrm xmlns:a="http://schemas.openxmlformats.org/drawingml/2006/main">
-            <a:off x="9353550" y="3238500"/>
-            <a:ext cx="1905000" cy="400050"/>
-          </a:xfrm>
-          <a:prstGeom xmlns:a="http://schemas.openxmlformats.org/drawingml/2006/main" prst="rect">
-            <a:avLst/>
-          </a:prstGeom>
-          <a:noFill xmlns:a="http://schemas.openxmlformats.org/drawingml/2006/main"/>
-          <a:ln xmlns:a="http://schemas.openxmlformats.org/drawingml/2006/main" w="0">
-            <a:noFill/>
-            <a:prstDash val="solid"/>
-          </a:ln>
-        </p:spPr>
-        <p:txBody>
-          <a:bodyPr xmlns:a="http://schemas.openxmlformats.org/drawingml/2006/main" anchor="t"/>
-          <a:lstStyle xmlns:a="http://schemas.openxmlformats.org/drawingml/2006/main"/>
-          <a:p xmlns:a="http://schemas.openxmlformats.org/drawingml/2006/main">
-            <a:pPr algn="l">
-              <a:defRPr sz="1725" b="1">
-                <a:solidFill>
-                  <a:srgbClr val="141C22"/>
-                </a:solidFill>
-              </a:defRPr>
-            </a:pPr>
-            <a:r>
-              <a:rPr sz="1725" b="1">
-                <a:solidFill>
-                  <a:srgbClr val="141C22"/>
-                </a:solidFill>
-              </a:rPr>
-              <a:t>AI response</a:t>
-            </a:r>
-          </a:p>
-        </p:txBody>
-      </p:sp>
-      <p:sp>
-        <p:nvSpPr>
-          <p:cNvPr id="27" name="architecture-body-3">
-            <a:extLst xmlns:a="http://schemas.openxmlformats.org/drawingml/2006/main">
-              <a:ext uri="{FF2B5EF4-FFF2-40B4-BE49-F238E27FC236}">
-                <a16:creationId xmlns:a16="http://schemas.microsoft.com/office/drawing/2014/main" id="{3ECC4E57-89E0-42FA-8C12-BEC94C40725B}"/>
-              </a:ext>
-            </a:extLst>
-          </p:cNvPr>
-          <p:cNvSpPr>
-            <a:spLocks xmlns:a="http://schemas.openxmlformats.org/drawingml/2006/main" noGrp="1"/>
-          </p:cNvSpPr>
-          <p:nvPr/>
-        </p:nvSpPr>
-        <p:spPr>
-          <a:xfrm xmlns:a="http://schemas.openxmlformats.org/drawingml/2006/main">
-            <a:off x="9353550" y="3829050"/>
-            <a:ext cx="1905000" cy="590550"/>
-          </a:xfrm>
-          <a:prstGeom xmlns:a="http://schemas.openxmlformats.org/drawingml/2006/main" prst="rect">
-            <a:avLst/>
-          </a:prstGeom>
-          <a:noFill xmlns:a="http://schemas.openxmlformats.org/drawingml/2006/main"/>
-          <a:ln xmlns:a="http://schemas.openxmlformats.org/drawingml/2006/main" w="0">
-            <a:noFill/>
-            <a:prstDash val="solid"/>
-          </a:ln>
-        </p:spPr>
-        <p:txBody>
-          <a:bodyPr xmlns:a="http://schemas.openxmlformats.org/drawingml/2006/main" anchor="t"/>
-          <a:lstStyle xmlns:a="http://schemas.openxmlformats.org/drawingml/2006/main"/>
-          <a:p xmlns:a="http://schemas.openxmlformats.org/drawingml/2006/main">
-            <a:pPr algn="l">
-              <a:defRPr sz="1275" b="0">
-                <a:solidFill>
-                  <a:srgbClr val="647078"/>
-                </a:solidFill>
-              </a:defRPr>
-            </a:pPr>
-            <a:r>
-              <a:rPr sz="1275" b="0">
-                <a:solidFill>
-                  <a:srgbClr val="647078"/>
-                </a:solidFill>
-              </a:rPr>
-              <a:t>Structured answer,</a:t>
-            </a:r>
-          </a:p>
-          <a:p xmlns:a="http://schemas.openxmlformats.org/drawingml/2006/main">
-            <a:pPr algn="l">
-              <a:defRPr sz="1275" b="0">
-                <a:solidFill>
-                  <a:srgbClr val="647078"/>
-                </a:solidFill>
-              </a:defRPr>
-            </a:pPr>
-            <a:r>
-              <a:rPr sz="1275" b="0">
-                <a:solidFill>
-                  <a:srgbClr val="647078"/>
-                </a:solidFill>
-              </a:rPr>
-              <a:t>evidence, next steps</a:t>
-            </a:r>
-          </a:p>
-        </p:txBody>
-      </p:sp>
-      <p:sp>
-        <p:nvSpPr>
-          <p:cNvPr id="28" name="architecture-caption">
-            <a:extLst xmlns:a="http://schemas.openxmlformats.org/drawingml/2006/main">
-              <a:ext uri="{FF2B5EF4-FFF2-40B4-BE49-F238E27FC236}">
-                <a16:creationId xmlns:a16="http://schemas.microsoft.com/office/drawing/2014/main" id="{CB5A5957-E65D-4AB6-87C2-7B9F0EBB42D9}"/>
-              </a:ext>
-            </a:extLst>
-          </p:cNvPr>
-          <p:cNvSpPr>
-            <a:spLocks xmlns:a="http://schemas.openxmlformats.org/drawingml/2006/main" noGrp="1"/>
-          </p:cNvSpPr>
-          <p:nvPr/>
-        </p:nvSpPr>
-        <p:spPr>
-          <a:xfrm xmlns:a="http://schemas.openxmlformats.org/drawingml/2006/main">
-            <a:off x="514350" y="5238750"/>
-            <a:ext cx="11049000" cy="590550"/>
-          </a:xfrm>
-          <a:prstGeom xmlns:a="http://schemas.openxmlformats.org/drawingml/2006/main" prst="rect">
-            <a:avLst/>
-          </a:prstGeom>
-          <a:noFill xmlns:a="http://schemas.openxmlformats.org/drawingml/2006/main"/>
-          <a:ln xmlns:a="http://schemas.openxmlformats.org/drawingml/2006/main" w="0">
-            <a:noFill/>
-            <a:prstDash val="solid"/>
-          </a:ln>
-        </p:spPr>
-        <p:txBody>
-          <a:bodyPr xmlns:a="http://schemas.openxmlformats.org/drawingml/2006/main" anchor="t"/>
-          <a:lstStyle xmlns:a="http://schemas.openxmlformats.org/drawingml/2006/main"/>
-          <a:p xmlns:a="http://schemas.openxmlformats.org/drawingml/2006/main">
-            <a:pPr algn="l">
-              <a:defRPr sz="1350" b="0">
-                <a:solidFill>
-                  <a:srgbClr val="647078"/>
-                </a:solidFill>
-              </a:defRPr>
-            </a:pPr>
-            <a:r>
-              <a:rPr sz="1350" b="0">
-                <a:solidFill>
-                  <a:srgbClr val="647078"/>
-                </a:solidFill>
-              </a:rPr>
-              <a:t>Production mode uses the OpenAI Responses API with server-side secrets. Explicit Mock mode remains available for deterministic UI testing.</a:t>
+          <p:cNvPr id="23" name="canvas-boundary-text">
+            <a:extLst xmlns:a="http://schemas.openxmlformats.org/drawingml/2006/main">
+              <a:ext uri="{FF2B5EF4-FFF2-40B4-BE49-F238E27FC236}">
+                <a16:creationId xmlns:a16="http://schemas.microsoft.com/office/drawing/2014/main" id="{91D6FAE6-435D-49C1-B3C0-9C2987B552F1}"/>
+              </a:ext>
+            </a:extLst>
+          </p:cNvPr>
+          <p:cNvSpPr>
+            <a:spLocks xmlns:a="http://schemas.openxmlformats.org/drawingml/2006/main" noGrp="1"/>
+          </p:cNvSpPr>
+          <p:nvPr/>
+        </p:nvSpPr>
+        <p:spPr>
+          <a:xfrm xmlns:a="http://schemas.openxmlformats.org/drawingml/2006/main">
+            <a:off x="723900" y="5981700"/>
+            <a:ext cx="10591800" cy="228600"/>
+          </a:xfrm>
+          <a:prstGeom xmlns:a="http://schemas.openxmlformats.org/drawingml/2006/main" prst="rect">
+            <a:avLst/>
+          </a:prstGeom>
+          <a:noFill xmlns:a="http://schemas.openxmlformats.org/drawingml/2006/main"/>
+          <a:ln xmlns:a="http://schemas.openxmlformats.org/drawingml/2006/main" w="0">
+            <a:noFill/>
+            <a:prstDash val="solid"/>
+          </a:ln>
+        </p:spPr>
+        <p:txBody>
+          <a:bodyPr xmlns:a="http://schemas.openxmlformats.org/drawingml/2006/main" anchor="t"/>
+          <a:lstStyle xmlns:a="http://schemas.openxmlformats.org/drawingml/2006/main"/>
+          <a:p xmlns:a="http://schemas.openxmlformats.org/drawingml/2006/main">
+            <a:pPr algn="ctr">
+              <a:defRPr sz="1125" b="1">
+                <a:solidFill>
+                  <a:srgbClr val="725E16"/>
+                </a:solidFill>
+              </a:defRPr>
+            </a:pPr>
+            <a:r>
+              <a:rPr sz="1125" b="1">
+                <a:solidFill>
+                  <a:srgbClr val="725E16"/>
+                </a:solidFill>
+              </a:rPr>
+              <a:t>Canvas connection code is complete; live school access still requires an administrator-approved Developer Key.</a:t>
             </a:r>
           </a:p>
         </p:txBody>
@@ -6607,7 +7715,7 @@
     </p:spTree>
     <p:extLst>
       <p:ext uri="{BB962C8B-B14F-4D97-AF65-F5344CB8AC3E}">
-        <p14:creationId xmlns:p14="http://schemas.microsoft.com/office/powerpoint/2010/main" val="1733611944"/>
+        <p14:creationId xmlns:p14="http://schemas.microsoft.com/office/powerpoint/2010/main" val="1166567586"/>
       </p:ext>
     </p:extLst>
   </p:cSld>
@@ -6635,10 +7743,10 @@
       </p:grpSpPr>
       <p:sp>
         <p:nvSpPr>
-          <p:cNvPr id="26" name="section-7">
-            <a:extLst xmlns:a="http://schemas.openxmlformats.org/drawingml/2006/main">
-              <a:ext uri="{FF2B5EF4-FFF2-40B4-BE49-F238E27FC236}">
-                <a16:creationId xmlns:a16="http://schemas.microsoft.com/office/drawing/2014/main" id="{08F8EFFB-D684-4B69-B69D-80D469098113}"/>
+          <p:cNvPr id="29" name="section-7">
+            <a:extLst xmlns:a="http://schemas.openxmlformats.org/drawingml/2006/main">
+              <a:ext uri="{FF2B5EF4-FFF2-40B4-BE49-F238E27FC236}">
+                <a16:creationId xmlns:a16="http://schemas.microsoft.com/office/drawing/2014/main" id="{C468B355-C192-4019-966B-A58974286522}"/>
               </a:ext>
             </a:extLst>
           </p:cNvPr>
@@ -6678,7 +7786,7 @@
                   <a:srgbClr val="2F7D74"/>
                 </a:solidFill>
               </a:rPr>
-              <a:t>TRUST BY DESIGN</a:t>
+              <a:t>SECURE ARCHITECTURE</a:t>
             </a:r>
           </a:p>
         </p:txBody>
@@ -6688,7 +7796,7 @@
           <p:cNvPr id="2" name="page-7">
             <a:extLst xmlns:a="http://schemas.openxmlformats.org/drawingml/2006/main">
               <a:ext uri="{FF2B5EF4-FFF2-40B4-BE49-F238E27FC236}">
-                <a16:creationId xmlns:a16="http://schemas.microsoft.com/office/drawing/2014/main" id="{A8ED8BD4-43FE-4789-94F6-A8844669AA7D}"/>
+                <a16:creationId xmlns:a16="http://schemas.microsoft.com/office/drawing/2014/main" id="{C801743E-CFC8-429F-B054-C95FDDB464EE}"/>
               </a:ext>
             </a:extLst>
           </p:cNvPr>
@@ -6738,7 +7846,7 @@
           <p:cNvPr id="3" name="rule-48-66">
             <a:extLst xmlns:a="http://schemas.openxmlformats.org/drawingml/2006/main">
               <a:ext uri="{FF2B5EF4-FFF2-40B4-BE49-F238E27FC236}">
-                <a16:creationId xmlns:a16="http://schemas.microsoft.com/office/drawing/2014/main" id="{F9DCC29E-CBAA-4A82-80D0-AA2F9BF32E24}"/>
+                <a16:creationId xmlns:a16="http://schemas.microsoft.com/office/drawing/2014/main" id="{F1A3D063-83B7-4C7D-8693-1B06D1CC0547}"/>
               </a:ext>
             </a:extLst>
           </p:cNvPr>
@@ -6766,10 +7874,10 @@
       </p:sp>
       <p:sp>
         <p:nvSpPr>
-          <p:cNvPr id="4" name="title-Help students do the work. Do not do it for them.">
-            <a:extLst xmlns:a="http://schemas.openxmlformats.org/drawingml/2006/main">
-              <a:ext uri="{FF2B5EF4-FFF2-40B4-BE49-F238E27FC236}">
-                <a16:creationId xmlns:a16="http://schemas.microsoft.com/office/drawing/2014/main" id="{139B5F08-5405-4EBA-B785-99A2D204ABDE}"/>
+          <p:cNvPr id="4" name="title-Live AI stays bounded to the selected work.">
+            <a:extLst xmlns:a="http://schemas.openxmlformats.org/drawingml/2006/main">
+              <a:ext uri="{FF2B5EF4-FFF2-40B4-BE49-F238E27FC236}">
+                <a16:creationId xmlns:a16="http://schemas.microsoft.com/office/drawing/2014/main" id="{F0E7A196-7DBB-4F97-BC28-F42A4E6E6DB8}"/>
               </a:ext>
             </a:extLst>
           </p:cNvPr>
@@ -6809,17 +7917,17 @@
                   <a:srgbClr val="141C22"/>
                 </a:solidFill>
               </a:rPr>
-              <a:t>Help students do the work. Do not do it for them.</a:t>
-            </a:r>
-          </a:p>
-        </p:txBody>
-      </p:sp>
-      <p:sp>
-        <p:nvSpPr>
-          <p:cNvPr id="5" name="subtitle-Help students do the work. Do not do it for them.">
-            <a:extLst xmlns:a="http://schemas.openxmlformats.org/drawingml/2006/main">
-              <a:ext uri="{FF2B5EF4-FFF2-40B4-BE49-F238E27FC236}">
-                <a16:creationId xmlns:a16="http://schemas.microsoft.com/office/drawing/2014/main" id="{60957D8F-791E-4CFD-B350-BB469DB66DF7}"/>
+              <a:t>Live AI stays bounded to the selected work.</a:t>
+            </a:r>
+          </a:p>
+        </p:txBody>
+      </p:sp>
+      <p:sp>
+        <p:nvSpPr>
+          <p:cNvPr id="5" name="subtitle-Live AI stays bounded to the selected work.">
+            <a:extLst xmlns:a="http://schemas.openxmlformats.org/drawingml/2006/main">
+              <a:ext uri="{FF2B5EF4-FFF2-40B4-BE49-F238E27FC236}">
+                <a16:creationId xmlns:a16="http://schemas.microsoft.com/office/drawing/2014/main" id="{97B110A3-DF50-4779-9BCD-C4BB5DE1013D}"/>
               </a:ext>
             </a:extLst>
           </p:cNvPr>
@@ -6859,139 +7967,41 @@
                   <a:srgbClr val="647078"/>
                 </a:solidFill>
               </a:rPr>
-              <a:t>The Coach is designed as a study partner with explicit academic-integrity and privacy boundaries.</a:t>
-            </a:r>
-          </a:p>
-        </p:txBody>
-      </p:sp>
-      <p:sp>
-        <p:nvSpPr>
-          <p:cNvPr id="6" name="integrity-do-title">
-            <a:extLst xmlns:a="http://schemas.openxmlformats.org/drawingml/2006/main">
-              <a:ext uri="{FF2B5EF4-FFF2-40B4-BE49-F238E27FC236}">
-                <a16:creationId xmlns:a16="http://schemas.microsoft.com/office/drawing/2014/main" id="{FE73EE0E-9DEB-4917-A6C1-1D9D20A75391}"/>
-              </a:ext>
-            </a:extLst>
-          </p:cNvPr>
-          <p:cNvSpPr>
-            <a:spLocks xmlns:a="http://schemas.openxmlformats.org/drawingml/2006/main" noGrp="1"/>
-          </p:cNvSpPr>
-          <p:nvPr/>
-        </p:nvSpPr>
-        <p:spPr>
-          <a:xfrm xmlns:a="http://schemas.openxmlformats.org/drawingml/2006/main">
-            <a:off x="552450" y="2476500"/>
-            <a:ext cx="4762500" cy="266700"/>
-          </a:xfrm>
-          <a:prstGeom xmlns:a="http://schemas.openxmlformats.org/drawingml/2006/main" prst="rect">
-            <a:avLst/>
-          </a:prstGeom>
-          <a:noFill xmlns:a="http://schemas.openxmlformats.org/drawingml/2006/main"/>
-          <a:ln xmlns:a="http://schemas.openxmlformats.org/drawingml/2006/main" w="0">
-            <a:noFill/>
-            <a:prstDash val="solid"/>
-          </a:ln>
-        </p:spPr>
-        <p:txBody>
-          <a:bodyPr xmlns:a="http://schemas.openxmlformats.org/drawingml/2006/main" anchor="t"/>
-          <a:lstStyle xmlns:a="http://schemas.openxmlformats.org/drawingml/2006/main"/>
-          <a:p xmlns:a="http://schemas.openxmlformats.org/drawingml/2006/main">
-            <a:pPr algn="l">
-              <a:defRPr sz="1050" b="1">
-                <a:solidFill>
-                  <a:srgbClr val="2F7D74"/>
-                </a:solidFill>
-              </a:defRPr>
-            </a:pPr>
-            <a:r>
-              <a:rPr sz="1050" b="1">
-                <a:solidFill>
-                  <a:srgbClr val="2F7D74"/>
-                </a:solidFill>
-              </a:rPr>
-              <a:t>THE COACH CAN</a:t>
-            </a:r>
-          </a:p>
-        </p:txBody>
-      </p:sp>
-      <p:sp>
-        <p:nvSpPr>
-          <p:cNvPr id="7" name="integrity-dont-title">
-            <a:extLst xmlns:a="http://schemas.openxmlformats.org/drawingml/2006/main">
-              <a:ext uri="{FF2B5EF4-FFF2-40B4-BE49-F238E27FC236}">
-                <a16:creationId xmlns:a16="http://schemas.microsoft.com/office/drawing/2014/main" id="{9BC5B724-27DE-496E-8651-BFFEA1D6BA0B}"/>
-              </a:ext>
-            </a:extLst>
-          </p:cNvPr>
-          <p:cNvSpPr>
-            <a:spLocks xmlns:a="http://schemas.openxmlformats.org/drawingml/2006/main" noGrp="1"/>
-          </p:cNvSpPr>
-          <p:nvPr/>
-        </p:nvSpPr>
-        <p:spPr>
-          <a:xfrm xmlns:a="http://schemas.openxmlformats.org/drawingml/2006/main">
-            <a:off x="6534150" y="2476500"/>
-            <a:ext cx="4762500" cy="266700"/>
-          </a:xfrm>
-          <a:prstGeom xmlns:a="http://schemas.openxmlformats.org/drawingml/2006/main" prst="rect">
-            <a:avLst/>
-          </a:prstGeom>
-          <a:noFill xmlns:a="http://schemas.openxmlformats.org/drawingml/2006/main"/>
-          <a:ln xmlns:a="http://schemas.openxmlformats.org/drawingml/2006/main" w="0">
-            <a:noFill/>
-            <a:prstDash val="solid"/>
-          </a:ln>
-        </p:spPr>
-        <p:txBody>
-          <a:bodyPr xmlns:a="http://schemas.openxmlformats.org/drawingml/2006/main" anchor="t"/>
-          <a:lstStyle xmlns:a="http://schemas.openxmlformats.org/drawingml/2006/main"/>
-          <a:p xmlns:a="http://schemas.openxmlformats.org/drawingml/2006/main">
-            <a:pPr algn="l">
-              <a:defRPr sz="1050" b="1">
-                <a:solidFill>
-                  <a:srgbClr val="B9504A"/>
-                </a:solidFill>
-              </a:defRPr>
-            </a:pPr>
-            <a:r>
-              <a:rPr sz="1050" b="1">
-                <a:solidFill>
-                  <a:srgbClr val="B9504A"/>
-                </a:solidFill>
-              </a:rPr>
-              <a:t>THE COACH WILL NOT</a:t>
-            </a:r>
-          </a:p>
-        </p:txBody>
-      </p:sp>
-      <p:sp>
-        <p:nvSpPr>
-          <p:cNvPr id="8" name="can-dot-0">
-            <a:extLst xmlns:a="http://schemas.openxmlformats.org/drawingml/2006/main">
-              <a:ext uri="{FF2B5EF4-FFF2-40B4-BE49-F238E27FC236}">
-                <a16:creationId xmlns:a16="http://schemas.microsoft.com/office/drawing/2014/main" id="{DF4EB4C4-F2F8-4B29-86B7-09DD6E09C7DC}"/>
-              </a:ext>
-            </a:extLst>
-          </p:cNvPr>
-          <p:cNvSpPr>
-            <a:spLocks xmlns:a="http://schemas.openxmlformats.org/drawingml/2006/main" noGrp="1"/>
-          </p:cNvSpPr>
-          <p:nvPr/>
-        </p:nvSpPr>
-        <p:spPr>
-          <a:xfrm xmlns:a="http://schemas.openxmlformats.org/drawingml/2006/main">
-            <a:off x="590550" y="3086100"/>
-            <a:ext cx="171450" cy="171450"/>
-          </a:xfrm>
-          <a:prstGeom xmlns:a="http://schemas.openxmlformats.org/drawingml/2006/main" prst="ellipse">
-            <a:avLst/>
+              <a:t>The browser sends only the selected context; the Worker validates it and returns a structured, evidence-grounded response.</a:t>
+            </a:r>
+          </a:p>
+        </p:txBody>
+      </p:sp>
+      <p:sp>
+        <p:nvSpPr>
+          <p:cNvPr id="6" name="architecture-node-0">
+            <a:extLst xmlns:a="http://schemas.openxmlformats.org/drawingml/2006/main">
+              <a:ext uri="{FF2B5EF4-FFF2-40B4-BE49-F238E27FC236}">
+                <a16:creationId xmlns:a16="http://schemas.microsoft.com/office/drawing/2014/main" id="{B17E8E83-07E2-407C-9AD4-A60902A697A9}"/>
+              </a:ext>
+            </a:extLst>
+          </p:cNvPr>
+          <p:cNvSpPr>
+            <a:spLocks xmlns:a="http://schemas.openxmlformats.org/drawingml/2006/main" noGrp="1"/>
+          </p:cNvSpPr>
+          <p:nvPr/>
+        </p:nvSpPr>
+        <p:spPr>
+          <a:xfrm xmlns:a="http://schemas.openxmlformats.org/drawingml/2006/main">
+            <a:off x="514350" y="2571750"/>
+            <a:ext cx="2324100" cy="2076450"/>
+          </a:xfrm>
+          <a:prstGeom xmlns:a="http://schemas.openxmlformats.org/drawingml/2006/main" prst="roundRect">
+            <a:avLst>
+              <a:gd name="adj" fmla="val 3670"/>
+            </a:avLst>
           </a:prstGeom>
           <a:solidFill xmlns:a="http://schemas.openxmlformats.org/drawingml/2006/main">
-            <a:srgbClr val="2F7D74"/>
+            <a:srgbClr val="FFFFFF"/>
           </a:solidFill>
           <a:ln xmlns:a="http://schemas.openxmlformats.org/drawingml/2006/main" w="9525">
             <a:solidFill>
-              <a:srgbClr val="2F7D74"/>
+              <a:srgbClr val="C8CECA"/>
             </a:solidFill>
             <a:prstDash val="solid"/>
           </a:ln>
@@ -6999,22 +8009,22 @@
       </p:sp>
       <p:sp>
         <p:nvSpPr>
-          <p:cNvPr id="9" name="can-0">
-            <a:extLst xmlns:a="http://schemas.openxmlformats.org/drawingml/2006/main">
-              <a:ext uri="{FF2B5EF4-FFF2-40B4-BE49-F238E27FC236}">
-                <a16:creationId xmlns:a16="http://schemas.microsoft.com/office/drawing/2014/main" id="{41A3F67E-6EDD-451F-9A1B-3D304E283AEB}"/>
-              </a:ext>
-            </a:extLst>
-          </p:cNvPr>
-          <p:cNvSpPr>
-            <a:spLocks xmlns:a="http://schemas.openxmlformats.org/drawingml/2006/main" noGrp="1"/>
-          </p:cNvSpPr>
-          <p:nvPr/>
-        </p:nvSpPr>
-        <p:spPr>
-          <a:xfrm xmlns:a="http://schemas.openxmlformats.org/drawingml/2006/main">
-            <a:off x="914400" y="3009900"/>
-            <a:ext cx="4476750" cy="361950"/>
+          <p:cNvPr id="7" name="architecture-index-0">
+            <a:extLst xmlns:a="http://schemas.openxmlformats.org/drawingml/2006/main">
+              <a:ext uri="{FF2B5EF4-FFF2-40B4-BE49-F238E27FC236}">
+                <a16:creationId xmlns:a16="http://schemas.microsoft.com/office/drawing/2014/main" id="{CD318C1D-3E3D-4EED-924A-B7D1A93753F0}"/>
+              </a:ext>
+            </a:extLst>
+          </p:cNvPr>
+          <p:cNvSpPr>
+            <a:spLocks xmlns:a="http://schemas.openxmlformats.org/drawingml/2006/main" noGrp="1"/>
+          </p:cNvSpPr>
+          <p:nvPr/>
+        </p:nvSpPr>
+        <p:spPr>
+          <a:xfrm xmlns:a="http://schemas.openxmlformats.org/drawingml/2006/main">
+            <a:off x="723900" y="2781300"/>
+            <a:ext cx="457200" cy="266700"/>
           </a:xfrm>
           <a:prstGeom xmlns:a="http://schemas.openxmlformats.org/drawingml/2006/main" prst="rect">
             <a:avLst/>
@@ -7030,51 +8040,182 @@
           <a:lstStyle xmlns:a="http://schemas.openxmlformats.org/drawingml/2006/main"/>
           <a:p xmlns:a="http://schemas.openxmlformats.org/drawingml/2006/main">
             <a:pPr algn="l">
-              <a:defRPr sz="1575" b="0">
+              <a:defRPr sz="975" b="1">
+                <a:solidFill>
+                  <a:srgbClr val="2F7D74"/>
+                </a:solidFill>
+              </a:defRPr>
+            </a:pPr>
+            <a:r>
+              <a:rPr sz="975" b="1">
+                <a:solidFill>
+                  <a:srgbClr val="2F7D74"/>
+                </a:solidFill>
+              </a:rPr>
+              <a:t>01</a:t>
+            </a:r>
+          </a:p>
+        </p:txBody>
+      </p:sp>
+      <p:sp>
+        <p:nvSpPr>
+          <p:cNvPr id="8" name="architecture-title-0">
+            <a:extLst xmlns:a="http://schemas.openxmlformats.org/drawingml/2006/main">
+              <a:ext uri="{FF2B5EF4-FFF2-40B4-BE49-F238E27FC236}">
+                <a16:creationId xmlns:a16="http://schemas.microsoft.com/office/drawing/2014/main" id="{AE0044F3-22B0-4674-8955-5E8C114F8933}"/>
+              </a:ext>
+            </a:extLst>
+          </p:cNvPr>
+          <p:cNvSpPr>
+            <a:spLocks xmlns:a="http://schemas.openxmlformats.org/drawingml/2006/main" noGrp="1"/>
+          </p:cNvSpPr>
+          <p:nvPr/>
+        </p:nvSpPr>
+        <p:spPr>
+          <a:xfrm xmlns:a="http://schemas.openxmlformats.org/drawingml/2006/main">
+            <a:off x="723900" y="3238500"/>
+            <a:ext cx="1905000" cy="495300"/>
+          </a:xfrm>
+          <a:prstGeom xmlns:a="http://schemas.openxmlformats.org/drawingml/2006/main" prst="rect">
+            <a:avLst/>
+          </a:prstGeom>
+          <a:noFill xmlns:a="http://schemas.openxmlformats.org/drawingml/2006/main"/>
+          <a:ln xmlns:a="http://schemas.openxmlformats.org/drawingml/2006/main" w="0">
+            <a:noFill/>
+            <a:prstDash val="solid"/>
+          </a:ln>
+        </p:spPr>
+        <p:txBody>
+          <a:bodyPr xmlns:a="http://schemas.openxmlformats.org/drawingml/2006/main" anchor="t"/>
+          <a:lstStyle xmlns:a="http://schemas.openxmlformats.org/drawingml/2006/main"/>
+          <a:p xmlns:a="http://schemas.openxmlformats.org/drawingml/2006/main">
+            <a:pPr algn="l">
+              <a:defRPr sz="1650" b="1">
                 <a:solidFill>
                   <a:srgbClr val="141C22"/>
                 </a:solidFill>
               </a:defRPr>
             </a:pPr>
             <a:r>
-              <a:rPr sz="1575" b="0">
+              <a:rPr sz="1650" b="1">
                 <a:solidFill>
                   <a:srgbClr val="141C22"/>
                 </a:solidFill>
               </a:rPr>
-              <a:t>Explain assignment language</a:t>
-            </a:r>
-          </a:p>
-        </p:txBody>
-      </p:sp>
-      <p:sp>
-        <p:nvSpPr>
-          <p:cNvPr id="10" name="can-dot-1">
-            <a:extLst xmlns:a="http://schemas.openxmlformats.org/drawingml/2006/main">
-              <a:ext uri="{FF2B5EF4-FFF2-40B4-BE49-F238E27FC236}">
-                <a16:creationId xmlns:a16="http://schemas.microsoft.com/office/drawing/2014/main" id="{2B8B4598-507F-4D8B-987A-91D8641E962C}"/>
-              </a:ext>
-            </a:extLst>
-          </p:cNvPr>
-          <p:cNvSpPr>
-            <a:spLocks xmlns:a="http://schemas.openxmlformats.org/drawingml/2006/main" noGrp="1"/>
-          </p:cNvSpPr>
-          <p:nvPr/>
-        </p:nvSpPr>
-        <p:spPr>
-          <a:xfrm xmlns:a="http://schemas.openxmlformats.org/drawingml/2006/main">
-            <a:off x="590550" y="3714750"/>
+              <a:t>Browser</a:t>
+            </a:r>
+          </a:p>
+        </p:txBody>
+      </p:sp>
+      <p:sp>
+        <p:nvSpPr>
+          <p:cNvPr id="9" name="architecture-body-0">
+            <a:extLst xmlns:a="http://schemas.openxmlformats.org/drawingml/2006/main">
+              <a:ext uri="{FF2B5EF4-FFF2-40B4-BE49-F238E27FC236}">
+                <a16:creationId xmlns:a16="http://schemas.microsoft.com/office/drawing/2014/main" id="{4F794061-DF01-4156-AB06-BC654BDEE6CC}"/>
+              </a:ext>
+            </a:extLst>
+          </p:cNvPr>
+          <p:cNvSpPr>
+            <a:spLocks xmlns:a="http://schemas.openxmlformats.org/drawingml/2006/main" noGrp="1"/>
+          </p:cNvSpPr>
+          <p:nvPr/>
+        </p:nvSpPr>
+        <p:spPr>
+          <a:xfrm xmlns:a="http://schemas.openxmlformats.org/drawingml/2006/main">
+            <a:off x="723900" y="3886200"/>
+            <a:ext cx="1905000" cy="590550"/>
+          </a:xfrm>
+          <a:prstGeom xmlns:a="http://schemas.openxmlformats.org/drawingml/2006/main" prst="rect">
+            <a:avLst/>
+          </a:prstGeom>
+          <a:noFill xmlns:a="http://schemas.openxmlformats.org/drawingml/2006/main"/>
+          <a:ln xmlns:a="http://schemas.openxmlformats.org/drawingml/2006/main" w="0">
+            <a:noFill/>
+            <a:prstDash val="solid"/>
+          </a:ln>
+        </p:spPr>
+        <p:txBody>
+          <a:bodyPr xmlns:a="http://schemas.openxmlformats.org/drawingml/2006/main" anchor="t"/>
+          <a:lstStyle xmlns:a="http://schemas.openxmlformats.org/drawingml/2006/main"/>
+          <a:p xmlns:a="http://schemas.openxmlformats.org/drawingml/2006/main">
+            <a:pPr algn="l">
+              <a:defRPr sz="1200" b="0">
+                <a:solidFill>
+                  <a:srgbClr val="647078"/>
+                </a:solidFill>
+              </a:defRPr>
+            </a:pPr>
+            <a:r>
+              <a:rPr sz="1200" b="0">
+                <a:solidFill>
+                  <a:srgbClr val="647078"/>
+                </a:solidFill>
+              </a:rPr>
+              <a:t>Local workspace and scoped conversation</a:t>
+            </a:r>
+          </a:p>
+        </p:txBody>
+      </p:sp>
+      <p:sp>
+        <p:nvSpPr>
+          <p:cNvPr id="10" name="rule-298-378">
+            <a:extLst xmlns:a="http://schemas.openxmlformats.org/drawingml/2006/main">
+              <a:ext uri="{FF2B5EF4-FFF2-40B4-BE49-F238E27FC236}">
+                <a16:creationId xmlns:a16="http://schemas.microsoft.com/office/drawing/2014/main" id="{5F370885-20C4-4D1F-B153-882142BD3AEA}"/>
+              </a:ext>
+            </a:extLst>
+          </p:cNvPr>
+          <p:cNvSpPr>
+            <a:spLocks xmlns:a="http://schemas.openxmlformats.org/drawingml/2006/main" noGrp="1"/>
+          </p:cNvSpPr>
+          <p:nvPr/>
+        </p:nvSpPr>
+        <p:spPr>
+          <a:xfrm xmlns:a="http://schemas.openxmlformats.org/drawingml/2006/main">
+            <a:off x="2838450" y="3600450"/>
+            <a:ext cx="552450" cy="28575"/>
+          </a:xfrm>
+          <a:prstGeom xmlns:a="http://schemas.openxmlformats.org/drawingml/2006/main" prst="rect">
+            <a:avLst/>
+          </a:prstGeom>
+          <a:solidFill xmlns:a="http://schemas.openxmlformats.org/drawingml/2006/main">
+            <a:srgbClr val="C9A63F"/>
+          </a:solidFill>
+          <a:ln xmlns:a="http://schemas.openxmlformats.org/drawingml/2006/main" w="0">
+            <a:noFill/>
+            <a:prstDash val="solid"/>
+          </a:ln>
+        </p:spPr>
+      </p:sp>
+      <p:sp>
+        <p:nvSpPr>
+          <p:cNvPr id="11" name="architecture-arrow-0">
+            <a:extLst xmlns:a="http://schemas.openxmlformats.org/drawingml/2006/main">
+              <a:ext uri="{FF2B5EF4-FFF2-40B4-BE49-F238E27FC236}">
+                <a16:creationId xmlns:a16="http://schemas.microsoft.com/office/drawing/2014/main" id="{DDD27821-77F3-4194-BF0D-225E8C96E3DE}"/>
+              </a:ext>
+            </a:extLst>
+          </p:cNvPr>
+          <p:cNvSpPr>
+            <a:spLocks xmlns:a="http://schemas.openxmlformats.org/drawingml/2006/main" noGrp="1"/>
+          </p:cNvSpPr>
+          <p:nvPr/>
+        </p:nvSpPr>
+        <p:spPr>
+          <a:xfrm xmlns:a="http://schemas.openxmlformats.org/drawingml/2006/main">
+            <a:off x="3219450" y="3524250"/>
             <a:ext cx="171450" cy="171450"/>
           </a:xfrm>
-          <a:prstGeom xmlns:a="http://schemas.openxmlformats.org/drawingml/2006/main" prst="ellipse">
+          <a:prstGeom xmlns:a="http://schemas.openxmlformats.org/drawingml/2006/main" prst="triangle">
             <a:avLst/>
           </a:prstGeom>
           <a:solidFill xmlns:a="http://schemas.openxmlformats.org/drawingml/2006/main">
-            <a:srgbClr val="2F7D74"/>
+            <a:srgbClr val="C9A63F"/>
           </a:solidFill>
           <a:ln xmlns:a="http://schemas.openxmlformats.org/drawingml/2006/main" w="9525">
             <a:solidFill>
-              <a:srgbClr val="2F7D74"/>
+              <a:srgbClr val="C9A63F"/>
             </a:solidFill>
             <a:prstDash val="solid"/>
           </a:ln>
@@ -7082,82 +8223,34 @@
       </p:sp>
       <p:sp>
         <p:nvSpPr>
-          <p:cNvPr id="11" name="can-1">
-            <a:extLst xmlns:a="http://schemas.openxmlformats.org/drawingml/2006/main">
-              <a:ext uri="{FF2B5EF4-FFF2-40B4-BE49-F238E27FC236}">
-                <a16:creationId xmlns:a16="http://schemas.microsoft.com/office/drawing/2014/main" id="{1EEE4C3A-C993-4B99-8815-0FAE674E195C}"/>
-              </a:ext>
-            </a:extLst>
-          </p:cNvPr>
-          <p:cNvSpPr>
-            <a:spLocks xmlns:a="http://schemas.openxmlformats.org/drawingml/2006/main" noGrp="1"/>
-          </p:cNvSpPr>
-          <p:nvPr/>
-        </p:nvSpPr>
-        <p:spPr>
-          <a:xfrm xmlns:a="http://schemas.openxmlformats.org/drawingml/2006/main">
-            <a:off x="914400" y="3638550"/>
-            <a:ext cx="4476750" cy="361950"/>
-          </a:xfrm>
-          <a:prstGeom xmlns:a="http://schemas.openxmlformats.org/drawingml/2006/main" prst="rect">
-            <a:avLst/>
-          </a:prstGeom>
-          <a:noFill xmlns:a="http://schemas.openxmlformats.org/drawingml/2006/main"/>
-          <a:ln xmlns:a="http://schemas.openxmlformats.org/drawingml/2006/main" w="0">
-            <a:noFill/>
-            <a:prstDash val="solid"/>
-          </a:ln>
-        </p:spPr>
-        <p:txBody>
-          <a:bodyPr xmlns:a="http://schemas.openxmlformats.org/drawingml/2006/main" anchor="t"/>
-          <a:lstStyle xmlns:a="http://schemas.openxmlformats.org/drawingml/2006/main"/>
-          <a:p xmlns:a="http://schemas.openxmlformats.org/drawingml/2006/main">
-            <a:pPr algn="l">
-              <a:defRPr sz="1575" b="0">
-                <a:solidFill>
-                  <a:srgbClr val="141C22"/>
-                </a:solidFill>
-              </a:defRPr>
-            </a:pPr>
-            <a:r>
-              <a:rPr sz="1575" b="0">
-                <a:solidFill>
-                  <a:srgbClr val="141C22"/>
-                </a:solidFill>
-              </a:rPr>
-              <a:t>Identify requirements and gaps</a:t>
-            </a:r>
-          </a:p>
-        </p:txBody>
-      </p:sp>
-      <p:sp>
-        <p:nvSpPr>
-          <p:cNvPr id="12" name="can-dot-2">
-            <a:extLst xmlns:a="http://schemas.openxmlformats.org/drawingml/2006/main">
-              <a:ext uri="{FF2B5EF4-FFF2-40B4-BE49-F238E27FC236}">
-                <a16:creationId xmlns:a16="http://schemas.microsoft.com/office/drawing/2014/main" id="{DA85F919-9B24-438E-9DFC-CE0BA4F599FC}"/>
-              </a:ext>
-            </a:extLst>
-          </p:cNvPr>
-          <p:cNvSpPr>
-            <a:spLocks xmlns:a="http://schemas.openxmlformats.org/drawingml/2006/main" noGrp="1"/>
-          </p:cNvSpPr>
-          <p:nvPr/>
-        </p:nvSpPr>
-        <p:spPr>
-          <a:xfrm xmlns:a="http://schemas.openxmlformats.org/drawingml/2006/main">
-            <a:off x="590550" y="4343400"/>
-            <a:ext cx="171450" cy="171450"/>
-          </a:xfrm>
-          <a:prstGeom xmlns:a="http://schemas.openxmlformats.org/drawingml/2006/main" prst="ellipse">
-            <a:avLst/>
+          <p:cNvPr id="12" name="architecture-node-1">
+            <a:extLst xmlns:a="http://schemas.openxmlformats.org/drawingml/2006/main">
+              <a:ext uri="{FF2B5EF4-FFF2-40B4-BE49-F238E27FC236}">
+                <a16:creationId xmlns:a16="http://schemas.microsoft.com/office/drawing/2014/main" id="{54E99595-8C0F-4760-8E27-7837EEE25CA7}"/>
+              </a:ext>
+            </a:extLst>
+          </p:cNvPr>
+          <p:cNvSpPr>
+            <a:spLocks xmlns:a="http://schemas.openxmlformats.org/drawingml/2006/main" noGrp="1"/>
+          </p:cNvSpPr>
+          <p:nvPr/>
+        </p:nvSpPr>
+        <p:spPr>
+          <a:xfrm xmlns:a="http://schemas.openxmlformats.org/drawingml/2006/main">
+            <a:off x="3390900" y="2571750"/>
+            <a:ext cx="2324100" cy="2076450"/>
+          </a:xfrm>
+          <a:prstGeom xmlns:a="http://schemas.openxmlformats.org/drawingml/2006/main" prst="roundRect">
+            <a:avLst>
+              <a:gd name="adj" fmla="val 3670"/>
+            </a:avLst>
           </a:prstGeom>
           <a:solidFill xmlns:a="http://schemas.openxmlformats.org/drawingml/2006/main">
-            <a:srgbClr val="2F7D74"/>
+            <a:srgbClr val="FFFFFF"/>
           </a:solidFill>
           <a:ln xmlns:a="http://schemas.openxmlformats.org/drawingml/2006/main" w="9525">
             <a:solidFill>
-              <a:srgbClr val="2F7D74"/>
+              <a:srgbClr val="C8CECA"/>
             </a:solidFill>
             <a:prstDash val="solid"/>
           </a:ln>
@@ -7165,22 +8258,22 @@
       </p:sp>
       <p:sp>
         <p:nvSpPr>
-          <p:cNvPr id="13" name="can-2">
-            <a:extLst xmlns:a="http://schemas.openxmlformats.org/drawingml/2006/main">
-              <a:ext uri="{FF2B5EF4-FFF2-40B4-BE49-F238E27FC236}">
-                <a16:creationId xmlns:a16="http://schemas.microsoft.com/office/drawing/2014/main" id="{D22AD4E2-3014-4D6B-A048-AF3A3C05D3EC}"/>
-              </a:ext>
-            </a:extLst>
-          </p:cNvPr>
-          <p:cNvSpPr>
-            <a:spLocks xmlns:a="http://schemas.openxmlformats.org/drawingml/2006/main" noGrp="1"/>
-          </p:cNvSpPr>
-          <p:nvPr/>
-        </p:nvSpPr>
-        <p:spPr>
-          <a:xfrm xmlns:a="http://schemas.openxmlformats.org/drawingml/2006/main">
-            <a:off x="914400" y="4267200"/>
-            <a:ext cx="4476750" cy="361950"/>
+          <p:cNvPr id="13" name="architecture-index-1">
+            <a:extLst xmlns:a="http://schemas.openxmlformats.org/drawingml/2006/main">
+              <a:ext uri="{FF2B5EF4-FFF2-40B4-BE49-F238E27FC236}">
+                <a16:creationId xmlns:a16="http://schemas.microsoft.com/office/drawing/2014/main" id="{FE631B5B-ED58-45D9-8884-8892AB6B73FD}"/>
+              </a:ext>
+            </a:extLst>
+          </p:cNvPr>
+          <p:cNvSpPr>
+            <a:spLocks xmlns:a="http://schemas.openxmlformats.org/drawingml/2006/main" noGrp="1"/>
+          </p:cNvSpPr>
+          <p:nvPr/>
+        </p:nvSpPr>
+        <p:spPr>
+          <a:xfrm xmlns:a="http://schemas.openxmlformats.org/drawingml/2006/main">
+            <a:off x="3600450" y="2781300"/>
+            <a:ext cx="457200" cy="266700"/>
           </a:xfrm>
           <a:prstGeom xmlns:a="http://schemas.openxmlformats.org/drawingml/2006/main" prst="rect">
             <a:avLst/>
@@ -7196,51 +8289,182 @@
           <a:lstStyle xmlns:a="http://schemas.openxmlformats.org/drawingml/2006/main"/>
           <a:p xmlns:a="http://schemas.openxmlformats.org/drawingml/2006/main">
             <a:pPr algn="l">
-              <a:defRPr sz="1575" b="0">
+              <a:defRPr sz="975" b="1">
+                <a:solidFill>
+                  <a:srgbClr val="2F7D74"/>
+                </a:solidFill>
+              </a:defRPr>
+            </a:pPr>
+            <a:r>
+              <a:rPr sz="975" b="1">
+                <a:solidFill>
+                  <a:srgbClr val="2F7D74"/>
+                </a:solidFill>
+              </a:rPr>
+              <a:t>02</a:t>
+            </a:r>
+          </a:p>
+        </p:txBody>
+      </p:sp>
+      <p:sp>
+        <p:nvSpPr>
+          <p:cNvPr id="14" name="architecture-title-1">
+            <a:extLst xmlns:a="http://schemas.openxmlformats.org/drawingml/2006/main">
+              <a:ext uri="{FF2B5EF4-FFF2-40B4-BE49-F238E27FC236}">
+                <a16:creationId xmlns:a16="http://schemas.microsoft.com/office/drawing/2014/main" id="{54C8B05D-CE3C-44BC-9F14-64129E1D581E}"/>
+              </a:ext>
+            </a:extLst>
+          </p:cNvPr>
+          <p:cNvSpPr>
+            <a:spLocks xmlns:a="http://schemas.openxmlformats.org/drawingml/2006/main" noGrp="1"/>
+          </p:cNvSpPr>
+          <p:nvPr/>
+        </p:nvSpPr>
+        <p:spPr>
+          <a:xfrm xmlns:a="http://schemas.openxmlformats.org/drawingml/2006/main">
+            <a:off x="3600450" y="3238500"/>
+            <a:ext cx="1905000" cy="495300"/>
+          </a:xfrm>
+          <a:prstGeom xmlns:a="http://schemas.openxmlformats.org/drawingml/2006/main" prst="rect">
+            <a:avLst/>
+          </a:prstGeom>
+          <a:noFill xmlns:a="http://schemas.openxmlformats.org/drawingml/2006/main"/>
+          <a:ln xmlns:a="http://schemas.openxmlformats.org/drawingml/2006/main" w="0">
+            <a:noFill/>
+            <a:prstDash val="solid"/>
+          </a:ln>
+        </p:spPr>
+        <p:txBody>
+          <a:bodyPr xmlns:a="http://schemas.openxmlformats.org/drawingml/2006/main" anchor="t"/>
+          <a:lstStyle xmlns:a="http://schemas.openxmlformats.org/drawingml/2006/main"/>
+          <a:p xmlns:a="http://schemas.openxmlformats.org/drawingml/2006/main">
+            <a:pPr algn="l">
+              <a:defRPr sz="1650" b="1">
                 <a:solidFill>
                   <a:srgbClr val="141C22"/>
                 </a:solidFill>
               </a:defRPr>
             </a:pPr>
             <a:r>
-              <a:rPr sz="1575" b="0">
+              <a:rPr sz="1650" b="1">
                 <a:solidFill>
                   <a:srgbClr val="141C22"/>
                 </a:solidFill>
               </a:rPr>
-              <a:t>Suggest a sequence of next steps</a:t>
-            </a:r>
-          </a:p>
-        </p:txBody>
-      </p:sp>
-      <p:sp>
-        <p:nvSpPr>
-          <p:cNvPr id="14" name="can-dot-3">
-            <a:extLst xmlns:a="http://schemas.openxmlformats.org/drawingml/2006/main">
-              <a:ext uri="{FF2B5EF4-FFF2-40B4-BE49-F238E27FC236}">
-                <a16:creationId xmlns:a16="http://schemas.microsoft.com/office/drawing/2014/main" id="{64EEF6A3-C497-42B4-95B9-77BFED96F32E}"/>
-              </a:ext>
-            </a:extLst>
-          </p:cNvPr>
-          <p:cNvSpPr>
-            <a:spLocks xmlns:a="http://schemas.openxmlformats.org/drawingml/2006/main" noGrp="1"/>
-          </p:cNvSpPr>
-          <p:nvPr/>
-        </p:nvSpPr>
-        <p:spPr>
-          <a:xfrm xmlns:a="http://schemas.openxmlformats.org/drawingml/2006/main">
-            <a:off x="590550" y="4972050"/>
+              <a:t>Context builder</a:t>
+            </a:r>
+          </a:p>
+        </p:txBody>
+      </p:sp>
+      <p:sp>
+        <p:nvSpPr>
+          <p:cNvPr id="15" name="architecture-body-1">
+            <a:extLst xmlns:a="http://schemas.openxmlformats.org/drawingml/2006/main">
+              <a:ext uri="{FF2B5EF4-FFF2-40B4-BE49-F238E27FC236}">
+                <a16:creationId xmlns:a16="http://schemas.microsoft.com/office/drawing/2014/main" id="{7B82EC68-95F3-4AA0-A8AA-21AF5A10A9B5}"/>
+              </a:ext>
+            </a:extLst>
+          </p:cNvPr>
+          <p:cNvSpPr>
+            <a:spLocks xmlns:a="http://schemas.openxmlformats.org/drawingml/2006/main" noGrp="1"/>
+          </p:cNvSpPr>
+          <p:nvPr/>
+        </p:nvSpPr>
+        <p:spPr>
+          <a:xfrm xmlns:a="http://schemas.openxmlformats.org/drawingml/2006/main">
+            <a:off x="3600450" y="3886200"/>
+            <a:ext cx="1905000" cy="590550"/>
+          </a:xfrm>
+          <a:prstGeom xmlns:a="http://schemas.openxmlformats.org/drawingml/2006/main" prst="rect">
+            <a:avLst/>
+          </a:prstGeom>
+          <a:noFill xmlns:a="http://schemas.openxmlformats.org/drawingml/2006/main"/>
+          <a:ln xmlns:a="http://schemas.openxmlformats.org/drawingml/2006/main" w="0">
+            <a:noFill/>
+            <a:prstDash val="solid"/>
+          </a:ln>
+        </p:spPr>
+        <p:txBody>
+          <a:bodyPr xmlns:a="http://schemas.openxmlformats.org/drawingml/2006/main" anchor="t"/>
+          <a:lstStyle xmlns:a="http://schemas.openxmlformats.org/drawingml/2006/main"/>
+          <a:p xmlns:a="http://schemas.openxmlformats.org/drawingml/2006/main">
+            <a:pPr algn="l">
+              <a:defRPr sz="1200" b="0">
+                <a:solidFill>
+                  <a:srgbClr val="647078"/>
+                </a:solidFill>
+              </a:defRPr>
+            </a:pPr>
+            <a:r>
+              <a:rPr sz="1200" b="0">
+                <a:solidFill>
+                  <a:srgbClr val="647078"/>
+                </a:solidFill>
+              </a:rPr>
+              <a:t>Selected course, assignment, and sources</a:t>
+            </a:r>
+          </a:p>
+        </p:txBody>
+      </p:sp>
+      <p:sp>
+        <p:nvSpPr>
+          <p:cNvPr id="16" name="rule-600-378">
+            <a:extLst xmlns:a="http://schemas.openxmlformats.org/drawingml/2006/main">
+              <a:ext uri="{FF2B5EF4-FFF2-40B4-BE49-F238E27FC236}">
+                <a16:creationId xmlns:a16="http://schemas.microsoft.com/office/drawing/2014/main" id="{BF1C4EB2-AA3A-4D5C-9216-CB0B31AEE5E7}"/>
+              </a:ext>
+            </a:extLst>
+          </p:cNvPr>
+          <p:cNvSpPr>
+            <a:spLocks xmlns:a="http://schemas.openxmlformats.org/drawingml/2006/main" noGrp="1"/>
+          </p:cNvSpPr>
+          <p:nvPr/>
+        </p:nvSpPr>
+        <p:spPr>
+          <a:xfrm xmlns:a="http://schemas.openxmlformats.org/drawingml/2006/main">
+            <a:off x="5715000" y="3600450"/>
+            <a:ext cx="552450" cy="28575"/>
+          </a:xfrm>
+          <a:prstGeom xmlns:a="http://schemas.openxmlformats.org/drawingml/2006/main" prst="rect">
+            <a:avLst/>
+          </a:prstGeom>
+          <a:solidFill xmlns:a="http://schemas.openxmlformats.org/drawingml/2006/main">
+            <a:srgbClr val="C9A63F"/>
+          </a:solidFill>
+          <a:ln xmlns:a="http://schemas.openxmlformats.org/drawingml/2006/main" w="0">
+            <a:noFill/>
+            <a:prstDash val="solid"/>
+          </a:ln>
+        </p:spPr>
+      </p:sp>
+      <p:sp>
+        <p:nvSpPr>
+          <p:cNvPr id="17" name="architecture-arrow-1">
+            <a:extLst xmlns:a="http://schemas.openxmlformats.org/drawingml/2006/main">
+              <a:ext uri="{FF2B5EF4-FFF2-40B4-BE49-F238E27FC236}">
+                <a16:creationId xmlns:a16="http://schemas.microsoft.com/office/drawing/2014/main" id="{58027C6D-708E-492F-BC5D-239BF42BC51C}"/>
+              </a:ext>
+            </a:extLst>
+          </p:cNvPr>
+          <p:cNvSpPr>
+            <a:spLocks xmlns:a="http://schemas.openxmlformats.org/drawingml/2006/main" noGrp="1"/>
+          </p:cNvSpPr>
+          <p:nvPr/>
+        </p:nvSpPr>
+        <p:spPr>
+          <a:xfrm xmlns:a="http://schemas.openxmlformats.org/drawingml/2006/main">
+            <a:off x="6096000" y="3524250"/>
             <a:ext cx="171450" cy="171450"/>
           </a:xfrm>
-          <a:prstGeom xmlns:a="http://schemas.openxmlformats.org/drawingml/2006/main" prst="ellipse">
+          <a:prstGeom xmlns:a="http://schemas.openxmlformats.org/drawingml/2006/main" prst="triangle">
             <a:avLst/>
           </a:prstGeom>
           <a:solidFill xmlns:a="http://schemas.openxmlformats.org/drawingml/2006/main">
-            <a:srgbClr val="2F7D74"/>
+            <a:srgbClr val="C9A63F"/>
           </a:solidFill>
           <a:ln xmlns:a="http://schemas.openxmlformats.org/drawingml/2006/main" w="9525">
             <a:solidFill>
-              <a:srgbClr val="2F7D74"/>
+              <a:srgbClr val="C9A63F"/>
             </a:solidFill>
             <a:prstDash val="solid"/>
           </a:ln>
@@ -7248,408 +8472,26 @@
       </p:sp>
       <p:sp>
         <p:nvSpPr>
-          <p:cNvPr id="15" name="can-3">
-            <a:extLst xmlns:a="http://schemas.openxmlformats.org/drawingml/2006/main">
-              <a:ext uri="{FF2B5EF4-FFF2-40B4-BE49-F238E27FC236}">
-                <a16:creationId xmlns:a16="http://schemas.microsoft.com/office/drawing/2014/main" id="{02D3A15D-3AFB-43DF-A257-4B1250F90A63}"/>
-              </a:ext>
-            </a:extLst>
-          </p:cNvPr>
-          <p:cNvSpPr>
-            <a:spLocks xmlns:a="http://schemas.openxmlformats.org/drawingml/2006/main" noGrp="1"/>
-          </p:cNvSpPr>
-          <p:nvPr/>
-        </p:nvSpPr>
-        <p:spPr>
-          <a:xfrm xmlns:a="http://schemas.openxmlformats.org/drawingml/2006/main">
-            <a:off x="914400" y="4895850"/>
-            <a:ext cx="4476750" cy="361950"/>
-          </a:xfrm>
-          <a:prstGeom xmlns:a="http://schemas.openxmlformats.org/drawingml/2006/main" prst="rect">
-            <a:avLst/>
-          </a:prstGeom>
-          <a:noFill xmlns:a="http://schemas.openxmlformats.org/drawingml/2006/main"/>
-          <a:ln xmlns:a="http://schemas.openxmlformats.org/drawingml/2006/main" w="0">
-            <a:noFill/>
-            <a:prstDash val="solid"/>
-          </a:ln>
-        </p:spPr>
-        <p:txBody>
-          <a:bodyPr xmlns:a="http://schemas.openxmlformats.org/drawingml/2006/main" anchor="t"/>
-          <a:lstStyle xmlns:a="http://schemas.openxmlformats.org/drawingml/2006/main"/>
-          <a:p xmlns:a="http://schemas.openxmlformats.org/drawingml/2006/main">
-            <a:pPr algn="l">
-              <a:defRPr sz="1575" b="0">
-                <a:solidFill>
-                  <a:srgbClr val="141C22"/>
-                </a:solidFill>
-              </a:defRPr>
-            </a:pPr>
-            <a:r>
-              <a:rPr sz="1575" b="0">
-                <a:solidFill>
-                  <a:srgbClr val="141C22"/>
-                </a:solidFill>
-              </a:rPr>
-              <a:t>Ground answers in uploaded evidence</a:t>
-            </a:r>
-          </a:p>
-        </p:txBody>
-      </p:sp>
-      <p:sp>
-        <p:nvSpPr>
-          <p:cNvPr id="16" name="cannot-mark-0">
-            <a:extLst xmlns:a="http://schemas.openxmlformats.org/drawingml/2006/main">
-              <a:ext uri="{FF2B5EF4-FFF2-40B4-BE49-F238E27FC236}">
-                <a16:creationId xmlns:a16="http://schemas.microsoft.com/office/drawing/2014/main" id="{C7BC0758-AE17-4598-99FD-E4D05CAAC61C}"/>
-              </a:ext>
-            </a:extLst>
-          </p:cNvPr>
-          <p:cNvSpPr>
-            <a:spLocks xmlns:a="http://schemas.openxmlformats.org/drawingml/2006/main" noGrp="1"/>
-          </p:cNvSpPr>
-          <p:nvPr/>
-        </p:nvSpPr>
-        <p:spPr>
-          <a:xfrm xmlns:a="http://schemas.openxmlformats.org/drawingml/2006/main">
-            <a:off x="6572250" y="3086100"/>
-            <a:ext cx="171450" cy="171450"/>
-          </a:xfrm>
-          <a:prstGeom xmlns:a="http://schemas.openxmlformats.org/drawingml/2006/main" prst="rect">
-            <a:avLst/>
-          </a:prstGeom>
-          <a:solidFill xmlns:a="http://schemas.openxmlformats.org/drawingml/2006/main">
-            <a:srgbClr val="B9504A"/>
-          </a:solidFill>
-          <a:ln xmlns:a="http://schemas.openxmlformats.org/drawingml/2006/main" w="9525">
-            <a:solidFill>
-              <a:srgbClr val="B9504A"/>
-            </a:solidFill>
-            <a:prstDash val="solid"/>
-          </a:ln>
-        </p:spPr>
-      </p:sp>
-      <p:sp>
-        <p:nvSpPr>
-          <p:cNvPr id="17" name="cannot-0">
-            <a:extLst xmlns:a="http://schemas.openxmlformats.org/drawingml/2006/main">
-              <a:ext uri="{FF2B5EF4-FFF2-40B4-BE49-F238E27FC236}">
-                <a16:creationId xmlns:a16="http://schemas.microsoft.com/office/drawing/2014/main" id="{B9FABEB1-FA09-4396-A441-5AEC56B2B784}"/>
-              </a:ext>
-            </a:extLst>
-          </p:cNvPr>
-          <p:cNvSpPr>
-            <a:spLocks xmlns:a="http://schemas.openxmlformats.org/drawingml/2006/main" noGrp="1"/>
-          </p:cNvSpPr>
-          <p:nvPr/>
-        </p:nvSpPr>
-        <p:spPr>
-          <a:xfrm xmlns:a="http://schemas.openxmlformats.org/drawingml/2006/main">
-            <a:off x="6896100" y="3009900"/>
-            <a:ext cx="4476750" cy="361950"/>
-          </a:xfrm>
-          <a:prstGeom xmlns:a="http://schemas.openxmlformats.org/drawingml/2006/main" prst="rect">
-            <a:avLst/>
-          </a:prstGeom>
-          <a:noFill xmlns:a="http://schemas.openxmlformats.org/drawingml/2006/main"/>
-          <a:ln xmlns:a="http://schemas.openxmlformats.org/drawingml/2006/main" w="0">
-            <a:noFill/>
-            <a:prstDash val="solid"/>
-          </a:ln>
-        </p:spPr>
-        <p:txBody>
-          <a:bodyPr xmlns:a="http://schemas.openxmlformats.org/drawingml/2006/main" anchor="t"/>
-          <a:lstStyle xmlns:a="http://schemas.openxmlformats.org/drawingml/2006/main"/>
-          <a:p xmlns:a="http://schemas.openxmlformats.org/drawingml/2006/main">
-            <a:pPr algn="l">
-              <a:defRPr sz="1575" b="0">
-                <a:solidFill>
-                  <a:srgbClr val="141C22"/>
-                </a:solidFill>
-              </a:defRPr>
-            </a:pPr>
-            <a:r>
-              <a:rPr sz="1575" b="0">
-                <a:solidFill>
-                  <a:srgbClr val="141C22"/>
-                </a:solidFill>
-              </a:rPr>
-              <a:t>Invent missing course facts</a:t>
-            </a:r>
-          </a:p>
-        </p:txBody>
-      </p:sp>
-      <p:sp>
-        <p:nvSpPr>
-          <p:cNvPr id="18" name="cannot-mark-1">
-            <a:extLst xmlns:a="http://schemas.openxmlformats.org/drawingml/2006/main">
-              <a:ext uri="{FF2B5EF4-FFF2-40B4-BE49-F238E27FC236}">
-                <a16:creationId xmlns:a16="http://schemas.microsoft.com/office/drawing/2014/main" id="{93CDA18B-B1F2-49F3-8EB5-87B8A632DD68}"/>
-              </a:ext>
-            </a:extLst>
-          </p:cNvPr>
-          <p:cNvSpPr>
-            <a:spLocks xmlns:a="http://schemas.openxmlformats.org/drawingml/2006/main" noGrp="1"/>
-          </p:cNvSpPr>
-          <p:nvPr/>
-        </p:nvSpPr>
-        <p:spPr>
-          <a:xfrm xmlns:a="http://schemas.openxmlformats.org/drawingml/2006/main">
-            <a:off x="6572250" y="3714750"/>
-            <a:ext cx="171450" cy="171450"/>
-          </a:xfrm>
-          <a:prstGeom xmlns:a="http://schemas.openxmlformats.org/drawingml/2006/main" prst="rect">
-            <a:avLst/>
-          </a:prstGeom>
-          <a:solidFill xmlns:a="http://schemas.openxmlformats.org/drawingml/2006/main">
-            <a:srgbClr val="B9504A"/>
-          </a:solidFill>
-          <a:ln xmlns:a="http://schemas.openxmlformats.org/drawingml/2006/main" w="9525">
-            <a:solidFill>
-              <a:srgbClr val="B9504A"/>
-            </a:solidFill>
-            <a:prstDash val="solid"/>
-          </a:ln>
-        </p:spPr>
-      </p:sp>
-      <p:sp>
-        <p:nvSpPr>
-          <p:cNvPr id="19" name="cannot-1">
-            <a:extLst xmlns:a="http://schemas.openxmlformats.org/drawingml/2006/main">
-              <a:ext uri="{FF2B5EF4-FFF2-40B4-BE49-F238E27FC236}">
-                <a16:creationId xmlns:a16="http://schemas.microsoft.com/office/drawing/2014/main" id="{02782978-AE1F-412E-A298-8499872EFFE4}"/>
-              </a:ext>
-            </a:extLst>
-          </p:cNvPr>
-          <p:cNvSpPr>
-            <a:spLocks xmlns:a="http://schemas.openxmlformats.org/drawingml/2006/main" noGrp="1"/>
-          </p:cNvSpPr>
-          <p:nvPr/>
-        </p:nvSpPr>
-        <p:spPr>
-          <a:xfrm xmlns:a="http://schemas.openxmlformats.org/drawingml/2006/main">
-            <a:off x="6896100" y="3638550"/>
-            <a:ext cx="4476750" cy="361950"/>
-          </a:xfrm>
-          <a:prstGeom xmlns:a="http://schemas.openxmlformats.org/drawingml/2006/main" prst="rect">
-            <a:avLst/>
-          </a:prstGeom>
-          <a:noFill xmlns:a="http://schemas.openxmlformats.org/drawingml/2006/main"/>
-          <a:ln xmlns:a="http://schemas.openxmlformats.org/drawingml/2006/main" w="0">
-            <a:noFill/>
-            <a:prstDash val="solid"/>
-          </a:ln>
-        </p:spPr>
-        <p:txBody>
-          <a:bodyPr xmlns:a="http://schemas.openxmlformats.org/drawingml/2006/main" anchor="t"/>
-          <a:lstStyle xmlns:a="http://schemas.openxmlformats.org/drawingml/2006/main"/>
-          <a:p xmlns:a="http://schemas.openxmlformats.org/drawingml/2006/main">
-            <a:pPr algn="l">
-              <a:defRPr sz="1575" b="0">
-                <a:solidFill>
-                  <a:srgbClr val="141C22"/>
-                </a:solidFill>
-              </a:defRPr>
-            </a:pPr>
-            <a:r>
-              <a:rPr sz="1575" b="0">
-                <a:solidFill>
-                  <a:srgbClr val="141C22"/>
-                </a:solidFill>
-              </a:rPr>
-              <a:t>Write a complete assessed submission</a:t>
-            </a:r>
-          </a:p>
-        </p:txBody>
-      </p:sp>
-      <p:sp>
-        <p:nvSpPr>
-          <p:cNvPr id="20" name="cannot-mark-2">
-            <a:extLst xmlns:a="http://schemas.openxmlformats.org/drawingml/2006/main">
-              <a:ext uri="{FF2B5EF4-FFF2-40B4-BE49-F238E27FC236}">
-                <a16:creationId xmlns:a16="http://schemas.microsoft.com/office/drawing/2014/main" id="{2A2621C7-349E-4240-8156-F199CBC45C86}"/>
-              </a:ext>
-            </a:extLst>
-          </p:cNvPr>
-          <p:cNvSpPr>
-            <a:spLocks xmlns:a="http://schemas.openxmlformats.org/drawingml/2006/main" noGrp="1"/>
-          </p:cNvSpPr>
-          <p:nvPr/>
-        </p:nvSpPr>
-        <p:spPr>
-          <a:xfrm xmlns:a="http://schemas.openxmlformats.org/drawingml/2006/main">
-            <a:off x="6572250" y="4343400"/>
-            <a:ext cx="171450" cy="171450"/>
-          </a:xfrm>
-          <a:prstGeom xmlns:a="http://schemas.openxmlformats.org/drawingml/2006/main" prst="rect">
-            <a:avLst/>
-          </a:prstGeom>
-          <a:solidFill xmlns:a="http://schemas.openxmlformats.org/drawingml/2006/main">
-            <a:srgbClr val="B9504A"/>
-          </a:solidFill>
-          <a:ln xmlns:a="http://schemas.openxmlformats.org/drawingml/2006/main" w="9525">
-            <a:solidFill>
-              <a:srgbClr val="B9504A"/>
-            </a:solidFill>
-            <a:prstDash val="solid"/>
-          </a:ln>
-        </p:spPr>
-      </p:sp>
-      <p:sp>
-        <p:nvSpPr>
-          <p:cNvPr id="21" name="cannot-2">
-            <a:extLst xmlns:a="http://schemas.openxmlformats.org/drawingml/2006/main">
-              <a:ext uri="{FF2B5EF4-FFF2-40B4-BE49-F238E27FC236}">
-                <a16:creationId xmlns:a16="http://schemas.microsoft.com/office/drawing/2014/main" id="{DDB41FD3-97A7-4F2E-99C7-9DB0EF113635}"/>
-              </a:ext>
-            </a:extLst>
-          </p:cNvPr>
-          <p:cNvSpPr>
-            <a:spLocks xmlns:a="http://schemas.openxmlformats.org/drawingml/2006/main" noGrp="1"/>
-          </p:cNvSpPr>
-          <p:nvPr/>
-        </p:nvSpPr>
-        <p:spPr>
-          <a:xfrm xmlns:a="http://schemas.openxmlformats.org/drawingml/2006/main">
-            <a:off x="6896100" y="4267200"/>
-            <a:ext cx="4476750" cy="361950"/>
-          </a:xfrm>
-          <a:prstGeom xmlns:a="http://schemas.openxmlformats.org/drawingml/2006/main" prst="rect">
-            <a:avLst/>
-          </a:prstGeom>
-          <a:noFill xmlns:a="http://schemas.openxmlformats.org/drawingml/2006/main"/>
-          <a:ln xmlns:a="http://schemas.openxmlformats.org/drawingml/2006/main" w="0">
-            <a:noFill/>
-            <a:prstDash val="solid"/>
-          </a:ln>
-        </p:spPr>
-        <p:txBody>
-          <a:bodyPr xmlns:a="http://schemas.openxmlformats.org/drawingml/2006/main" anchor="t"/>
-          <a:lstStyle xmlns:a="http://schemas.openxmlformats.org/drawingml/2006/main"/>
-          <a:p xmlns:a="http://schemas.openxmlformats.org/drawingml/2006/main">
-            <a:pPr algn="l">
-              <a:defRPr sz="1575" b="0">
-                <a:solidFill>
-                  <a:srgbClr val="141C22"/>
-                </a:solidFill>
-              </a:defRPr>
-            </a:pPr>
-            <a:r>
-              <a:rPr sz="1575" b="0">
-                <a:solidFill>
-                  <a:srgbClr val="141C22"/>
-                </a:solidFill>
-              </a:rPr>
-              <a:t>Send unrelated courses by default</a:t>
-            </a:r>
-          </a:p>
-        </p:txBody>
-      </p:sp>
-      <p:sp>
-        <p:nvSpPr>
-          <p:cNvPr id="22" name="cannot-mark-3">
-            <a:extLst xmlns:a="http://schemas.openxmlformats.org/drawingml/2006/main">
-              <a:ext uri="{FF2B5EF4-FFF2-40B4-BE49-F238E27FC236}">
-                <a16:creationId xmlns:a16="http://schemas.microsoft.com/office/drawing/2014/main" id="{130264F3-736C-4FA3-BBA8-C013DCE37E95}"/>
-              </a:ext>
-            </a:extLst>
-          </p:cNvPr>
-          <p:cNvSpPr>
-            <a:spLocks xmlns:a="http://schemas.openxmlformats.org/drawingml/2006/main" noGrp="1"/>
-          </p:cNvSpPr>
-          <p:nvPr/>
-        </p:nvSpPr>
-        <p:spPr>
-          <a:xfrm xmlns:a="http://schemas.openxmlformats.org/drawingml/2006/main">
-            <a:off x="6572250" y="4972050"/>
-            <a:ext cx="171450" cy="171450"/>
-          </a:xfrm>
-          <a:prstGeom xmlns:a="http://schemas.openxmlformats.org/drawingml/2006/main" prst="rect">
-            <a:avLst/>
-          </a:prstGeom>
-          <a:solidFill xmlns:a="http://schemas.openxmlformats.org/drawingml/2006/main">
-            <a:srgbClr val="B9504A"/>
-          </a:solidFill>
-          <a:ln xmlns:a="http://schemas.openxmlformats.org/drawingml/2006/main" w="9525">
-            <a:solidFill>
-              <a:srgbClr val="B9504A"/>
-            </a:solidFill>
-            <a:prstDash val="solid"/>
-          </a:ln>
-        </p:spPr>
-      </p:sp>
-      <p:sp>
-        <p:nvSpPr>
-          <p:cNvPr id="23" name="cannot-3">
-            <a:extLst xmlns:a="http://schemas.openxmlformats.org/drawingml/2006/main">
-              <a:ext uri="{FF2B5EF4-FFF2-40B4-BE49-F238E27FC236}">
-                <a16:creationId xmlns:a16="http://schemas.microsoft.com/office/drawing/2014/main" id="{27E68DF9-9A3D-46AE-95B5-F1646CB03880}"/>
-              </a:ext>
-            </a:extLst>
-          </p:cNvPr>
-          <p:cNvSpPr>
-            <a:spLocks xmlns:a="http://schemas.openxmlformats.org/drawingml/2006/main" noGrp="1"/>
-          </p:cNvSpPr>
-          <p:nvPr/>
-        </p:nvSpPr>
-        <p:spPr>
-          <a:xfrm xmlns:a="http://schemas.openxmlformats.org/drawingml/2006/main">
-            <a:off x="6896100" y="4895850"/>
-            <a:ext cx="4476750" cy="361950"/>
-          </a:xfrm>
-          <a:prstGeom xmlns:a="http://schemas.openxmlformats.org/drawingml/2006/main" prst="rect">
-            <a:avLst/>
-          </a:prstGeom>
-          <a:noFill xmlns:a="http://schemas.openxmlformats.org/drawingml/2006/main"/>
-          <a:ln xmlns:a="http://schemas.openxmlformats.org/drawingml/2006/main" w="0">
-            <a:noFill/>
-            <a:prstDash val="solid"/>
-          </a:ln>
-        </p:spPr>
-        <p:txBody>
-          <a:bodyPr xmlns:a="http://schemas.openxmlformats.org/drawingml/2006/main" anchor="t"/>
-          <a:lstStyle xmlns:a="http://schemas.openxmlformats.org/drawingml/2006/main"/>
-          <a:p xmlns:a="http://schemas.openxmlformats.org/drawingml/2006/main">
-            <a:pPr algn="l">
-              <a:defRPr sz="1575" b="0">
-                <a:solidFill>
-                  <a:srgbClr val="141C22"/>
-                </a:solidFill>
-              </a:defRPr>
-            </a:pPr>
-            <a:r>
-              <a:rPr sz="1575" b="0">
-                <a:solidFill>
-                  <a:srgbClr val="141C22"/>
-                </a:solidFill>
-              </a:rPr>
-              <a:t>Expose an API secret in client code</a:t>
-            </a:r>
-          </a:p>
-        </p:txBody>
-      </p:sp>
-      <p:sp>
-        <p:nvSpPr>
-          <p:cNvPr id="24" name="privacy-band">
-            <a:extLst xmlns:a="http://schemas.openxmlformats.org/drawingml/2006/main">
-              <a:ext uri="{FF2B5EF4-FFF2-40B4-BE49-F238E27FC236}">
-                <a16:creationId xmlns:a16="http://schemas.microsoft.com/office/drawing/2014/main" id="{390D7CEE-3B87-42CB-A74A-0294F94D6AE5}"/>
-              </a:ext>
-            </a:extLst>
-          </p:cNvPr>
-          <p:cNvSpPr>
-            <a:spLocks xmlns:a="http://schemas.openxmlformats.org/drawingml/2006/main" noGrp="1"/>
-          </p:cNvSpPr>
-          <p:nvPr/>
-        </p:nvSpPr>
-        <p:spPr>
-          <a:xfrm xmlns:a="http://schemas.openxmlformats.org/drawingml/2006/main">
-            <a:off x="552450" y="5791200"/>
-            <a:ext cx="10820400" cy="457200"/>
+          <p:cNvPr id="18" name="architecture-node-2">
+            <a:extLst xmlns:a="http://schemas.openxmlformats.org/drawingml/2006/main">
+              <a:ext uri="{FF2B5EF4-FFF2-40B4-BE49-F238E27FC236}">
+                <a16:creationId xmlns:a16="http://schemas.microsoft.com/office/drawing/2014/main" id="{75B9CB6F-EC73-4C27-9D30-EAC361731C43}"/>
+              </a:ext>
+            </a:extLst>
+          </p:cNvPr>
+          <p:cNvSpPr>
+            <a:spLocks xmlns:a="http://schemas.openxmlformats.org/drawingml/2006/main" noGrp="1"/>
+          </p:cNvSpPr>
+          <p:nvPr/>
+        </p:nvSpPr>
+        <p:spPr>
+          <a:xfrm xmlns:a="http://schemas.openxmlformats.org/drawingml/2006/main">
+            <a:off x="6267450" y="2571750"/>
+            <a:ext cx="2324100" cy="2076450"/>
           </a:xfrm>
           <a:prstGeom xmlns:a="http://schemas.openxmlformats.org/drawingml/2006/main" prst="roundRect">
             <a:avLst>
-              <a:gd name="adj" fmla="val 16667"/>
+              <a:gd name="adj" fmla="val 3670"/>
             </a:avLst>
           </a:prstGeom>
           <a:solidFill xmlns:a="http://schemas.openxmlformats.org/drawingml/2006/main">
@@ -7665,50 +8507,449 @@
       </p:sp>
       <p:sp>
         <p:nvSpPr>
-          <p:cNvPr id="25" name="privacy-band-text">
-            <a:extLst xmlns:a="http://schemas.openxmlformats.org/drawingml/2006/main">
-              <a:ext uri="{FF2B5EF4-FFF2-40B4-BE49-F238E27FC236}">
-                <a16:creationId xmlns:a16="http://schemas.microsoft.com/office/drawing/2014/main" id="{23282841-BBAC-4BFB-B715-937F4C17495A}"/>
-              </a:ext>
-            </a:extLst>
-          </p:cNvPr>
-          <p:cNvSpPr>
-            <a:spLocks xmlns:a="http://schemas.openxmlformats.org/drawingml/2006/main" noGrp="1"/>
-          </p:cNvSpPr>
-          <p:nvPr/>
-        </p:nvSpPr>
-        <p:spPr>
-          <a:xfrm xmlns:a="http://schemas.openxmlformats.org/drawingml/2006/main">
-            <a:off x="762000" y="5886450"/>
-            <a:ext cx="10401300" cy="266700"/>
-          </a:xfrm>
-          <a:prstGeom xmlns:a="http://schemas.openxmlformats.org/drawingml/2006/main" prst="rect">
-            <a:avLst/>
-          </a:prstGeom>
-          <a:noFill xmlns:a="http://schemas.openxmlformats.org/drawingml/2006/main"/>
-          <a:ln xmlns:a="http://schemas.openxmlformats.org/drawingml/2006/main" w="0">
-            <a:noFill/>
-            <a:prstDash val="solid"/>
-          </a:ln>
-        </p:spPr>
-        <p:txBody>
-          <a:bodyPr xmlns:a="http://schemas.openxmlformats.org/drawingml/2006/main" anchor="t"/>
-          <a:lstStyle xmlns:a="http://schemas.openxmlformats.org/drawingml/2006/main"/>
-          <a:p xmlns:a="http://schemas.openxmlformats.org/drawingml/2006/main">
-            <a:pPr algn="ctr">
-              <a:defRPr sz="1200" b="1">
+          <p:cNvPr id="19" name="architecture-index-2">
+            <a:extLst xmlns:a="http://schemas.openxmlformats.org/drawingml/2006/main">
+              <a:ext uri="{FF2B5EF4-FFF2-40B4-BE49-F238E27FC236}">
+                <a16:creationId xmlns:a16="http://schemas.microsoft.com/office/drawing/2014/main" id="{AFB6C743-1816-4E9D-A48F-8E49C389933D}"/>
+              </a:ext>
+            </a:extLst>
+          </p:cNvPr>
+          <p:cNvSpPr>
+            <a:spLocks xmlns:a="http://schemas.openxmlformats.org/drawingml/2006/main" noGrp="1"/>
+          </p:cNvSpPr>
+          <p:nvPr/>
+        </p:nvSpPr>
+        <p:spPr>
+          <a:xfrm xmlns:a="http://schemas.openxmlformats.org/drawingml/2006/main">
+            <a:off x="6477000" y="2781300"/>
+            <a:ext cx="457200" cy="266700"/>
+          </a:xfrm>
+          <a:prstGeom xmlns:a="http://schemas.openxmlformats.org/drawingml/2006/main" prst="rect">
+            <a:avLst/>
+          </a:prstGeom>
+          <a:noFill xmlns:a="http://schemas.openxmlformats.org/drawingml/2006/main"/>
+          <a:ln xmlns:a="http://schemas.openxmlformats.org/drawingml/2006/main" w="0">
+            <a:noFill/>
+            <a:prstDash val="solid"/>
+          </a:ln>
+        </p:spPr>
+        <p:txBody>
+          <a:bodyPr xmlns:a="http://schemas.openxmlformats.org/drawingml/2006/main" anchor="t"/>
+          <a:lstStyle xmlns:a="http://schemas.openxmlformats.org/drawingml/2006/main"/>
+          <a:p xmlns:a="http://schemas.openxmlformats.org/drawingml/2006/main">
+            <a:pPr algn="l">
+              <a:defRPr sz="975" b="1">
+                <a:solidFill>
+                  <a:srgbClr val="C9A63F"/>
+                </a:solidFill>
+              </a:defRPr>
+            </a:pPr>
+            <a:r>
+              <a:rPr sz="975" b="1">
+                <a:solidFill>
+                  <a:srgbClr val="C9A63F"/>
+                </a:solidFill>
+              </a:rPr>
+              <a:t>03</a:t>
+            </a:r>
+          </a:p>
+        </p:txBody>
+      </p:sp>
+      <p:sp>
+        <p:nvSpPr>
+          <p:cNvPr id="20" name="architecture-title-2">
+            <a:extLst xmlns:a="http://schemas.openxmlformats.org/drawingml/2006/main">
+              <a:ext uri="{FF2B5EF4-FFF2-40B4-BE49-F238E27FC236}">
+                <a16:creationId xmlns:a16="http://schemas.microsoft.com/office/drawing/2014/main" id="{B9F734A9-6641-42D9-B7B1-02C706ABFCED}"/>
+              </a:ext>
+            </a:extLst>
+          </p:cNvPr>
+          <p:cNvSpPr>
+            <a:spLocks xmlns:a="http://schemas.openxmlformats.org/drawingml/2006/main" noGrp="1"/>
+          </p:cNvSpPr>
+          <p:nvPr/>
+        </p:nvSpPr>
+        <p:spPr>
+          <a:xfrm xmlns:a="http://schemas.openxmlformats.org/drawingml/2006/main">
+            <a:off x="6477000" y="3238500"/>
+            <a:ext cx="1905000" cy="495300"/>
+          </a:xfrm>
+          <a:prstGeom xmlns:a="http://schemas.openxmlformats.org/drawingml/2006/main" prst="rect">
+            <a:avLst/>
+          </a:prstGeom>
+          <a:noFill xmlns:a="http://schemas.openxmlformats.org/drawingml/2006/main"/>
+          <a:ln xmlns:a="http://schemas.openxmlformats.org/drawingml/2006/main" w="0">
+            <a:noFill/>
+            <a:prstDash val="solid"/>
+          </a:ln>
+        </p:spPr>
+        <p:txBody>
+          <a:bodyPr xmlns:a="http://schemas.openxmlformats.org/drawingml/2006/main" anchor="t"/>
+          <a:lstStyle xmlns:a="http://schemas.openxmlformats.org/drawingml/2006/main"/>
+          <a:p xmlns:a="http://schemas.openxmlformats.org/drawingml/2006/main">
+            <a:pPr algn="l">
+              <a:defRPr sz="1650" b="1">
                 <a:solidFill>
                   <a:srgbClr val="FFFFFF"/>
                 </a:solidFill>
               </a:defRPr>
             </a:pPr>
             <a:r>
-              <a:rPr sz="1200" b="1">
+              <a:rPr sz="1650" b="1">
                 <a:solidFill>
                   <a:srgbClr val="FFFFFF"/>
                 </a:solidFill>
               </a:rPr>
-              <a:t>Selected course context is sent only when the student asks; conversations remain scoped to that course and assignment.</a:t>
+              <a:t>Cloudflare Worker</a:t>
+            </a:r>
+          </a:p>
+        </p:txBody>
+      </p:sp>
+      <p:sp>
+        <p:nvSpPr>
+          <p:cNvPr id="21" name="architecture-body-2">
+            <a:extLst xmlns:a="http://schemas.openxmlformats.org/drawingml/2006/main">
+              <a:ext uri="{FF2B5EF4-FFF2-40B4-BE49-F238E27FC236}">
+                <a16:creationId xmlns:a16="http://schemas.microsoft.com/office/drawing/2014/main" id="{13A18EE4-C23A-4ECF-BBB2-B908B59A7082}"/>
+              </a:ext>
+            </a:extLst>
+          </p:cNvPr>
+          <p:cNvSpPr>
+            <a:spLocks xmlns:a="http://schemas.openxmlformats.org/drawingml/2006/main" noGrp="1"/>
+          </p:cNvSpPr>
+          <p:nvPr/>
+        </p:nvSpPr>
+        <p:spPr>
+          <a:xfrm xmlns:a="http://schemas.openxmlformats.org/drawingml/2006/main">
+            <a:off x="6477000" y="3886200"/>
+            <a:ext cx="1905000" cy="590550"/>
+          </a:xfrm>
+          <a:prstGeom xmlns:a="http://schemas.openxmlformats.org/drawingml/2006/main" prst="rect">
+            <a:avLst/>
+          </a:prstGeom>
+          <a:noFill xmlns:a="http://schemas.openxmlformats.org/drawingml/2006/main"/>
+          <a:ln xmlns:a="http://schemas.openxmlformats.org/drawingml/2006/main" w="0">
+            <a:noFill/>
+            <a:prstDash val="solid"/>
+          </a:ln>
+        </p:spPr>
+        <p:txBody>
+          <a:bodyPr xmlns:a="http://schemas.openxmlformats.org/drawingml/2006/main" anchor="t"/>
+          <a:lstStyle xmlns:a="http://schemas.openxmlformats.org/drawingml/2006/main"/>
+          <a:p xmlns:a="http://schemas.openxmlformats.org/drawingml/2006/main">
+            <a:pPr algn="l">
+              <a:defRPr sz="1200" b="0">
+                <a:solidFill>
+                  <a:srgbClr val="CBD2D5"/>
+                </a:solidFill>
+              </a:defRPr>
+            </a:pPr>
+            <a:r>
+              <a:rPr sz="1200" b="0">
+                <a:solidFill>
+                  <a:srgbClr val="CBD2D5"/>
+                </a:solidFill>
+              </a:rPr>
+              <a:t>CORS, size limits, rate limits, validation</a:t>
+            </a:r>
+          </a:p>
+        </p:txBody>
+      </p:sp>
+      <p:sp>
+        <p:nvSpPr>
+          <p:cNvPr id="22" name="rule-902-378">
+            <a:extLst xmlns:a="http://schemas.openxmlformats.org/drawingml/2006/main">
+              <a:ext uri="{FF2B5EF4-FFF2-40B4-BE49-F238E27FC236}">
+                <a16:creationId xmlns:a16="http://schemas.microsoft.com/office/drawing/2014/main" id="{0D2CF3E9-FC34-4FB1-A275-4A304009A259}"/>
+              </a:ext>
+            </a:extLst>
+          </p:cNvPr>
+          <p:cNvSpPr>
+            <a:spLocks xmlns:a="http://schemas.openxmlformats.org/drawingml/2006/main" noGrp="1"/>
+          </p:cNvSpPr>
+          <p:nvPr/>
+        </p:nvSpPr>
+        <p:spPr>
+          <a:xfrm xmlns:a="http://schemas.openxmlformats.org/drawingml/2006/main">
+            <a:off x="8591550" y="3600450"/>
+            <a:ext cx="552450" cy="28575"/>
+          </a:xfrm>
+          <a:prstGeom xmlns:a="http://schemas.openxmlformats.org/drawingml/2006/main" prst="rect">
+            <a:avLst/>
+          </a:prstGeom>
+          <a:solidFill xmlns:a="http://schemas.openxmlformats.org/drawingml/2006/main">
+            <a:srgbClr val="C9A63F"/>
+          </a:solidFill>
+          <a:ln xmlns:a="http://schemas.openxmlformats.org/drawingml/2006/main" w="0">
+            <a:noFill/>
+            <a:prstDash val="solid"/>
+          </a:ln>
+        </p:spPr>
+      </p:sp>
+      <p:sp>
+        <p:nvSpPr>
+          <p:cNvPr id="23" name="architecture-arrow-2">
+            <a:extLst xmlns:a="http://schemas.openxmlformats.org/drawingml/2006/main">
+              <a:ext uri="{FF2B5EF4-FFF2-40B4-BE49-F238E27FC236}">
+                <a16:creationId xmlns:a16="http://schemas.microsoft.com/office/drawing/2014/main" id="{D0F06623-40BA-4309-A2CF-35CF46593005}"/>
+              </a:ext>
+            </a:extLst>
+          </p:cNvPr>
+          <p:cNvSpPr>
+            <a:spLocks xmlns:a="http://schemas.openxmlformats.org/drawingml/2006/main" noGrp="1"/>
+          </p:cNvSpPr>
+          <p:nvPr/>
+        </p:nvSpPr>
+        <p:spPr>
+          <a:xfrm xmlns:a="http://schemas.openxmlformats.org/drawingml/2006/main">
+            <a:off x="8972550" y="3524250"/>
+            <a:ext cx="171450" cy="171450"/>
+          </a:xfrm>
+          <a:prstGeom xmlns:a="http://schemas.openxmlformats.org/drawingml/2006/main" prst="triangle">
+            <a:avLst/>
+          </a:prstGeom>
+          <a:solidFill xmlns:a="http://schemas.openxmlformats.org/drawingml/2006/main">
+            <a:srgbClr val="C9A63F"/>
+          </a:solidFill>
+          <a:ln xmlns:a="http://schemas.openxmlformats.org/drawingml/2006/main" w="9525">
+            <a:solidFill>
+              <a:srgbClr val="C9A63F"/>
+            </a:solidFill>
+            <a:prstDash val="solid"/>
+          </a:ln>
+        </p:spPr>
+      </p:sp>
+      <p:sp>
+        <p:nvSpPr>
+          <p:cNvPr id="24" name="architecture-node-3">
+            <a:extLst xmlns:a="http://schemas.openxmlformats.org/drawingml/2006/main">
+              <a:ext uri="{FF2B5EF4-FFF2-40B4-BE49-F238E27FC236}">
+                <a16:creationId xmlns:a16="http://schemas.microsoft.com/office/drawing/2014/main" id="{AEE8860B-873B-4E55-AB4B-BDCC9EB19EA4}"/>
+              </a:ext>
+            </a:extLst>
+          </p:cNvPr>
+          <p:cNvSpPr>
+            <a:spLocks xmlns:a="http://schemas.openxmlformats.org/drawingml/2006/main" noGrp="1"/>
+          </p:cNvSpPr>
+          <p:nvPr/>
+        </p:nvSpPr>
+        <p:spPr>
+          <a:xfrm xmlns:a="http://schemas.openxmlformats.org/drawingml/2006/main">
+            <a:off x="9144000" y="2571750"/>
+            <a:ext cx="2324100" cy="2076450"/>
+          </a:xfrm>
+          <a:prstGeom xmlns:a="http://schemas.openxmlformats.org/drawingml/2006/main" prst="roundRect">
+            <a:avLst>
+              <a:gd name="adj" fmla="val 3670"/>
+            </a:avLst>
+          </a:prstGeom>
+          <a:solidFill xmlns:a="http://schemas.openxmlformats.org/drawingml/2006/main">
+            <a:srgbClr val="FFFFFF"/>
+          </a:solidFill>
+          <a:ln xmlns:a="http://schemas.openxmlformats.org/drawingml/2006/main" w="9525">
+            <a:solidFill>
+              <a:srgbClr val="C8CECA"/>
+            </a:solidFill>
+            <a:prstDash val="solid"/>
+          </a:ln>
+        </p:spPr>
+      </p:sp>
+      <p:sp>
+        <p:nvSpPr>
+          <p:cNvPr id="25" name="architecture-index-3">
+            <a:extLst xmlns:a="http://schemas.openxmlformats.org/drawingml/2006/main">
+              <a:ext uri="{FF2B5EF4-FFF2-40B4-BE49-F238E27FC236}">
+                <a16:creationId xmlns:a16="http://schemas.microsoft.com/office/drawing/2014/main" id="{7A3F9F1C-76E2-4B49-AFD7-297748A6BA0A}"/>
+              </a:ext>
+            </a:extLst>
+          </p:cNvPr>
+          <p:cNvSpPr>
+            <a:spLocks xmlns:a="http://schemas.openxmlformats.org/drawingml/2006/main" noGrp="1"/>
+          </p:cNvSpPr>
+          <p:nvPr/>
+        </p:nvSpPr>
+        <p:spPr>
+          <a:xfrm xmlns:a="http://schemas.openxmlformats.org/drawingml/2006/main">
+            <a:off x="9353550" y="2781300"/>
+            <a:ext cx="457200" cy="266700"/>
+          </a:xfrm>
+          <a:prstGeom xmlns:a="http://schemas.openxmlformats.org/drawingml/2006/main" prst="rect">
+            <a:avLst/>
+          </a:prstGeom>
+          <a:noFill xmlns:a="http://schemas.openxmlformats.org/drawingml/2006/main"/>
+          <a:ln xmlns:a="http://schemas.openxmlformats.org/drawingml/2006/main" w="0">
+            <a:noFill/>
+            <a:prstDash val="solid"/>
+          </a:ln>
+        </p:spPr>
+        <p:txBody>
+          <a:bodyPr xmlns:a="http://schemas.openxmlformats.org/drawingml/2006/main" anchor="t"/>
+          <a:lstStyle xmlns:a="http://schemas.openxmlformats.org/drawingml/2006/main"/>
+          <a:p xmlns:a="http://schemas.openxmlformats.org/drawingml/2006/main">
+            <a:pPr algn="l">
+              <a:defRPr sz="975" b="1">
+                <a:solidFill>
+                  <a:srgbClr val="2F7D74"/>
+                </a:solidFill>
+              </a:defRPr>
+            </a:pPr>
+            <a:r>
+              <a:rPr sz="975" b="1">
+                <a:solidFill>
+                  <a:srgbClr val="2F7D74"/>
+                </a:solidFill>
+              </a:rPr>
+              <a:t>04</a:t>
+            </a:r>
+          </a:p>
+        </p:txBody>
+      </p:sp>
+      <p:sp>
+        <p:nvSpPr>
+          <p:cNvPr id="26" name="architecture-title-3">
+            <a:extLst xmlns:a="http://schemas.openxmlformats.org/drawingml/2006/main">
+              <a:ext uri="{FF2B5EF4-FFF2-40B4-BE49-F238E27FC236}">
+                <a16:creationId xmlns:a16="http://schemas.microsoft.com/office/drawing/2014/main" id="{D4822DAF-C9CB-4844-A2DA-8F97C0CA3FEC}"/>
+              </a:ext>
+            </a:extLst>
+          </p:cNvPr>
+          <p:cNvSpPr>
+            <a:spLocks xmlns:a="http://schemas.openxmlformats.org/drawingml/2006/main" noGrp="1"/>
+          </p:cNvSpPr>
+          <p:nvPr/>
+        </p:nvSpPr>
+        <p:spPr>
+          <a:xfrm xmlns:a="http://schemas.openxmlformats.org/drawingml/2006/main">
+            <a:off x="9353550" y="3238500"/>
+            <a:ext cx="1905000" cy="495300"/>
+          </a:xfrm>
+          <a:prstGeom xmlns:a="http://schemas.openxmlformats.org/drawingml/2006/main" prst="rect">
+            <a:avLst/>
+          </a:prstGeom>
+          <a:noFill xmlns:a="http://schemas.openxmlformats.org/drawingml/2006/main"/>
+          <a:ln xmlns:a="http://schemas.openxmlformats.org/drawingml/2006/main" w="0">
+            <a:noFill/>
+            <a:prstDash val="solid"/>
+          </a:ln>
+        </p:spPr>
+        <p:txBody>
+          <a:bodyPr xmlns:a="http://schemas.openxmlformats.org/drawingml/2006/main" anchor="t"/>
+          <a:lstStyle xmlns:a="http://schemas.openxmlformats.org/drawingml/2006/main"/>
+          <a:p xmlns:a="http://schemas.openxmlformats.org/drawingml/2006/main">
+            <a:pPr algn="l">
+              <a:defRPr sz="1650" b="1">
+                <a:solidFill>
+                  <a:srgbClr val="141C22"/>
+                </a:solidFill>
+              </a:defRPr>
+            </a:pPr>
+            <a:r>
+              <a:rPr sz="1650" b="1">
+                <a:solidFill>
+                  <a:srgbClr val="141C22"/>
+                </a:solidFill>
+              </a:rPr>
+              <a:t>Workers AI</a:t>
+            </a:r>
+          </a:p>
+        </p:txBody>
+      </p:sp>
+      <p:sp>
+        <p:nvSpPr>
+          <p:cNvPr id="27" name="architecture-body-3">
+            <a:extLst xmlns:a="http://schemas.openxmlformats.org/drawingml/2006/main">
+              <a:ext uri="{FF2B5EF4-FFF2-40B4-BE49-F238E27FC236}">
+                <a16:creationId xmlns:a16="http://schemas.microsoft.com/office/drawing/2014/main" id="{4BBF4285-10FD-4F11-B72B-B63457F6D3D8}"/>
+              </a:ext>
+            </a:extLst>
+          </p:cNvPr>
+          <p:cNvSpPr>
+            <a:spLocks xmlns:a="http://schemas.openxmlformats.org/drawingml/2006/main" noGrp="1"/>
+          </p:cNvSpPr>
+          <p:nvPr/>
+        </p:nvSpPr>
+        <p:spPr>
+          <a:xfrm xmlns:a="http://schemas.openxmlformats.org/drawingml/2006/main">
+            <a:off x="9353550" y="3886200"/>
+            <a:ext cx="1905000" cy="590550"/>
+          </a:xfrm>
+          <a:prstGeom xmlns:a="http://schemas.openxmlformats.org/drawingml/2006/main" prst="rect">
+            <a:avLst/>
+          </a:prstGeom>
+          <a:noFill xmlns:a="http://schemas.openxmlformats.org/drawingml/2006/main"/>
+          <a:ln xmlns:a="http://schemas.openxmlformats.org/drawingml/2006/main" w="0">
+            <a:noFill/>
+            <a:prstDash val="solid"/>
+          </a:ln>
+        </p:spPr>
+        <p:txBody>
+          <a:bodyPr xmlns:a="http://schemas.openxmlformats.org/drawingml/2006/main" anchor="t"/>
+          <a:lstStyle xmlns:a="http://schemas.openxmlformats.org/drawingml/2006/main"/>
+          <a:p xmlns:a="http://schemas.openxmlformats.org/drawingml/2006/main">
+            <a:pPr algn="l">
+              <a:defRPr sz="1200" b="0">
+                <a:solidFill>
+                  <a:srgbClr val="647078"/>
+                </a:solidFill>
+              </a:defRPr>
+            </a:pPr>
+            <a:r>
+              <a:rPr sz="1200" b="0">
+                <a:solidFill>
+                  <a:srgbClr val="647078"/>
+                </a:solidFill>
+              </a:rPr>
+              <a:t>Live answer, citations, next steps</a:t>
+            </a:r>
+          </a:p>
+        </p:txBody>
+      </p:sp>
+      <p:sp>
+        <p:nvSpPr>
+          <p:cNvPr id="28" name="architecture-caption">
+            <a:extLst xmlns:a="http://schemas.openxmlformats.org/drawingml/2006/main">
+              <a:ext uri="{FF2B5EF4-FFF2-40B4-BE49-F238E27FC236}">
+                <a16:creationId xmlns:a16="http://schemas.microsoft.com/office/drawing/2014/main" id="{ED4BFA69-C0CF-43E3-A46B-640A62BD7524}"/>
+              </a:ext>
+            </a:extLst>
+          </p:cNvPr>
+          <p:cNvSpPr>
+            <a:spLocks xmlns:a="http://schemas.openxmlformats.org/drawingml/2006/main" noGrp="1"/>
+          </p:cNvSpPr>
+          <p:nvPr/>
+        </p:nvSpPr>
+        <p:spPr>
+          <a:xfrm xmlns:a="http://schemas.openxmlformats.org/drawingml/2006/main">
+            <a:off x="514350" y="5219700"/>
+            <a:ext cx="11049000" cy="647700"/>
+          </a:xfrm>
+          <a:prstGeom xmlns:a="http://schemas.openxmlformats.org/drawingml/2006/main" prst="rect">
+            <a:avLst/>
+          </a:prstGeom>
+          <a:noFill xmlns:a="http://schemas.openxmlformats.org/drawingml/2006/main"/>
+          <a:ln xmlns:a="http://schemas.openxmlformats.org/drawingml/2006/main" w="0">
+            <a:noFill/>
+            <a:prstDash val="solid"/>
+          </a:ln>
+        </p:spPr>
+        <p:txBody>
+          <a:bodyPr xmlns:a="http://schemas.openxmlformats.org/drawingml/2006/main" anchor="t"/>
+          <a:lstStyle xmlns:a="http://schemas.openxmlformats.org/drawingml/2006/main"/>
+          <a:p xmlns:a="http://schemas.openxmlformats.org/drawingml/2006/main">
+            <a:pPr algn="l">
+              <a:defRPr sz="1350" b="0">
+                <a:solidFill>
+                  <a:srgbClr val="647078"/>
+                </a:solidFill>
+              </a:defRPr>
+            </a:pPr>
+            <a:r>
+              <a:rPr sz="1350" b="0">
+                <a:solidFill>
+                  <a:srgbClr val="647078"/>
+                </a:solidFill>
+              </a:rPr>
+              <a:t>No secret is stored in client code. Invalid citations are removed, missing evidence is surfaced, and the Coach is instructed not to write an entire assessed submission.</a:t>
             </a:r>
           </a:p>
         </p:txBody>
@@ -7716,7 +8957,7 @@
     </p:spTree>
     <p:extLst>
       <p:ext uri="{BB962C8B-B14F-4D97-AF65-F5344CB8AC3E}">
-        <p14:creationId xmlns:p14="http://schemas.microsoft.com/office/powerpoint/2010/main" val="1543476454"/>
+        <p14:creationId xmlns:p14="http://schemas.microsoft.com/office/powerpoint/2010/main" val="193680843"/>
       </p:ext>
     </p:extLst>
   </p:cSld>
@@ -7747,7 +8988,7 @@
           <p:cNvPr id="20" name="section-8">
             <a:extLst xmlns:a="http://schemas.openxmlformats.org/drawingml/2006/main">
               <a:ext uri="{FF2B5EF4-FFF2-40B4-BE49-F238E27FC236}">
-                <a16:creationId xmlns:a16="http://schemas.microsoft.com/office/drawing/2014/main" id="{3F8D2E38-B18D-47B3-ADA7-078FAB640C1E}"/>
+                <a16:creationId xmlns:a16="http://schemas.microsoft.com/office/drawing/2014/main" id="{0C403526-8641-4E4F-BAF4-7FC86D2358E9}"/>
               </a:ext>
             </a:extLst>
           </p:cNvPr>
@@ -7797,7 +9038,7 @@
           <p:cNvPr id="2" name="page-8">
             <a:extLst xmlns:a="http://schemas.openxmlformats.org/drawingml/2006/main">
               <a:ext uri="{FF2B5EF4-FFF2-40B4-BE49-F238E27FC236}">
-                <a16:creationId xmlns:a16="http://schemas.microsoft.com/office/drawing/2014/main" id="{D7CCDD56-34BE-46CF-8516-027C2029FA41}"/>
+                <a16:creationId xmlns:a16="http://schemas.microsoft.com/office/drawing/2014/main" id="{F9D48018-2B5B-4063-AEAF-3B1434986730}"/>
               </a:ext>
             </a:extLst>
           </p:cNvPr>
@@ -7847,7 +9088,7 @@
           <p:cNvPr id="3" name="rule-48-66">
             <a:extLst xmlns:a="http://schemas.openxmlformats.org/drawingml/2006/main">
               <a:ext uri="{FF2B5EF4-FFF2-40B4-BE49-F238E27FC236}">
-                <a16:creationId xmlns:a16="http://schemas.microsoft.com/office/drawing/2014/main" id="{75FC1BED-D434-4D82-BBF4-CFAD153239CA}"/>
+                <a16:creationId xmlns:a16="http://schemas.microsoft.com/office/drawing/2014/main" id="{5E12379A-0A6E-4295-BC88-66D33B56574A}"/>
               </a:ext>
             </a:extLst>
           </p:cNvPr>
@@ -7875,10 +9116,10 @@
       </p:sp>
       <p:sp>
         <p:nvSpPr>
-          <p:cNvPr id="4" name="title-Built like a product, verified like one.">
-            <a:extLst xmlns:a="http://schemas.openxmlformats.org/drawingml/2006/main">
-              <a:ext uri="{FF2B5EF4-FFF2-40B4-BE49-F238E27FC236}">
-                <a16:creationId xmlns:a16="http://schemas.microsoft.com/office/drawing/2014/main" id="{9A9F28FD-3733-47F0-B55B-B1412F3C1B0C}"/>
+          <p:cNvPr id="4" name="title-The complete workflow is tested, not staged.">
+            <a:extLst xmlns:a="http://schemas.openxmlformats.org/drawingml/2006/main">
+              <a:ext uri="{FF2B5EF4-FFF2-40B4-BE49-F238E27FC236}">
+                <a16:creationId xmlns:a16="http://schemas.microsoft.com/office/drawing/2014/main" id="{3AEEECA4-2908-4920-B5F7-87D9A8CCFA31}"/>
               </a:ext>
             </a:extLst>
           </p:cNvPr>
@@ -7918,17 +9159,17 @@
                   <a:srgbClr val="141C22"/>
                 </a:solidFill>
               </a:rPr>
-              <a:t>Built like a product, verified like one.</a:t>
-            </a:r>
-          </a:p>
-        </p:txBody>
-      </p:sp>
-      <p:sp>
-        <p:nvSpPr>
-          <p:cNvPr id="5" name="subtitle-Built like a product, verified like one.">
-            <a:extLst xmlns:a="http://schemas.openxmlformats.org/drawingml/2006/main">
-              <a:ext uri="{FF2B5EF4-FFF2-40B4-BE49-F238E27FC236}">
-                <a16:creationId xmlns:a16="http://schemas.microsoft.com/office/drawing/2014/main" id="{FC8550C2-17CF-48CB-972E-B1ECC1012BE1}"/>
+              <a:t>The complete workflow is tested, not staged.</a:t>
+            </a:r>
+          </a:p>
+        </p:txBody>
+      </p:sp>
+      <p:sp>
+        <p:nvSpPr>
+          <p:cNvPr id="5" name="subtitle-The complete workflow is tested, not staged.">
+            <a:extLst xmlns:a="http://schemas.openxmlformats.org/drawingml/2006/main">
+              <a:ext uri="{FF2B5EF4-FFF2-40B4-BE49-F238E27FC236}">
+                <a16:creationId xmlns:a16="http://schemas.microsoft.com/office/drawing/2014/main" id="{D0ABF649-755A-4221-B6AF-CA07DCF7835C}"/>
               </a:ext>
             </a:extLst>
           </p:cNvPr>
@@ -7968,7 +9209,7 @@
                   <a:srgbClr val="647078"/>
                 </a:solidFill>
               </a:rPr>
-              <a:t>Automated contracts cover parsing, OCR normalization, course binding, Coach context, UI behavior, and backend security.</a:t>
+              <a:t>Automated contracts and live browser QA cover import, planning, submission checks, Canvas boundaries, and multi-turn Coach behavior.</a:t>
             </a:r>
           </a:p>
         </p:txBody>
@@ -7978,7 +9219,7 @@
           <p:cNvPr id="6" name="stat-0">
             <a:extLst xmlns:a="http://schemas.openxmlformats.org/drawingml/2006/main">
               <a:ext uri="{FF2B5EF4-FFF2-40B4-BE49-F238E27FC236}">
-                <a16:creationId xmlns:a16="http://schemas.microsoft.com/office/drawing/2014/main" id="{F325C00D-26A4-4F45-B2A2-E647E94D3762}"/>
+                <a16:creationId xmlns:a16="http://schemas.microsoft.com/office/drawing/2014/main" id="{0ADB01AF-1FA1-41B3-BD87-706B30E6E141}"/>
               </a:ext>
             </a:extLst>
           </p:cNvPr>
@@ -8013,7 +9254,7 @@
           <p:cNvPr id="7" name="stat-value-0">
             <a:extLst xmlns:a="http://schemas.openxmlformats.org/drawingml/2006/main">
               <a:ext uri="{FF2B5EF4-FFF2-40B4-BE49-F238E27FC236}">
-                <a16:creationId xmlns:a16="http://schemas.microsoft.com/office/drawing/2014/main" id="{83985625-7AE2-494F-983D-8C40FEFB2EA7}"/>
+                <a16:creationId xmlns:a16="http://schemas.microsoft.com/office/drawing/2014/main" id="{06CCFD77-9165-47D7-8D8B-C98FFCC7857B}"/>
               </a:ext>
             </a:extLst>
           </p:cNvPr>
@@ -8053,7 +9294,7 @@
                   <a:srgbClr val="2F7D74"/>
                 </a:solidFill>
               </a:rPr>
-              <a:t>292</a:t>
+              <a:t>326</a:t>
             </a:r>
           </a:p>
         </p:txBody>
@@ -8063,7 +9304,7 @@
           <p:cNvPr id="8" name="stat-label-0">
             <a:extLst xmlns:a="http://schemas.openxmlformats.org/drawingml/2006/main">
               <a:ext uri="{FF2B5EF4-FFF2-40B4-BE49-F238E27FC236}">
-                <a16:creationId xmlns:a16="http://schemas.microsoft.com/office/drawing/2014/main" id="{2EE80C63-E367-4400-B48C-9E38CB4FFD9C}"/>
+                <a16:creationId xmlns:a16="http://schemas.microsoft.com/office/drawing/2014/main" id="{987E85F9-CB6A-4A3C-907A-978957A61213}"/>
               </a:ext>
             </a:extLst>
           </p:cNvPr>
@@ -8113,7 +9354,7 @@
           <p:cNvPr id="9" name="stat-1">
             <a:extLst xmlns:a="http://schemas.openxmlformats.org/drawingml/2006/main">
               <a:ext uri="{FF2B5EF4-FFF2-40B4-BE49-F238E27FC236}">
-                <a16:creationId xmlns:a16="http://schemas.microsoft.com/office/drawing/2014/main" id="{BF74396F-702E-49DF-BE8C-EE069CBD31D8}"/>
+                <a16:creationId xmlns:a16="http://schemas.microsoft.com/office/drawing/2014/main" id="{2FF9B683-B955-4E0D-A003-5932F853C809}"/>
               </a:ext>
             </a:extLst>
           </p:cNvPr>
@@ -8148,7 +9389,7 @@
           <p:cNvPr id="10" name="stat-value-1">
             <a:extLst xmlns:a="http://schemas.openxmlformats.org/drawingml/2006/main">
               <a:ext uri="{FF2B5EF4-FFF2-40B4-BE49-F238E27FC236}">
-                <a16:creationId xmlns:a16="http://schemas.microsoft.com/office/drawing/2014/main" id="{C0E74035-5521-4B66-8E84-C60403CC5D40}"/>
+                <a16:creationId xmlns:a16="http://schemas.microsoft.com/office/drawing/2014/main" id="{F16180B9-CCF5-402E-93E8-EC4D1D5B4DA1}"/>
               </a:ext>
             </a:extLst>
           </p:cNvPr>
@@ -8198,7 +9439,7 @@
           <p:cNvPr id="11" name="stat-label-1">
             <a:extLst xmlns:a="http://schemas.openxmlformats.org/drawingml/2006/main">
               <a:ext uri="{FF2B5EF4-FFF2-40B4-BE49-F238E27FC236}">
-                <a16:creationId xmlns:a16="http://schemas.microsoft.com/office/drawing/2014/main" id="{057F63EF-021A-4BB2-92D7-BCC9DBBBC39F}"/>
+                <a16:creationId xmlns:a16="http://schemas.microsoft.com/office/drawing/2014/main" id="{8E85B373-F2AD-4AE9-A9EF-F60B89F55FB3}"/>
               </a:ext>
             </a:extLst>
           </p:cNvPr>
@@ -8248,7 +9489,7 @@
           <p:cNvPr id="12" name="stat-2">
             <a:extLst xmlns:a="http://schemas.openxmlformats.org/drawingml/2006/main">
               <a:ext uri="{FF2B5EF4-FFF2-40B4-BE49-F238E27FC236}">
-                <a16:creationId xmlns:a16="http://schemas.microsoft.com/office/drawing/2014/main" id="{F27A90D8-270B-4257-8EFE-E209A50DDCC0}"/>
+                <a16:creationId xmlns:a16="http://schemas.microsoft.com/office/drawing/2014/main" id="{2A0ACFB2-600D-4FFE-9A4E-74A5B6B16B31}"/>
               </a:ext>
             </a:extLst>
           </p:cNvPr>
@@ -8283,7 +9524,7 @@
           <p:cNvPr id="13" name="stat-value-2">
             <a:extLst xmlns:a="http://schemas.openxmlformats.org/drawingml/2006/main">
               <a:ext uri="{FF2B5EF4-FFF2-40B4-BE49-F238E27FC236}">
-                <a16:creationId xmlns:a16="http://schemas.microsoft.com/office/drawing/2014/main" id="{5755B259-071E-49A3-B861-65B26001CE71}"/>
+                <a16:creationId xmlns:a16="http://schemas.microsoft.com/office/drawing/2014/main" id="{9B820956-53BD-483C-9A20-D5EE1D516A4F}"/>
               </a:ext>
             </a:extLst>
           </p:cNvPr>
@@ -8323,7 +9564,7 @@
                   <a:srgbClr val="141C22"/>
                 </a:solidFill>
               </a:rPr>
-              <a:t>2</a:t>
+              <a:t>390</a:t>
             </a:r>
           </a:p>
         </p:txBody>
@@ -8333,7 +9574,7 @@
           <p:cNvPr id="14" name="stat-label-2">
             <a:extLst xmlns:a="http://schemas.openxmlformats.org/drawingml/2006/main">
               <a:ext uri="{FF2B5EF4-FFF2-40B4-BE49-F238E27FC236}">
-                <a16:creationId xmlns:a16="http://schemas.microsoft.com/office/drawing/2014/main" id="{2C9A38E3-1A83-4AB9-BD4E-014176C46F8D}"/>
+                <a16:creationId xmlns:a16="http://schemas.microsoft.com/office/drawing/2014/main" id="{FD3470DF-5378-43DA-B62B-A3186509D531}"/>
               </a:ext>
             </a:extLst>
           </p:cNvPr>
@@ -8373,7 +9614,7 @@
                   <a:srgbClr val="647078"/>
                 </a:solidFill>
               </a:rPr>
-              <a:t>responsive viewports checked</a:t>
+              <a:t>px mobile width verified</a:t>
             </a:r>
           </a:p>
         </p:txBody>
@@ -8383,19 +9624,19 @@
           <p:cNvPr id="15" name="validation-list">
             <a:extLst xmlns:a="http://schemas.openxmlformats.org/drawingml/2006/main">
               <a:ext uri="{FF2B5EF4-FFF2-40B4-BE49-F238E27FC236}">
-                <a16:creationId xmlns:a16="http://schemas.microsoft.com/office/drawing/2014/main" id="{76C8D152-1326-445F-B8E4-A8CD8C3C2908}"/>
-              </a:ext>
-            </a:extLst>
-          </p:cNvPr>
-          <p:cNvSpPr>
-            <a:spLocks xmlns:a="http://schemas.openxmlformats.org/drawingml/2006/main" noGrp="1"/>
-          </p:cNvSpPr>
-          <p:nvPr/>
-        </p:nvSpPr>
-        <p:spPr>
-          <a:xfrm xmlns:a="http://schemas.openxmlformats.org/drawingml/2006/main">
-            <a:off x="552450" y="4095750"/>
-            <a:ext cx="4953000" cy="1866900"/>
+                <a16:creationId xmlns:a16="http://schemas.microsoft.com/office/drawing/2014/main" id="{278B415E-746D-4A22-B247-B4C93553A357}"/>
+              </a:ext>
+            </a:extLst>
+          </p:cNvPr>
+          <p:cNvSpPr>
+            <a:spLocks xmlns:a="http://schemas.openxmlformats.org/drawingml/2006/main" noGrp="1"/>
+          </p:cNvSpPr>
+          <p:nvPr/>
+        </p:nvSpPr>
+        <p:spPr>
+          <a:xfrm xmlns:a="http://schemas.openxmlformats.org/drawingml/2006/main">
+            <a:off x="552450" y="4019550"/>
+            <a:ext cx="5905500" cy="2038350"/>
           </a:xfrm>
           <a:prstGeom xmlns:a="http://schemas.openxmlformats.org/drawingml/2006/main" prst="rect">
             <a:avLst/>
@@ -8445,7 +9686,7 @@
                   <a:srgbClr val="647078"/>
                 </a:solidFill>
               </a:rPr>
-              <a:t>Canvas screenshots → exact title, due date, points, status</a:t>
+              <a:t>Screenshots and documents -&gt; exact course and assignment facts</a:t>
             </a:r>
           </a:p>
           <a:p xmlns:a="http://schemas.openxmlformats.org/drawingml/2006/main">
@@ -8462,7 +9703,7 @@
                   <a:srgbClr val="647078"/>
                 </a:solidFill>
               </a:rPr>
-              <a:t>Syllabus uploads → course-level dates and policies</a:t>
+              <a:t>Course-bound upload -&gt; no duplicate course split</a:t>
             </a:r>
           </a:p>
           <a:p xmlns:a="http://schemas.openxmlformats.org/drawingml/2006/main">
@@ -8479,7 +9720,7 @@
                   <a:srgbClr val="647078"/>
                 </a:solidFill>
               </a:rPr>
-              <a:t>Assignment imports → requirements, deliverables, work plan</a:t>
+              <a:t>Today and scheduler -&gt; next action and replanning</a:t>
             </a:r>
           </a:p>
           <a:p xmlns:a="http://schemas.openxmlformats.org/drawingml/2006/main">
@@ -8496,7 +9737,24 @@
                   <a:srgbClr val="647078"/>
                 </a:solidFill>
               </a:rPr>
-              <a:t>Coach → isolated context, quick actions, custom questions</a:t>
+              <a:t>Final check -&gt; rubric coverage, score range, AI-writing reminder</a:t>
+            </a:r>
+          </a:p>
+          <a:p xmlns:a="http://schemas.openxmlformats.org/drawingml/2006/main">
+            <a:pPr algn="l">
+              <a:defRPr sz="1275" b="0">
+                <a:solidFill>
+                  <a:srgbClr val="647078"/>
+                </a:solidFill>
+              </a:defRPr>
+            </a:pPr>
+            <a:r>
+              <a:rPr sz="1275" b="0">
+                <a:solidFill>
+                  <a:srgbClr val="647078"/>
+                </a:solidFill>
+              </a:rPr>
+              <a:t>Coach -&gt; two live turns, citations, readable three-day plan</a:t>
             </a:r>
           </a:p>
         </p:txBody>
@@ -8506,7 +9764,7 @@
           <p:cNvPr id="16" name="mobile-frame">
             <a:extLst xmlns:a="http://schemas.openxmlformats.org/drawingml/2006/main">
               <a:ext uri="{FF2B5EF4-FFF2-40B4-BE49-F238E27FC236}">
-                <a16:creationId xmlns:a16="http://schemas.microsoft.com/office/drawing/2014/main" id="{68CF0D75-8B23-4673-A171-1D1517BB8352}"/>
+                <a16:creationId xmlns:a16="http://schemas.microsoft.com/office/drawing/2014/main" id="{E1328298-75A7-4BD7-BD45-E3DEACD3E12E}"/>
               </a:ext>
             </a:extLst>
           </p:cNvPr>
@@ -8545,8 +9803,8 @@
           <p:nvPr/>
         </p:nvPicPr>
         <p:blipFill>
-          <a:blip xmlns:r="http://schemas.openxmlformats.org/officeDocument/2006/relationships" xmlns:a="http://schemas.openxmlformats.org/drawingml/2006/main" r:embed="R64188655835f45bf"/>
-          <a:srcRect xmlns:a="http://schemas.openxmlformats.org/drawingml/2006/main" l="0" t="30589" r="0" b="30589"/>
+          <a:blip xmlns:r="http://schemas.openxmlformats.org/officeDocument/2006/relationships" xmlns:a="http://schemas.openxmlformats.org/drawingml/2006/main" r:embed="R268bedd48886494c"/>
+          <a:srcRect xmlns:a="http://schemas.openxmlformats.org/drawingml/2006/main" l="0" t="12718" r="0" b="12718"/>
           <a:stretch xmlns:a="http://schemas.openxmlformats.org/drawingml/2006/main">
             <a:fillRect l="0" t="0" r="0" b="0"/>
           </a:stretch>
@@ -8568,7 +9826,7 @@
           <p:cNvPr id="18" name="label-Mobile QA-1090">
             <a:extLst xmlns:a="http://schemas.openxmlformats.org/drawingml/2006/main">
               <a:ext uri="{FF2B5EF4-FFF2-40B4-BE49-F238E27FC236}">
-                <a16:creationId xmlns:a16="http://schemas.microsoft.com/office/drawing/2014/main" id="{AD5F8565-3833-413F-A7C5-32A7ABE50345}"/>
+                <a16:creationId xmlns:a16="http://schemas.microsoft.com/office/drawing/2014/main" id="{8B564D44-2CD8-4AB7-80F0-94139379E013}"/>
               </a:ext>
             </a:extLst>
           </p:cNvPr>
@@ -8624,7 +9882,7 @@
           <p:cNvPr id="19" name="mobile-callout">
             <a:extLst xmlns:a="http://schemas.openxmlformats.org/drawingml/2006/main">
               <a:ext uri="{FF2B5EF4-FFF2-40B4-BE49-F238E27FC236}">
-                <a16:creationId xmlns:a16="http://schemas.microsoft.com/office/drawing/2014/main" id="{943D0383-2447-4B25-81D5-A471F207897F}"/>
+                <a16:creationId xmlns:a16="http://schemas.microsoft.com/office/drawing/2014/main" id="{C69A67BA-FC0C-4726-8CEB-79C2AD331BA3}"/>
               </a:ext>
             </a:extLst>
           </p:cNvPr>
@@ -8636,7 +9894,7 @@
         <p:spPr>
           <a:xfrm xmlns:a="http://schemas.openxmlformats.org/drawingml/2006/main">
             <a:off x="10382250" y="3067050"/>
-            <a:ext cx="1276350" cy="1581150"/>
+            <a:ext cx="1276350" cy="1809750"/>
           </a:xfrm>
           <a:prstGeom xmlns:a="http://schemas.openxmlformats.org/drawingml/2006/main" prst="rect">
             <a:avLst/>
@@ -8664,7 +9922,7 @@
                   <a:srgbClr val="647078"/>
                 </a:solidFill>
               </a:rPr>
-              <a:t>No horizontal overflow at 390 × 844. Controls remain readable and touch-friendly.</a:t>
+              <a:t>No page or transcript overflow at 390 x 844. The live Coach returned citations and a readable multi-day plan.</a:t>
             </a:r>
           </a:p>
         </p:txBody>
@@ -8672,7 +9930,7 @@
     </p:spTree>
     <p:extLst>
       <p:ext uri="{BB962C8B-B14F-4D97-AF65-F5344CB8AC3E}">
-        <p14:creationId xmlns:p14="http://schemas.microsoft.com/office/powerpoint/2010/main" val="1879893912"/>
+        <p14:creationId xmlns:p14="http://schemas.microsoft.com/office/powerpoint/2010/main" val="413168301"/>
       </p:ext>
     </p:extLst>
   </p:cSld>
@@ -8703,7 +9961,7 @@
           <p:cNvPr id="8" name="close-kicker">
             <a:extLst xmlns:a="http://schemas.openxmlformats.org/drawingml/2006/main">
               <a:ext uri="{FF2B5EF4-FFF2-40B4-BE49-F238E27FC236}">
-                <a16:creationId xmlns:a16="http://schemas.microsoft.com/office/drawing/2014/main" id="{AE377890-D300-4983-AF26-CCCA520C32FA}"/>
+                <a16:creationId xmlns:a16="http://schemas.microsoft.com/office/drawing/2014/main" id="{92425B85-D062-48E3-8DC7-30D37986F8DA}"/>
               </a:ext>
             </a:extLst>
           </p:cNvPr>
@@ -8753,7 +10011,7 @@
           <p:cNvPr id="2" name="close-title">
             <a:extLst xmlns:a="http://schemas.openxmlformats.org/drawingml/2006/main">
               <a:ext uri="{FF2B5EF4-FFF2-40B4-BE49-F238E27FC236}">
-                <a16:creationId xmlns:a16="http://schemas.microsoft.com/office/drawing/2014/main" id="{50438FB4-20D2-4A52-A8D3-4DECC0CA9371}"/>
+                <a16:creationId xmlns:a16="http://schemas.microsoft.com/office/drawing/2014/main" id="{86DF85D7-08E6-40D8-935A-492FA828867B}"/>
               </a:ext>
             </a:extLst>
           </p:cNvPr>
@@ -8793,7 +10051,7 @@
                   <a:srgbClr val="FFFFFF"/>
                 </a:solidFill>
               </a:rPr>
-              <a:t>One upload.</a:t>
+              <a:t>One course.</a:t>
             </a:r>
           </a:p>
           <a:p xmlns:a="http://schemas.openxmlformats.org/drawingml/2006/main">
@@ -8810,7 +10068,7 @@
                   <a:srgbClr val="FFFFFF"/>
                 </a:solidFill>
               </a:rPr>
-              <a:t>One organized course.</a:t>
+              <a:t>One clear plan.</a:t>
             </a:r>
           </a:p>
           <a:p xmlns:a="http://schemas.openxmlformats.org/drawingml/2006/main">
@@ -8827,7 +10085,7 @@
                   <a:srgbClr val="FFFFFF"/>
                 </a:solidFill>
               </a:rPr>
-              <a:t>One clear next step.</a:t>
+              <a:t>One Coach that remembers.</a:t>
             </a:r>
           </a:p>
         </p:txBody>
@@ -8837,7 +10095,7 @@
           <p:cNvPr id="3" name="close-body">
             <a:extLst xmlns:a="http://schemas.openxmlformats.org/drawingml/2006/main">
               <a:ext uri="{FF2B5EF4-FFF2-40B4-BE49-F238E27FC236}">
-                <a16:creationId xmlns:a16="http://schemas.microsoft.com/office/drawing/2014/main" id="{F8D006DA-C93D-4308-ADFB-C6BCDAD30DBC}"/>
+                <a16:creationId xmlns:a16="http://schemas.microsoft.com/office/drawing/2014/main" id="{3AB467EF-C481-4330-B6D1-515D1A163240}"/>
               </a:ext>
             </a:extLst>
           </p:cNvPr>
@@ -8877,7 +10135,7 @@
                   <a:srgbClr val="CAD1D4"/>
                 </a:solidFill>
               </a:rPr>
-              <a:t>A private, evidence-grounded academic workspace designed around the student's actual course materials.</a:t>
+              <a:t>A live, evidence-grounded academic workspace designed around the student's actual course materials and next action.</a:t>
             </a:r>
           </a:p>
         </p:txBody>
@@ -8887,7 +10145,7 @@
           <p:cNvPr id="4" name="close-link">
             <a:extLst xmlns:a="http://schemas.openxmlformats.org/drawingml/2006/main">
               <a:ext uri="{FF2B5EF4-FFF2-40B4-BE49-F238E27FC236}">
-                <a16:creationId xmlns:a16="http://schemas.microsoft.com/office/drawing/2014/main" id="{1A9722AA-1F79-43B0-B00E-F22CBA662C29}"/>
+                <a16:creationId xmlns:a16="http://schemas.microsoft.com/office/drawing/2014/main" id="{C97BB3FD-6BFA-43DE-850E-60AA7AC8EECE}"/>
               </a:ext>
             </a:extLst>
           </p:cNvPr>
@@ -8922,7 +10180,7 @@
           <p:cNvPr id="5" name="close-link-label">
             <a:extLst xmlns:a="http://schemas.openxmlformats.org/drawingml/2006/main">
               <a:ext uri="{FF2B5EF4-FFF2-40B4-BE49-F238E27FC236}">
-                <a16:creationId xmlns:a16="http://schemas.microsoft.com/office/drawing/2014/main" id="{85936440-99ED-4A84-AA12-E0B6853CB136}"/>
+                <a16:creationId xmlns:a16="http://schemas.microsoft.com/office/drawing/2014/main" id="{D408B31F-975E-496F-B1CC-B472B7D4CA17}"/>
               </a:ext>
             </a:extLst>
           </p:cNvPr>
@@ -8972,7 +10230,7 @@
           <p:cNvPr id="6" name="close-link-url">
             <a:extLst xmlns:a="http://schemas.openxmlformats.org/drawingml/2006/main">
               <a:ext uri="{FF2B5EF4-FFF2-40B4-BE49-F238E27FC236}">
-                <a16:creationId xmlns:a16="http://schemas.microsoft.com/office/drawing/2014/main" id="{0308A696-BF60-49E9-8AD7-BEA6A4EFB242}"/>
+                <a16:creationId xmlns:a16="http://schemas.microsoft.com/office/drawing/2014/main" id="{20AF6A1F-F254-4019-93F1-3F23109B7897}"/>
               </a:ext>
             </a:extLst>
           </p:cNvPr>
@@ -9039,7 +10297,7 @@
           <p:cNvPr id="7" name="close-note">
             <a:extLst xmlns:a="http://schemas.openxmlformats.org/drawingml/2006/main">
               <a:ext uri="{FF2B5EF4-FFF2-40B4-BE49-F238E27FC236}">
-                <a16:creationId xmlns:a16="http://schemas.microsoft.com/office/drawing/2014/main" id="{1088610C-3C7A-49AF-B9B0-B7A7DCAC07B9}"/>
+                <a16:creationId xmlns:a16="http://schemas.microsoft.com/office/drawing/2014/main" id="{6CCCA737-F997-4F5E-8118-6F97D2A1086F}"/>
               </a:ext>
             </a:extLst>
           </p:cNvPr>
@@ -9079,7 +10337,7 @@
                   <a:srgbClr val="CAD1D4"/>
                 </a:solidFill>
               </a:rPr>
-              <a:t>Real-time AI responses activate when a server-side OpenAI API secret is configured. Mock mode remains available for deterministic testing.</a:t>
+              <a:t>The public product now includes live multi-turn AI, evidence citations, planning, final checks, and responsive mobile support.</a:t>
             </a:r>
           </a:p>
         </p:txBody>
@@ -9087,7 +10345,7 @@
     </p:spTree>
     <p:extLst>
       <p:ext uri="{BB962C8B-B14F-4D97-AF65-F5344CB8AC3E}">
-        <p14:creationId xmlns:p14="http://schemas.microsoft.com/office/powerpoint/2010/main" val="589691409"/>
+        <p14:creationId xmlns:p14="http://schemas.microsoft.com/office/powerpoint/2010/main" val="1348786821"/>
       </p:ext>
     </p:extLst>
   </p:cSld>

--- a/product-presentation/ClassPilot-AI-Product-Introduction.pptx
+++ b/product-presentation/ClassPilot-AI-Product-Introduction.pptx
@@ -2,21 +2,21 @@
 <file path=ppt/presentation.xml><?xml version="1.0" encoding="utf-8"?>
 <p:presentation xmlns:p="http://schemas.openxmlformats.org/presentationml/2006/main">
   <p:sldMasterIdLst>
-    <p:sldMasterId xmlns:r="http://schemas.openxmlformats.org/officeDocument/2006/relationships" id="2147483648" r:id="R6bba25dc900c48d2"/>
+    <p:sldMasterId xmlns:r="http://schemas.openxmlformats.org/officeDocument/2006/relationships" id="2147483648" r:id="R43dc006ba7914c27"/>
   </p:sldMasterIdLst>
   <p:notesMasterIdLst>
-    <p:notesMasterId xmlns:r="http://schemas.openxmlformats.org/officeDocument/2006/relationships" r:id="Rf5bea1f3331745a1"/>
+    <p:notesMasterId xmlns:r="http://schemas.openxmlformats.org/officeDocument/2006/relationships" r:id="Ra4b9cefdc6064f7f"/>
   </p:notesMasterIdLst>
   <p:sldIdLst>
-    <p:sldId xmlns:r="http://schemas.openxmlformats.org/officeDocument/2006/relationships" id="256" r:id="Rc0d73fd047734cd6"/>
-    <p:sldId xmlns:r="http://schemas.openxmlformats.org/officeDocument/2006/relationships" id="257" r:id="R0c09c5d59c8c4b6c"/>
-    <p:sldId xmlns:r="http://schemas.openxmlformats.org/officeDocument/2006/relationships" id="258" r:id="R800e55b8bc644bb9"/>
-    <p:sldId xmlns:r="http://schemas.openxmlformats.org/officeDocument/2006/relationships" id="259" r:id="Rd67132c2ebdb4dd4"/>
-    <p:sldId xmlns:r="http://schemas.openxmlformats.org/officeDocument/2006/relationships" id="260" r:id="Rbf7e1ad497fe4ce6"/>
-    <p:sldId xmlns:r="http://schemas.openxmlformats.org/officeDocument/2006/relationships" id="261" r:id="R448f7d096f16475b"/>
-    <p:sldId xmlns:r="http://schemas.openxmlformats.org/officeDocument/2006/relationships" id="262" r:id="R7f3551a379a14393"/>
-    <p:sldId xmlns:r="http://schemas.openxmlformats.org/officeDocument/2006/relationships" id="263" r:id="R535bbd9bfce643c5"/>
-    <p:sldId xmlns:r="http://schemas.openxmlformats.org/officeDocument/2006/relationships" id="264" r:id="Rb415f9de078543ae"/>
+    <p:sldId xmlns:r="http://schemas.openxmlformats.org/officeDocument/2006/relationships" id="256" r:id="Rd49fc55df65449c4"/>
+    <p:sldId xmlns:r="http://schemas.openxmlformats.org/officeDocument/2006/relationships" id="257" r:id="Ra88ebe294b824b64"/>
+    <p:sldId xmlns:r="http://schemas.openxmlformats.org/officeDocument/2006/relationships" id="258" r:id="Rc0e2663f12874896"/>
+    <p:sldId xmlns:r="http://schemas.openxmlformats.org/officeDocument/2006/relationships" id="259" r:id="R2874afd358e04081"/>
+    <p:sldId xmlns:r="http://schemas.openxmlformats.org/officeDocument/2006/relationships" id="260" r:id="R9533f6656fdb4f55"/>
+    <p:sldId xmlns:r="http://schemas.openxmlformats.org/officeDocument/2006/relationships" id="261" r:id="Ra7c0434d8d924364"/>
+    <p:sldId xmlns:r="http://schemas.openxmlformats.org/officeDocument/2006/relationships" id="262" r:id="R9b529e60e68c4312"/>
+    <p:sldId xmlns:r="http://schemas.openxmlformats.org/officeDocument/2006/relationships" id="263" r:id="Rb62c406f6b6e4cea"/>
+    <p:sldId xmlns:r="http://schemas.openxmlformats.org/officeDocument/2006/relationships" id="264" r:id="R3606e903a8174f14"/>
   </p:sldIdLst>
   <p:sldSz cx="12192000" cy="6858000"/>
   <p:notesSz cx="6858000" cy="9144000"/>
@@ -810,7 +810,7 @@
           <a:lstStyle xmlns:a="http://schemas.openxmlformats.org/drawingml/2006/main"/>
           <a:p xmlns:a="http://schemas.openxmlformats.org/drawingml/2006/main">
             <a:r>
-              <a:t>Show the two-turn live conversation. The Coach first identifies the easiest-to-miss requirement, then converts that advice into a three-day plan with evidence citations and actionable steps.</a:t>
+              <a:t>Show the live one-step loop. The Coach reads the selected assignment, gives one small action, asks one checkpoint question, and waits for the student before adapting.</a:t>
             </a:r>
           </a:p>
           <a:p xmlns:a="http://schemas.openxmlformats.org/drawingml/2006/main">
@@ -825,7 +825,7 @@
           </a:p>
           <a:p xmlns:a="http://schemas.openxmlformats.org/drawingml/2006/main">
             <a:r>
-              <a:t>- ClassPilot AI live product screenshot and Workers AI response, captured July 25, 2026.</a:t>
+              <a:t>- ClassPilot AI live product screenshot and Workers AI response, captured July 27, 2026.</a:t>
             </a:r>
           </a:p>
           <a:p xmlns:a="http://schemas.openxmlformats.org/drawingml/2006/main">
@@ -900,7 +900,7 @@
           <a:lstStyle xmlns:a="http://schemas.openxmlformats.org/drawingml/2006/main"/>
           <a:p xmlns:a="http://schemas.openxmlformats.org/drawingml/2006/main">
             <a:r>
-              <a:t>Explain how ClassPilot supports execution, not only import. Be transparent that the Canvas OAuth flow is implemented but institutional approval is an external prerequisite.</a:t>
+              <a:t>Explain how ClassPilot supports execution, not only import. Students without institutional API access can use a local calendar feed or explicitly capture the Canvas page they are viewing.</a:t>
             </a:r>
           </a:p>
           <a:p xmlns:a="http://schemas.openxmlformats.org/drawingml/2006/main">
@@ -915,12 +915,12 @@
           </a:p>
           <a:p xmlns:a="http://schemas.openxmlformats.org/drawingml/2006/main">
             <a:r>
-              <a:t>- ClassPilot AI Today, study scheduler, submission checker, and Canvas connector implementations, July 2026.</a:t>
-            </a:r>
-          </a:p>
-          <a:p xmlns:a="http://schemas.openxmlformats.org/drawingml/2006/main">
-            <a:r>
-              <a:t>- Canvas LMS OAuth2 documentation: https://developerdocs.instructure.com/services/canvas/oauth2</a:t>
+              <a:t>- ClassPilot AI Today, study scheduler, submission checker, Canvas calendar feed, and Canvas Companion implementations, July 2026.</a:t>
+            </a:r>
+          </a:p>
+          <a:p xmlns:a="http://schemas.openxmlformats.org/drawingml/2006/main">
+            <a:r>
+              <a:t>- Canvas calendar feed documentation: https://community.canvaslms.com/t5/Student-Guide/How-do-I-view-the-Calendar-iCal-feed/ta-p/1806</a:t>
             </a:r>
           </a:p>
           <a:p xmlns:a="http://schemas.openxmlformats.org/drawingml/2006/main">
@@ -995,7 +995,7 @@
           <a:lstStyle xmlns:a="http://schemas.openxmlformats.org/drawingml/2006/main"/>
           <a:p xmlns:a="http://schemas.openxmlformats.org/drawingml/2006/main">
             <a:r>
-              <a:t>Use this slide to explain the privacy and academic-integrity boundary. Workers AI is the default live provider; an OpenAI server-side provider remains optional without changing the public response contract.</a:t>
+              <a:t>Use this slide to explain the privacy and academic-integrity boundary. The Worker validates every response and recovers a useful model-generated action when the model places it in the wrong field.</a:t>
             </a:r>
           </a:p>
           <a:p xmlns:a="http://schemas.openxmlformats.org/drawingml/2006/main">
@@ -1010,7 +1010,7 @@
           </a:p>
           <a:p xmlns:a="http://schemas.openxmlformats.org/drawingml/2006/main">
             <a:r>
-              <a:t>- ClassPilot AI Worker and Coach system instructions, July 25, 2026.</a:t>
+              <a:t>- ClassPilot AI Worker and Coach response contract, July 27, 2026.</a:t>
             </a:r>
           </a:p>
           <a:p xmlns:a="http://schemas.openxmlformats.org/drawingml/2006/main">
@@ -1095,7 +1095,7 @@
           <a:lstStyle xmlns:a="http://schemas.openxmlformats.org/drawingml/2006/main"/>
           <a:p xmlns:a="http://schemas.openxmlformats.org/drawingml/2006/main">
             <a:r>
-              <a:t>Share the verification evidence: 326 automated tests passed, the public product had no browser console errors, and the 390-pixel mobile layout had no page or transcript overflow.</a:t>
+              <a:t>Share the verification evidence: 365 automated tests passed, the public product had no Coach error, and the 390-pixel mobile layout had no horizontal overflow with exactly one interactive step.</a:t>
             </a:r>
           </a:p>
           <a:p xmlns:a="http://schemas.openxmlformats.org/drawingml/2006/main">
@@ -1110,12 +1110,12 @@
           </a:p>
           <a:p xmlns:a="http://schemas.openxmlformats.org/drawingml/2006/main">
             <a:r>
-              <a:t>- ClassPilot AI test suite and public browser QA, July 25, 2026.</a:t>
-            </a:r>
-          </a:p>
-          <a:p xmlns:a="http://schemas.openxmlformats.org/drawingml/2006/main">
-            <a:r>
-              <a:t>- ClassPilot AI live mobile product screenshot, captured July 25, 2026.</a:t>
+              <a:t>- ClassPilot AI test suite and public browser QA, July 27, 2026.</a:t>
+            </a:r>
+          </a:p>
+          <a:p xmlns:a="http://schemas.openxmlformats.org/drawingml/2006/main">
+            <a:r>
+              <a:t>- ClassPilot AI live mobile product screenshot, captured July 27, 2026.</a:t>
             </a:r>
           </a:p>
           <a:p xmlns:a="http://schemas.openxmlformats.org/drawingml/2006/main">
@@ -1190,7 +1190,7 @@
           <a:lstStyle xmlns:a="http://schemas.openxmlformats.org/drawingml/2006/main"/>
           <a:p xmlns:a="http://schemas.openxmlformats.org/drawingml/2006/main">
             <a:r>
-              <a:t>Close on the product promise and open the live URL. The Coach is online through Workers AI; Canvas sync will become active after the school approves a Developer Key.</a:t>
+              <a:t>Close on the product promise and open the live URL. The Coach is online through Workers AI, while Canvas calendar feed and Companion imports work without a Developer Key.</a:t>
             </a:r>
           </a:p>
           <a:p xmlns:a="http://schemas.openxmlformats.org/drawingml/2006/main">
@@ -1283,7 +1283,7 @@
   </p:cSld>
   <p:clrMap bg1="lt1" tx1="dk1" bg2="lt2" tx2="dk2" accent1="accent1" accent2="accent2" accent3="accent3" accent4="accent4" accent5="accent5" accent6="accent6" hlink="hlink" folHlink="folHlink"/>
   <p:sldLayoutIdLst>
-    <p:sldLayoutId xmlns:r="http://schemas.openxmlformats.org/officeDocument/2006/relationships" id="2147483649" r:id="R5627ecae792f435f"/>
+    <p:sldLayoutId xmlns:r="http://schemas.openxmlformats.org/officeDocument/2006/relationships" id="2147483649" r:id="R2c0ddd83bcec4b3b"/>
   </p:sldLayoutIdLst>
   <p:txStyles>
     <p:titleStyle>
@@ -1834,7 +1834,7 @@
           <p:cNvPr id="8" name="cover-accent">
             <a:extLst xmlns:a="http://schemas.openxmlformats.org/drawingml/2006/main">
               <a:ext uri="{FF2B5EF4-FFF2-40B4-BE49-F238E27FC236}">
-                <a16:creationId xmlns:a16="http://schemas.microsoft.com/office/drawing/2014/main" id="{DDCC0067-4EED-49E1-B814-F62D9EA49F84}"/>
+                <a16:creationId xmlns:a16="http://schemas.microsoft.com/office/drawing/2014/main" id="{35B2A1B7-1794-491A-9B68-60CCE2A8339A}"/>
               </a:ext>
             </a:extLst>
           </p:cNvPr>
@@ -1867,7 +1867,7 @@
           <p:cNvPr id="2" name="cover-kicker">
             <a:extLst xmlns:a="http://schemas.openxmlformats.org/drawingml/2006/main">
               <a:ext uri="{FF2B5EF4-FFF2-40B4-BE49-F238E27FC236}">
-                <a16:creationId xmlns:a16="http://schemas.microsoft.com/office/drawing/2014/main" id="{015AE949-3195-4FCD-B75D-43D6EEDE0F6C}"/>
+                <a16:creationId xmlns:a16="http://schemas.microsoft.com/office/drawing/2014/main" id="{1451072C-5C7D-4BC0-835A-943AAA3132B4}"/>
               </a:ext>
             </a:extLst>
           </p:cNvPr>
@@ -1917,7 +1917,7 @@
           <p:cNvPr id="3" name="cover-title">
             <a:extLst xmlns:a="http://schemas.openxmlformats.org/drawingml/2006/main">
               <a:ext uri="{FF2B5EF4-FFF2-40B4-BE49-F238E27FC236}">
-                <a16:creationId xmlns:a16="http://schemas.microsoft.com/office/drawing/2014/main" id="{D58A0D3F-5EDE-4086-AC33-0C6A4982D70B}"/>
+                <a16:creationId xmlns:a16="http://schemas.microsoft.com/office/drawing/2014/main" id="{D130C052-C1A2-4095-ADEE-FA54F66ABDA4}"/>
               </a:ext>
             </a:extLst>
           </p:cNvPr>
@@ -1984,7 +1984,7 @@
           <p:cNvPr id="4" name="cover-body">
             <a:extLst xmlns:a="http://schemas.openxmlformats.org/drawingml/2006/main">
               <a:ext uri="{FF2B5EF4-FFF2-40B4-BE49-F238E27FC236}">
-                <a16:creationId xmlns:a16="http://schemas.microsoft.com/office/drawing/2014/main" id="{210CA153-8888-415B-95A2-C3DC988FA63E}"/>
+                <a16:creationId xmlns:a16="http://schemas.microsoft.com/office/drawing/2014/main" id="{246B2E2C-D230-4AA5-91BE-1FFA5B396619}"/>
               </a:ext>
             </a:extLst>
           </p:cNvPr>
@@ -2034,7 +2034,7 @@
           <p:cNvPr id="5" name="label-Product introduction-62">
             <a:extLst xmlns:a="http://schemas.openxmlformats.org/drawingml/2006/main">
               <a:ext uri="{FF2B5EF4-FFF2-40B4-BE49-F238E27FC236}">
-                <a16:creationId xmlns:a16="http://schemas.microsoft.com/office/drawing/2014/main" id="{1229FEA3-7838-4C52-8910-9A820B9C2CBF}"/>
+                <a16:creationId xmlns:a16="http://schemas.microsoft.com/office/drawing/2014/main" id="{FC1D486C-CF37-4216-BAA4-4EB06D15717B}"/>
               </a:ext>
             </a:extLst>
           </p:cNvPr>
@@ -2090,7 +2090,7 @@
           <p:cNvPr id="6" name="cover-screen-frame">
             <a:extLst xmlns:a="http://schemas.openxmlformats.org/drawingml/2006/main">
               <a:ext uri="{FF2B5EF4-FFF2-40B4-BE49-F238E27FC236}">
-                <a16:creationId xmlns:a16="http://schemas.microsoft.com/office/drawing/2014/main" id="{3E3B973C-9308-4886-A6BD-349EEA6125FD}"/>
+                <a16:creationId xmlns:a16="http://schemas.microsoft.com/office/drawing/2014/main" id="{5A0FB9B5-DF0A-4E52-AF08-D9CE9835C6EE}"/>
               </a:ext>
             </a:extLst>
           </p:cNvPr>
@@ -2129,8 +2129,8 @@
           <p:nvPr/>
         </p:nvPicPr>
         <p:blipFill>
-          <a:blip xmlns:r="http://schemas.openxmlformats.org/officeDocument/2006/relationships" xmlns:a="http://schemas.openxmlformats.org/drawingml/2006/main" r:embed="Rf0499b74358b400c"/>
-          <a:srcRect xmlns:a="http://schemas.openxmlformats.org/drawingml/2006/main" l="2017" t="0" r="2017" b="0"/>
+          <a:blip xmlns:r="http://schemas.openxmlformats.org/officeDocument/2006/relationships" xmlns:a="http://schemas.openxmlformats.org/drawingml/2006/main" r:embed="R5b803a7c418049e0"/>
+          <a:srcRect xmlns:a="http://schemas.openxmlformats.org/drawingml/2006/main" l="15942" t="0" r="15942" b="0"/>
           <a:stretch xmlns:a="http://schemas.openxmlformats.org/drawingml/2006/main">
             <a:fillRect l="0" t="0" r="0" b="0"/>
           </a:stretch>
@@ -2150,7 +2150,7 @@
     </p:spTree>
     <p:extLst>
       <p:ext uri="{BB962C8B-B14F-4D97-AF65-F5344CB8AC3E}">
-        <p14:creationId xmlns:p14="http://schemas.microsoft.com/office/powerpoint/2010/main" val="797015344"/>
+        <p14:creationId xmlns:p14="http://schemas.microsoft.com/office/powerpoint/2010/main" val="1735593376"/>
       </p:ext>
     </p:extLst>
   </p:cSld>
@@ -2181,7 +2181,7 @@
           <p:cNvPr id="18" name="section-2">
             <a:extLst xmlns:a="http://schemas.openxmlformats.org/drawingml/2006/main">
               <a:ext uri="{FF2B5EF4-FFF2-40B4-BE49-F238E27FC236}">
-                <a16:creationId xmlns:a16="http://schemas.microsoft.com/office/drawing/2014/main" id="{6CC7964F-EF1A-421F-B39E-EA6981A08DD6}"/>
+                <a16:creationId xmlns:a16="http://schemas.microsoft.com/office/drawing/2014/main" id="{E1BE0053-277A-431F-A450-BA8B7B00E50E}"/>
               </a:ext>
             </a:extLst>
           </p:cNvPr>
@@ -2231,7 +2231,7 @@
           <p:cNvPr id="2" name="page-2">
             <a:extLst xmlns:a="http://schemas.openxmlformats.org/drawingml/2006/main">
               <a:ext uri="{FF2B5EF4-FFF2-40B4-BE49-F238E27FC236}">
-                <a16:creationId xmlns:a16="http://schemas.microsoft.com/office/drawing/2014/main" id="{E6E8A8DB-074D-4F4A-9213-5CB1EAC7A660}"/>
+                <a16:creationId xmlns:a16="http://schemas.microsoft.com/office/drawing/2014/main" id="{B2CD36A9-8DF0-4A2D-93BA-0E11E00974B4}"/>
               </a:ext>
             </a:extLst>
           </p:cNvPr>
@@ -2281,7 +2281,7 @@
           <p:cNvPr id="3" name="rule-48-66">
             <a:extLst xmlns:a="http://schemas.openxmlformats.org/drawingml/2006/main">
               <a:ext uri="{FF2B5EF4-FFF2-40B4-BE49-F238E27FC236}">
-                <a16:creationId xmlns:a16="http://schemas.microsoft.com/office/drawing/2014/main" id="{EBA05033-4F05-43BA-BBAF-73BC5053FEA1}"/>
+                <a16:creationId xmlns:a16="http://schemas.microsoft.com/office/drawing/2014/main" id="{9C4C3F5D-B6B8-4482-B1C7-7749AF73349A}"/>
               </a:ext>
             </a:extLst>
           </p:cNvPr>
@@ -2312,7 +2312,7 @@
           <p:cNvPr id="4" name="title-Students do not need another dashboard.">
             <a:extLst xmlns:a="http://schemas.openxmlformats.org/drawingml/2006/main">
               <a:ext uri="{FF2B5EF4-FFF2-40B4-BE49-F238E27FC236}">
-                <a16:creationId xmlns:a16="http://schemas.microsoft.com/office/drawing/2014/main" id="{45718F58-F3C7-47BB-A2DA-61AFB4D94128}"/>
+                <a16:creationId xmlns:a16="http://schemas.microsoft.com/office/drawing/2014/main" id="{13923A4E-4CBB-4A9D-9223-1620CD93E7D2}"/>
               </a:ext>
             </a:extLst>
           </p:cNvPr>
@@ -2362,7 +2362,7 @@
           <p:cNvPr id="5" name="subtitle-Students do not need another dashboard.">
             <a:extLst xmlns:a="http://schemas.openxmlformats.org/drawingml/2006/main">
               <a:ext uri="{FF2B5EF4-FFF2-40B4-BE49-F238E27FC236}">
-                <a16:creationId xmlns:a16="http://schemas.microsoft.com/office/drawing/2014/main" id="{AAB437CA-9BF1-42A4-88EF-CE7A01BDF9C5}"/>
+                <a16:creationId xmlns:a16="http://schemas.microsoft.com/office/drawing/2014/main" id="{B91BBF21-5074-4B65-9152-183DBCA391C6}"/>
               </a:ext>
             </a:extLst>
           </p:cNvPr>
@@ -2412,7 +2412,7 @@
           <p:cNvPr id="6" name="problem-card-0">
             <a:extLst xmlns:a="http://schemas.openxmlformats.org/drawingml/2006/main">
               <a:ext uri="{FF2B5EF4-FFF2-40B4-BE49-F238E27FC236}">
-                <a16:creationId xmlns:a16="http://schemas.microsoft.com/office/drawing/2014/main" id="{1CC18705-A946-49D7-8D56-B0BE6FD0FD6E}"/>
+                <a16:creationId xmlns:a16="http://schemas.microsoft.com/office/drawing/2014/main" id="{48D153AE-D0B0-44D1-B547-C0B6CACD6AA2}"/>
               </a:ext>
             </a:extLst>
           </p:cNvPr>
@@ -2447,7 +2447,7 @@
           <p:cNvPr id="7" name="problem-number-0">
             <a:extLst xmlns:a="http://schemas.openxmlformats.org/drawingml/2006/main">
               <a:ext uri="{FF2B5EF4-FFF2-40B4-BE49-F238E27FC236}">
-                <a16:creationId xmlns:a16="http://schemas.microsoft.com/office/drawing/2014/main" id="{C42C15EC-DD2D-4BAA-9098-856539CF1C1E}"/>
+                <a16:creationId xmlns:a16="http://schemas.microsoft.com/office/drawing/2014/main" id="{E9202568-EF88-47B3-979F-992F061FC5FB}"/>
               </a:ext>
             </a:extLst>
           </p:cNvPr>
@@ -2497,7 +2497,7 @@
           <p:cNvPr id="8" name="problem-title-0">
             <a:extLst xmlns:a="http://schemas.openxmlformats.org/drawingml/2006/main">
               <a:ext uri="{FF2B5EF4-FFF2-40B4-BE49-F238E27FC236}">
-                <a16:creationId xmlns:a16="http://schemas.microsoft.com/office/drawing/2014/main" id="{A12300B3-41F6-46E6-A8CF-E13BF62DDD38}"/>
+                <a16:creationId xmlns:a16="http://schemas.microsoft.com/office/drawing/2014/main" id="{96B8A65A-D9B7-4B1B-95EB-2E74F3F247C5}"/>
               </a:ext>
             </a:extLst>
           </p:cNvPr>
@@ -2547,7 +2547,7 @@
           <p:cNvPr id="9" name="problem-body-0">
             <a:extLst xmlns:a="http://schemas.openxmlformats.org/drawingml/2006/main">
               <a:ext uri="{FF2B5EF4-FFF2-40B4-BE49-F238E27FC236}">
-                <a16:creationId xmlns:a16="http://schemas.microsoft.com/office/drawing/2014/main" id="{6F2EC913-EA92-4E7A-B582-7A77AD2AE3EE}"/>
+                <a16:creationId xmlns:a16="http://schemas.microsoft.com/office/drawing/2014/main" id="{A8D946A4-C66D-41E4-A402-522F87B07841}"/>
               </a:ext>
             </a:extLst>
           </p:cNvPr>
@@ -2597,7 +2597,7 @@
           <p:cNvPr id="10" name="problem-card-1">
             <a:extLst xmlns:a="http://schemas.openxmlformats.org/drawingml/2006/main">
               <a:ext uri="{FF2B5EF4-FFF2-40B4-BE49-F238E27FC236}">
-                <a16:creationId xmlns:a16="http://schemas.microsoft.com/office/drawing/2014/main" id="{57B3C753-52B9-40DE-81F6-871748B5AE1C}"/>
+                <a16:creationId xmlns:a16="http://schemas.microsoft.com/office/drawing/2014/main" id="{A5385C68-25D4-4D6D-B692-A5D20EC4D3B2}"/>
               </a:ext>
             </a:extLst>
           </p:cNvPr>
@@ -2632,7 +2632,7 @@
           <p:cNvPr id="11" name="problem-number-1">
             <a:extLst xmlns:a="http://schemas.openxmlformats.org/drawingml/2006/main">
               <a:ext uri="{FF2B5EF4-FFF2-40B4-BE49-F238E27FC236}">
-                <a16:creationId xmlns:a16="http://schemas.microsoft.com/office/drawing/2014/main" id="{75D072BC-6878-43E9-A9EB-5DB960ABBAEE}"/>
+                <a16:creationId xmlns:a16="http://schemas.microsoft.com/office/drawing/2014/main" id="{A6A25C92-EA96-4581-95F3-A99498C29598}"/>
               </a:ext>
             </a:extLst>
           </p:cNvPr>
@@ -2682,7 +2682,7 @@
           <p:cNvPr id="12" name="problem-title-1">
             <a:extLst xmlns:a="http://schemas.openxmlformats.org/drawingml/2006/main">
               <a:ext uri="{FF2B5EF4-FFF2-40B4-BE49-F238E27FC236}">
-                <a16:creationId xmlns:a16="http://schemas.microsoft.com/office/drawing/2014/main" id="{0E2AFD70-05A2-48A4-B070-89BBE701B2CE}"/>
+                <a16:creationId xmlns:a16="http://schemas.microsoft.com/office/drawing/2014/main" id="{7CD3161B-D889-453B-8A4A-D804A0BC1FE7}"/>
               </a:ext>
             </a:extLst>
           </p:cNvPr>
@@ -2732,7 +2732,7 @@
           <p:cNvPr id="13" name="problem-body-1">
             <a:extLst xmlns:a="http://schemas.openxmlformats.org/drawingml/2006/main">
               <a:ext uri="{FF2B5EF4-FFF2-40B4-BE49-F238E27FC236}">
-                <a16:creationId xmlns:a16="http://schemas.microsoft.com/office/drawing/2014/main" id="{CA2EB6EB-5A9E-4943-91D7-1D9CF7A59C9C}"/>
+                <a16:creationId xmlns:a16="http://schemas.microsoft.com/office/drawing/2014/main" id="{84078649-0444-4F82-A3CB-6EDD6E7D865D}"/>
               </a:ext>
             </a:extLst>
           </p:cNvPr>
@@ -2782,7 +2782,7 @@
           <p:cNvPr id="14" name="problem-card-2">
             <a:extLst xmlns:a="http://schemas.openxmlformats.org/drawingml/2006/main">
               <a:ext uri="{FF2B5EF4-FFF2-40B4-BE49-F238E27FC236}">
-                <a16:creationId xmlns:a16="http://schemas.microsoft.com/office/drawing/2014/main" id="{9C0E33D9-FFEC-41A3-AF4D-C0969D1D2A17}"/>
+                <a16:creationId xmlns:a16="http://schemas.microsoft.com/office/drawing/2014/main" id="{6B438D81-B522-4DAE-AC5B-9F78E5FEA2D8}"/>
               </a:ext>
             </a:extLst>
           </p:cNvPr>
@@ -2817,7 +2817,7 @@
           <p:cNvPr id="15" name="problem-number-2">
             <a:extLst xmlns:a="http://schemas.openxmlformats.org/drawingml/2006/main">
               <a:ext uri="{FF2B5EF4-FFF2-40B4-BE49-F238E27FC236}">
-                <a16:creationId xmlns:a16="http://schemas.microsoft.com/office/drawing/2014/main" id="{14A47894-C15F-4598-AFD2-6CF8FF05E4C2}"/>
+                <a16:creationId xmlns:a16="http://schemas.microsoft.com/office/drawing/2014/main" id="{BBACAB45-BF77-4837-A7EE-7A67936F63F9}"/>
               </a:ext>
             </a:extLst>
           </p:cNvPr>
@@ -2867,7 +2867,7 @@
           <p:cNvPr id="16" name="problem-title-2">
             <a:extLst xmlns:a="http://schemas.openxmlformats.org/drawingml/2006/main">
               <a:ext uri="{FF2B5EF4-FFF2-40B4-BE49-F238E27FC236}">
-                <a16:creationId xmlns:a16="http://schemas.microsoft.com/office/drawing/2014/main" id="{C58EEE39-7F5D-463F-8E49-67DDDA86CA49}"/>
+                <a16:creationId xmlns:a16="http://schemas.microsoft.com/office/drawing/2014/main" id="{92C34566-E660-4ECA-892E-35B87F0050E0}"/>
               </a:ext>
             </a:extLst>
           </p:cNvPr>
@@ -2917,7 +2917,7 @@
           <p:cNvPr id="17" name="problem-body-2">
             <a:extLst xmlns:a="http://schemas.openxmlformats.org/drawingml/2006/main">
               <a:ext uri="{FF2B5EF4-FFF2-40B4-BE49-F238E27FC236}">
-                <a16:creationId xmlns:a16="http://schemas.microsoft.com/office/drawing/2014/main" id="{FED7F536-AB53-47DB-9D5E-850EF63AF4D9}"/>
+                <a16:creationId xmlns:a16="http://schemas.microsoft.com/office/drawing/2014/main" id="{A66A612A-B27A-4195-A61E-2FE7629359BA}"/>
               </a:ext>
             </a:extLst>
           </p:cNvPr>
@@ -2965,7 +2965,7 @@
     </p:spTree>
     <p:extLst>
       <p:ext uri="{BB962C8B-B14F-4D97-AF65-F5344CB8AC3E}">
-        <p14:creationId xmlns:p14="http://schemas.microsoft.com/office/powerpoint/2010/main" val="1617875129"/>
+        <p14:creationId xmlns:p14="http://schemas.microsoft.com/office/powerpoint/2010/main" val="1709972998"/>
       </p:ext>
     </p:extLst>
   </p:cSld>
@@ -2996,7 +2996,7 @@
           <p:cNvPr id="29" name="section-3">
             <a:extLst xmlns:a="http://schemas.openxmlformats.org/drawingml/2006/main">
               <a:ext uri="{FF2B5EF4-FFF2-40B4-BE49-F238E27FC236}">
-                <a16:creationId xmlns:a16="http://schemas.microsoft.com/office/drawing/2014/main" id="{13EE8F65-9563-4031-A533-13ECF9B7528B}"/>
+                <a16:creationId xmlns:a16="http://schemas.microsoft.com/office/drawing/2014/main" id="{A76F7560-18B1-4AD1-98DE-9D8A8467CA2A}"/>
               </a:ext>
             </a:extLst>
           </p:cNvPr>
@@ -3046,7 +3046,7 @@
           <p:cNvPr id="2" name="page-3">
             <a:extLst xmlns:a="http://schemas.openxmlformats.org/drawingml/2006/main">
               <a:ext uri="{FF2B5EF4-FFF2-40B4-BE49-F238E27FC236}">
-                <a16:creationId xmlns:a16="http://schemas.microsoft.com/office/drawing/2014/main" id="{FE9655F9-91C3-4416-91DF-265679B4C4A6}"/>
+                <a16:creationId xmlns:a16="http://schemas.microsoft.com/office/drawing/2014/main" id="{9FA203D6-0BE4-42CB-B636-E79FE38A5C22}"/>
               </a:ext>
             </a:extLst>
           </p:cNvPr>
@@ -3096,7 +3096,7 @@
           <p:cNvPr id="3" name="rule-48-66">
             <a:extLst xmlns:a="http://schemas.openxmlformats.org/drawingml/2006/main">
               <a:ext uri="{FF2B5EF4-FFF2-40B4-BE49-F238E27FC236}">
-                <a16:creationId xmlns:a16="http://schemas.microsoft.com/office/drawing/2014/main" id="{E5D89E68-8452-4B03-899F-35E8FC8E1FDF}"/>
+                <a16:creationId xmlns:a16="http://schemas.microsoft.com/office/drawing/2014/main" id="{69B3CA68-06B9-49B8-9AEF-5E2770E45493}"/>
               </a:ext>
             </a:extLst>
           </p:cNvPr>
@@ -3127,7 +3127,7 @@
           <p:cNvPr id="4" name="title-Upload once. Keep every fact with the right course.">
             <a:extLst xmlns:a="http://schemas.openxmlformats.org/drawingml/2006/main">
               <a:ext uri="{FF2B5EF4-FFF2-40B4-BE49-F238E27FC236}">
-                <a16:creationId xmlns:a16="http://schemas.microsoft.com/office/drawing/2014/main" id="{7EF6AE4E-2321-4086-8FD2-BF400696B9E1}"/>
+                <a16:creationId xmlns:a16="http://schemas.microsoft.com/office/drawing/2014/main" id="{653CA707-07C8-49E1-AA8F-54791A34B88F}"/>
               </a:ext>
             </a:extLst>
           </p:cNvPr>
@@ -3177,7 +3177,7 @@
           <p:cNvPr id="5" name="subtitle-Upload once. Keep every fact with the right course.">
             <a:extLst xmlns:a="http://schemas.openxmlformats.org/drawingml/2006/main">
               <a:ext uri="{FF2B5EF4-FFF2-40B4-BE49-F238E27FC236}">
-                <a16:creationId xmlns:a16="http://schemas.microsoft.com/office/drawing/2014/main" id="{729DAE95-8CAC-4B2F-A78B-58F615115A8B}"/>
+                <a16:creationId xmlns:a16="http://schemas.microsoft.com/office/drawing/2014/main" id="{6A686A7A-E604-43F4-AD39-D57327A25F37}"/>
               </a:ext>
             </a:extLst>
           </p:cNvPr>
@@ -3227,7 +3227,7 @@
           <p:cNvPr id="6" name="step-number-1">
             <a:extLst xmlns:a="http://schemas.openxmlformats.org/drawingml/2006/main">
               <a:ext uri="{FF2B5EF4-FFF2-40B4-BE49-F238E27FC236}">
-                <a16:creationId xmlns:a16="http://schemas.microsoft.com/office/drawing/2014/main" id="{41C2250D-112F-483B-9E00-614A22071B91}"/>
+                <a16:creationId xmlns:a16="http://schemas.microsoft.com/office/drawing/2014/main" id="{A45001DB-FE43-4E12-9A82-5817E80600F5}"/>
               </a:ext>
             </a:extLst>
           </p:cNvPr>
@@ -3260,7 +3260,7 @@
           <p:cNvPr id="7" name="step-digit-1">
             <a:extLst xmlns:a="http://schemas.openxmlformats.org/drawingml/2006/main">
               <a:ext uri="{FF2B5EF4-FFF2-40B4-BE49-F238E27FC236}">
-                <a16:creationId xmlns:a16="http://schemas.microsoft.com/office/drawing/2014/main" id="{AD3FB824-3B55-4B4F-9E37-C233E7BD5916}"/>
+                <a16:creationId xmlns:a16="http://schemas.microsoft.com/office/drawing/2014/main" id="{77F43AAE-3893-4609-9999-4DE3D55AA921}"/>
               </a:ext>
             </a:extLst>
           </p:cNvPr>
@@ -3310,7 +3310,7 @@
           <p:cNvPr id="8" name="step-heading-1">
             <a:extLst xmlns:a="http://schemas.openxmlformats.org/drawingml/2006/main">
               <a:ext uri="{FF2B5EF4-FFF2-40B4-BE49-F238E27FC236}">
-                <a16:creationId xmlns:a16="http://schemas.microsoft.com/office/drawing/2014/main" id="{184693AB-6EB7-4927-B73D-3E7F20238996}"/>
+                <a16:creationId xmlns:a16="http://schemas.microsoft.com/office/drawing/2014/main" id="{649B19FE-5F11-49DE-B719-0EA1BE3841A1}"/>
               </a:ext>
             </a:extLst>
           </p:cNvPr>
@@ -3360,7 +3360,7 @@
           <p:cNvPr id="9" name="step-body-1">
             <a:extLst xmlns:a="http://schemas.openxmlformats.org/drawingml/2006/main">
               <a:ext uri="{FF2B5EF4-FFF2-40B4-BE49-F238E27FC236}">
-                <a16:creationId xmlns:a16="http://schemas.microsoft.com/office/drawing/2014/main" id="{BD878C88-1B33-4C21-830E-F00E00152CF4}"/>
+                <a16:creationId xmlns:a16="http://schemas.microsoft.com/office/drawing/2014/main" id="{C31E3AF5-D2B8-4EC8-A6E3-6EFE0A0167FC}"/>
               </a:ext>
             </a:extLst>
           </p:cNvPr>
@@ -3410,7 +3410,7 @@
           <p:cNvPr id="10" name="rule-116-302">
             <a:extLst xmlns:a="http://schemas.openxmlformats.org/drawingml/2006/main">
               <a:ext uri="{FF2B5EF4-FFF2-40B4-BE49-F238E27FC236}">
-                <a16:creationId xmlns:a16="http://schemas.microsoft.com/office/drawing/2014/main" id="{6671CB29-4EB4-4C86-9EFE-D38432A7D55A}"/>
+                <a16:creationId xmlns:a16="http://schemas.microsoft.com/office/drawing/2014/main" id="{CD76DB5D-56EA-4330-9245-E2F6B66393C6}"/>
               </a:ext>
             </a:extLst>
           </p:cNvPr>
@@ -3441,7 +3441,7 @@
           <p:cNvPr id="11" name="arrow-0">
             <a:extLst xmlns:a="http://schemas.openxmlformats.org/drawingml/2006/main">
               <a:ext uri="{FF2B5EF4-FFF2-40B4-BE49-F238E27FC236}">
-                <a16:creationId xmlns:a16="http://schemas.microsoft.com/office/drawing/2014/main" id="{D16D6F31-0852-4849-B1A4-091CA66BA395}"/>
+                <a16:creationId xmlns:a16="http://schemas.microsoft.com/office/drawing/2014/main" id="{14D1432C-0D1D-4276-8CDB-2A01319AE821}"/>
               </a:ext>
             </a:extLst>
           </p:cNvPr>
@@ -3474,7 +3474,7 @@
           <p:cNvPr id="12" name="step-number-2">
             <a:extLst xmlns:a="http://schemas.openxmlformats.org/drawingml/2006/main">
               <a:ext uri="{FF2B5EF4-FFF2-40B4-BE49-F238E27FC236}">
-                <a16:creationId xmlns:a16="http://schemas.microsoft.com/office/drawing/2014/main" id="{C758AC14-4116-4340-876B-CDA33028538A}"/>
+                <a16:creationId xmlns:a16="http://schemas.microsoft.com/office/drawing/2014/main" id="{20307735-AF98-4406-BB55-D3BDE1D21D35}"/>
               </a:ext>
             </a:extLst>
           </p:cNvPr>
@@ -3507,7 +3507,7 @@
           <p:cNvPr id="13" name="step-digit-2">
             <a:extLst xmlns:a="http://schemas.openxmlformats.org/drawingml/2006/main">
               <a:ext uri="{FF2B5EF4-FFF2-40B4-BE49-F238E27FC236}">
-                <a16:creationId xmlns:a16="http://schemas.microsoft.com/office/drawing/2014/main" id="{C6AB886F-36BF-4977-B387-E6A87129D2A0}"/>
+                <a16:creationId xmlns:a16="http://schemas.microsoft.com/office/drawing/2014/main" id="{FCE9B429-B189-4DF5-96EE-927075A38406}"/>
               </a:ext>
             </a:extLst>
           </p:cNvPr>
@@ -3557,7 +3557,7 @@
           <p:cNvPr id="14" name="step-heading-2">
             <a:extLst xmlns:a="http://schemas.openxmlformats.org/drawingml/2006/main">
               <a:ext uri="{FF2B5EF4-FFF2-40B4-BE49-F238E27FC236}">
-                <a16:creationId xmlns:a16="http://schemas.microsoft.com/office/drawing/2014/main" id="{69A493A6-7E2F-4EDA-B777-9C74D155D7DF}"/>
+                <a16:creationId xmlns:a16="http://schemas.microsoft.com/office/drawing/2014/main" id="{0C3F03F6-D61D-4B66-9D71-1ECC36C207CC}"/>
               </a:ext>
             </a:extLst>
           </p:cNvPr>
@@ -3607,7 +3607,7 @@
           <p:cNvPr id="15" name="step-body-2">
             <a:extLst xmlns:a="http://schemas.openxmlformats.org/drawingml/2006/main">
               <a:ext uri="{FF2B5EF4-FFF2-40B4-BE49-F238E27FC236}">
-                <a16:creationId xmlns:a16="http://schemas.microsoft.com/office/drawing/2014/main" id="{5885FB04-9099-4DC0-BB4B-30043981A17A}"/>
+                <a16:creationId xmlns:a16="http://schemas.microsoft.com/office/drawing/2014/main" id="{F9A08255-83ED-4388-B1A6-1A8C051EED62}"/>
               </a:ext>
             </a:extLst>
           </p:cNvPr>
@@ -3657,7 +3657,7 @@
           <p:cNvPr id="16" name="rule-418-302">
             <a:extLst xmlns:a="http://schemas.openxmlformats.org/drawingml/2006/main">
               <a:ext uri="{FF2B5EF4-FFF2-40B4-BE49-F238E27FC236}">
-                <a16:creationId xmlns:a16="http://schemas.microsoft.com/office/drawing/2014/main" id="{D23FD719-3D8F-4C56-BCA8-C1C4679A1600}"/>
+                <a16:creationId xmlns:a16="http://schemas.microsoft.com/office/drawing/2014/main" id="{6C91E5D1-E7A0-4024-AB6C-5967FAC01F90}"/>
               </a:ext>
             </a:extLst>
           </p:cNvPr>
@@ -3688,7 +3688,7 @@
           <p:cNvPr id="17" name="arrow-1">
             <a:extLst xmlns:a="http://schemas.openxmlformats.org/drawingml/2006/main">
               <a:ext uri="{FF2B5EF4-FFF2-40B4-BE49-F238E27FC236}">
-                <a16:creationId xmlns:a16="http://schemas.microsoft.com/office/drawing/2014/main" id="{3F301BF0-C5EA-49CD-9ADD-B232519FB02E}"/>
+                <a16:creationId xmlns:a16="http://schemas.microsoft.com/office/drawing/2014/main" id="{A1428B0E-548F-4AEB-941D-989F1EC252A1}"/>
               </a:ext>
             </a:extLst>
           </p:cNvPr>
@@ -3721,7 +3721,7 @@
           <p:cNvPr id="18" name="step-number-3">
             <a:extLst xmlns:a="http://schemas.openxmlformats.org/drawingml/2006/main">
               <a:ext uri="{FF2B5EF4-FFF2-40B4-BE49-F238E27FC236}">
-                <a16:creationId xmlns:a16="http://schemas.microsoft.com/office/drawing/2014/main" id="{DE2621B7-5EC3-43AA-92AC-923DCC4A1DF9}"/>
+                <a16:creationId xmlns:a16="http://schemas.microsoft.com/office/drawing/2014/main" id="{C74AF893-8FE2-4440-BB2B-817A7D86C608}"/>
               </a:ext>
             </a:extLst>
           </p:cNvPr>
@@ -3754,7 +3754,7 @@
           <p:cNvPr id="19" name="step-digit-3">
             <a:extLst xmlns:a="http://schemas.openxmlformats.org/drawingml/2006/main">
               <a:ext uri="{FF2B5EF4-FFF2-40B4-BE49-F238E27FC236}">
-                <a16:creationId xmlns:a16="http://schemas.microsoft.com/office/drawing/2014/main" id="{14E73AE7-C4E4-443D-BE2B-B5EA15BEEFE8}"/>
+                <a16:creationId xmlns:a16="http://schemas.microsoft.com/office/drawing/2014/main" id="{3F836F8B-8A0D-4C92-A52E-F750A51164E1}"/>
               </a:ext>
             </a:extLst>
           </p:cNvPr>
@@ -3804,7 +3804,7 @@
           <p:cNvPr id="20" name="step-heading-3">
             <a:extLst xmlns:a="http://schemas.openxmlformats.org/drawingml/2006/main">
               <a:ext uri="{FF2B5EF4-FFF2-40B4-BE49-F238E27FC236}">
-                <a16:creationId xmlns:a16="http://schemas.microsoft.com/office/drawing/2014/main" id="{DC2AF1D0-0C11-4320-AAE8-889E58E3D4FE}"/>
+                <a16:creationId xmlns:a16="http://schemas.microsoft.com/office/drawing/2014/main" id="{086C9D35-5142-4071-B85C-88E76DC28D43}"/>
               </a:ext>
             </a:extLst>
           </p:cNvPr>
@@ -3854,7 +3854,7 @@
           <p:cNvPr id="21" name="step-body-3">
             <a:extLst xmlns:a="http://schemas.openxmlformats.org/drawingml/2006/main">
               <a:ext uri="{FF2B5EF4-FFF2-40B4-BE49-F238E27FC236}">
-                <a16:creationId xmlns:a16="http://schemas.microsoft.com/office/drawing/2014/main" id="{DC411792-184D-4589-8ABC-583F6D801620}"/>
+                <a16:creationId xmlns:a16="http://schemas.microsoft.com/office/drawing/2014/main" id="{FF8976A6-A655-4226-8BE0-CB94454C4D77}"/>
               </a:ext>
             </a:extLst>
           </p:cNvPr>
@@ -3904,7 +3904,7 @@
           <p:cNvPr id="22" name="rule-720-302">
             <a:extLst xmlns:a="http://schemas.openxmlformats.org/drawingml/2006/main">
               <a:ext uri="{FF2B5EF4-FFF2-40B4-BE49-F238E27FC236}">
-                <a16:creationId xmlns:a16="http://schemas.microsoft.com/office/drawing/2014/main" id="{FAF3D9C3-439A-4917-A50B-28B0043B3CAC}"/>
+                <a16:creationId xmlns:a16="http://schemas.microsoft.com/office/drawing/2014/main" id="{434889F9-FDFC-4824-AA87-FE64645F060A}"/>
               </a:ext>
             </a:extLst>
           </p:cNvPr>
@@ -3935,7 +3935,7 @@
           <p:cNvPr id="23" name="arrow-2">
             <a:extLst xmlns:a="http://schemas.openxmlformats.org/drawingml/2006/main">
               <a:ext uri="{FF2B5EF4-FFF2-40B4-BE49-F238E27FC236}">
-                <a16:creationId xmlns:a16="http://schemas.microsoft.com/office/drawing/2014/main" id="{8B7CFC15-D031-4AFD-A22E-4C65E73C6606}"/>
+                <a16:creationId xmlns:a16="http://schemas.microsoft.com/office/drawing/2014/main" id="{6BC8FF49-4487-4B4C-BB3B-88B075F66495}"/>
               </a:ext>
             </a:extLst>
           </p:cNvPr>
@@ -3968,7 +3968,7 @@
           <p:cNvPr id="24" name="step-number-4">
             <a:extLst xmlns:a="http://schemas.openxmlformats.org/drawingml/2006/main">
               <a:ext uri="{FF2B5EF4-FFF2-40B4-BE49-F238E27FC236}">
-                <a16:creationId xmlns:a16="http://schemas.microsoft.com/office/drawing/2014/main" id="{0519DA33-C9C4-4FC1-85D6-05BA2FD40F66}"/>
+                <a16:creationId xmlns:a16="http://schemas.microsoft.com/office/drawing/2014/main" id="{C38BF6D6-1A86-4558-8C3C-D6F280B8B1A4}"/>
               </a:ext>
             </a:extLst>
           </p:cNvPr>
@@ -4001,7 +4001,7 @@
           <p:cNvPr id="25" name="step-digit-4">
             <a:extLst xmlns:a="http://schemas.openxmlformats.org/drawingml/2006/main">
               <a:ext uri="{FF2B5EF4-FFF2-40B4-BE49-F238E27FC236}">
-                <a16:creationId xmlns:a16="http://schemas.microsoft.com/office/drawing/2014/main" id="{AAEE159C-153A-4CD6-8F86-154E938CB6F6}"/>
+                <a16:creationId xmlns:a16="http://schemas.microsoft.com/office/drawing/2014/main" id="{4BF137AB-921C-4D4A-9443-CECC3C7EDE34}"/>
               </a:ext>
             </a:extLst>
           </p:cNvPr>
@@ -4051,7 +4051,7 @@
           <p:cNvPr id="26" name="step-heading-4">
             <a:extLst xmlns:a="http://schemas.openxmlformats.org/drawingml/2006/main">
               <a:ext uri="{FF2B5EF4-FFF2-40B4-BE49-F238E27FC236}">
-                <a16:creationId xmlns:a16="http://schemas.microsoft.com/office/drawing/2014/main" id="{7AE5F467-1041-4647-9DBF-516E92AFD60F}"/>
+                <a16:creationId xmlns:a16="http://schemas.microsoft.com/office/drawing/2014/main" id="{B90FCCC2-6D43-4334-804A-1538B68EE8A8}"/>
               </a:ext>
             </a:extLst>
           </p:cNvPr>
@@ -4101,7 +4101,7 @@
           <p:cNvPr id="27" name="step-body-4">
             <a:extLst xmlns:a="http://schemas.openxmlformats.org/drawingml/2006/main">
               <a:ext uri="{FF2B5EF4-FFF2-40B4-BE49-F238E27FC236}">
-                <a16:creationId xmlns:a16="http://schemas.microsoft.com/office/drawing/2014/main" id="{1D79D506-0EEE-45B5-B881-FB586B056A21}"/>
+                <a16:creationId xmlns:a16="http://schemas.microsoft.com/office/drawing/2014/main" id="{21578FDE-202A-4A4D-A080-8C031703B2A9}"/>
               </a:ext>
             </a:extLst>
           </p:cNvPr>
@@ -4151,7 +4151,7 @@
           <p:cNvPr id="28" name="workflow-result">
             <a:extLst xmlns:a="http://schemas.openxmlformats.org/drawingml/2006/main">
               <a:ext uri="{FF2B5EF4-FFF2-40B4-BE49-F238E27FC236}">
-                <a16:creationId xmlns:a16="http://schemas.microsoft.com/office/drawing/2014/main" id="{4E72650F-F30F-40C5-A019-47873A7508A6}"/>
+                <a16:creationId xmlns:a16="http://schemas.microsoft.com/office/drawing/2014/main" id="{05FF0A2C-F990-45D6-B76E-CB57A580EBFD}"/>
               </a:ext>
             </a:extLst>
           </p:cNvPr>
@@ -4199,7 +4199,7 @@
     </p:spTree>
     <p:extLst>
       <p:ext uri="{BB962C8B-B14F-4D97-AF65-F5344CB8AC3E}">
-        <p14:creationId xmlns:p14="http://schemas.microsoft.com/office/powerpoint/2010/main" val="1723410769"/>
+        <p14:creationId xmlns:p14="http://schemas.microsoft.com/office/powerpoint/2010/main" val="799625306"/>
       </p:ext>
     </p:extLst>
   </p:cSld>
@@ -4230,7 +4230,7 @@
           <p:cNvPr id="42" name="section-4">
             <a:extLst xmlns:a="http://schemas.openxmlformats.org/drawingml/2006/main">
               <a:ext uri="{FF2B5EF4-FFF2-40B4-BE49-F238E27FC236}">
-                <a16:creationId xmlns:a16="http://schemas.microsoft.com/office/drawing/2014/main" id="{44B8CE2C-31A5-4773-8981-59ADB80CEEFC}"/>
+                <a16:creationId xmlns:a16="http://schemas.microsoft.com/office/drawing/2014/main" id="{6AFAF402-3AF7-4506-8F00-9C62D858F9D6}"/>
               </a:ext>
             </a:extLst>
           </p:cNvPr>
@@ -4280,7 +4280,7 @@
           <p:cNvPr id="2" name="page-4">
             <a:extLst xmlns:a="http://schemas.openxmlformats.org/drawingml/2006/main">
               <a:ext uri="{FF2B5EF4-FFF2-40B4-BE49-F238E27FC236}">
-                <a16:creationId xmlns:a16="http://schemas.microsoft.com/office/drawing/2014/main" id="{92AE81CA-5FB4-4FD6-811C-429E675B9882}"/>
+                <a16:creationId xmlns:a16="http://schemas.microsoft.com/office/drawing/2014/main" id="{E47B4816-B886-44AD-A852-A2DAA286A272}"/>
               </a:ext>
             </a:extLst>
           </p:cNvPr>
@@ -4330,7 +4330,7 @@
           <p:cNvPr id="3" name="rule-48-66">
             <a:extLst xmlns:a="http://schemas.openxmlformats.org/drawingml/2006/main">
               <a:ext uri="{FF2B5EF4-FFF2-40B4-BE49-F238E27FC236}">
-                <a16:creationId xmlns:a16="http://schemas.microsoft.com/office/drawing/2014/main" id="{BC574603-CD4F-4878-9F06-436D548D1526}"/>
+                <a16:creationId xmlns:a16="http://schemas.microsoft.com/office/drawing/2014/main" id="{D9AF9379-0AB7-40FC-BFAF-325176256E46}"/>
               </a:ext>
             </a:extLst>
           </p:cNvPr>
@@ -4361,7 +4361,7 @@
           <p:cNvPr id="4" name="title-ClassPilot closes the loop from prompt to submission.">
             <a:extLst xmlns:a="http://schemas.openxmlformats.org/drawingml/2006/main">
               <a:ext uri="{FF2B5EF4-FFF2-40B4-BE49-F238E27FC236}">
-                <a16:creationId xmlns:a16="http://schemas.microsoft.com/office/drawing/2014/main" id="{63DCCB33-9F37-4BDD-92A5-AB6526022D0D}"/>
+                <a16:creationId xmlns:a16="http://schemas.microsoft.com/office/drawing/2014/main" id="{7EB0AAA5-2C3E-423E-922F-985C13B0EBE0}"/>
               </a:ext>
             </a:extLst>
           </p:cNvPr>
@@ -4411,7 +4411,7 @@
           <p:cNvPr id="5" name="subtitle-ClassPilot closes the loop from prompt to submission.">
             <a:extLst xmlns:a="http://schemas.openxmlformats.org/drawingml/2006/main">
               <a:ext uri="{FF2B5EF4-FFF2-40B4-BE49-F238E27FC236}">
-                <a16:creationId xmlns:a16="http://schemas.microsoft.com/office/drawing/2014/main" id="{70166D9B-9AED-49F6-BED2-DCF36EFE96DE}"/>
+                <a16:creationId xmlns:a16="http://schemas.microsoft.com/office/drawing/2014/main" id="{F1AE8BE5-4D6D-4775-A100-0793E8CA9F9C}"/>
               </a:ext>
             </a:extLst>
           </p:cNvPr>
@@ -4461,7 +4461,7 @@
           <p:cNvPr id="6" name="loop-node-0">
             <a:extLst xmlns:a="http://schemas.openxmlformats.org/drawingml/2006/main">
               <a:ext uri="{FF2B5EF4-FFF2-40B4-BE49-F238E27FC236}">
-                <a16:creationId xmlns:a16="http://schemas.microsoft.com/office/drawing/2014/main" id="{438807E0-950F-420B-B613-385554BB8A0E}"/>
+                <a16:creationId xmlns:a16="http://schemas.microsoft.com/office/drawing/2014/main" id="{3A21CBE7-04C2-40C6-A1D8-08932C9E1004}"/>
               </a:ext>
             </a:extLst>
           </p:cNvPr>
@@ -4494,7 +4494,7 @@
           <p:cNvPr id="7" name="loop-number-0">
             <a:extLst xmlns:a="http://schemas.openxmlformats.org/drawingml/2006/main">
               <a:ext uri="{FF2B5EF4-FFF2-40B4-BE49-F238E27FC236}">
-                <a16:creationId xmlns:a16="http://schemas.microsoft.com/office/drawing/2014/main" id="{E37299C4-FC37-4AD1-AC47-64A6E281D1FD}"/>
+                <a16:creationId xmlns:a16="http://schemas.microsoft.com/office/drawing/2014/main" id="{A9BCD19A-9529-4EA8-8DBE-EF5C6B3CBCD2}"/>
               </a:ext>
             </a:extLst>
           </p:cNvPr>
@@ -4544,7 +4544,7 @@
           <p:cNvPr id="8" name="loop-title-0">
             <a:extLst xmlns:a="http://schemas.openxmlformats.org/drawingml/2006/main">
               <a:ext uri="{FF2B5EF4-FFF2-40B4-BE49-F238E27FC236}">
-                <a16:creationId xmlns:a16="http://schemas.microsoft.com/office/drawing/2014/main" id="{29592C90-1112-4E57-8870-C1B5BA3B3612}"/>
+                <a16:creationId xmlns:a16="http://schemas.microsoft.com/office/drawing/2014/main" id="{CBC5FE59-7013-4773-B02E-C26CF95E2065}"/>
               </a:ext>
             </a:extLst>
           </p:cNvPr>
@@ -4594,7 +4594,7 @@
           <p:cNvPr id="9" name="loop-body-0">
             <a:extLst xmlns:a="http://schemas.openxmlformats.org/drawingml/2006/main">
               <a:ext uri="{FF2B5EF4-FFF2-40B4-BE49-F238E27FC236}">
-                <a16:creationId xmlns:a16="http://schemas.microsoft.com/office/drawing/2014/main" id="{9216B843-1EA8-4EEF-B2EE-55A575FC30FC}"/>
+                <a16:creationId xmlns:a16="http://schemas.microsoft.com/office/drawing/2014/main" id="{9E4E3E7F-C84F-4EFA-9B9E-73860DE25F14}"/>
               </a:ext>
             </a:extLst>
           </p:cNvPr>
@@ -4644,7 +4644,7 @@
           <p:cNvPr id="10" name="rule-102-298">
             <a:extLst xmlns:a="http://schemas.openxmlformats.org/drawingml/2006/main">
               <a:ext uri="{FF2B5EF4-FFF2-40B4-BE49-F238E27FC236}">
-                <a16:creationId xmlns:a16="http://schemas.microsoft.com/office/drawing/2014/main" id="{4D054A14-B07B-42EF-9380-9AC64416CFE7}"/>
+                <a16:creationId xmlns:a16="http://schemas.microsoft.com/office/drawing/2014/main" id="{88CD023E-9A2A-4CB2-9BFD-8D45AB474AEE}"/>
               </a:ext>
             </a:extLst>
           </p:cNvPr>
@@ -4675,7 +4675,7 @@
           <p:cNvPr id="11" name="loop-arrow-0">
             <a:extLst xmlns:a="http://schemas.openxmlformats.org/drawingml/2006/main">
               <a:ext uri="{FF2B5EF4-FFF2-40B4-BE49-F238E27FC236}">
-                <a16:creationId xmlns:a16="http://schemas.microsoft.com/office/drawing/2014/main" id="{80851DCD-B753-40EA-AD36-B00D74B0D565}"/>
+                <a16:creationId xmlns:a16="http://schemas.microsoft.com/office/drawing/2014/main" id="{549ACD5E-4D01-49FB-B4D0-7AAE9D67F09B}"/>
               </a:ext>
             </a:extLst>
           </p:cNvPr>
@@ -4708,7 +4708,7 @@
           <p:cNvPr id="12" name="loop-node-1">
             <a:extLst xmlns:a="http://schemas.openxmlformats.org/drawingml/2006/main">
               <a:ext uri="{FF2B5EF4-FFF2-40B4-BE49-F238E27FC236}">
-                <a16:creationId xmlns:a16="http://schemas.microsoft.com/office/drawing/2014/main" id="{870032A0-EBBD-4574-88AA-BEBA55FAC691}"/>
+                <a16:creationId xmlns:a16="http://schemas.microsoft.com/office/drawing/2014/main" id="{F9B38F63-696D-4D61-89F2-E2A18CC4B13A}"/>
               </a:ext>
             </a:extLst>
           </p:cNvPr>
@@ -4741,7 +4741,7 @@
           <p:cNvPr id="13" name="loop-number-1">
             <a:extLst xmlns:a="http://schemas.openxmlformats.org/drawingml/2006/main">
               <a:ext uri="{FF2B5EF4-FFF2-40B4-BE49-F238E27FC236}">
-                <a16:creationId xmlns:a16="http://schemas.microsoft.com/office/drawing/2014/main" id="{230D45B3-0E0E-431B-A2FF-80D0D7A2554A}"/>
+                <a16:creationId xmlns:a16="http://schemas.microsoft.com/office/drawing/2014/main" id="{CCF244A5-BD1F-400F-B4C7-00B0326BBC38}"/>
               </a:ext>
             </a:extLst>
           </p:cNvPr>
@@ -4791,7 +4791,7 @@
           <p:cNvPr id="14" name="loop-title-1">
             <a:extLst xmlns:a="http://schemas.openxmlformats.org/drawingml/2006/main">
               <a:ext uri="{FF2B5EF4-FFF2-40B4-BE49-F238E27FC236}">
-                <a16:creationId xmlns:a16="http://schemas.microsoft.com/office/drawing/2014/main" id="{944A51C6-1FAE-473B-BB1C-1230B7693DE0}"/>
+                <a16:creationId xmlns:a16="http://schemas.microsoft.com/office/drawing/2014/main" id="{94DDAD09-0AB4-4B4F-B7E5-7766FD83D8F0}"/>
               </a:ext>
             </a:extLst>
           </p:cNvPr>
@@ -4841,7 +4841,7 @@
           <p:cNvPr id="15" name="loop-body-1">
             <a:extLst xmlns:a="http://schemas.openxmlformats.org/drawingml/2006/main">
               <a:ext uri="{FF2B5EF4-FFF2-40B4-BE49-F238E27FC236}">
-                <a16:creationId xmlns:a16="http://schemas.microsoft.com/office/drawing/2014/main" id="{75D3B1F8-AE77-4CA2-ABAA-8BAD8482A474}"/>
+                <a16:creationId xmlns:a16="http://schemas.microsoft.com/office/drawing/2014/main" id="{76B5FA40-70E2-4D58-8CEB-BE26041E0D08}"/>
               </a:ext>
             </a:extLst>
           </p:cNvPr>
@@ -4891,7 +4891,7 @@
           <p:cNvPr id="16" name="rule-300-298">
             <a:extLst xmlns:a="http://schemas.openxmlformats.org/drawingml/2006/main">
               <a:ext uri="{FF2B5EF4-FFF2-40B4-BE49-F238E27FC236}">
-                <a16:creationId xmlns:a16="http://schemas.microsoft.com/office/drawing/2014/main" id="{F00F7828-EBC2-443D-85BF-F85F4FFEA11B}"/>
+                <a16:creationId xmlns:a16="http://schemas.microsoft.com/office/drawing/2014/main" id="{E9BAEA6C-C249-40E4-8FD8-E6AA019064B7}"/>
               </a:ext>
             </a:extLst>
           </p:cNvPr>
@@ -4922,7 +4922,7 @@
           <p:cNvPr id="17" name="loop-arrow-1">
             <a:extLst xmlns:a="http://schemas.openxmlformats.org/drawingml/2006/main">
               <a:ext uri="{FF2B5EF4-FFF2-40B4-BE49-F238E27FC236}">
-                <a16:creationId xmlns:a16="http://schemas.microsoft.com/office/drawing/2014/main" id="{E79B337C-F218-4791-8532-677C5856D689}"/>
+                <a16:creationId xmlns:a16="http://schemas.microsoft.com/office/drawing/2014/main" id="{9048AFD8-3D4A-4658-A57B-EA1AFBE07AB7}"/>
               </a:ext>
             </a:extLst>
           </p:cNvPr>
@@ -4955,7 +4955,7 @@
           <p:cNvPr id="18" name="loop-node-2">
             <a:extLst xmlns:a="http://schemas.openxmlformats.org/drawingml/2006/main">
               <a:ext uri="{FF2B5EF4-FFF2-40B4-BE49-F238E27FC236}">
-                <a16:creationId xmlns:a16="http://schemas.microsoft.com/office/drawing/2014/main" id="{1BF53103-1534-46BE-96B6-326756C2B604}"/>
+                <a16:creationId xmlns:a16="http://schemas.microsoft.com/office/drawing/2014/main" id="{E0E7D696-26FB-4F2B-9152-11CAA3319C31}"/>
               </a:ext>
             </a:extLst>
           </p:cNvPr>
@@ -4988,7 +4988,7 @@
           <p:cNvPr id="19" name="loop-number-2">
             <a:extLst xmlns:a="http://schemas.openxmlformats.org/drawingml/2006/main">
               <a:ext uri="{FF2B5EF4-FFF2-40B4-BE49-F238E27FC236}">
-                <a16:creationId xmlns:a16="http://schemas.microsoft.com/office/drawing/2014/main" id="{297A2C56-C6A8-4653-B9DB-972AF8CA928E}"/>
+                <a16:creationId xmlns:a16="http://schemas.microsoft.com/office/drawing/2014/main" id="{5E725DC9-DD14-4F1C-B9A3-3EC169B4C036}"/>
               </a:ext>
             </a:extLst>
           </p:cNvPr>
@@ -5038,7 +5038,7 @@
           <p:cNvPr id="20" name="loop-title-2">
             <a:extLst xmlns:a="http://schemas.openxmlformats.org/drawingml/2006/main">
               <a:ext uri="{FF2B5EF4-FFF2-40B4-BE49-F238E27FC236}">
-                <a16:creationId xmlns:a16="http://schemas.microsoft.com/office/drawing/2014/main" id="{54F26BED-6368-4A91-96C8-9746F3C6EE59}"/>
+                <a16:creationId xmlns:a16="http://schemas.microsoft.com/office/drawing/2014/main" id="{B4DF27B9-C433-4C18-8833-C0BE6FCED271}"/>
               </a:ext>
             </a:extLst>
           </p:cNvPr>
@@ -5088,7 +5088,7 @@
           <p:cNvPr id="21" name="loop-body-2">
             <a:extLst xmlns:a="http://schemas.openxmlformats.org/drawingml/2006/main">
               <a:ext uri="{FF2B5EF4-FFF2-40B4-BE49-F238E27FC236}">
-                <a16:creationId xmlns:a16="http://schemas.microsoft.com/office/drawing/2014/main" id="{057D5EA6-10C5-49BF-B2E7-D98C27020C3C}"/>
+                <a16:creationId xmlns:a16="http://schemas.microsoft.com/office/drawing/2014/main" id="{7E495C71-E70F-410F-9BF4-DD3595D54046}"/>
               </a:ext>
             </a:extLst>
           </p:cNvPr>
@@ -5138,7 +5138,7 @@
           <p:cNvPr id="22" name="rule-498-298">
             <a:extLst xmlns:a="http://schemas.openxmlformats.org/drawingml/2006/main">
               <a:ext uri="{FF2B5EF4-FFF2-40B4-BE49-F238E27FC236}">
-                <a16:creationId xmlns:a16="http://schemas.microsoft.com/office/drawing/2014/main" id="{A5AAE025-A7E7-40E7-BE3C-C874CA8635F3}"/>
+                <a16:creationId xmlns:a16="http://schemas.microsoft.com/office/drawing/2014/main" id="{132C7B25-93D7-4682-82CF-AE0E4C214DA1}"/>
               </a:ext>
             </a:extLst>
           </p:cNvPr>
@@ -5169,7 +5169,7 @@
           <p:cNvPr id="23" name="loop-arrow-2">
             <a:extLst xmlns:a="http://schemas.openxmlformats.org/drawingml/2006/main">
               <a:ext uri="{FF2B5EF4-FFF2-40B4-BE49-F238E27FC236}">
-                <a16:creationId xmlns:a16="http://schemas.microsoft.com/office/drawing/2014/main" id="{0CE733CC-5F27-4463-97AC-FBAFD0042D04}"/>
+                <a16:creationId xmlns:a16="http://schemas.microsoft.com/office/drawing/2014/main" id="{E9DAE346-D3A7-4A2C-BA93-94EFCBBEB728}"/>
               </a:ext>
             </a:extLst>
           </p:cNvPr>
@@ -5202,7 +5202,7 @@
           <p:cNvPr id="24" name="loop-node-3">
             <a:extLst xmlns:a="http://schemas.openxmlformats.org/drawingml/2006/main">
               <a:ext uri="{FF2B5EF4-FFF2-40B4-BE49-F238E27FC236}">
-                <a16:creationId xmlns:a16="http://schemas.microsoft.com/office/drawing/2014/main" id="{2D0C4F7F-0DC3-42DD-A785-3C750CF0D418}"/>
+                <a16:creationId xmlns:a16="http://schemas.microsoft.com/office/drawing/2014/main" id="{F33314E0-3792-4257-A991-F7698D14B7F4}"/>
               </a:ext>
             </a:extLst>
           </p:cNvPr>
@@ -5235,7 +5235,7 @@
           <p:cNvPr id="25" name="loop-number-3">
             <a:extLst xmlns:a="http://schemas.openxmlformats.org/drawingml/2006/main">
               <a:ext uri="{FF2B5EF4-FFF2-40B4-BE49-F238E27FC236}">
-                <a16:creationId xmlns:a16="http://schemas.microsoft.com/office/drawing/2014/main" id="{3404F5B8-7F0F-480D-82E0-B9B8277ACBCC}"/>
+                <a16:creationId xmlns:a16="http://schemas.microsoft.com/office/drawing/2014/main" id="{266CD194-9858-458E-9745-3A7569DC07E4}"/>
               </a:ext>
             </a:extLst>
           </p:cNvPr>
@@ -5285,7 +5285,7 @@
           <p:cNvPr id="26" name="loop-title-3">
             <a:extLst xmlns:a="http://schemas.openxmlformats.org/drawingml/2006/main">
               <a:ext uri="{FF2B5EF4-FFF2-40B4-BE49-F238E27FC236}">
-                <a16:creationId xmlns:a16="http://schemas.microsoft.com/office/drawing/2014/main" id="{DA9BD617-B6ED-49F9-B38B-FA4830826730}"/>
+                <a16:creationId xmlns:a16="http://schemas.microsoft.com/office/drawing/2014/main" id="{6F9734C2-8E9E-4FCF-BF30-794FE5A95A23}"/>
               </a:ext>
             </a:extLst>
           </p:cNvPr>
@@ -5335,7 +5335,7 @@
           <p:cNvPr id="27" name="loop-body-3">
             <a:extLst xmlns:a="http://schemas.openxmlformats.org/drawingml/2006/main">
               <a:ext uri="{FF2B5EF4-FFF2-40B4-BE49-F238E27FC236}">
-                <a16:creationId xmlns:a16="http://schemas.microsoft.com/office/drawing/2014/main" id="{9595BCEA-C917-4935-BB19-2D63BA837EF7}"/>
+                <a16:creationId xmlns:a16="http://schemas.microsoft.com/office/drawing/2014/main" id="{C4E97178-38DA-475E-8C9A-60FE39A195C6}"/>
               </a:ext>
             </a:extLst>
           </p:cNvPr>
@@ -5385,7 +5385,7 @@
           <p:cNvPr id="28" name="rule-696-298">
             <a:extLst xmlns:a="http://schemas.openxmlformats.org/drawingml/2006/main">
               <a:ext uri="{FF2B5EF4-FFF2-40B4-BE49-F238E27FC236}">
-                <a16:creationId xmlns:a16="http://schemas.microsoft.com/office/drawing/2014/main" id="{9868B865-36F1-4228-AC66-9F3DCCC5DAED}"/>
+                <a16:creationId xmlns:a16="http://schemas.microsoft.com/office/drawing/2014/main" id="{290ACDB7-65AF-410F-9CBC-051959FA6E7E}"/>
               </a:ext>
             </a:extLst>
           </p:cNvPr>
@@ -5416,7 +5416,7 @@
           <p:cNvPr id="29" name="loop-arrow-3">
             <a:extLst xmlns:a="http://schemas.openxmlformats.org/drawingml/2006/main">
               <a:ext uri="{FF2B5EF4-FFF2-40B4-BE49-F238E27FC236}">
-                <a16:creationId xmlns:a16="http://schemas.microsoft.com/office/drawing/2014/main" id="{2DC85590-43F2-4A8D-8F08-7ABB59150CD7}"/>
+                <a16:creationId xmlns:a16="http://schemas.microsoft.com/office/drawing/2014/main" id="{EFF8C2E9-CF0A-4159-A62B-B480B56C3872}"/>
               </a:ext>
             </a:extLst>
           </p:cNvPr>
@@ -5449,7 +5449,7 @@
           <p:cNvPr id="30" name="loop-node-4">
             <a:extLst xmlns:a="http://schemas.openxmlformats.org/drawingml/2006/main">
               <a:ext uri="{FF2B5EF4-FFF2-40B4-BE49-F238E27FC236}">
-                <a16:creationId xmlns:a16="http://schemas.microsoft.com/office/drawing/2014/main" id="{92B9E6EC-6654-420A-8245-F706AF743333}"/>
+                <a16:creationId xmlns:a16="http://schemas.microsoft.com/office/drawing/2014/main" id="{4B752079-49B4-49ED-94A9-D95F2763E02A}"/>
               </a:ext>
             </a:extLst>
           </p:cNvPr>
@@ -5482,7 +5482,7 @@
           <p:cNvPr id="31" name="loop-number-4">
             <a:extLst xmlns:a="http://schemas.openxmlformats.org/drawingml/2006/main">
               <a:ext uri="{FF2B5EF4-FFF2-40B4-BE49-F238E27FC236}">
-                <a16:creationId xmlns:a16="http://schemas.microsoft.com/office/drawing/2014/main" id="{CA87C956-9EE0-4FD0-940A-E1FA0C9048EE}"/>
+                <a16:creationId xmlns:a16="http://schemas.microsoft.com/office/drawing/2014/main" id="{7D22B758-0608-4E00-9943-CF24D5BDC685}"/>
               </a:ext>
             </a:extLst>
           </p:cNvPr>
@@ -5532,7 +5532,7 @@
           <p:cNvPr id="32" name="loop-title-4">
             <a:extLst xmlns:a="http://schemas.openxmlformats.org/drawingml/2006/main">
               <a:ext uri="{FF2B5EF4-FFF2-40B4-BE49-F238E27FC236}">
-                <a16:creationId xmlns:a16="http://schemas.microsoft.com/office/drawing/2014/main" id="{CF7005D1-7A3B-47D5-8622-BD335C33A90F}"/>
+                <a16:creationId xmlns:a16="http://schemas.microsoft.com/office/drawing/2014/main" id="{540394E3-9FBC-42F1-9688-3D0013038098}"/>
               </a:ext>
             </a:extLst>
           </p:cNvPr>
@@ -5582,7 +5582,7 @@
           <p:cNvPr id="33" name="loop-body-4">
             <a:extLst xmlns:a="http://schemas.openxmlformats.org/drawingml/2006/main">
               <a:ext uri="{FF2B5EF4-FFF2-40B4-BE49-F238E27FC236}">
-                <a16:creationId xmlns:a16="http://schemas.microsoft.com/office/drawing/2014/main" id="{34EA7839-A276-42E3-B208-6711543A6BF5}"/>
+                <a16:creationId xmlns:a16="http://schemas.microsoft.com/office/drawing/2014/main" id="{092EA5D1-CAAD-4A28-AF7B-8F6765ED9EAE}"/>
               </a:ext>
             </a:extLst>
           </p:cNvPr>
@@ -5632,7 +5632,7 @@
           <p:cNvPr id="34" name="rule-894-298">
             <a:extLst xmlns:a="http://schemas.openxmlformats.org/drawingml/2006/main">
               <a:ext uri="{FF2B5EF4-FFF2-40B4-BE49-F238E27FC236}">
-                <a16:creationId xmlns:a16="http://schemas.microsoft.com/office/drawing/2014/main" id="{EA4BB8B1-0A58-4140-B61D-6C2F002C2DB5}"/>
+                <a16:creationId xmlns:a16="http://schemas.microsoft.com/office/drawing/2014/main" id="{97F668DC-48D9-4763-B8BD-447E026D2AEE}"/>
               </a:ext>
             </a:extLst>
           </p:cNvPr>
@@ -5663,7 +5663,7 @@
           <p:cNvPr id="35" name="loop-arrow-4">
             <a:extLst xmlns:a="http://schemas.openxmlformats.org/drawingml/2006/main">
               <a:ext uri="{FF2B5EF4-FFF2-40B4-BE49-F238E27FC236}">
-                <a16:creationId xmlns:a16="http://schemas.microsoft.com/office/drawing/2014/main" id="{E814C3FC-1F20-457E-89D6-29C9379A6264}"/>
+                <a16:creationId xmlns:a16="http://schemas.microsoft.com/office/drawing/2014/main" id="{E64F245C-34F5-447A-84A8-074C67F06B29}"/>
               </a:ext>
             </a:extLst>
           </p:cNvPr>
@@ -5696,7 +5696,7 @@
           <p:cNvPr id="36" name="loop-node-5">
             <a:extLst xmlns:a="http://schemas.openxmlformats.org/drawingml/2006/main">
               <a:ext uri="{FF2B5EF4-FFF2-40B4-BE49-F238E27FC236}">
-                <a16:creationId xmlns:a16="http://schemas.microsoft.com/office/drawing/2014/main" id="{4473E7D6-EA70-4AB8-8E76-088709FFDC0D}"/>
+                <a16:creationId xmlns:a16="http://schemas.microsoft.com/office/drawing/2014/main" id="{88B0AC93-C2B5-4728-A90D-DF0E1EB67239}"/>
               </a:ext>
             </a:extLst>
           </p:cNvPr>
@@ -5729,7 +5729,7 @@
           <p:cNvPr id="37" name="loop-number-5">
             <a:extLst xmlns:a="http://schemas.openxmlformats.org/drawingml/2006/main">
               <a:ext uri="{FF2B5EF4-FFF2-40B4-BE49-F238E27FC236}">
-                <a16:creationId xmlns:a16="http://schemas.microsoft.com/office/drawing/2014/main" id="{D4B470F4-E577-4EE5-B12A-13D91FF2F5C2}"/>
+                <a16:creationId xmlns:a16="http://schemas.microsoft.com/office/drawing/2014/main" id="{D4495106-C223-497A-82E8-54891319689B}"/>
               </a:ext>
             </a:extLst>
           </p:cNvPr>
@@ -5779,7 +5779,7 @@
           <p:cNvPr id="38" name="loop-title-5">
             <a:extLst xmlns:a="http://schemas.openxmlformats.org/drawingml/2006/main">
               <a:ext uri="{FF2B5EF4-FFF2-40B4-BE49-F238E27FC236}">
-                <a16:creationId xmlns:a16="http://schemas.microsoft.com/office/drawing/2014/main" id="{B96D63F0-D949-41C3-B6E4-D010B425FA60}"/>
+                <a16:creationId xmlns:a16="http://schemas.microsoft.com/office/drawing/2014/main" id="{676055F1-6D9D-4DDB-84FE-F06D1440D58E}"/>
               </a:ext>
             </a:extLst>
           </p:cNvPr>
@@ -5829,7 +5829,7 @@
           <p:cNvPr id="39" name="loop-body-5">
             <a:extLst xmlns:a="http://schemas.openxmlformats.org/drawingml/2006/main">
               <a:ext uri="{FF2B5EF4-FFF2-40B4-BE49-F238E27FC236}">
-                <a16:creationId xmlns:a16="http://schemas.microsoft.com/office/drawing/2014/main" id="{1718CBF2-3B5C-46A9-B0C7-8663C7032158}"/>
+                <a16:creationId xmlns:a16="http://schemas.microsoft.com/office/drawing/2014/main" id="{DD97A5F1-B52D-4603-963F-36344559CC63}"/>
               </a:ext>
             </a:extLst>
           </p:cNvPr>
@@ -5879,7 +5879,7 @@
           <p:cNvPr id="40" name="loop-result-band">
             <a:extLst xmlns:a="http://schemas.openxmlformats.org/drawingml/2006/main">
               <a:ext uri="{FF2B5EF4-FFF2-40B4-BE49-F238E27FC236}">
-                <a16:creationId xmlns:a16="http://schemas.microsoft.com/office/drawing/2014/main" id="{106E4FDB-5A46-4F48-8C8F-887A99668FBB}"/>
+                <a16:creationId xmlns:a16="http://schemas.microsoft.com/office/drawing/2014/main" id="{0FD10546-0326-4D6E-82EF-CADBA32C528C}"/>
               </a:ext>
             </a:extLst>
           </p:cNvPr>
@@ -5914,7 +5914,7 @@
           <p:cNvPr id="41" name="loop-result">
             <a:extLst xmlns:a="http://schemas.openxmlformats.org/drawingml/2006/main">
               <a:ext uri="{FF2B5EF4-FFF2-40B4-BE49-F238E27FC236}">
-                <a16:creationId xmlns:a16="http://schemas.microsoft.com/office/drawing/2014/main" id="{4199F23C-3BBE-40CB-B8AB-9FDEC043E258}"/>
+                <a16:creationId xmlns:a16="http://schemas.microsoft.com/office/drawing/2014/main" id="{48453A52-3F26-43AF-BDEC-92399F37BFF4}"/>
               </a:ext>
             </a:extLst>
           </p:cNvPr>
@@ -5962,7 +5962,7 @@
     </p:spTree>
     <p:extLst>
       <p:ext uri="{BB962C8B-B14F-4D97-AF65-F5344CB8AC3E}">
-        <p14:creationId xmlns:p14="http://schemas.microsoft.com/office/powerpoint/2010/main" val="1008414837"/>
+        <p14:creationId xmlns:p14="http://schemas.microsoft.com/office/powerpoint/2010/main" val="252197258"/>
       </p:ext>
     </p:extLst>
   </p:cSld>
@@ -5993,7 +5993,7 @@
           <p:cNvPr id="16" name="section-5">
             <a:extLst xmlns:a="http://schemas.openxmlformats.org/drawingml/2006/main">
               <a:ext uri="{FF2B5EF4-FFF2-40B4-BE49-F238E27FC236}">
-                <a16:creationId xmlns:a16="http://schemas.microsoft.com/office/drawing/2014/main" id="{D6A7C937-E0AE-4E24-8BF6-E3F2EFB3F36B}"/>
+                <a16:creationId xmlns:a16="http://schemas.microsoft.com/office/drawing/2014/main" id="{2BD6497E-89C5-4319-8AC6-611C2C6B950D}"/>
               </a:ext>
             </a:extLst>
           </p:cNvPr>
@@ -6043,7 +6043,7 @@
           <p:cNvPr id="2" name="page-5">
             <a:extLst xmlns:a="http://schemas.openxmlformats.org/drawingml/2006/main">
               <a:ext uri="{FF2B5EF4-FFF2-40B4-BE49-F238E27FC236}">
-                <a16:creationId xmlns:a16="http://schemas.microsoft.com/office/drawing/2014/main" id="{73BCE469-9293-49F9-B901-3C30E7C14026}"/>
+                <a16:creationId xmlns:a16="http://schemas.microsoft.com/office/drawing/2014/main" id="{64BC4DFB-E00C-4191-B523-0CAB28DBC0D1}"/>
               </a:ext>
             </a:extLst>
           </p:cNvPr>
@@ -6093,7 +6093,7 @@
           <p:cNvPr id="3" name="rule-48-66">
             <a:extLst xmlns:a="http://schemas.openxmlformats.org/drawingml/2006/main">
               <a:ext uri="{FF2B5EF4-FFF2-40B4-BE49-F238E27FC236}">
-                <a16:creationId xmlns:a16="http://schemas.microsoft.com/office/drawing/2014/main" id="{34E6F6F9-A353-4465-B15D-F7CAB53ED3A5}"/>
+                <a16:creationId xmlns:a16="http://schemas.microsoft.com/office/drawing/2014/main" id="{AC03248E-B3A9-4D40-9556-2DA4DA674D2E}"/>
               </a:ext>
             </a:extLst>
           </p:cNvPr>
@@ -6121,10 +6121,10 @@
       </p:sp>
       <p:sp>
         <p:nvSpPr>
-          <p:cNvPr id="4" name="title-The Coach is a real multi-turn conversation.">
-            <a:extLst xmlns:a="http://schemas.openxmlformats.org/drawingml/2006/main">
-              <a:ext uri="{FF2B5EF4-FFF2-40B4-BE49-F238E27FC236}">
-                <a16:creationId xmlns:a16="http://schemas.microsoft.com/office/drawing/2014/main" id="{58C42D70-B350-4AB5-B4E3-9CDBD7AD5E34}"/>
+          <p:cNvPr id="4" name="title-The Coach gives one step, then waits.">
+            <a:extLst xmlns:a="http://schemas.openxmlformats.org/drawingml/2006/main">
+              <a:ext uri="{FF2B5EF4-FFF2-40B4-BE49-F238E27FC236}">
+                <a16:creationId xmlns:a16="http://schemas.microsoft.com/office/drawing/2014/main" id="{6ACEF70B-57B1-43DC-8EA1-10AA33361B1A}"/>
               </a:ext>
             </a:extLst>
           </p:cNvPr>
@@ -6164,17 +6164,17 @@
                   <a:srgbClr val="141C22"/>
                 </a:solidFill>
               </a:rPr>
-              <a:t>The Coach is a real multi-turn conversation.</a:t>
-            </a:r>
-          </a:p>
-        </p:txBody>
-      </p:sp>
-      <p:sp>
-        <p:nvSpPr>
-          <p:cNvPr id="5" name="subtitle-The Coach is a real multi-turn conversation.">
-            <a:extLst xmlns:a="http://schemas.openxmlformats.org/drawingml/2006/main">
-              <a:ext uri="{FF2B5EF4-FFF2-40B4-BE49-F238E27FC236}">
-                <a16:creationId xmlns:a16="http://schemas.microsoft.com/office/drawing/2014/main" id="{8BD3A010-2F8A-4C3C-9815-5DB4EA1C3A42}"/>
+              <a:t>The Coach gives one step, then waits.</a:t>
+            </a:r>
+          </a:p>
+        </p:txBody>
+      </p:sp>
+      <p:sp>
+        <p:nvSpPr>
+          <p:cNvPr id="5" name="subtitle-The Coach gives one step, then waits.">
+            <a:extLst xmlns:a="http://schemas.openxmlformats.org/drawingml/2006/main">
+              <a:ext uri="{FF2B5EF4-FFF2-40B4-BE49-F238E27FC236}">
+                <a16:creationId xmlns:a16="http://schemas.microsoft.com/office/drawing/2014/main" id="{9D5B4C67-7F0D-494B-A363-542111335C6A}"/>
               </a:ext>
             </a:extLst>
           </p:cNvPr>
@@ -6214,7 +6214,7 @@
                   <a:srgbClr val="647078"/>
                 </a:solidFill>
               </a:rPr>
-              <a:t>Students can ask a question, challenge the answer, request a plan, and act on the next steps without leaving the assignment.</a:t>
+              <a:t>Students can start, continue, get unstuck, or test an idea without receiving a generic plan or a finished answer.</a:t>
             </a:r>
           </a:p>
         </p:txBody>
@@ -6224,7 +6224,7 @@
           <p:cNvPr id="6" name="coach-screen-frame">
             <a:extLst xmlns:a="http://schemas.openxmlformats.org/drawingml/2006/main">
               <a:ext uri="{FF2B5EF4-FFF2-40B4-BE49-F238E27FC236}">
-                <a16:creationId xmlns:a16="http://schemas.microsoft.com/office/drawing/2014/main" id="{A799AC5B-9B38-44A8-B2C8-FDCF013F893B}"/>
+                <a16:creationId xmlns:a16="http://schemas.microsoft.com/office/drawing/2014/main" id="{9722DD13-DEB5-4F3A-9786-D16D3EC289EF}"/>
               </a:ext>
             </a:extLst>
           </p:cNvPr>
@@ -6263,8 +6263,8 @@
           <p:nvPr/>
         </p:nvPicPr>
         <p:blipFill>
-          <a:blip xmlns:r="http://schemas.openxmlformats.org/officeDocument/2006/relationships" xmlns:a="http://schemas.openxmlformats.org/drawingml/2006/main" r:embed="R130e1cb852ff49fe"/>
-          <a:srcRect xmlns:a="http://schemas.openxmlformats.org/drawingml/2006/main" l="0" t="10874" r="0" b="10874"/>
+          <a:blip xmlns:r="http://schemas.openxmlformats.org/officeDocument/2006/relationships" xmlns:a="http://schemas.openxmlformats.org/drawingml/2006/main" r:embed="Rd8fc379cbe1d4275"/>
+          <a:srcRect xmlns:a="http://schemas.openxmlformats.org/drawingml/2006/main" l="0" t="6527" r="0" b="6527"/>
           <a:stretch xmlns:a="http://schemas.openxmlformats.org/drawingml/2006/main">
             <a:fillRect l="0" t="0" r="0" b="0"/>
           </a:stretch>
@@ -6286,7 +6286,7 @@
           <p:cNvPr id="8" name="coach-label-0">
             <a:extLst xmlns:a="http://schemas.openxmlformats.org/drawingml/2006/main">
               <a:ext uri="{FF2B5EF4-FFF2-40B4-BE49-F238E27FC236}">
-                <a16:creationId xmlns:a16="http://schemas.microsoft.com/office/drawing/2014/main" id="{C3A4ACB2-2B8D-4B45-9780-691F2C568C46}"/>
+                <a16:creationId xmlns:a16="http://schemas.microsoft.com/office/drawing/2014/main" id="{24DC8C12-00E9-4615-9F38-CFCDA5A7E0B0}"/>
               </a:ext>
             </a:extLst>
           </p:cNvPr>
@@ -6326,7 +6326,7 @@
                   <a:srgbClr val="2F7D74"/>
                 </a:solidFill>
               </a:rPr>
-              <a:t>FOLLOW UP</a:t>
+              <a:t>ADAPT</a:t>
             </a:r>
           </a:p>
         </p:txBody>
@@ -6336,7 +6336,7 @@
           <p:cNvPr id="9" name="coach-copy-0">
             <a:extLst xmlns:a="http://schemas.openxmlformats.org/drawingml/2006/main">
               <a:ext uri="{FF2B5EF4-FFF2-40B4-BE49-F238E27FC236}">
-                <a16:creationId xmlns:a16="http://schemas.microsoft.com/office/drawing/2014/main" id="{4B027DEB-DA4A-4829-AEDB-50C568344DC6}"/>
+                <a16:creationId xmlns:a16="http://schemas.microsoft.com/office/drawing/2014/main" id="{331608B7-E49F-4967-9BFC-D85100AC2509}"/>
               </a:ext>
             </a:extLst>
           </p:cNvPr>
@@ -6376,7 +6376,7 @@
                   <a:srgbClr val="647078"/>
                 </a:solidFill>
               </a:rPr>
-              <a:t>Conversation history stays scoped to the selected course and assignment.</a:t>
+              <a:t>The next action advances, shrinks, or changes after each student response.</a:t>
             </a:r>
           </a:p>
         </p:txBody>
@@ -6386,7 +6386,7 @@
           <p:cNvPr id="10" name="rule-830-362">
             <a:extLst xmlns:a="http://schemas.openxmlformats.org/drawingml/2006/main">
               <a:ext uri="{FF2B5EF4-FFF2-40B4-BE49-F238E27FC236}">
-                <a16:creationId xmlns:a16="http://schemas.microsoft.com/office/drawing/2014/main" id="{B7D045E8-20F3-440F-AC9F-2494F1A9D7E4}"/>
+                <a16:creationId xmlns:a16="http://schemas.microsoft.com/office/drawing/2014/main" id="{3E18A0A7-A61A-4B00-BABC-5808042C7ECC}"/>
               </a:ext>
             </a:extLst>
           </p:cNvPr>
@@ -6417,7 +6417,7 @@
           <p:cNvPr id="11" name="coach-label-1">
             <a:extLst xmlns:a="http://schemas.openxmlformats.org/drawingml/2006/main">
               <a:ext uri="{FF2B5EF4-FFF2-40B4-BE49-F238E27FC236}">
-                <a16:creationId xmlns:a16="http://schemas.microsoft.com/office/drawing/2014/main" id="{CBA2F5A4-0E3F-4B42-9AEB-58DC73FABCF9}"/>
+                <a16:creationId xmlns:a16="http://schemas.microsoft.com/office/drawing/2014/main" id="{D9456207-5AB8-4D8C-A95E-157A644FF271}"/>
               </a:ext>
             </a:extLst>
           </p:cNvPr>
@@ -6467,7 +6467,7 @@
           <p:cNvPr id="12" name="coach-copy-1">
             <a:extLst xmlns:a="http://schemas.openxmlformats.org/drawingml/2006/main">
               <a:ext uri="{FF2B5EF4-FFF2-40B4-BE49-F238E27FC236}">
-                <a16:creationId xmlns:a16="http://schemas.microsoft.com/office/drawing/2014/main" id="{00A1B16B-E3FC-4CB9-A36C-3D83321EA2EF}"/>
+                <a16:creationId xmlns:a16="http://schemas.microsoft.com/office/drawing/2014/main" id="{FE33BE70-2258-4484-AA30-3CD2BBB82D31}"/>
               </a:ext>
             </a:extLst>
           </p:cNvPr>
@@ -6507,7 +6507,7 @@
                   <a:srgbClr val="647078"/>
                 </a:solidFill>
               </a:rPr>
-              <a:t>Evidence chips point back to exact due dates, requirements, and rubric text.</a:t>
+              <a:t>Evidence chips point back to exact dates, requirements, and rubric text.</a:t>
             </a:r>
           </a:p>
         </p:txBody>
@@ -6517,7 +6517,7 @@
           <p:cNvPr id="13" name="rule-830-486">
             <a:extLst xmlns:a="http://schemas.openxmlformats.org/drawingml/2006/main">
               <a:ext uri="{FF2B5EF4-FFF2-40B4-BE49-F238E27FC236}">
-                <a16:creationId xmlns:a16="http://schemas.microsoft.com/office/drawing/2014/main" id="{83B0F387-77A3-46B5-9EA7-C9B5E0163009}"/>
+                <a16:creationId xmlns:a16="http://schemas.microsoft.com/office/drawing/2014/main" id="{31FBC723-687F-4CB5-B777-2CA984365CBE}"/>
               </a:ext>
             </a:extLst>
           </p:cNvPr>
@@ -6548,7 +6548,7 @@
           <p:cNvPr id="14" name="coach-label-2">
             <a:extLst xmlns:a="http://schemas.openxmlformats.org/drawingml/2006/main">
               <a:ext uri="{FF2B5EF4-FFF2-40B4-BE49-F238E27FC236}">
-                <a16:creationId xmlns:a16="http://schemas.microsoft.com/office/drawing/2014/main" id="{993E66AE-10AA-4265-B8AB-AE761AF0CC42}"/>
+                <a16:creationId xmlns:a16="http://schemas.microsoft.com/office/drawing/2014/main" id="{6CA07AA3-C2EF-4A99-A28C-13A293370101}"/>
               </a:ext>
             </a:extLst>
           </p:cNvPr>
@@ -6588,7 +6588,7 @@
                   <a:srgbClr val="2F7D74"/>
                 </a:solidFill>
               </a:rPr>
-              <a:t>ACT</a:t>
+              <a:t>OWN</a:t>
             </a:r>
           </a:p>
         </p:txBody>
@@ -6598,7 +6598,7 @@
           <p:cNvPr id="15" name="coach-copy-2">
             <a:extLst xmlns:a="http://schemas.openxmlformats.org/drawingml/2006/main">
               <a:ext uri="{FF2B5EF4-FFF2-40B4-BE49-F238E27FC236}">
-                <a16:creationId xmlns:a16="http://schemas.microsoft.com/office/drawing/2014/main" id="{FBF6161E-81B5-4FFD-BDF2-89AA11C7DCE7}"/>
+                <a16:creationId xmlns:a16="http://schemas.microsoft.com/office/drawing/2014/main" id="{5596E9B4-4D0D-45A1-854D-1F15F3043CF1}"/>
               </a:ext>
             </a:extLst>
           </p:cNvPr>
@@ -6638,7 +6638,7 @@
                   <a:srgbClr val="647078"/>
                 </a:solidFill>
               </a:rPr>
-              <a:t>Any suggested next step can be added directly to the assignment checklist.</a:t>
+              <a:t>The Coach protects student authorship and adds its step to the checklist.</a:t>
             </a:r>
           </a:p>
         </p:txBody>
@@ -6646,7 +6646,7 @@
     </p:spTree>
     <p:extLst>
       <p:ext uri="{BB962C8B-B14F-4D97-AF65-F5344CB8AC3E}">
-        <p14:creationId xmlns:p14="http://schemas.microsoft.com/office/powerpoint/2010/main" val="671696357"/>
+        <p14:creationId xmlns:p14="http://schemas.microsoft.com/office/powerpoint/2010/main" val="583151108"/>
       </p:ext>
     </p:extLst>
   </p:cSld>
@@ -6677,7 +6677,7 @@
           <p:cNvPr id="24" name="section-6">
             <a:extLst xmlns:a="http://schemas.openxmlformats.org/drawingml/2006/main">
               <a:ext uri="{FF2B5EF4-FFF2-40B4-BE49-F238E27FC236}">
-                <a16:creationId xmlns:a16="http://schemas.microsoft.com/office/drawing/2014/main" id="{8CB14444-5BF1-458E-B6CA-D714B48815F4}"/>
+                <a16:creationId xmlns:a16="http://schemas.microsoft.com/office/drawing/2014/main" id="{D5E6DB6D-610D-4B61-92D9-655A26706C0A}"/>
               </a:ext>
             </a:extLst>
           </p:cNvPr>
@@ -6727,7 +6727,7 @@
           <p:cNvPr id="2" name="page-6">
             <a:extLst xmlns:a="http://schemas.openxmlformats.org/drawingml/2006/main">
               <a:ext uri="{FF2B5EF4-FFF2-40B4-BE49-F238E27FC236}">
-                <a16:creationId xmlns:a16="http://schemas.microsoft.com/office/drawing/2014/main" id="{B2FD077E-3200-4466-8D6E-C362B7AA7890}"/>
+                <a16:creationId xmlns:a16="http://schemas.microsoft.com/office/drawing/2014/main" id="{0A886CD6-40C5-4F0F-9C44-C355AEA2794C}"/>
               </a:ext>
             </a:extLst>
           </p:cNvPr>
@@ -6777,7 +6777,7 @@
           <p:cNvPr id="3" name="rule-48-66">
             <a:extLst xmlns:a="http://schemas.openxmlformats.org/drawingml/2006/main">
               <a:ext uri="{FF2B5EF4-FFF2-40B4-BE49-F238E27FC236}">
-                <a16:creationId xmlns:a16="http://schemas.microsoft.com/office/drawing/2014/main" id="{85D89935-F0FE-4CE4-81D2-26CA31D1C6A9}"/>
+                <a16:creationId xmlns:a16="http://schemas.microsoft.com/office/drawing/2014/main" id="{C9E0563E-9D71-4954-B499-DE0A1E7EB04F}"/>
               </a:ext>
             </a:extLst>
           </p:cNvPr>
@@ -6808,7 +6808,7 @@
           <p:cNvPr id="4" name="title-Planning and final checks stay connected.">
             <a:extLst xmlns:a="http://schemas.openxmlformats.org/drawingml/2006/main">
               <a:ext uri="{FF2B5EF4-FFF2-40B4-BE49-F238E27FC236}">
-                <a16:creationId xmlns:a16="http://schemas.microsoft.com/office/drawing/2014/main" id="{BA1F6E61-854E-4D9F-8DF0-A550F6C97912}"/>
+                <a16:creationId xmlns:a16="http://schemas.microsoft.com/office/drawing/2014/main" id="{CA988B5F-F07E-43E1-8331-865911240121}"/>
               </a:ext>
             </a:extLst>
           </p:cNvPr>
@@ -6858,7 +6858,7 @@
           <p:cNvPr id="5" name="subtitle-Planning and final checks stay connected.">
             <a:extLst xmlns:a="http://schemas.openxmlformats.org/drawingml/2006/main">
               <a:ext uri="{FF2B5EF4-FFF2-40B4-BE49-F238E27FC236}">
-                <a16:creationId xmlns:a16="http://schemas.microsoft.com/office/drawing/2014/main" id="{46DC5EAE-2D0B-4AE2-856D-CD2D96C26E59}"/>
+                <a16:creationId xmlns:a16="http://schemas.microsoft.com/office/drawing/2014/main" id="{6262FF70-41F6-4B23-8666-3DEF25BD36E6}"/>
               </a:ext>
             </a:extLst>
           </p:cNvPr>
@@ -6908,7 +6908,7 @@
           <p:cNvPr id="6" name="daily-tag-0">
             <a:extLst xmlns:a="http://schemas.openxmlformats.org/drawingml/2006/main">
               <a:ext uri="{FF2B5EF4-FFF2-40B4-BE49-F238E27FC236}">
-                <a16:creationId xmlns:a16="http://schemas.microsoft.com/office/drawing/2014/main" id="{37611E16-AEB6-4943-A058-FA00F8A21D83}"/>
+                <a16:creationId xmlns:a16="http://schemas.microsoft.com/office/drawing/2014/main" id="{94F42046-EE15-4C12-9A2A-C4BB74F40307}"/>
               </a:ext>
             </a:extLst>
           </p:cNvPr>
@@ -6958,7 +6958,7 @@
           <p:cNvPr id="7" name="daily-title-0">
             <a:extLst xmlns:a="http://schemas.openxmlformats.org/drawingml/2006/main">
               <a:ext uri="{FF2B5EF4-FFF2-40B4-BE49-F238E27FC236}">
-                <a16:creationId xmlns:a16="http://schemas.microsoft.com/office/drawing/2014/main" id="{7EE8623E-F6BC-475E-960D-94A471563D7E}"/>
+                <a16:creationId xmlns:a16="http://schemas.microsoft.com/office/drawing/2014/main" id="{A9275F16-5280-4CF3-BC6C-2ED603FD6C7C}"/>
               </a:ext>
             </a:extLst>
           </p:cNvPr>
@@ -7008,7 +7008,7 @@
           <p:cNvPr id="8" name="daily-copy-0">
             <a:extLst xmlns:a="http://schemas.openxmlformats.org/drawingml/2006/main">
               <a:ext uri="{FF2B5EF4-FFF2-40B4-BE49-F238E27FC236}">
-                <a16:creationId xmlns:a16="http://schemas.microsoft.com/office/drawing/2014/main" id="{DBBC28C7-FC68-4F58-A9AA-853A95AFFCE4}"/>
+                <a16:creationId xmlns:a16="http://schemas.microsoft.com/office/drawing/2014/main" id="{837C8ABD-8515-4176-AB98-9E8B9BA2A31E}"/>
               </a:ext>
             </a:extLst>
           </p:cNvPr>
@@ -7058,7 +7058,7 @@
           <p:cNvPr id="9" name="rule-58-310">
             <a:extLst xmlns:a="http://schemas.openxmlformats.org/drawingml/2006/main">
               <a:ext uri="{FF2B5EF4-FFF2-40B4-BE49-F238E27FC236}">
-                <a16:creationId xmlns:a16="http://schemas.microsoft.com/office/drawing/2014/main" id="{C85943EB-66D2-4B7E-A49A-DC499099AB5D}"/>
+                <a16:creationId xmlns:a16="http://schemas.microsoft.com/office/drawing/2014/main" id="{2BD447D1-56AF-4F7C-A267-0B1CF3D4FCFE}"/>
               </a:ext>
             </a:extLst>
           </p:cNvPr>
@@ -7089,7 +7089,7 @@
           <p:cNvPr id="10" name="daily-tag-1">
             <a:extLst xmlns:a="http://schemas.openxmlformats.org/drawingml/2006/main">
               <a:ext uri="{FF2B5EF4-FFF2-40B4-BE49-F238E27FC236}">
-                <a16:creationId xmlns:a16="http://schemas.microsoft.com/office/drawing/2014/main" id="{CE66F96E-AE5B-4C51-9D48-57AA6AA7759F}"/>
+                <a16:creationId xmlns:a16="http://schemas.microsoft.com/office/drawing/2014/main" id="{5150FD79-84E1-4485-9488-611A17873C3A}"/>
               </a:ext>
             </a:extLst>
           </p:cNvPr>
@@ -7139,7 +7139,7 @@
           <p:cNvPr id="11" name="daily-title-1">
             <a:extLst xmlns:a="http://schemas.openxmlformats.org/drawingml/2006/main">
               <a:ext uri="{FF2B5EF4-FFF2-40B4-BE49-F238E27FC236}">
-                <a16:creationId xmlns:a16="http://schemas.microsoft.com/office/drawing/2014/main" id="{C45B8E18-85A2-43A0-8DC4-45E8EF0AB5D8}"/>
+                <a16:creationId xmlns:a16="http://schemas.microsoft.com/office/drawing/2014/main" id="{A9069B83-2697-4C36-9AC0-795F55EA1921}"/>
               </a:ext>
             </a:extLst>
           </p:cNvPr>
@@ -7189,7 +7189,7 @@
           <p:cNvPr id="12" name="daily-copy-1">
             <a:extLst xmlns:a="http://schemas.openxmlformats.org/drawingml/2006/main">
               <a:ext uri="{FF2B5EF4-FFF2-40B4-BE49-F238E27FC236}">
-                <a16:creationId xmlns:a16="http://schemas.microsoft.com/office/drawing/2014/main" id="{2FD19688-DE13-48C8-903A-30F6C96F9082}"/>
+                <a16:creationId xmlns:a16="http://schemas.microsoft.com/office/drawing/2014/main" id="{3CA171E6-D644-4847-BF7B-6F835CC214F0}"/>
               </a:ext>
             </a:extLst>
           </p:cNvPr>
@@ -7239,7 +7239,7 @@
           <p:cNvPr id="13" name="rule-58-402">
             <a:extLst xmlns:a="http://schemas.openxmlformats.org/drawingml/2006/main">
               <a:ext uri="{FF2B5EF4-FFF2-40B4-BE49-F238E27FC236}">
-                <a16:creationId xmlns:a16="http://schemas.microsoft.com/office/drawing/2014/main" id="{F01DEEDF-28C9-4A54-96D5-BB504025E232}"/>
+                <a16:creationId xmlns:a16="http://schemas.microsoft.com/office/drawing/2014/main" id="{12978677-03E4-4B68-94FD-26B88927A784}"/>
               </a:ext>
             </a:extLst>
           </p:cNvPr>
@@ -7270,7 +7270,7 @@
           <p:cNvPr id="14" name="daily-tag-2">
             <a:extLst xmlns:a="http://schemas.openxmlformats.org/drawingml/2006/main">
               <a:ext uri="{FF2B5EF4-FFF2-40B4-BE49-F238E27FC236}">
-                <a16:creationId xmlns:a16="http://schemas.microsoft.com/office/drawing/2014/main" id="{77A2A086-1FB7-449C-872C-ADE12A9916BD}"/>
+                <a16:creationId xmlns:a16="http://schemas.microsoft.com/office/drawing/2014/main" id="{3D4D4DE0-769C-46D3-9F5E-6C167B8D8F39}"/>
               </a:ext>
             </a:extLst>
           </p:cNvPr>
@@ -7320,7 +7320,7 @@
           <p:cNvPr id="15" name="daily-title-2">
             <a:extLst xmlns:a="http://schemas.openxmlformats.org/drawingml/2006/main">
               <a:ext uri="{FF2B5EF4-FFF2-40B4-BE49-F238E27FC236}">
-                <a16:creationId xmlns:a16="http://schemas.microsoft.com/office/drawing/2014/main" id="{14575ABB-FEFD-4078-8917-C04E5FCF514B}"/>
+                <a16:creationId xmlns:a16="http://schemas.microsoft.com/office/drawing/2014/main" id="{1500CB96-6A2E-4B0E-A363-B8952344904C}"/>
               </a:ext>
             </a:extLst>
           </p:cNvPr>
@@ -7370,7 +7370,7 @@
           <p:cNvPr id="16" name="daily-copy-2">
             <a:extLst xmlns:a="http://schemas.openxmlformats.org/drawingml/2006/main">
               <a:ext uri="{FF2B5EF4-FFF2-40B4-BE49-F238E27FC236}">
-                <a16:creationId xmlns:a16="http://schemas.microsoft.com/office/drawing/2014/main" id="{1F2A2494-FCF3-45B1-8746-38D06E30EA9C}"/>
+                <a16:creationId xmlns:a16="http://schemas.microsoft.com/office/drawing/2014/main" id="{98B1E9F6-9A71-4DE8-8F1A-A87D831F077B}"/>
               </a:ext>
             </a:extLst>
           </p:cNvPr>
@@ -7420,7 +7420,7 @@
           <p:cNvPr id="17" name="rule-58-494">
             <a:extLst xmlns:a="http://schemas.openxmlformats.org/drawingml/2006/main">
               <a:ext uri="{FF2B5EF4-FFF2-40B4-BE49-F238E27FC236}">
-                <a16:creationId xmlns:a16="http://schemas.microsoft.com/office/drawing/2014/main" id="{10EF45ED-858B-4012-AFFC-80F3E6513432}"/>
+                <a16:creationId xmlns:a16="http://schemas.microsoft.com/office/drawing/2014/main" id="{9B53DEDF-8A24-484B-BDC1-888FF4238D52}"/>
               </a:ext>
             </a:extLst>
           </p:cNvPr>
@@ -7451,7 +7451,7 @@
           <p:cNvPr id="18" name="daily-tag-3">
             <a:extLst xmlns:a="http://schemas.openxmlformats.org/drawingml/2006/main">
               <a:ext uri="{FF2B5EF4-FFF2-40B4-BE49-F238E27FC236}">
-                <a16:creationId xmlns:a16="http://schemas.microsoft.com/office/drawing/2014/main" id="{69EB1374-7B73-4A50-8901-085E51C968B3}"/>
+                <a16:creationId xmlns:a16="http://schemas.microsoft.com/office/drawing/2014/main" id="{B5E4310B-0BA4-4C07-9525-3448C187B1C5}"/>
               </a:ext>
             </a:extLst>
           </p:cNvPr>
@@ -7501,7 +7501,7 @@
           <p:cNvPr id="19" name="daily-title-3">
             <a:extLst xmlns:a="http://schemas.openxmlformats.org/drawingml/2006/main">
               <a:ext uri="{FF2B5EF4-FFF2-40B4-BE49-F238E27FC236}">
-                <a16:creationId xmlns:a16="http://schemas.microsoft.com/office/drawing/2014/main" id="{8F8A82F8-C305-41AD-BDC1-040DA59AEC54}"/>
+                <a16:creationId xmlns:a16="http://schemas.microsoft.com/office/drawing/2014/main" id="{A3BEB680-0E42-4FCD-8E23-D21F43EB5DE7}"/>
               </a:ext>
             </a:extLst>
           </p:cNvPr>
@@ -7541,7 +7541,7 @@
                   <a:srgbClr val="141C22"/>
                 </a:solidFill>
               </a:rPr>
-              <a:t>Read-only sync</a:t>
+              <a:t>Keyless import</a:t>
             </a:r>
           </a:p>
         </p:txBody>
@@ -7551,7 +7551,7 @@
           <p:cNvPr id="20" name="daily-copy-3">
             <a:extLst xmlns:a="http://schemas.openxmlformats.org/drawingml/2006/main">
               <a:ext uri="{FF2B5EF4-FFF2-40B4-BE49-F238E27FC236}">
-                <a16:creationId xmlns:a16="http://schemas.microsoft.com/office/drawing/2014/main" id="{729FC4B9-3FED-41EB-A1A5-6ADCBFD787F9}"/>
+                <a16:creationId xmlns:a16="http://schemas.microsoft.com/office/drawing/2014/main" id="{8958CB10-3273-41E9-AF14-2DAA45B26519}"/>
               </a:ext>
             </a:extLst>
           </p:cNvPr>
@@ -7591,7 +7591,7 @@
                   <a:srgbClr val="647078"/>
                 </a:solidFill>
               </a:rPr>
-              <a:t>Imports active courses, syllabus content, assignments, dates, points, and submission state through scoped OAuth.</a:t>
+              <a:t>Imports deadlines through a Canvas calendar feed or captures the current Canvas page with the Companion. School OAuth remains optional.</a:t>
             </a:r>
           </a:p>
         </p:txBody>
@@ -7601,7 +7601,7 @@
           <p:cNvPr id="21" name="rule-58-586">
             <a:extLst xmlns:a="http://schemas.openxmlformats.org/drawingml/2006/main">
               <a:ext uri="{FF2B5EF4-FFF2-40B4-BE49-F238E27FC236}">
-                <a16:creationId xmlns:a16="http://schemas.microsoft.com/office/drawing/2014/main" id="{0FAE2545-B6C2-4DDE-8987-F0A982183738}"/>
+                <a16:creationId xmlns:a16="http://schemas.microsoft.com/office/drawing/2014/main" id="{438C2BA3-DF19-4FA7-A12C-A346F9AE1F8E}"/>
               </a:ext>
             </a:extLst>
           </p:cNvPr>
@@ -7632,7 +7632,7 @@
           <p:cNvPr id="22" name="canvas-boundary">
             <a:extLst xmlns:a="http://schemas.openxmlformats.org/drawingml/2006/main">
               <a:ext uri="{FF2B5EF4-FFF2-40B4-BE49-F238E27FC236}">
-                <a16:creationId xmlns:a16="http://schemas.microsoft.com/office/drawing/2014/main" id="{5CF05043-3533-4735-855D-17077080F380}"/>
+                <a16:creationId xmlns:a16="http://schemas.microsoft.com/office/drawing/2014/main" id="{6D3A10A9-A24A-4277-AAE7-50DD763E26E4}"/>
               </a:ext>
             </a:extLst>
           </p:cNvPr>
@@ -7667,7 +7667,7 @@
           <p:cNvPr id="23" name="canvas-boundary-text">
             <a:extLst xmlns:a="http://schemas.openxmlformats.org/drawingml/2006/main">
               <a:ext uri="{FF2B5EF4-FFF2-40B4-BE49-F238E27FC236}">
-                <a16:creationId xmlns:a16="http://schemas.microsoft.com/office/drawing/2014/main" id="{91D6FAE6-435D-49C1-B3C0-9C2987B552F1}"/>
+                <a16:creationId xmlns:a16="http://schemas.microsoft.com/office/drawing/2014/main" id="{C8F5B0CE-27A4-4E1D-AA4A-89D2A1657E0B}"/>
               </a:ext>
             </a:extLst>
           </p:cNvPr>
@@ -7707,7 +7707,7 @@
                   <a:srgbClr val="725E16"/>
                 </a:solidFill>
               </a:rPr>
-              <a:t>Canvas connection code is complete; live school access still requires an administrator-approved Developer Key.</a:t>
+              <a:t>No Developer Key required: use the Canvas calendar feed or the click-to-capture Companion.</a:t>
             </a:r>
           </a:p>
         </p:txBody>
@@ -7715,7 +7715,7 @@
     </p:spTree>
     <p:extLst>
       <p:ext uri="{BB962C8B-B14F-4D97-AF65-F5344CB8AC3E}">
-        <p14:creationId xmlns:p14="http://schemas.microsoft.com/office/powerpoint/2010/main" val="1166567586"/>
+        <p14:creationId xmlns:p14="http://schemas.microsoft.com/office/powerpoint/2010/main" val="1025784097"/>
       </p:ext>
     </p:extLst>
   </p:cSld>
@@ -7746,7 +7746,7 @@
           <p:cNvPr id="29" name="section-7">
             <a:extLst xmlns:a="http://schemas.openxmlformats.org/drawingml/2006/main">
               <a:ext uri="{FF2B5EF4-FFF2-40B4-BE49-F238E27FC236}">
-                <a16:creationId xmlns:a16="http://schemas.microsoft.com/office/drawing/2014/main" id="{C468B355-C192-4019-966B-A58974286522}"/>
+                <a16:creationId xmlns:a16="http://schemas.microsoft.com/office/drawing/2014/main" id="{8315674E-89F8-4193-A1AA-F6DD7822B864}"/>
               </a:ext>
             </a:extLst>
           </p:cNvPr>
@@ -7796,7 +7796,7 @@
           <p:cNvPr id="2" name="page-7">
             <a:extLst xmlns:a="http://schemas.openxmlformats.org/drawingml/2006/main">
               <a:ext uri="{FF2B5EF4-FFF2-40B4-BE49-F238E27FC236}">
-                <a16:creationId xmlns:a16="http://schemas.microsoft.com/office/drawing/2014/main" id="{C801743E-CFC8-429F-B054-C95FDDB464EE}"/>
+                <a16:creationId xmlns:a16="http://schemas.microsoft.com/office/drawing/2014/main" id="{59F77726-37BF-4381-A2DF-E1E4C7DEEF13}"/>
               </a:ext>
             </a:extLst>
           </p:cNvPr>
@@ -7846,7 +7846,7 @@
           <p:cNvPr id="3" name="rule-48-66">
             <a:extLst xmlns:a="http://schemas.openxmlformats.org/drawingml/2006/main">
               <a:ext uri="{FF2B5EF4-FFF2-40B4-BE49-F238E27FC236}">
-                <a16:creationId xmlns:a16="http://schemas.microsoft.com/office/drawing/2014/main" id="{F1A3D063-83B7-4C7D-8693-1B06D1CC0547}"/>
+                <a16:creationId xmlns:a16="http://schemas.microsoft.com/office/drawing/2014/main" id="{EF1170A8-C574-4A88-B5DF-A4AECFC54971}"/>
               </a:ext>
             </a:extLst>
           </p:cNvPr>
@@ -7877,7 +7877,7 @@
           <p:cNvPr id="4" name="title-Live AI stays bounded to the selected work.">
             <a:extLst xmlns:a="http://schemas.openxmlformats.org/drawingml/2006/main">
               <a:ext uri="{FF2B5EF4-FFF2-40B4-BE49-F238E27FC236}">
-                <a16:creationId xmlns:a16="http://schemas.microsoft.com/office/drawing/2014/main" id="{F0E7A196-7DBB-4F97-BC28-F42A4E6E6DB8}"/>
+                <a16:creationId xmlns:a16="http://schemas.microsoft.com/office/drawing/2014/main" id="{5F28C0FF-6A23-407D-9296-DB89BFF23036}"/>
               </a:ext>
             </a:extLst>
           </p:cNvPr>
@@ -7927,7 +7927,7 @@
           <p:cNvPr id="5" name="subtitle-Live AI stays bounded to the selected work.">
             <a:extLst xmlns:a="http://schemas.openxmlformats.org/drawingml/2006/main">
               <a:ext uri="{FF2B5EF4-FFF2-40B4-BE49-F238E27FC236}">
-                <a16:creationId xmlns:a16="http://schemas.microsoft.com/office/drawing/2014/main" id="{97B110A3-DF50-4779-9BCD-C4BB5DE1013D}"/>
+                <a16:creationId xmlns:a16="http://schemas.microsoft.com/office/drawing/2014/main" id="{2059F11D-7386-4DF3-B8AC-F14538CA1EC7}"/>
               </a:ext>
             </a:extLst>
           </p:cNvPr>
@@ -7977,7 +7977,7 @@
           <p:cNvPr id="6" name="architecture-node-0">
             <a:extLst xmlns:a="http://schemas.openxmlformats.org/drawingml/2006/main">
               <a:ext uri="{FF2B5EF4-FFF2-40B4-BE49-F238E27FC236}">
-                <a16:creationId xmlns:a16="http://schemas.microsoft.com/office/drawing/2014/main" id="{B17E8E83-07E2-407C-9AD4-A60902A697A9}"/>
+                <a16:creationId xmlns:a16="http://schemas.microsoft.com/office/drawing/2014/main" id="{A1EA4E3D-58AC-4DDB-B0DF-27BF45809C5A}"/>
               </a:ext>
             </a:extLst>
           </p:cNvPr>
@@ -8012,7 +8012,7 @@
           <p:cNvPr id="7" name="architecture-index-0">
             <a:extLst xmlns:a="http://schemas.openxmlformats.org/drawingml/2006/main">
               <a:ext uri="{FF2B5EF4-FFF2-40B4-BE49-F238E27FC236}">
-                <a16:creationId xmlns:a16="http://schemas.microsoft.com/office/drawing/2014/main" id="{CD318C1D-3E3D-4EED-924A-B7D1A93753F0}"/>
+                <a16:creationId xmlns:a16="http://schemas.microsoft.com/office/drawing/2014/main" id="{0B380102-5DE3-4919-8FDF-3E54F30D9A63}"/>
               </a:ext>
             </a:extLst>
           </p:cNvPr>
@@ -8062,7 +8062,7 @@
           <p:cNvPr id="8" name="architecture-title-0">
             <a:extLst xmlns:a="http://schemas.openxmlformats.org/drawingml/2006/main">
               <a:ext uri="{FF2B5EF4-FFF2-40B4-BE49-F238E27FC236}">
-                <a16:creationId xmlns:a16="http://schemas.microsoft.com/office/drawing/2014/main" id="{AE0044F3-22B0-4674-8955-5E8C114F8933}"/>
+                <a16:creationId xmlns:a16="http://schemas.microsoft.com/office/drawing/2014/main" id="{9F56E78F-EC8A-4FA8-9447-46BDFFA5CDD0}"/>
               </a:ext>
             </a:extLst>
           </p:cNvPr>
@@ -8112,7 +8112,7 @@
           <p:cNvPr id="9" name="architecture-body-0">
             <a:extLst xmlns:a="http://schemas.openxmlformats.org/drawingml/2006/main">
               <a:ext uri="{FF2B5EF4-FFF2-40B4-BE49-F238E27FC236}">
-                <a16:creationId xmlns:a16="http://schemas.microsoft.com/office/drawing/2014/main" id="{4F794061-DF01-4156-AB06-BC654BDEE6CC}"/>
+                <a16:creationId xmlns:a16="http://schemas.microsoft.com/office/drawing/2014/main" id="{583C7794-ADAE-44FB-B4A0-2099879B7340}"/>
               </a:ext>
             </a:extLst>
           </p:cNvPr>
@@ -8162,7 +8162,7 @@
           <p:cNvPr id="10" name="rule-298-378">
             <a:extLst xmlns:a="http://schemas.openxmlformats.org/drawingml/2006/main">
               <a:ext uri="{FF2B5EF4-FFF2-40B4-BE49-F238E27FC236}">
-                <a16:creationId xmlns:a16="http://schemas.microsoft.com/office/drawing/2014/main" id="{5F370885-20C4-4D1F-B153-882142BD3AEA}"/>
+                <a16:creationId xmlns:a16="http://schemas.microsoft.com/office/drawing/2014/main" id="{74E3EFB4-922C-4C75-AD10-4AE892ACB2AD}"/>
               </a:ext>
             </a:extLst>
           </p:cNvPr>
@@ -8193,7 +8193,7 @@
           <p:cNvPr id="11" name="architecture-arrow-0">
             <a:extLst xmlns:a="http://schemas.openxmlformats.org/drawingml/2006/main">
               <a:ext uri="{FF2B5EF4-FFF2-40B4-BE49-F238E27FC236}">
-                <a16:creationId xmlns:a16="http://schemas.microsoft.com/office/drawing/2014/main" id="{DDD27821-77F3-4194-BF0D-225E8C96E3DE}"/>
+                <a16:creationId xmlns:a16="http://schemas.microsoft.com/office/drawing/2014/main" id="{DCA5FA50-14D8-4EE7-BF43-AC1EF2ABDAC7}"/>
               </a:ext>
             </a:extLst>
           </p:cNvPr>
@@ -8226,7 +8226,7 @@
           <p:cNvPr id="12" name="architecture-node-1">
             <a:extLst xmlns:a="http://schemas.openxmlformats.org/drawingml/2006/main">
               <a:ext uri="{FF2B5EF4-FFF2-40B4-BE49-F238E27FC236}">
-                <a16:creationId xmlns:a16="http://schemas.microsoft.com/office/drawing/2014/main" id="{54E99595-8C0F-4760-8E27-7837EEE25CA7}"/>
+                <a16:creationId xmlns:a16="http://schemas.microsoft.com/office/drawing/2014/main" id="{8BB80893-39A5-4763-85D3-6608074C14F3}"/>
               </a:ext>
             </a:extLst>
           </p:cNvPr>
@@ -8261,7 +8261,7 @@
           <p:cNvPr id="13" name="architecture-index-1">
             <a:extLst xmlns:a="http://schemas.openxmlformats.org/drawingml/2006/main">
               <a:ext uri="{FF2B5EF4-FFF2-40B4-BE49-F238E27FC236}">
-                <a16:creationId xmlns:a16="http://schemas.microsoft.com/office/drawing/2014/main" id="{FE631B5B-ED58-45D9-8884-8892AB6B73FD}"/>
+                <a16:creationId xmlns:a16="http://schemas.microsoft.com/office/drawing/2014/main" id="{895ABCB2-7F0B-470A-9E52-6BED17243AAA}"/>
               </a:ext>
             </a:extLst>
           </p:cNvPr>
@@ -8311,7 +8311,7 @@
           <p:cNvPr id="14" name="architecture-title-1">
             <a:extLst xmlns:a="http://schemas.openxmlformats.org/drawingml/2006/main">
               <a:ext uri="{FF2B5EF4-FFF2-40B4-BE49-F238E27FC236}">
-                <a16:creationId xmlns:a16="http://schemas.microsoft.com/office/drawing/2014/main" id="{54C8B05D-CE3C-44BC-9F14-64129E1D581E}"/>
+                <a16:creationId xmlns:a16="http://schemas.microsoft.com/office/drawing/2014/main" id="{E3089BB5-4F8D-4319-B7CD-E9F2EB0C1F9A}"/>
               </a:ext>
             </a:extLst>
           </p:cNvPr>
@@ -8361,7 +8361,7 @@
           <p:cNvPr id="15" name="architecture-body-1">
             <a:extLst xmlns:a="http://schemas.openxmlformats.org/drawingml/2006/main">
               <a:ext uri="{FF2B5EF4-FFF2-40B4-BE49-F238E27FC236}">
-                <a16:creationId xmlns:a16="http://schemas.microsoft.com/office/drawing/2014/main" id="{7B82EC68-95F3-4AA0-A8AA-21AF5A10A9B5}"/>
+                <a16:creationId xmlns:a16="http://schemas.microsoft.com/office/drawing/2014/main" id="{93BAB925-A343-4215-BC39-ABEEE4114B16}"/>
               </a:ext>
             </a:extLst>
           </p:cNvPr>
@@ -8411,7 +8411,7 @@
           <p:cNvPr id="16" name="rule-600-378">
             <a:extLst xmlns:a="http://schemas.openxmlformats.org/drawingml/2006/main">
               <a:ext uri="{FF2B5EF4-FFF2-40B4-BE49-F238E27FC236}">
-                <a16:creationId xmlns:a16="http://schemas.microsoft.com/office/drawing/2014/main" id="{BF1C4EB2-AA3A-4D5C-9216-CB0B31AEE5E7}"/>
+                <a16:creationId xmlns:a16="http://schemas.microsoft.com/office/drawing/2014/main" id="{98141546-235B-4A16-B195-097FC696DF97}"/>
               </a:ext>
             </a:extLst>
           </p:cNvPr>
@@ -8442,7 +8442,7 @@
           <p:cNvPr id="17" name="architecture-arrow-1">
             <a:extLst xmlns:a="http://schemas.openxmlformats.org/drawingml/2006/main">
               <a:ext uri="{FF2B5EF4-FFF2-40B4-BE49-F238E27FC236}">
-                <a16:creationId xmlns:a16="http://schemas.microsoft.com/office/drawing/2014/main" id="{58027C6D-708E-492F-BC5D-239BF42BC51C}"/>
+                <a16:creationId xmlns:a16="http://schemas.microsoft.com/office/drawing/2014/main" id="{97CD7A88-8A15-468A-AEAA-CEC767A7AA61}"/>
               </a:ext>
             </a:extLst>
           </p:cNvPr>
@@ -8475,7 +8475,7 @@
           <p:cNvPr id="18" name="architecture-node-2">
             <a:extLst xmlns:a="http://schemas.openxmlformats.org/drawingml/2006/main">
               <a:ext uri="{FF2B5EF4-FFF2-40B4-BE49-F238E27FC236}">
-                <a16:creationId xmlns:a16="http://schemas.microsoft.com/office/drawing/2014/main" id="{75B9CB6F-EC73-4C27-9D30-EAC361731C43}"/>
+                <a16:creationId xmlns:a16="http://schemas.microsoft.com/office/drawing/2014/main" id="{4A471F4F-6C61-456B-98F2-4CA679704E2F}"/>
               </a:ext>
             </a:extLst>
           </p:cNvPr>
@@ -8510,7 +8510,7 @@
           <p:cNvPr id="19" name="architecture-index-2">
             <a:extLst xmlns:a="http://schemas.openxmlformats.org/drawingml/2006/main">
               <a:ext uri="{FF2B5EF4-FFF2-40B4-BE49-F238E27FC236}">
-                <a16:creationId xmlns:a16="http://schemas.microsoft.com/office/drawing/2014/main" id="{AFB6C743-1816-4E9D-A48F-8E49C389933D}"/>
+                <a16:creationId xmlns:a16="http://schemas.microsoft.com/office/drawing/2014/main" id="{BBAF524F-7D58-4A56-9E11-E09C65009ABB}"/>
               </a:ext>
             </a:extLst>
           </p:cNvPr>
@@ -8560,7 +8560,7 @@
           <p:cNvPr id="20" name="architecture-title-2">
             <a:extLst xmlns:a="http://schemas.openxmlformats.org/drawingml/2006/main">
               <a:ext uri="{FF2B5EF4-FFF2-40B4-BE49-F238E27FC236}">
-                <a16:creationId xmlns:a16="http://schemas.microsoft.com/office/drawing/2014/main" id="{B9F734A9-6641-42D9-B7B1-02C706ABFCED}"/>
+                <a16:creationId xmlns:a16="http://schemas.microsoft.com/office/drawing/2014/main" id="{1AE58874-010F-41E8-8BDF-9C7177AEE0E5}"/>
               </a:ext>
             </a:extLst>
           </p:cNvPr>
@@ -8610,7 +8610,7 @@
           <p:cNvPr id="21" name="architecture-body-2">
             <a:extLst xmlns:a="http://schemas.openxmlformats.org/drawingml/2006/main">
               <a:ext uri="{FF2B5EF4-FFF2-40B4-BE49-F238E27FC236}">
-                <a16:creationId xmlns:a16="http://schemas.microsoft.com/office/drawing/2014/main" id="{13A18EE4-C23A-4ECF-BBB2-B908B59A7082}"/>
+                <a16:creationId xmlns:a16="http://schemas.microsoft.com/office/drawing/2014/main" id="{D8F5AB91-51AF-43C9-9A78-F6212D128272}"/>
               </a:ext>
             </a:extLst>
           </p:cNvPr>
@@ -8660,7 +8660,7 @@
           <p:cNvPr id="22" name="rule-902-378">
             <a:extLst xmlns:a="http://schemas.openxmlformats.org/drawingml/2006/main">
               <a:ext uri="{FF2B5EF4-FFF2-40B4-BE49-F238E27FC236}">
-                <a16:creationId xmlns:a16="http://schemas.microsoft.com/office/drawing/2014/main" id="{0D2CF3E9-FC34-4FB1-A275-4A304009A259}"/>
+                <a16:creationId xmlns:a16="http://schemas.microsoft.com/office/drawing/2014/main" id="{4C2366E1-888C-4274-8EEC-F062320E91E6}"/>
               </a:ext>
             </a:extLst>
           </p:cNvPr>
@@ -8691,7 +8691,7 @@
           <p:cNvPr id="23" name="architecture-arrow-2">
             <a:extLst xmlns:a="http://schemas.openxmlformats.org/drawingml/2006/main">
               <a:ext uri="{FF2B5EF4-FFF2-40B4-BE49-F238E27FC236}">
-                <a16:creationId xmlns:a16="http://schemas.microsoft.com/office/drawing/2014/main" id="{D0F06623-40BA-4309-A2CF-35CF46593005}"/>
+                <a16:creationId xmlns:a16="http://schemas.microsoft.com/office/drawing/2014/main" id="{F424522D-01AF-4EEE-9BC2-E2EE0669A4E8}"/>
               </a:ext>
             </a:extLst>
           </p:cNvPr>
@@ -8724,7 +8724,7 @@
           <p:cNvPr id="24" name="architecture-node-3">
             <a:extLst xmlns:a="http://schemas.openxmlformats.org/drawingml/2006/main">
               <a:ext uri="{FF2B5EF4-FFF2-40B4-BE49-F238E27FC236}">
-                <a16:creationId xmlns:a16="http://schemas.microsoft.com/office/drawing/2014/main" id="{AEE8860B-873B-4E55-AB4B-BDCC9EB19EA4}"/>
+                <a16:creationId xmlns:a16="http://schemas.microsoft.com/office/drawing/2014/main" id="{D615ABD1-D416-4A5D-A141-0F92FCC557B2}"/>
               </a:ext>
             </a:extLst>
           </p:cNvPr>
@@ -8759,7 +8759,7 @@
           <p:cNvPr id="25" name="architecture-index-3">
             <a:extLst xmlns:a="http://schemas.openxmlformats.org/drawingml/2006/main">
               <a:ext uri="{FF2B5EF4-FFF2-40B4-BE49-F238E27FC236}">
-                <a16:creationId xmlns:a16="http://schemas.microsoft.com/office/drawing/2014/main" id="{7A3F9F1C-76E2-4B49-AFD7-297748A6BA0A}"/>
+                <a16:creationId xmlns:a16="http://schemas.microsoft.com/office/drawing/2014/main" id="{671584D3-F256-4071-9FC3-7F2EB679AB43}"/>
               </a:ext>
             </a:extLst>
           </p:cNvPr>
@@ -8809,7 +8809,7 @@
           <p:cNvPr id="26" name="architecture-title-3">
             <a:extLst xmlns:a="http://schemas.openxmlformats.org/drawingml/2006/main">
               <a:ext uri="{FF2B5EF4-FFF2-40B4-BE49-F238E27FC236}">
-                <a16:creationId xmlns:a16="http://schemas.microsoft.com/office/drawing/2014/main" id="{D4822DAF-C9CB-4844-A2DA-8F97C0CA3FEC}"/>
+                <a16:creationId xmlns:a16="http://schemas.microsoft.com/office/drawing/2014/main" id="{7B0C7905-3C9B-414A-9DAC-0736F62CD6BF}"/>
               </a:ext>
             </a:extLst>
           </p:cNvPr>
@@ -8859,7 +8859,7 @@
           <p:cNvPr id="27" name="architecture-body-3">
             <a:extLst xmlns:a="http://schemas.openxmlformats.org/drawingml/2006/main">
               <a:ext uri="{FF2B5EF4-FFF2-40B4-BE49-F238E27FC236}">
-                <a16:creationId xmlns:a16="http://schemas.microsoft.com/office/drawing/2014/main" id="{4BBF4285-10FD-4F11-B72B-B63457F6D3D8}"/>
+                <a16:creationId xmlns:a16="http://schemas.microsoft.com/office/drawing/2014/main" id="{50B4877D-079A-4789-88E8-7DCD833432DC}"/>
               </a:ext>
             </a:extLst>
           </p:cNvPr>
@@ -8899,7 +8899,7 @@
                   <a:srgbClr val="647078"/>
                 </a:solidFill>
               </a:rPr>
-              <a:t>Live answer, citations, next steps</a:t>
+              <a:t>Live answer, citations, one next step</a:t>
             </a:r>
           </a:p>
         </p:txBody>
@@ -8909,7 +8909,7 @@
           <p:cNvPr id="28" name="architecture-caption">
             <a:extLst xmlns:a="http://schemas.openxmlformats.org/drawingml/2006/main">
               <a:ext uri="{FF2B5EF4-FFF2-40B4-BE49-F238E27FC236}">
-                <a16:creationId xmlns:a16="http://schemas.microsoft.com/office/drawing/2014/main" id="{ED4BFA69-C0CF-43E3-A46B-640A62BD7524}"/>
+                <a16:creationId xmlns:a16="http://schemas.microsoft.com/office/drawing/2014/main" id="{EA06B4E2-A24C-46CA-89CC-41BA0EF8CCBB}"/>
               </a:ext>
             </a:extLst>
           </p:cNvPr>
@@ -8949,7 +8949,7 @@
                   <a:srgbClr val="647078"/>
                 </a:solidFill>
               </a:rPr>
-              <a:t>No secret is stored in client code. Invalid citations are removed, missing evidence is surfaced, and the Coach is instructed not to write an entire assessed submission.</a:t>
+              <a:t>No secret is stored in client code. Invalid citations are removed, malformed model output is repaired, and complete assessed submissions are redirected into student-owned reasoning.</a:t>
             </a:r>
           </a:p>
         </p:txBody>
@@ -8957,7 +8957,7 @@
     </p:spTree>
     <p:extLst>
       <p:ext uri="{BB962C8B-B14F-4D97-AF65-F5344CB8AC3E}">
-        <p14:creationId xmlns:p14="http://schemas.microsoft.com/office/powerpoint/2010/main" val="193680843"/>
+        <p14:creationId xmlns:p14="http://schemas.microsoft.com/office/powerpoint/2010/main" val="672966255"/>
       </p:ext>
     </p:extLst>
   </p:cSld>
@@ -8988,7 +8988,7 @@
           <p:cNvPr id="20" name="section-8">
             <a:extLst xmlns:a="http://schemas.openxmlformats.org/drawingml/2006/main">
               <a:ext uri="{FF2B5EF4-FFF2-40B4-BE49-F238E27FC236}">
-                <a16:creationId xmlns:a16="http://schemas.microsoft.com/office/drawing/2014/main" id="{0C403526-8641-4E4F-BAF4-7FC86D2358E9}"/>
+                <a16:creationId xmlns:a16="http://schemas.microsoft.com/office/drawing/2014/main" id="{71B3A6E5-7BAC-4E6D-B7B8-D2FA51AA89DE}"/>
               </a:ext>
             </a:extLst>
           </p:cNvPr>
@@ -9038,7 +9038,7 @@
           <p:cNvPr id="2" name="page-8">
             <a:extLst xmlns:a="http://schemas.openxmlformats.org/drawingml/2006/main">
               <a:ext uri="{FF2B5EF4-FFF2-40B4-BE49-F238E27FC236}">
-                <a16:creationId xmlns:a16="http://schemas.microsoft.com/office/drawing/2014/main" id="{F9D48018-2B5B-4063-AEAF-3B1434986730}"/>
+                <a16:creationId xmlns:a16="http://schemas.microsoft.com/office/drawing/2014/main" id="{B1C57CAA-6DFB-4E61-8452-8F5B8940B64D}"/>
               </a:ext>
             </a:extLst>
           </p:cNvPr>
@@ -9088,7 +9088,7 @@
           <p:cNvPr id="3" name="rule-48-66">
             <a:extLst xmlns:a="http://schemas.openxmlformats.org/drawingml/2006/main">
               <a:ext uri="{FF2B5EF4-FFF2-40B4-BE49-F238E27FC236}">
-                <a16:creationId xmlns:a16="http://schemas.microsoft.com/office/drawing/2014/main" id="{5E12379A-0A6E-4295-BC88-66D33B56574A}"/>
+                <a16:creationId xmlns:a16="http://schemas.microsoft.com/office/drawing/2014/main" id="{7C508C06-EF27-4B57-AB0F-B61B55489CF8}"/>
               </a:ext>
             </a:extLst>
           </p:cNvPr>
@@ -9119,7 +9119,7 @@
           <p:cNvPr id="4" name="title-The complete workflow is tested, not staged.">
             <a:extLst xmlns:a="http://schemas.openxmlformats.org/drawingml/2006/main">
               <a:ext uri="{FF2B5EF4-FFF2-40B4-BE49-F238E27FC236}">
-                <a16:creationId xmlns:a16="http://schemas.microsoft.com/office/drawing/2014/main" id="{3AEEECA4-2908-4920-B5F7-87D9A8CCFA31}"/>
+                <a16:creationId xmlns:a16="http://schemas.microsoft.com/office/drawing/2014/main" id="{D0E73F49-5097-41B0-B876-4C1F51FF9581}"/>
               </a:ext>
             </a:extLst>
           </p:cNvPr>
@@ -9169,7 +9169,7 @@
           <p:cNvPr id="5" name="subtitle-The complete workflow is tested, not staged.">
             <a:extLst xmlns:a="http://schemas.openxmlformats.org/drawingml/2006/main">
               <a:ext uri="{FF2B5EF4-FFF2-40B4-BE49-F238E27FC236}">
-                <a16:creationId xmlns:a16="http://schemas.microsoft.com/office/drawing/2014/main" id="{D0ABF649-755A-4221-B6AF-CA07DCF7835C}"/>
+                <a16:creationId xmlns:a16="http://schemas.microsoft.com/office/drawing/2014/main" id="{3F8379D5-9315-4A26-B438-C0DEE9C5A121}"/>
               </a:ext>
             </a:extLst>
           </p:cNvPr>
@@ -9219,7 +9219,7 @@
           <p:cNvPr id="6" name="stat-0">
             <a:extLst xmlns:a="http://schemas.openxmlformats.org/drawingml/2006/main">
               <a:ext uri="{FF2B5EF4-FFF2-40B4-BE49-F238E27FC236}">
-                <a16:creationId xmlns:a16="http://schemas.microsoft.com/office/drawing/2014/main" id="{0ADB01AF-1FA1-41B3-BD87-706B30E6E141}"/>
+                <a16:creationId xmlns:a16="http://schemas.microsoft.com/office/drawing/2014/main" id="{635D6D1D-4870-4DEB-8C76-A69DD77FF82B}"/>
               </a:ext>
             </a:extLst>
           </p:cNvPr>
@@ -9254,7 +9254,7 @@
           <p:cNvPr id="7" name="stat-value-0">
             <a:extLst xmlns:a="http://schemas.openxmlformats.org/drawingml/2006/main">
               <a:ext uri="{FF2B5EF4-FFF2-40B4-BE49-F238E27FC236}">
-                <a16:creationId xmlns:a16="http://schemas.microsoft.com/office/drawing/2014/main" id="{06CCFD77-9165-47D7-8D8B-C98FFCC7857B}"/>
+                <a16:creationId xmlns:a16="http://schemas.microsoft.com/office/drawing/2014/main" id="{7BABFBD6-5CDC-443A-B9C3-F11D4D5C6DBE}"/>
               </a:ext>
             </a:extLst>
           </p:cNvPr>
@@ -9294,7 +9294,7 @@
                   <a:srgbClr val="2F7D74"/>
                 </a:solidFill>
               </a:rPr>
-              <a:t>326</a:t>
+              <a:t>365</a:t>
             </a:r>
           </a:p>
         </p:txBody>
@@ -9304,7 +9304,7 @@
           <p:cNvPr id="8" name="stat-label-0">
             <a:extLst xmlns:a="http://schemas.openxmlformats.org/drawingml/2006/main">
               <a:ext uri="{FF2B5EF4-FFF2-40B4-BE49-F238E27FC236}">
-                <a16:creationId xmlns:a16="http://schemas.microsoft.com/office/drawing/2014/main" id="{987E85F9-CB6A-4A3C-907A-978957A61213}"/>
+                <a16:creationId xmlns:a16="http://schemas.microsoft.com/office/drawing/2014/main" id="{B9C345DE-0190-4026-AD6C-ACAC0186AD44}"/>
               </a:ext>
             </a:extLst>
           </p:cNvPr>
@@ -9354,7 +9354,7 @@
           <p:cNvPr id="9" name="stat-1">
             <a:extLst xmlns:a="http://schemas.openxmlformats.org/drawingml/2006/main">
               <a:ext uri="{FF2B5EF4-FFF2-40B4-BE49-F238E27FC236}">
-                <a16:creationId xmlns:a16="http://schemas.microsoft.com/office/drawing/2014/main" id="{2FF9B683-B955-4E0D-A003-5932F853C809}"/>
+                <a16:creationId xmlns:a16="http://schemas.microsoft.com/office/drawing/2014/main" id="{32A9A9D9-A5F7-40ED-83C6-83DC27405A97}"/>
               </a:ext>
             </a:extLst>
           </p:cNvPr>
@@ -9389,7 +9389,7 @@
           <p:cNvPr id="10" name="stat-value-1">
             <a:extLst xmlns:a="http://schemas.openxmlformats.org/drawingml/2006/main">
               <a:ext uri="{FF2B5EF4-FFF2-40B4-BE49-F238E27FC236}">
-                <a16:creationId xmlns:a16="http://schemas.microsoft.com/office/drawing/2014/main" id="{F16180B9-CCF5-402E-93E8-EC4D1D5B4DA1}"/>
+                <a16:creationId xmlns:a16="http://schemas.microsoft.com/office/drawing/2014/main" id="{EBD01141-C19A-45C9-8B27-1107AAF455C6}"/>
               </a:ext>
             </a:extLst>
           </p:cNvPr>
@@ -9439,7 +9439,7 @@
           <p:cNvPr id="11" name="stat-label-1">
             <a:extLst xmlns:a="http://schemas.openxmlformats.org/drawingml/2006/main">
               <a:ext uri="{FF2B5EF4-FFF2-40B4-BE49-F238E27FC236}">
-                <a16:creationId xmlns:a16="http://schemas.microsoft.com/office/drawing/2014/main" id="{8E85B373-F2AD-4AE9-A9EF-F60B89F55FB3}"/>
+                <a16:creationId xmlns:a16="http://schemas.microsoft.com/office/drawing/2014/main" id="{11CCCF22-8891-4427-9380-285EA4B208A8}"/>
               </a:ext>
             </a:extLst>
           </p:cNvPr>
@@ -9489,7 +9489,7 @@
           <p:cNvPr id="12" name="stat-2">
             <a:extLst xmlns:a="http://schemas.openxmlformats.org/drawingml/2006/main">
               <a:ext uri="{FF2B5EF4-FFF2-40B4-BE49-F238E27FC236}">
-                <a16:creationId xmlns:a16="http://schemas.microsoft.com/office/drawing/2014/main" id="{2A0ACFB2-600D-4FFE-9A4E-74A5B6B16B31}"/>
+                <a16:creationId xmlns:a16="http://schemas.microsoft.com/office/drawing/2014/main" id="{1EE4C8CD-96F7-488A-A1A0-C4BB5569DEEC}"/>
               </a:ext>
             </a:extLst>
           </p:cNvPr>
@@ -9524,7 +9524,7 @@
           <p:cNvPr id="13" name="stat-value-2">
             <a:extLst xmlns:a="http://schemas.openxmlformats.org/drawingml/2006/main">
               <a:ext uri="{FF2B5EF4-FFF2-40B4-BE49-F238E27FC236}">
-                <a16:creationId xmlns:a16="http://schemas.microsoft.com/office/drawing/2014/main" id="{9B820956-53BD-483C-9A20-D5EE1D516A4F}"/>
+                <a16:creationId xmlns:a16="http://schemas.microsoft.com/office/drawing/2014/main" id="{9C944DEB-9EFA-4BAF-A23E-025FC7E26E13}"/>
               </a:ext>
             </a:extLst>
           </p:cNvPr>
@@ -9574,7 +9574,7 @@
           <p:cNvPr id="14" name="stat-label-2">
             <a:extLst xmlns:a="http://schemas.openxmlformats.org/drawingml/2006/main">
               <a:ext uri="{FF2B5EF4-FFF2-40B4-BE49-F238E27FC236}">
-                <a16:creationId xmlns:a16="http://schemas.microsoft.com/office/drawing/2014/main" id="{FD3470DF-5378-43DA-B62B-A3186509D531}"/>
+                <a16:creationId xmlns:a16="http://schemas.microsoft.com/office/drawing/2014/main" id="{643DA8E6-1FCC-4113-9AD4-1EB4C2F3E80C}"/>
               </a:ext>
             </a:extLst>
           </p:cNvPr>
@@ -9624,7 +9624,7 @@
           <p:cNvPr id="15" name="validation-list">
             <a:extLst xmlns:a="http://schemas.openxmlformats.org/drawingml/2006/main">
               <a:ext uri="{FF2B5EF4-FFF2-40B4-BE49-F238E27FC236}">
-                <a16:creationId xmlns:a16="http://schemas.microsoft.com/office/drawing/2014/main" id="{278B415E-746D-4A22-B247-B4C93553A357}"/>
+                <a16:creationId xmlns:a16="http://schemas.microsoft.com/office/drawing/2014/main" id="{43103C09-0CA6-4211-9F65-23A65588837B}"/>
               </a:ext>
             </a:extLst>
           </p:cNvPr>
@@ -9754,7 +9754,7 @@
                   <a:srgbClr val="647078"/>
                 </a:solidFill>
               </a:rPr>
-              <a:t>Coach -&gt; two live turns, citations, readable three-day plan</a:t>
+              <a:t>Coach -&gt; start, advance, stuck support, and authorship protection</a:t>
             </a:r>
           </a:p>
         </p:txBody>
@@ -9764,7 +9764,7 @@
           <p:cNvPr id="16" name="mobile-frame">
             <a:extLst xmlns:a="http://schemas.openxmlformats.org/drawingml/2006/main">
               <a:ext uri="{FF2B5EF4-FFF2-40B4-BE49-F238E27FC236}">
-                <a16:creationId xmlns:a16="http://schemas.microsoft.com/office/drawing/2014/main" id="{E1328298-75A7-4BD7-BD45-E3DEACD3E12E}"/>
+                <a16:creationId xmlns:a16="http://schemas.microsoft.com/office/drawing/2014/main" id="{2583CC95-0AE3-4989-B474-2808F0B3D9AF}"/>
               </a:ext>
             </a:extLst>
           </p:cNvPr>
@@ -9803,7 +9803,7 @@
           <p:nvPr/>
         </p:nvPicPr>
         <p:blipFill>
-          <a:blip xmlns:r="http://schemas.openxmlformats.org/officeDocument/2006/relationships" xmlns:a="http://schemas.openxmlformats.org/drawingml/2006/main" r:embed="R268bedd48886494c"/>
+          <a:blip xmlns:r="http://schemas.openxmlformats.org/officeDocument/2006/relationships" xmlns:a="http://schemas.openxmlformats.org/drawingml/2006/main" r:embed="R17a03dad87fc4bb9"/>
           <a:srcRect xmlns:a="http://schemas.openxmlformats.org/drawingml/2006/main" l="0" t="12718" r="0" b="12718"/>
           <a:stretch xmlns:a="http://schemas.openxmlformats.org/drawingml/2006/main">
             <a:fillRect l="0" t="0" r="0" b="0"/>
@@ -9826,7 +9826,7 @@
           <p:cNvPr id="18" name="label-Mobile QA-1090">
             <a:extLst xmlns:a="http://schemas.openxmlformats.org/drawingml/2006/main">
               <a:ext uri="{FF2B5EF4-FFF2-40B4-BE49-F238E27FC236}">
-                <a16:creationId xmlns:a16="http://schemas.microsoft.com/office/drawing/2014/main" id="{8B564D44-2CD8-4AB7-80F0-94139379E013}"/>
+                <a16:creationId xmlns:a16="http://schemas.microsoft.com/office/drawing/2014/main" id="{BA9F4130-48BF-4A85-87C9-35F845C71C30}"/>
               </a:ext>
             </a:extLst>
           </p:cNvPr>
@@ -9882,7 +9882,7 @@
           <p:cNvPr id="19" name="mobile-callout">
             <a:extLst xmlns:a="http://schemas.openxmlformats.org/drawingml/2006/main">
               <a:ext uri="{FF2B5EF4-FFF2-40B4-BE49-F238E27FC236}">
-                <a16:creationId xmlns:a16="http://schemas.microsoft.com/office/drawing/2014/main" id="{C69A67BA-FC0C-4726-8CEB-79C2AD331BA3}"/>
+                <a16:creationId xmlns:a16="http://schemas.microsoft.com/office/drawing/2014/main" id="{8500F3CF-6E77-48D3-AF1F-0E2D55B3DAF5}"/>
               </a:ext>
             </a:extLst>
           </p:cNvPr>
@@ -9922,7 +9922,7 @@
                   <a:srgbClr val="647078"/>
                 </a:solidFill>
               </a:rPr>
-              <a:t>No page or transcript overflow at 390 x 844. The live Coach returned citations and a readable multi-day plan.</a:t>
+              <a:t>No horizontal overflow at 390 x 844. The current step and all three feedback actions remain usable.</a:t>
             </a:r>
           </a:p>
         </p:txBody>
@@ -9930,7 +9930,7 @@
     </p:spTree>
     <p:extLst>
       <p:ext uri="{BB962C8B-B14F-4D97-AF65-F5344CB8AC3E}">
-        <p14:creationId xmlns:p14="http://schemas.microsoft.com/office/powerpoint/2010/main" val="413168301"/>
+        <p14:creationId xmlns:p14="http://schemas.microsoft.com/office/powerpoint/2010/main" val="1763832311"/>
       </p:ext>
     </p:extLst>
   </p:cSld>
@@ -9961,7 +9961,7 @@
           <p:cNvPr id="8" name="close-kicker">
             <a:extLst xmlns:a="http://schemas.openxmlformats.org/drawingml/2006/main">
               <a:ext uri="{FF2B5EF4-FFF2-40B4-BE49-F238E27FC236}">
-                <a16:creationId xmlns:a16="http://schemas.microsoft.com/office/drawing/2014/main" id="{92425B85-D062-48E3-8DC7-30D37986F8DA}"/>
+                <a16:creationId xmlns:a16="http://schemas.microsoft.com/office/drawing/2014/main" id="{55EC7C1E-DD68-4410-AAF4-5FBF54C4ACD1}"/>
               </a:ext>
             </a:extLst>
           </p:cNvPr>
@@ -10011,7 +10011,7 @@
           <p:cNvPr id="2" name="close-title">
             <a:extLst xmlns:a="http://schemas.openxmlformats.org/drawingml/2006/main">
               <a:ext uri="{FF2B5EF4-FFF2-40B4-BE49-F238E27FC236}">
-                <a16:creationId xmlns:a16="http://schemas.microsoft.com/office/drawing/2014/main" id="{86DF85D7-08E6-40D8-935A-492FA828867B}"/>
+                <a16:creationId xmlns:a16="http://schemas.microsoft.com/office/drawing/2014/main" id="{8B874115-8008-44E9-9C2D-3C293BD16077}"/>
               </a:ext>
             </a:extLst>
           </p:cNvPr>
@@ -10095,7 +10095,7 @@
           <p:cNvPr id="3" name="close-body">
             <a:extLst xmlns:a="http://schemas.openxmlformats.org/drawingml/2006/main">
               <a:ext uri="{FF2B5EF4-FFF2-40B4-BE49-F238E27FC236}">
-                <a16:creationId xmlns:a16="http://schemas.microsoft.com/office/drawing/2014/main" id="{3AB467EF-C481-4330-B6D1-515D1A163240}"/>
+                <a16:creationId xmlns:a16="http://schemas.microsoft.com/office/drawing/2014/main" id="{A47E72D2-4FB8-4897-A01E-53E44C3D1A8C}"/>
               </a:ext>
             </a:extLst>
           </p:cNvPr>
@@ -10145,7 +10145,7 @@
           <p:cNvPr id="4" name="close-link">
             <a:extLst xmlns:a="http://schemas.openxmlformats.org/drawingml/2006/main">
               <a:ext uri="{FF2B5EF4-FFF2-40B4-BE49-F238E27FC236}">
-                <a16:creationId xmlns:a16="http://schemas.microsoft.com/office/drawing/2014/main" id="{C97BB3FD-6BFA-43DE-850E-60AA7AC8EECE}"/>
+                <a16:creationId xmlns:a16="http://schemas.microsoft.com/office/drawing/2014/main" id="{C0B08B47-883C-4DB9-91A6-6C84538991CD}"/>
               </a:ext>
             </a:extLst>
           </p:cNvPr>
@@ -10180,7 +10180,7 @@
           <p:cNvPr id="5" name="close-link-label">
             <a:extLst xmlns:a="http://schemas.openxmlformats.org/drawingml/2006/main">
               <a:ext uri="{FF2B5EF4-FFF2-40B4-BE49-F238E27FC236}">
-                <a16:creationId xmlns:a16="http://schemas.microsoft.com/office/drawing/2014/main" id="{D408B31F-975E-496F-B1CC-B472B7D4CA17}"/>
+                <a16:creationId xmlns:a16="http://schemas.microsoft.com/office/drawing/2014/main" id="{5B4946F7-D499-4F9A-8FC5-EB880CA96072}"/>
               </a:ext>
             </a:extLst>
           </p:cNvPr>
@@ -10230,7 +10230,7 @@
           <p:cNvPr id="6" name="close-link-url">
             <a:extLst xmlns:a="http://schemas.openxmlformats.org/drawingml/2006/main">
               <a:ext uri="{FF2B5EF4-FFF2-40B4-BE49-F238E27FC236}">
-                <a16:creationId xmlns:a16="http://schemas.microsoft.com/office/drawing/2014/main" id="{20AF6A1F-F254-4019-93F1-3F23109B7897}"/>
+                <a16:creationId xmlns:a16="http://schemas.microsoft.com/office/drawing/2014/main" id="{AA3BF4E4-8B60-4F0F-942B-9AD073F3DBA3}"/>
               </a:ext>
             </a:extLst>
           </p:cNvPr>
@@ -10297,7 +10297,7 @@
           <p:cNvPr id="7" name="close-note">
             <a:extLst xmlns:a="http://schemas.openxmlformats.org/drawingml/2006/main">
               <a:ext uri="{FF2B5EF4-FFF2-40B4-BE49-F238E27FC236}">
-                <a16:creationId xmlns:a16="http://schemas.microsoft.com/office/drawing/2014/main" id="{6CCCA737-F997-4F5E-8118-6F97D2A1086F}"/>
+                <a16:creationId xmlns:a16="http://schemas.microsoft.com/office/drawing/2014/main" id="{9ECB1B40-74E9-4ECF-9747-87BDBB318C51}"/>
               </a:ext>
             </a:extLst>
           </p:cNvPr>
@@ -10345,7 +10345,7 @@
     </p:spTree>
     <p:extLst>
       <p:ext uri="{BB962C8B-B14F-4D97-AF65-F5344CB8AC3E}">
-        <p14:creationId xmlns:p14="http://schemas.microsoft.com/office/powerpoint/2010/main" val="1348786821"/>
+        <p14:creationId xmlns:p14="http://schemas.microsoft.com/office/powerpoint/2010/main" val="2060588918"/>
       </p:ext>
     </p:extLst>
   </p:cSld>
